--- a/docs/异步页流水-技术说明-美化版.pptx
+++ b/docs/异步页流水-技术说明-美化版.pptx
@@ -2353,14 +2353,154 @@
           <a:prstGeom prst="rect">
             <a:avLst/>
           </a:prstGeom>
-          <a:solidFill>
-            <a:srgbClr val="0B1F33"/>
-          </a:solidFill>
+          <a:gradFill rotWithShape="1">
+            <a:gsLst>
+              <a:gs pos="0">
+                <a:srgbClr val="0B1F33"/>
+              </a:gs>
+              <a:gs pos="100000">
+                <a:srgbClr val="16405F"/>
+              </a:gs>
+            </a:gsLst>
+            <a:lin scaled="0" ang="18900000"/>
+          </a:gradFill>
           <a:ln/>
         </p:spPr>
         <p:txBody>
           <a:bodyPr/>
           <a:p/>
+        </p:txBody>
+      </p:sp>
+      <p:sp>
+        <p:nvSpPr>
+          <p:cNvPr id="19" name="Oval 18"/>
+          <p:cNvSpPr/>
+          <p:nvPr/>
+        </p:nvSpPr>
+        <p:spPr>
+          <a:xfrm>
+            <a:off x="8128000" y="2794000"/>
+            <a:ext cx="4064000" cy="4064000"/>
+          </a:xfrm>
+          <a:prstGeom prst="ellipse">
+            <a:avLst/>
+          </a:prstGeom>
+          <a:noFill/>
+          <a:ln w="12700">
+            <a:solidFill>
+              <a:srgbClr val="2A6B8F"/>
+            </a:solidFill>
+          </a:ln>
+          <a:effectLst/>
+        </p:spPr>
+        <p:style>
+          <a:lnRef idx="1">
+            <a:schemeClr val="accent1"/>
+          </a:lnRef>
+          <a:fillRef idx="3">
+            <a:schemeClr val="accent1"/>
+          </a:fillRef>
+          <a:effectRef idx="2">
+            <a:schemeClr val="accent1"/>
+          </a:effectRef>
+          <a:fontRef idx="minor">
+            <a:schemeClr val="lt1"/>
+          </a:fontRef>
+        </p:style>
+        <p:txBody>
+          <a:bodyPr rtlCol="0" anchor="ctr"/>
+          <a:lstStyle/>
+          <a:p>
+            <a:pPr algn="ctr"/>
+          </a:p>
+        </p:txBody>
+      </p:sp>
+      <p:sp>
+        <p:nvSpPr>
+          <p:cNvPr id="18" name="Oval 17"/>
+          <p:cNvSpPr/>
+          <p:nvPr/>
+        </p:nvSpPr>
+        <p:spPr>
+          <a:xfrm>
+            <a:off x="8128000" y="-2286000"/>
+            <a:ext cx="3048000" cy="3048000"/>
+          </a:xfrm>
+          <a:prstGeom prst="ellipse">
+            <a:avLst/>
+          </a:prstGeom>
+          <a:noFill/>
+          <a:ln w="12700">
+            <a:solidFill>
+              <a:srgbClr val="2A6B8F"/>
+            </a:solidFill>
+          </a:ln>
+          <a:effectLst/>
+        </p:spPr>
+        <p:style>
+          <a:lnRef idx="1">
+            <a:schemeClr val="accent1"/>
+          </a:lnRef>
+          <a:fillRef idx="3">
+            <a:schemeClr val="accent1"/>
+          </a:fillRef>
+          <a:effectRef idx="2">
+            <a:schemeClr val="accent1"/>
+          </a:effectRef>
+          <a:fontRef idx="minor">
+            <a:schemeClr val="lt1"/>
+          </a:fontRef>
+        </p:style>
+        <p:txBody>
+          <a:bodyPr rtlCol="0" anchor="ctr"/>
+          <a:lstStyle/>
+          <a:p>
+            <a:pPr algn="ctr"/>
+          </a:p>
+        </p:txBody>
+      </p:sp>
+      <p:sp>
+        <p:nvSpPr>
+          <p:cNvPr id="17" name="Oval 16"/>
+          <p:cNvSpPr/>
+          <p:nvPr/>
+        </p:nvSpPr>
+        <p:spPr>
+          <a:xfrm>
+            <a:off x="6604000" y="-2667000"/>
+            <a:ext cx="4826000" cy="4826000"/>
+          </a:xfrm>
+          <a:prstGeom prst="ellipse">
+            <a:avLst/>
+          </a:prstGeom>
+          <a:noFill/>
+          <a:ln w="12700">
+            <a:solidFill>
+              <a:srgbClr val="2A6B8F"/>
+            </a:solidFill>
+          </a:ln>
+          <a:effectLst/>
+        </p:spPr>
+        <p:style>
+          <a:lnRef idx="1">
+            <a:schemeClr val="accent1"/>
+          </a:lnRef>
+          <a:fillRef idx="3">
+            <a:schemeClr val="accent1"/>
+          </a:fillRef>
+          <a:effectRef idx="2">
+            <a:schemeClr val="accent1"/>
+          </a:effectRef>
+          <a:fontRef idx="minor">
+            <a:schemeClr val="lt1"/>
+          </a:fontRef>
+        </p:style>
+        <p:txBody>
+          <a:bodyPr rtlCol="0" anchor="ctr"/>
+          <a:lstStyle/>
+          <a:p>
+            <a:pPr algn="ctr"/>
+          </a:p>
         </p:txBody>
       </p:sp>
       <p:sp>
@@ -2461,7 +2601,29 @@
                 <a:ea typeface="Microsoft YaHei" pitchFamily="34" charset="-122"/>
                 <a:cs typeface="Microsoft YaHei" pitchFamily="34" charset="-120"/>
               </a:rPr>
-              <a:t>站在 KVMem 的肩膀上</a:t>
+              <a:t>站在 </a:t>
+            </a:r>
+            <a:r>
+              <a:rPr lang="en-US" sz="4200" b="1" dirty="0">
+                <a:solidFill>
+                  <a:srgbClr val="3FC6D6"/>
+                </a:solidFill>
+                <a:latin typeface="Microsoft YaHei" pitchFamily="34" charset="0"/>
+                <a:ea typeface="Microsoft YaHei" pitchFamily="34" charset="-122"/>
+                <a:cs typeface="Microsoft YaHei" pitchFamily="34" charset="-120"/>
+              </a:rPr>
+              <a:t>KVMem</a:t>
+            </a:r>
+            <a:r>
+              <a:rPr lang="en-US" sz="4200" b="1" dirty="0">
+                <a:solidFill>
+                  <a:srgbClr val="FFFFFF"/>
+                </a:solidFill>
+                <a:latin typeface="Microsoft YaHei" pitchFamily="34" charset="0"/>
+                <a:ea typeface="Microsoft YaHei" pitchFamily="34" charset="-122"/>
+                <a:cs typeface="Microsoft YaHei" pitchFamily="34" charset="-120"/>
+              </a:rPr>
+              <a:t> 的肩膀上</a:t>
             </a:r>
             <a:endParaRPr lang="en-US" sz="4200" dirty="0"/>
           </a:p>
@@ -2500,7 +2662,51 @@
                 <a:ea typeface="Microsoft YaHei" pitchFamily="34" charset="-122"/>
                 <a:cs typeface="Microsoft YaHei" pitchFamily="34" charset="-120"/>
               </a:rPr>
-              <a:t>异步页流水：从“装得下”到“跑得动”的探索与实践</a:t>
+              <a:t>异步页流水：从“</a:t>
+            </a:r>
+            <a:r>
+              <a:rPr lang="en-US" sz="1700" dirty="0">
+                <a:solidFill>
+                  <a:srgbClr val="3FC6D6"/>
+                </a:solidFill>
+                <a:latin typeface="Microsoft YaHei" pitchFamily="34" charset="0"/>
+                <a:ea typeface="Microsoft YaHei" pitchFamily="34" charset="-122"/>
+                <a:cs typeface="Microsoft YaHei" pitchFamily="34" charset="-120"/>
+              </a:rPr>
+              <a:t>装得下</a:t>
+            </a:r>
+            <a:r>
+              <a:rPr lang="en-US" sz="1700" dirty="0">
+                <a:solidFill>
+                  <a:srgbClr val="BFD3DF"/>
+                </a:solidFill>
+                <a:latin typeface="Microsoft YaHei" pitchFamily="34" charset="0"/>
+                <a:ea typeface="Microsoft YaHei" pitchFamily="34" charset="-122"/>
+                <a:cs typeface="Microsoft YaHei" pitchFamily="34" charset="-120"/>
+              </a:rPr>
+              <a:t>“到“</a:t>
+            </a:r>
+            <a:r>
+              <a:rPr lang="en-US" sz="1700" dirty="0">
+                <a:solidFill>
+                  <a:srgbClr val="3FC6D6"/>
+                </a:solidFill>
+                <a:latin typeface="Microsoft YaHei" pitchFamily="34" charset="0"/>
+                <a:ea typeface="Microsoft YaHei" pitchFamily="34" charset="-122"/>
+                <a:cs typeface="Microsoft YaHei" pitchFamily="34" charset="-120"/>
+              </a:rPr>
+              <a:t>跑得动</a:t>
+            </a:r>
+            <a:r>
+              <a:rPr lang="en-US" sz="1700" dirty="0">
+                <a:solidFill>
+                  <a:srgbClr val="BFD3DF"/>
+                </a:solidFill>
+                <a:latin typeface="Microsoft YaHei" pitchFamily="34" charset="0"/>
+                <a:ea typeface="Microsoft YaHei" pitchFamily="34" charset="-122"/>
+                <a:cs typeface="Microsoft YaHei" pitchFamily="34" charset="-120"/>
+              </a:rPr>
+              <a:t>“的探索与实践</a:t>
             </a:r>
             <a:endParaRPr lang="en-US" sz="1700" dirty="0"/>
           </a:p>
@@ -2553,7 +2759,14 @@
               <a:t>Di Chai · Leye Wang · Zeshen Su · Zhiguo Xia · Zhihang Yu</a:t>
             </a:r>
             <a:r>
-              <a:rPr lang="en-US" sz="1100" dirty="0"/>
+              <a:rPr lang="en-US" sz="1100" dirty="0" u="sng">
+                <a:solidFill>
+                  <a:srgbClr val="3FC6D6"/>
+                </a:solidFill>
+                <a:latin typeface="Microsoft YaHei"/>
+                <a:ea typeface="Microsoft YaHei"/>
+                <a:hlinkClick xmlns:ns0="http://schemas.openxmlformats.org/officeDocument/2006/relationships" ns0:id="rId3"/>
+              </a:rPr>
               <a:t>（arXiv 2609.04852）</a:t>
             </a:r>
             <a:endParaRPr lang="en-US" sz="1100" dirty="0"/>
@@ -2869,6 +3082,114 @@
               <a:t>目标</a:t>
             </a:r>
             <a:endParaRPr lang="en-US" sz="1050" dirty="0"/>
+          </a:p>
+        </p:txBody>
+      </p:sp>
+      <p:sp>
+        <p:nvSpPr>
+          <p:cNvPr id="20" name="TextBox 19"/>
+          <p:cNvSpPr txBox="1"/>
+          <p:nvPr/>
+        </p:nvSpPr>
+        <p:spPr>
+          <a:xfrm>
+            <a:off x="2438400" y="3771900"/>
+            <a:ext cx="381000" cy="177800"/>
+          </a:xfrm>
+          <a:prstGeom prst="rect">
+            <a:avLst/>
+          </a:prstGeom>
+          <a:noFill/>
+        </p:spPr>
+        <p:txBody>
+          <a:bodyPr wrap="none">
+            <a:spAutoFit/>
+          </a:bodyPr>
+          <a:lstStyle/>
+          <a:p>
+            <a:pPr algn="r"/>
+            <a:r>
+              <a:rPr b="1" sz="900">
+                <a:solidFill>
+                  <a:srgbClr val="F59E0B"/>
+                </a:solidFill>
+                <a:latin typeface="Microsoft YaHei"/>
+                <a:ea typeface="Microsoft YaHei"/>
+              </a:rPr>
+              <a:t>01</a:t>
+            </a:r>
+          </a:p>
+        </p:txBody>
+      </p:sp>
+      <p:sp>
+        <p:nvSpPr>
+          <p:cNvPr id="21" name="TextBox 20"/>
+          <p:cNvSpPr txBox="1"/>
+          <p:nvPr/>
+        </p:nvSpPr>
+        <p:spPr>
+          <a:xfrm>
+            <a:off x="4953000" y="3771900"/>
+            <a:ext cx="381000" cy="177800"/>
+          </a:xfrm>
+          <a:prstGeom prst="rect">
+            <a:avLst/>
+          </a:prstGeom>
+          <a:noFill/>
+        </p:spPr>
+        <p:txBody>
+          <a:bodyPr wrap="none">
+            <a:spAutoFit/>
+          </a:bodyPr>
+          <a:lstStyle/>
+          <a:p>
+            <a:pPr algn="r"/>
+            <a:r>
+              <a:rPr b="1" sz="900">
+                <a:solidFill>
+                  <a:srgbClr val="F59E0B"/>
+                </a:solidFill>
+                <a:latin typeface="Microsoft YaHei"/>
+                <a:ea typeface="Microsoft YaHei"/>
+              </a:rPr>
+              <a:t>02</a:t>
+            </a:r>
+          </a:p>
+        </p:txBody>
+      </p:sp>
+      <p:sp>
+        <p:nvSpPr>
+          <p:cNvPr id="22" name="TextBox 21"/>
+          <p:cNvSpPr txBox="1"/>
+          <p:nvPr/>
+        </p:nvSpPr>
+        <p:spPr>
+          <a:xfrm>
+            <a:off x="7467600" y="3771900"/>
+            <a:ext cx="381000" cy="177800"/>
+          </a:xfrm>
+          <a:prstGeom prst="rect">
+            <a:avLst/>
+          </a:prstGeom>
+          <a:noFill/>
+        </p:spPr>
+        <p:txBody>
+          <a:bodyPr wrap="none">
+            <a:spAutoFit/>
+          </a:bodyPr>
+          <a:lstStyle/>
+          <a:p>
+            <a:pPr algn="r"/>
+            <a:r>
+              <a:rPr b="1" sz="900">
+                <a:solidFill>
+                  <a:srgbClr val="F59E0B"/>
+                </a:solidFill>
+                <a:latin typeface="Microsoft YaHei"/>
+                <a:ea typeface="Microsoft YaHei"/>
+              </a:rPr>
+              <a:t>03</a:t>
+            </a:r>
           </a:p>
         </p:txBody>
       </p:sp>
@@ -2963,7 +3284,7 @@
                 <a:ea typeface="Microsoft YaHei" pitchFamily="34" charset="-122"/>
                 <a:cs typeface="Microsoft YaHei" pitchFamily="34" charset="-120"/>
               </a:rPr>
-              <a:t>STATUS</a:t>
+              <a:t>STATUS · 2026-10-11~14</a:t>
             </a:r>
             <a:endParaRPr lang="en-US" sz="1100" dirty="0"/>
           </a:p>
@@ -3002,7 +3323,7 @@
                 <a:ea typeface="Microsoft YaHei" pitchFamily="34" charset="-122"/>
                 <a:cs typeface="Microsoft YaHei" pitchFamily="34" charset="-120"/>
               </a:rPr>
-              <a:t>已实现的阶段：V2 上线初期的成果快照（2026-10-11~14）</a:t>
+              <a:t>已实现的阶段：V2 上线初期的成果快照</a:t>
             </a:r>
             <a:endParaRPr lang="en-US" sz="2400" dirty="0"/>
           </a:p>
@@ -4131,32 +4452,41 @@
         </p:nvSpPr>
         <p:spPr>
           <a:xfrm>
-            <a:off x="8549640" y="4826000"/>
-            <a:ext cx="457200" cy="274320"/>
-          </a:xfrm>
-          <a:prstGeom prst="rect">
-            <a:avLst/>
-          </a:prstGeom>
-          <a:noFill/>
-          <a:ln/>
-        </p:spPr>
-        <p:txBody>
-          <a:bodyPr wrap="square" lIns="0" tIns="0" rIns="0" bIns="0" rtlCol="0" anchor="ctr"/>
+            <a:off x="7874000" y="4826000"/>
+            <a:ext cx="1130300" cy="274320"/>
+          </a:xfrm>
+          <a:prstGeom prst="rect">
+            <a:avLst/>
+          </a:prstGeom>
+          <a:noFill/>
+          <a:ln/>
+        </p:spPr>
+        <p:txBody>
+          <a:bodyPr wrap="none" lIns="0" tIns="0" rIns="0" bIns="0" rtlCol="0" anchor="ctr"/>
           <a:lstStyle/>
           <a:p>
             <a:pPr marL="0" indent="0" algn="r">
               <a:buNone/>
             </a:pPr>
             <a:r>
-              <a:rPr lang="en-US" sz="1000" dirty="0">
-                <a:solidFill>
-                  <a:srgbClr val="6B7C8A"/>
-                </a:solidFill>
-                <a:latin typeface="Microsoft YaHei" pitchFamily="34" charset="0"/>
-                <a:ea typeface="Microsoft YaHei" pitchFamily="34" charset="-122"/>
-                <a:cs typeface="Microsoft YaHei" pitchFamily="34" charset="-120"/>
+              <a:rPr b="1" sz="1000">
+                <a:solidFill>
+                  <a:srgbClr val="0FA3A8"/>
+                </a:solidFill>
+                <a:latin typeface="Microsoft YaHei"/>
+                <a:ea typeface="Microsoft YaHei"/>
               </a:rPr>
               <a:t>10</a:t>
+            </a:r>
+            <a:r>
+              <a:rPr sz="900">
+                <a:solidFill>
+                  <a:srgbClr val="9FB8C8"/>
+                </a:solidFill>
+                <a:latin typeface="Microsoft YaHei"/>
+                <a:ea typeface="Microsoft YaHei"/>
+              </a:rPr>
+              <a:t> / 18</a:t>
             </a:r>
             <a:endParaRPr lang="en-US" sz="1000" dirty="0"/>
           </a:p>
@@ -4198,6 +4528,50 @@
               <a:t>站在 KVMem 的肩膀上 · 异步页流水</a:t>
             </a:r>
             <a:endParaRPr lang="en-US" sz="900" dirty="0"/>
+          </a:p>
+        </p:txBody>
+      </p:sp>
+      <p:sp>
+        <p:nvSpPr>
+          <p:cNvPr id="26" name="Rectangle 25"/>
+          <p:cNvSpPr/>
+          <p:nvPr/>
+        </p:nvSpPr>
+        <p:spPr>
+          <a:xfrm>
+            <a:off x="457200" y="4711700"/>
+            <a:ext cx="8547100" cy="9525"/>
+          </a:xfrm>
+          <a:prstGeom prst="rect">
+            <a:avLst/>
+          </a:prstGeom>
+          <a:solidFill>
+            <a:srgbClr val="D8E3EA"/>
+          </a:solidFill>
+          <a:ln>
+            <a:noFill/>
+          </a:ln>
+          <a:effectLst/>
+        </p:spPr>
+        <p:style>
+          <a:lnRef idx="1">
+            <a:schemeClr val="accent1"/>
+          </a:lnRef>
+          <a:fillRef idx="3">
+            <a:schemeClr val="accent1"/>
+          </a:fillRef>
+          <a:effectRef idx="2">
+            <a:schemeClr val="accent1"/>
+          </a:effectRef>
+          <a:fontRef idx="minor">
+            <a:schemeClr val="lt1"/>
+          </a:fontRef>
+        </p:style>
+        <p:txBody>
+          <a:bodyPr rtlCol="0" anchor="ctr"/>
+          <a:lstStyle/>
+          <a:p>
+            <a:pPr algn="ctr"/>
           </a:p>
         </p:txBody>
       </p:sp>
@@ -5099,32 +5473,41 @@
         </p:nvSpPr>
         <p:spPr>
           <a:xfrm>
-            <a:off x="8549640" y="4826000"/>
-            <a:ext cx="457200" cy="274320"/>
-          </a:xfrm>
-          <a:prstGeom prst="rect">
-            <a:avLst/>
-          </a:prstGeom>
-          <a:noFill/>
-          <a:ln/>
-        </p:spPr>
-        <p:txBody>
-          <a:bodyPr wrap="square" lIns="0" tIns="0" rIns="0" bIns="0" rtlCol="0" anchor="ctr"/>
+            <a:off x="7874000" y="4826000"/>
+            <a:ext cx="1130300" cy="274320"/>
+          </a:xfrm>
+          <a:prstGeom prst="rect">
+            <a:avLst/>
+          </a:prstGeom>
+          <a:noFill/>
+          <a:ln/>
+        </p:spPr>
+        <p:txBody>
+          <a:bodyPr wrap="none" lIns="0" tIns="0" rIns="0" bIns="0" rtlCol="0" anchor="ctr"/>
           <a:lstStyle/>
           <a:p>
             <a:pPr marL="0" indent="0" algn="r">
               <a:buNone/>
             </a:pPr>
             <a:r>
-              <a:rPr lang="en-US" sz="1000" dirty="0">
-                <a:solidFill>
-                  <a:srgbClr val="6B7C8A"/>
-                </a:solidFill>
-                <a:latin typeface="Microsoft YaHei" pitchFamily="34" charset="0"/>
-                <a:ea typeface="Microsoft YaHei" pitchFamily="34" charset="-122"/>
-                <a:cs typeface="Microsoft YaHei" pitchFamily="34" charset="-120"/>
+              <a:rPr b="1" sz="1000">
+                <a:solidFill>
+                  <a:srgbClr val="0FA3A8"/>
+                </a:solidFill>
+                <a:latin typeface="Microsoft YaHei"/>
+                <a:ea typeface="Microsoft YaHei"/>
               </a:rPr>
               <a:t>11</a:t>
+            </a:r>
+            <a:r>
+              <a:rPr sz="900">
+                <a:solidFill>
+                  <a:srgbClr val="9FB8C8"/>
+                </a:solidFill>
+                <a:latin typeface="Microsoft YaHei"/>
+                <a:ea typeface="Microsoft YaHei"/>
+              </a:rPr>
+              <a:t> / 18</a:t>
             </a:r>
             <a:endParaRPr lang="en-US" sz="1000" dirty="0"/>
           </a:p>
@@ -5166,6 +5549,50 @@
               <a:t>站在 KVMem 的肩膀上 · 异步页流水</a:t>
             </a:r>
             <a:endParaRPr lang="en-US" sz="900" dirty="0"/>
+          </a:p>
+        </p:txBody>
+      </p:sp>
+      <p:sp>
+        <p:nvSpPr>
+          <p:cNvPr id="53" name="Rectangle 52"/>
+          <p:cNvSpPr/>
+          <p:nvPr/>
+        </p:nvSpPr>
+        <p:spPr>
+          <a:xfrm>
+            <a:off x="457200" y="4711700"/>
+            <a:ext cx="8547100" cy="9525"/>
+          </a:xfrm>
+          <a:prstGeom prst="rect">
+            <a:avLst/>
+          </a:prstGeom>
+          <a:solidFill>
+            <a:srgbClr val="D8E3EA"/>
+          </a:solidFill>
+          <a:ln>
+            <a:noFill/>
+          </a:ln>
+          <a:effectLst/>
+        </p:spPr>
+        <p:style>
+          <a:lnRef idx="1">
+            <a:schemeClr val="accent1"/>
+          </a:lnRef>
+          <a:fillRef idx="3">
+            <a:schemeClr val="accent1"/>
+          </a:fillRef>
+          <a:effectRef idx="2">
+            <a:schemeClr val="accent1"/>
+          </a:effectRef>
+          <a:fontRef idx="minor">
+            <a:schemeClr val="lt1"/>
+          </a:fontRef>
+        </p:style>
+        <p:txBody>
+          <a:bodyPr rtlCol="0" anchor="ctr"/>
+          <a:lstStyle/>
+          <a:p>
+            <a:pPr algn="ctr"/>
           </a:p>
         </p:txBody>
       </p:sp>
@@ -5906,32 +6333,41 @@
         </p:nvSpPr>
         <p:spPr>
           <a:xfrm>
-            <a:off x="8549640" y="4826000"/>
-            <a:ext cx="457200" cy="274320"/>
-          </a:xfrm>
-          <a:prstGeom prst="rect">
-            <a:avLst/>
-          </a:prstGeom>
-          <a:noFill/>
-          <a:ln/>
-        </p:spPr>
-        <p:txBody>
-          <a:bodyPr wrap="square" lIns="0" tIns="0" rIns="0" bIns="0" rtlCol="0" anchor="ctr"/>
+            <a:off x="7874000" y="4826000"/>
+            <a:ext cx="1130300" cy="274320"/>
+          </a:xfrm>
+          <a:prstGeom prst="rect">
+            <a:avLst/>
+          </a:prstGeom>
+          <a:noFill/>
+          <a:ln/>
+        </p:spPr>
+        <p:txBody>
+          <a:bodyPr wrap="none" lIns="0" tIns="0" rIns="0" bIns="0" rtlCol="0" anchor="ctr"/>
           <a:lstStyle/>
           <a:p>
             <a:pPr marL="0" indent="0" algn="r">
               <a:buNone/>
             </a:pPr>
             <a:r>
-              <a:rPr lang="en-US" sz="1000" dirty="0">
-                <a:solidFill>
-                  <a:srgbClr val="6B7C8A"/>
-                </a:solidFill>
-                <a:latin typeface="Microsoft YaHei" pitchFamily="34" charset="0"/>
-                <a:ea typeface="Microsoft YaHei" pitchFamily="34" charset="-122"/>
-                <a:cs typeface="Microsoft YaHei" pitchFamily="34" charset="-120"/>
+              <a:rPr b="1" sz="1000">
+                <a:solidFill>
+                  <a:srgbClr val="0FA3A8"/>
+                </a:solidFill>
+                <a:latin typeface="Microsoft YaHei"/>
+                <a:ea typeface="Microsoft YaHei"/>
               </a:rPr>
               <a:t>12</a:t>
+            </a:r>
+            <a:r>
+              <a:rPr sz="900">
+                <a:solidFill>
+                  <a:srgbClr val="9FB8C8"/>
+                </a:solidFill>
+                <a:latin typeface="Microsoft YaHei"/>
+                <a:ea typeface="Microsoft YaHei"/>
+              </a:rPr>
+              <a:t> / 18</a:t>
             </a:r>
             <a:endParaRPr lang="en-US" sz="1000" dirty="0"/>
           </a:p>
@@ -5973,6 +6409,50 @@
               <a:t>站在 KVMem 的肩膀上 · 异步页流水</a:t>
             </a:r>
             <a:endParaRPr lang="en-US" sz="900" dirty="0"/>
+          </a:p>
+        </p:txBody>
+      </p:sp>
+      <p:sp>
+        <p:nvSpPr>
+          <p:cNvPr id="71" name="Rectangle 70"/>
+          <p:cNvSpPr/>
+          <p:nvPr/>
+        </p:nvSpPr>
+        <p:spPr>
+          <a:xfrm>
+            <a:off x="457200" y="4711700"/>
+            <a:ext cx="8547100" cy="9525"/>
+          </a:xfrm>
+          <a:prstGeom prst="rect">
+            <a:avLst/>
+          </a:prstGeom>
+          <a:solidFill>
+            <a:srgbClr val="D8E3EA"/>
+          </a:solidFill>
+          <a:ln>
+            <a:noFill/>
+          </a:ln>
+          <a:effectLst/>
+        </p:spPr>
+        <p:style>
+          <a:lnRef idx="1">
+            <a:schemeClr val="accent1"/>
+          </a:lnRef>
+          <a:fillRef idx="3">
+            <a:schemeClr val="accent1"/>
+          </a:fillRef>
+          <a:effectRef idx="2">
+            <a:schemeClr val="accent1"/>
+          </a:effectRef>
+          <a:fontRef idx="minor">
+            <a:schemeClr val="lt1"/>
+          </a:fontRef>
+        </p:style>
+        <p:txBody>
+          <a:bodyPr rtlCol="0" anchor="ctr"/>
+          <a:lstStyle/>
+          <a:p>
+            <a:pPr algn="ctr"/>
           </a:p>
         </p:txBody>
       </p:sp>
@@ -6742,32 +7222,41 @@
         </p:nvSpPr>
         <p:spPr>
           <a:xfrm>
-            <a:off x="8549640" y="4826000"/>
-            <a:ext cx="457200" cy="274320"/>
-          </a:xfrm>
-          <a:prstGeom prst="rect">
-            <a:avLst/>
-          </a:prstGeom>
-          <a:noFill/>
-          <a:ln/>
-        </p:spPr>
-        <p:txBody>
-          <a:bodyPr wrap="square" lIns="0" tIns="0" rIns="0" bIns="0" rtlCol="0" anchor="ctr"/>
+            <a:off x="7874000" y="4826000"/>
+            <a:ext cx="1130300" cy="274320"/>
+          </a:xfrm>
+          <a:prstGeom prst="rect">
+            <a:avLst/>
+          </a:prstGeom>
+          <a:noFill/>
+          <a:ln/>
+        </p:spPr>
+        <p:txBody>
+          <a:bodyPr wrap="none" lIns="0" tIns="0" rIns="0" bIns="0" rtlCol="0" anchor="ctr"/>
           <a:lstStyle/>
           <a:p>
             <a:pPr marL="0" indent="0" algn="r">
               <a:buNone/>
             </a:pPr>
             <a:r>
-              <a:rPr lang="en-US" sz="1000" dirty="0">
-                <a:solidFill>
-                  <a:srgbClr val="6B7C8A"/>
-                </a:solidFill>
-                <a:latin typeface="Microsoft YaHei" pitchFamily="34" charset="0"/>
-                <a:ea typeface="Microsoft YaHei" pitchFamily="34" charset="-122"/>
-                <a:cs typeface="Microsoft YaHei" pitchFamily="34" charset="-120"/>
+              <a:rPr b="1" sz="1000">
+                <a:solidFill>
+                  <a:srgbClr val="0FA3A8"/>
+                </a:solidFill>
+                <a:latin typeface="Microsoft YaHei"/>
+                <a:ea typeface="Microsoft YaHei"/>
               </a:rPr>
               <a:t>13</a:t>
+            </a:r>
+            <a:r>
+              <a:rPr sz="900">
+                <a:solidFill>
+                  <a:srgbClr val="9FB8C8"/>
+                </a:solidFill>
+                <a:latin typeface="Microsoft YaHei"/>
+                <a:ea typeface="Microsoft YaHei"/>
+              </a:rPr>
+              <a:t> / 18</a:t>
             </a:r>
             <a:endParaRPr lang="en-US" sz="1000" dirty="0"/>
           </a:p>
@@ -6809,6 +7298,50 @@
               <a:t>站在 KVMem 的肩膀上 · 异步页流水</a:t>
             </a:r>
             <a:endParaRPr lang="en-US" sz="900" dirty="0"/>
+          </a:p>
+        </p:txBody>
+      </p:sp>
+      <p:sp>
+        <p:nvSpPr>
+          <p:cNvPr id="90" name="Rectangle 89"/>
+          <p:cNvSpPr/>
+          <p:nvPr/>
+        </p:nvSpPr>
+        <p:spPr>
+          <a:xfrm>
+            <a:off x="457200" y="4711700"/>
+            <a:ext cx="8547100" cy="9525"/>
+          </a:xfrm>
+          <a:prstGeom prst="rect">
+            <a:avLst/>
+          </a:prstGeom>
+          <a:solidFill>
+            <a:srgbClr val="D8E3EA"/>
+          </a:solidFill>
+          <a:ln>
+            <a:noFill/>
+          </a:ln>
+          <a:effectLst/>
+        </p:spPr>
+        <p:style>
+          <a:lnRef idx="1">
+            <a:schemeClr val="accent1"/>
+          </a:lnRef>
+          <a:fillRef idx="3">
+            <a:schemeClr val="accent1"/>
+          </a:fillRef>
+          <a:effectRef idx="2">
+            <a:schemeClr val="accent1"/>
+          </a:effectRef>
+          <a:fontRef idx="minor">
+            <a:schemeClr val="lt1"/>
+          </a:fontRef>
+        </p:style>
+        <p:txBody>
+          <a:bodyPr rtlCol="0" anchor="ctr"/>
+          <a:lstStyle/>
+          <a:p>
+            <a:pPr algn="ctr"/>
           </a:p>
         </p:txBody>
       </p:sp>
@@ -10153,32 +10686,41 @@
         </p:nvSpPr>
         <p:spPr>
           <a:xfrm>
-            <a:off x="8549640" y="4826000"/>
-            <a:ext cx="457200" cy="274320"/>
-          </a:xfrm>
-          <a:prstGeom prst="rect">
-            <a:avLst/>
-          </a:prstGeom>
-          <a:noFill/>
-          <a:ln/>
-        </p:spPr>
-        <p:txBody>
-          <a:bodyPr wrap="square" lIns="0" tIns="0" rIns="0" bIns="0" rtlCol="0" anchor="ctr"/>
+            <a:off x="7874000" y="4826000"/>
+            <a:ext cx="1130300" cy="274320"/>
+          </a:xfrm>
+          <a:prstGeom prst="rect">
+            <a:avLst/>
+          </a:prstGeom>
+          <a:noFill/>
+          <a:ln/>
+        </p:spPr>
+        <p:txBody>
+          <a:bodyPr wrap="none" lIns="0" tIns="0" rIns="0" bIns="0" rtlCol="0" anchor="ctr"/>
           <a:lstStyle/>
           <a:p>
             <a:pPr marL="0" indent="0" algn="r">
               <a:buNone/>
             </a:pPr>
             <a:r>
-              <a:rPr lang="en-US" sz="1000" dirty="0">
-                <a:solidFill>
-                  <a:srgbClr val="6B7C8A"/>
-                </a:solidFill>
-                <a:latin typeface="Microsoft YaHei" pitchFamily="34" charset="0"/>
-                <a:ea typeface="Microsoft YaHei" pitchFamily="34" charset="-122"/>
-                <a:cs typeface="Microsoft YaHei" pitchFamily="34" charset="-120"/>
+              <a:rPr b="1" sz="1000">
+                <a:solidFill>
+                  <a:srgbClr val="0FA3A8"/>
+                </a:solidFill>
+                <a:latin typeface="Microsoft YaHei"/>
+                <a:ea typeface="Microsoft YaHei"/>
               </a:rPr>
               <a:t>14</a:t>
+            </a:r>
+            <a:r>
+              <a:rPr sz="900">
+                <a:solidFill>
+                  <a:srgbClr val="9FB8C8"/>
+                </a:solidFill>
+                <a:latin typeface="Microsoft YaHei"/>
+                <a:ea typeface="Microsoft YaHei"/>
+              </a:rPr>
+              <a:t> / 18</a:t>
             </a:r>
             <a:endParaRPr lang="en-US" sz="1000" dirty="0"/>
           </a:p>
@@ -10220,6 +10762,50 @@
               <a:t>站在 KVMem 的肩膀上 · 异步页流水</a:t>
             </a:r>
             <a:endParaRPr lang="en-US" sz="900" dirty="0"/>
+          </a:p>
+        </p:txBody>
+      </p:sp>
+      <p:sp>
+        <p:nvSpPr>
+          <p:cNvPr id="102" name="Rectangle 101"/>
+          <p:cNvSpPr/>
+          <p:nvPr/>
+        </p:nvSpPr>
+        <p:spPr>
+          <a:xfrm>
+            <a:off x="457200" y="4711700"/>
+            <a:ext cx="8547100" cy="9525"/>
+          </a:xfrm>
+          <a:prstGeom prst="rect">
+            <a:avLst/>
+          </a:prstGeom>
+          <a:solidFill>
+            <a:srgbClr val="D8E3EA"/>
+          </a:solidFill>
+          <a:ln>
+            <a:noFill/>
+          </a:ln>
+          <a:effectLst/>
+        </p:spPr>
+        <p:style>
+          <a:lnRef idx="1">
+            <a:schemeClr val="accent1"/>
+          </a:lnRef>
+          <a:fillRef idx="3">
+            <a:schemeClr val="accent1"/>
+          </a:fillRef>
+          <a:effectRef idx="2">
+            <a:schemeClr val="accent1"/>
+          </a:effectRef>
+          <a:fontRef idx="minor">
+            <a:schemeClr val="lt1"/>
+          </a:fontRef>
+        </p:style>
+        <p:txBody>
+          <a:bodyPr rtlCol="0" anchor="ctr"/>
+          <a:lstStyle/>
+          <a:p>
+            <a:pPr algn="ctr"/>
           </a:p>
         </p:txBody>
       </p:sp>
@@ -11121,32 +11707,41 @@
         </p:nvSpPr>
         <p:spPr>
           <a:xfrm>
-            <a:off x="8549640" y="4826000"/>
-            <a:ext cx="457200" cy="274320"/>
-          </a:xfrm>
-          <a:prstGeom prst="rect">
-            <a:avLst/>
-          </a:prstGeom>
-          <a:noFill/>
-          <a:ln/>
-        </p:spPr>
-        <p:txBody>
-          <a:bodyPr wrap="square" lIns="0" tIns="0" rIns="0" bIns="0" rtlCol="0" anchor="ctr"/>
+            <a:off x="7874000" y="4826000"/>
+            <a:ext cx="1130300" cy="274320"/>
+          </a:xfrm>
+          <a:prstGeom prst="rect">
+            <a:avLst/>
+          </a:prstGeom>
+          <a:noFill/>
+          <a:ln/>
+        </p:spPr>
+        <p:txBody>
+          <a:bodyPr wrap="none" lIns="0" tIns="0" rIns="0" bIns="0" rtlCol="0" anchor="ctr"/>
           <a:lstStyle/>
           <a:p>
             <a:pPr marL="0" indent="0" algn="r">
               <a:buNone/>
             </a:pPr>
             <a:r>
-              <a:rPr lang="en-US" sz="1000" dirty="0">
-                <a:solidFill>
-                  <a:srgbClr val="6B7C8A"/>
-                </a:solidFill>
-                <a:latin typeface="Microsoft YaHei" pitchFamily="34" charset="0"/>
-                <a:ea typeface="Microsoft YaHei" pitchFamily="34" charset="-122"/>
-                <a:cs typeface="Microsoft YaHei" pitchFamily="34" charset="-120"/>
+              <a:rPr b="1" sz="1000">
+                <a:solidFill>
+                  <a:srgbClr val="0FA3A8"/>
+                </a:solidFill>
+                <a:latin typeface="Microsoft YaHei"/>
+                <a:ea typeface="Microsoft YaHei"/>
               </a:rPr>
               <a:t>15</a:t>
+            </a:r>
+            <a:r>
+              <a:rPr sz="900">
+                <a:solidFill>
+                  <a:srgbClr val="9FB8C8"/>
+                </a:solidFill>
+                <a:latin typeface="Microsoft YaHei"/>
+                <a:ea typeface="Microsoft YaHei"/>
+              </a:rPr>
+              <a:t> / 18</a:t>
             </a:r>
             <a:endParaRPr lang="en-US" sz="1000" dirty="0"/>
           </a:p>
@@ -11188,6 +11783,50 @@
               <a:t>站在 KVMem 的肩膀上 · 异步页流水</a:t>
             </a:r>
             <a:endParaRPr lang="en-US" sz="900" dirty="0"/>
+          </a:p>
+        </p:txBody>
+      </p:sp>
+      <p:sp>
+        <p:nvSpPr>
+          <p:cNvPr id="129" name="Rectangle 128"/>
+          <p:cNvSpPr/>
+          <p:nvPr/>
+        </p:nvSpPr>
+        <p:spPr>
+          <a:xfrm>
+            <a:off x="457200" y="4711700"/>
+            <a:ext cx="8547100" cy="9525"/>
+          </a:xfrm>
+          <a:prstGeom prst="rect">
+            <a:avLst/>
+          </a:prstGeom>
+          <a:solidFill>
+            <a:srgbClr val="D8E3EA"/>
+          </a:solidFill>
+          <a:ln>
+            <a:noFill/>
+          </a:ln>
+          <a:effectLst/>
+        </p:spPr>
+        <p:style>
+          <a:lnRef idx="1">
+            <a:schemeClr val="accent1"/>
+          </a:lnRef>
+          <a:fillRef idx="3">
+            <a:schemeClr val="accent1"/>
+          </a:fillRef>
+          <a:effectRef idx="2">
+            <a:schemeClr val="accent1"/>
+          </a:effectRef>
+          <a:fontRef idx="minor">
+            <a:schemeClr val="lt1"/>
+          </a:fontRef>
+        </p:style>
+        <p:txBody>
+          <a:bodyPr rtlCol="0" anchor="ctr"/>
+          <a:lstStyle/>
+          <a:p>
+            <a:pPr algn="ctr"/>
           </a:p>
         </p:txBody>
       </p:sp>
@@ -12573,32 +13212,41 @@
         </p:nvSpPr>
         <p:spPr>
           <a:xfrm>
-            <a:off x="8549640" y="4826000"/>
-            <a:ext cx="457200" cy="274320"/>
-          </a:xfrm>
-          <a:prstGeom prst="rect">
-            <a:avLst/>
-          </a:prstGeom>
-          <a:noFill/>
-          <a:ln/>
-        </p:spPr>
-        <p:txBody>
-          <a:bodyPr wrap="square" lIns="0" tIns="0" rIns="0" bIns="0" rtlCol="0" anchor="ctr"/>
+            <a:off x="7874000" y="4826000"/>
+            <a:ext cx="1130300" cy="274320"/>
+          </a:xfrm>
+          <a:prstGeom prst="rect">
+            <a:avLst/>
+          </a:prstGeom>
+          <a:noFill/>
+          <a:ln/>
+        </p:spPr>
+        <p:txBody>
+          <a:bodyPr wrap="none" lIns="0" tIns="0" rIns="0" bIns="0" rtlCol="0" anchor="ctr"/>
           <a:lstStyle/>
           <a:p>
             <a:pPr marL="0" indent="0" algn="r">
               <a:buNone/>
             </a:pPr>
             <a:r>
-              <a:rPr lang="en-US" sz="1000" dirty="0">
-                <a:solidFill>
-                  <a:srgbClr val="6B7C8A"/>
-                </a:solidFill>
-                <a:latin typeface="Microsoft YaHei" pitchFamily="34" charset="0"/>
-                <a:ea typeface="Microsoft YaHei" pitchFamily="34" charset="-122"/>
-                <a:cs typeface="Microsoft YaHei" pitchFamily="34" charset="-120"/>
+              <a:rPr b="1" sz="1000">
+                <a:solidFill>
+                  <a:srgbClr val="0FA3A8"/>
+                </a:solidFill>
+                <a:latin typeface="Microsoft YaHei"/>
+                <a:ea typeface="Microsoft YaHei"/>
               </a:rPr>
               <a:t>16</a:t>
+            </a:r>
+            <a:r>
+              <a:rPr sz="900">
+                <a:solidFill>
+                  <a:srgbClr val="9FB8C8"/>
+                </a:solidFill>
+                <a:latin typeface="Microsoft YaHei"/>
+                <a:ea typeface="Microsoft YaHei"/>
+              </a:rPr>
+              <a:t> / 18</a:t>
             </a:r>
             <a:endParaRPr lang="en-US" sz="1000" dirty="0"/>
           </a:p>
@@ -12640,6 +13288,50 @@
               <a:t>站在 KVMem 的肩膀上 · 异步页流水</a:t>
             </a:r>
             <a:endParaRPr lang="en-US" sz="900" dirty="0"/>
+          </a:p>
+        </p:txBody>
+      </p:sp>
+      <p:sp>
+        <p:nvSpPr>
+          <p:cNvPr id="171" name="Rectangle 170"/>
+          <p:cNvSpPr/>
+          <p:nvPr/>
+        </p:nvSpPr>
+        <p:spPr>
+          <a:xfrm>
+            <a:off x="457200" y="4711700"/>
+            <a:ext cx="8547100" cy="9525"/>
+          </a:xfrm>
+          <a:prstGeom prst="rect">
+            <a:avLst/>
+          </a:prstGeom>
+          <a:solidFill>
+            <a:srgbClr val="D8E3EA"/>
+          </a:solidFill>
+          <a:ln>
+            <a:noFill/>
+          </a:ln>
+          <a:effectLst/>
+        </p:spPr>
+        <p:style>
+          <a:lnRef idx="1">
+            <a:schemeClr val="accent1"/>
+          </a:lnRef>
+          <a:fillRef idx="3">
+            <a:schemeClr val="accent1"/>
+          </a:fillRef>
+          <a:effectRef idx="2">
+            <a:schemeClr val="accent1"/>
+          </a:effectRef>
+          <a:fontRef idx="minor">
+            <a:schemeClr val="lt1"/>
+          </a:fontRef>
+        </p:style>
+        <p:txBody>
+          <a:bodyPr rtlCol="0" anchor="ctr"/>
+          <a:lstStyle/>
+          <a:p>
+            <a:pPr algn="ctr"/>
           </a:p>
         </p:txBody>
       </p:sp>
@@ -13370,32 +14062,41 @@
         </p:nvSpPr>
         <p:spPr>
           <a:xfrm>
-            <a:off x="8549640" y="4826000"/>
-            <a:ext cx="457200" cy="274320"/>
-          </a:xfrm>
-          <a:prstGeom prst="rect">
-            <a:avLst/>
-          </a:prstGeom>
-          <a:noFill/>
-          <a:ln/>
-        </p:spPr>
-        <p:txBody>
-          <a:bodyPr wrap="square" lIns="0" tIns="0" rIns="0" bIns="0" rtlCol="0" anchor="ctr"/>
+            <a:off x="7874000" y="4826000"/>
+            <a:ext cx="1130300" cy="274320"/>
+          </a:xfrm>
+          <a:prstGeom prst="rect">
+            <a:avLst/>
+          </a:prstGeom>
+          <a:noFill/>
+          <a:ln/>
+        </p:spPr>
+        <p:txBody>
+          <a:bodyPr wrap="none" lIns="0" tIns="0" rIns="0" bIns="0" rtlCol="0" anchor="ctr"/>
           <a:lstStyle/>
           <a:p>
             <a:pPr marL="0" indent="0" algn="r">
               <a:buNone/>
             </a:pPr>
             <a:r>
-              <a:rPr lang="en-US" sz="1000" dirty="0">
-                <a:solidFill>
-                  <a:srgbClr val="6B7C8A"/>
-                </a:solidFill>
-                <a:latin typeface="Microsoft YaHei" pitchFamily="34" charset="0"/>
-                <a:ea typeface="Microsoft YaHei" pitchFamily="34" charset="-122"/>
-                <a:cs typeface="Microsoft YaHei" pitchFamily="34" charset="-120"/>
+              <a:rPr b="1" sz="1000">
+                <a:solidFill>
+                  <a:srgbClr val="0FA3A8"/>
+                </a:solidFill>
+                <a:latin typeface="Microsoft YaHei"/>
+                <a:ea typeface="Microsoft YaHei"/>
               </a:rPr>
               <a:t>17</a:t>
+            </a:r>
+            <a:r>
+              <a:rPr sz="900">
+                <a:solidFill>
+                  <a:srgbClr val="9FB8C8"/>
+                </a:solidFill>
+                <a:latin typeface="Microsoft YaHei"/>
+                <a:ea typeface="Microsoft YaHei"/>
+              </a:rPr>
+              <a:t> / 18</a:t>
             </a:r>
             <a:endParaRPr lang="en-US" sz="1000" dirty="0"/>
           </a:p>
@@ -13437,6 +14138,50 @@
               <a:t>站在 KVMem 的肩膀上 · 异步页流水</a:t>
             </a:r>
             <a:endParaRPr lang="en-US" sz="900" dirty="0"/>
+          </a:p>
+        </p:txBody>
+      </p:sp>
+      <p:sp>
+        <p:nvSpPr>
+          <p:cNvPr id="189" name="Rectangle 188"/>
+          <p:cNvSpPr/>
+          <p:nvPr/>
+        </p:nvSpPr>
+        <p:spPr>
+          <a:xfrm>
+            <a:off x="457200" y="4711700"/>
+            <a:ext cx="8547100" cy="9525"/>
+          </a:xfrm>
+          <a:prstGeom prst="rect">
+            <a:avLst/>
+          </a:prstGeom>
+          <a:solidFill>
+            <a:srgbClr val="D8E3EA"/>
+          </a:solidFill>
+          <a:ln>
+            <a:noFill/>
+          </a:ln>
+          <a:effectLst/>
+        </p:spPr>
+        <p:style>
+          <a:lnRef idx="1">
+            <a:schemeClr val="accent1"/>
+          </a:lnRef>
+          <a:fillRef idx="3">
+            <a:schemeClr val="accent1"/>
+          </a:fillRef>
+          <a:effectRef idx="2">
+            <a:schemeClr val="accent1"/>
+          </a:effectRef>
+          <a:fontRef idx="minor">
+            <a:schemeClr val="lt1"/>
+          </a:fontRef>
+        </p:style>
+        <p:txBody>
+          <a:bodyPr rtlCol="0" anchor="ctr"/>
+          <a:lstStyle/>
+          <a:p>
+            <a:pPr algn="ctr"/>
           </a:p>
         </p:txBody>
       </p:sp>
@@ -14367,10 +15112,13 @@
               <a:buNone/>
             </a:pPr>
             <a:r>
-              <a:rPr lang="en-US" sz="950" dirty="0">
-                <a:solidFill>
-                  <a:srgbClr val="9FB8C8"/>
-                </a:solidFill>
+              <a:rPr lang="en-US" sz="950" dirty="0" u="sng">
+                <a:solidFill>
+                  <a:srgbClr val="3FC6D6"/>
+                </a:solidFill>
+                <a:latin typeface="Microsoft YaHei"/>
+                <a:ea typeface="Microsoft YaHei"/>
+                <a:hlinkClick xmlns:ns0="http://schemas.openxmlformats.org/officeDocument/2006/relationships" ns0:id="rId3"/>
               </a:rPr>
               <a:t>(arXiv 2609.04852 · B 站 FirePKU)</a:t>
             </a:r>
@@ -14494,10 +15242,13 @@
               <a:buNone/>
             </a:pPr>
             <a:r>
-              <a:rPr lang="en-US" sz="950" dirty="0">
-                <a:solidFill>
-                  <a:srgbClr val="9FB8C8"/>
-                </a:solidFill>
+              <a:rPr lang="en-US" sz="950" dirty="0" u="sng">
+                <a:solidFill>
+                  <a:srgbClr val="3FC6D6"/>
+                </a:solidFill>
+                <a:latin typeface="Microsoft YaHei"/>
+                <a:ea typeface="Microsoft YaHei"/>
+                <a:hlinkClick xmlns:ns2="http://schemas.openxmlformats.org/officeDocument/2006/relationships" ns2:id="rId4"/>
               </a:rPr>
               <a:t>kvmem/kvmem：</a:t>
             </a:r>
@@ -14672,60 +15423,94 @@
               <a:buNone/>
             </a:pPr>
             <a:r>
+              <a:rPr lang="en-US" sz="950" dirty="0" u="sng">
+                <a:solidFill>
+                  <a:srgbClr val="3FC6D6"/>
+                </a:solidFill>
+                <a:latin typeface="Microsoft YaHei"/>
+                <a:ea typeface="Microsoft YaHei"/>
+                <a:hlinkClick xmlns:ns4="http://schemas.openxmlformats.org/officeDocument/2006/relationships" ns4:id="rId5"/>
+              </a:rPr>
+              <a:t>沈三殊——最早把 NInfer × KVMem 结合</a:t>
+            </a:r>
+            <a:endParaRPr lang="en-US" sz="950" dirty="0"/>
+          </a:p>
+          <a:p>
+            <a:pPr marL="0" indent="0">
+              <a:buNone/>
+            </a:pPr>
+            <a:r>
+              <a:rPr lang="en-US" sz="950" dirty="0" u="sng">
+                <a:solidFill>
+                  <a:srgbClr val="3FC6D6"/>
+                </a:solidFill>
+                <a:latin typeface="Microsoft YaHei"/>
+                <a:ea typeface="Microsoft YaHei"/>
+                <a:hlinkClick xmlns:ns6="http://schemas.openxmlformats.org/officeDocument/2006/relationships" ns6:id="rId6"/>
+              </a:rPr>
+              <a:t>tancau——Ring 环实现 · 直接讨论</a:t>
+            </a:r>
+            <a:endParaRPr lang="en-US" sz="950" dirty="0"/>
+          </a:p>
+          <a:p>
+            <a:pPr marL="0" indent="0">
+              <a:buNone/>
+            </a:pPr>
+            <a:r>
+              <a:rPr lang="en-US" sz="950" dirty="0" u="sng">
+                <a:solidFill>
+                  <a:srgbClr val="3FC6D6"/>
+                </a:solidFill>
+                <a:latin typeface="Microsoft YaHei"/>
+                <a:ea typeface="Microsoft YaHei"/>
+                <a:hlinkClick xmlns:ns8="http://schemas.openxmlformats.org/officeDocument/2006/relationships" ns8:id="rId7"/>
+              </a:rPr>
+              <a:t>帅气的 zxz——5060Ti 线 · 融合计划</a:t>
+            </a:r>
+            <a:endParaRPr lang="en-US" sz="950" dirty="0"/>
+          </a:p>
+          <a:p>
+            <a:pPr marL="0" indent="0">
+              <a:buNone/>
+            </a:pPr>
+            <a:r>
+              <a:rPr lang="en-US" sz="950" dirty="0" u="sng">
+                <a:solidFill>
+                  <a:srgbClr val="3FC6D6"/>
+                </a:solidFill>
+                <a:latin typeface="Microsoft YaHei"/>
+                <a:ea typeface="Microsoft YaHei"/>
+                <a:hlinkClick xmlns:ns10="http://schemas.openxmlformats.org/officeDocument/2006/relationships" ns10:id="rId8"/>
+              </a:rPr>
+              <a:t>llama.cpp</a:t>
+            </a:r>
+            <a:r>
               <a:rPr lang="en-US" sz="950" dirty="0">
                 <a:solidFill>
                   <a:srgbClr val="9FB8C8"/>
                 </a:solidFill>
-              </a:rPr>
-              <a:t>沈三殊——最早把 NInfer × KVMem 结合</a:t>
-            </a:r>
-            <a:endParaRPr lang="en-US" sz="950" dirty="0"/>
-          </a:p>
-          <a:p>
-            <a:pPr marL="0" indent="0">
-              <a:buNone/>
-            </a:pPr>
+                <a:latin typeface="Microsoft YaHei" pitchFamily="34" charset="0"/>
+                <a:ea typeface="Microsoft YaHei" pitchFamily="34" charset="-122"/>
+                <a:cs typeface="Microsoft YaHei" pitchFamily="34" charset="-120"/>
+              </a:rPr>
+              <a:t xml:space="preserve"> · </a:t>
+            </a:r>
+            <a:r>
+              <a:rPr lang="en-US" sz="950" dirty="0" u="sng">
+                <a:solidFill>
+                  <a:srgbClr val="3FC6D6"/>
+                </a:solidFill>
+                <a:latin typeface="Microsoft YaHei"/>
+                <a:ea typeface="Microsoft YaHei"/>
+                <a:hlinkClick xmlns:ns12="http://schemas.openxmlformats.org/officeDocument/2006/relationships" ns12:id="rId9"/>
+              </a:rPr>
+              <a:t>Neroued/ninfer</a:t>
+            </a:r>
             <a:r>
               <a:rPr lang="en-US" sz="950" dirty="0">
                 <a:solidFill>
                   <a:srgbClr val="9FB8C8"/>
                 </a:solidFill>
-              </a:rPr>
-              <a:t>tancau——Ring 环实现 · 直接讨论</a:t>
-            </a:r>
-            <a:endParaRPr lang="en-US" sz="950" dirty="0"/>
-          </a:p>
-          <a:p>
-            <a:pPr marL="0" indent="0">
-              <a:buNone/>
-            </a:pPr>
-            <a:r>
-              <a:rPr lang="en-US" sz="950" dirty="0">
-                <a:solidFill>
-                  <a:srgbClr val="9FB8C8"/>
-                </a:solidFill>
-              </a:rPr>
-              <a:t>帅气的 zxz——5060Ti 线 · 融合计划</a:t>
-            </a:r>
-            <a:endParaRPr lang="en-US" sz="950" dirty="0"/>
-          </a:p>
-          <a:p>
-            <a:pPr marL="0" indent="0">
-              <a:buNone/>
-            </a:pPr>
-            <a:r>
-              <a:rPr lang="en-US" sz="950" dirty="0">
-                <a:solidFill>
-                  <a:srgbClr val="9FB8C8"/>
-                </a:solidFill>
-              </a:rPr>
-              <a:t>llama.cpp</a:t>
-            </a:r>
-            <a:r>
-              <a:rPr lang="en-US" sz="950" dirty="0">
-                <a:solidFill>
-                  <a:srgbClr val="9FB8C8"/>
-                </a:solidFill>
                 <a:latin typeface="Microsoft YaHei" pitchFamily="34" charset="0"/>
                 <a:ea typeface="Microsoft YaHei" pitchFamily="34" charset="-122"/>
                 <a:cs typeface="Microsoft YaHei" pitchFamily="34" charset="-120"/>
@@ -14733,29 +15518,13 @@
               <a:t xml:space="preserve"> · </a:t>
             </a:r>
             <a:r>
-              <a:rPr lang="en-US" sz="950" dirty="0">
-                <a:solidFill>
-                  <a:srgbClr val="9FB8C8"/>
-                </a:solidFill>
-              </a:rPr>
-              <a:t>Neroued/ninfer</a:t>
-            </a:r>
-            <a:r>
-              <a:rPr lang="en-US" sz="950" dirty="0">
-                <a:solidFill>
-                  <a:srgbClr val="9FB8C8"/>
-                </a:solidFill>
-                <a:latin typeface="Microsoft YaHei" pitchFamily="34" charset="0"/>
-                <a:ea typeface="Microsoft YaHei" pitchFamily="34" charset="-122"/>
-                <a:cs typeface="Microsoft YaHei" pitchFamily="34" charset="-120"/>
-              </a:rPr>
-              <a:t xml:space="preserve"> · </a:t>
-            </a:r>
-            <a:r>
-              <a:rPr lang="en-US" sz="950" dirty="0">
-                <a:solidFill>
-                  <a:srgbClr val="9FB8C8"/>
-                </a:solidFill>
+              <a:rPr lang="en-US" sz="950" dirty="0" u="sng">
+                <a:solidFill>
+                  <a:srgbClr val="3FC6D6"/>
+                </a:solidFill>
+                <a:latin typeface="Microsoft YaHei"/>
+                <a:ea typeface="Microsoft YaHei"/>
+                <a:hlinkClick xmlns:ns14="http://schemas.openxmlformats.org/officeDocument/2006/relationships" ns14:id="rId10"/>
               </a:rPr>
               <a:t>iamwavecut/ninfer-all</a:t>
             </a:r>
@@ -14810,32 +15579,41 @@
         </p:nvSpPr>
         <p:spPr>
           <a:xfrm>
-            <a:off x="8549640" y="4826000"/>
-            <a:ext cx="457200" cy="274320"/>
-          </a:xfrm>
-          <a:prstGeom prst="rect">
-            <a:avLst/>
-          </a:prstGeom>
-          <a:noFill/>
-          <a:ln/>
-        </p:spPr>
-        <p:txBody>
-          <a:bodyPr wrap="square" lIns="0" tIns="0" rIns="0" bIns="0" rtlCol="0" anchor="ctr"/>
+            <a:off x="7874000" y="4826000"/>
+            <a:ext cx="1130300" cy="274320"/>
+          </a:xfrm>
+          <a:prstGeom prst="rect">
+            <a:avLst/>
+          </a:prstGeom>
+          <a:noFill/>
+          <a:ln/>
+        </p:spPr>
+        <p:txBody>
+          <a:bodyPr wrap="none" lIns="0" tIns="0" rIns="0" bIns="0" rtlCol="0" anchor="ctr"/>
           <a:lstStyle/>
           <a:p>
             <a:pPr marL="0" indent="0" algn="r">
               <a:buNone/>
             </a:pPr>
             <a:r>
-              <a:rPr lang="en-US" sz="1000" dirty="0">
-                <a:solidFill>
-                  <a:srgbClr val="6B7C8A"/>
-                </a:solidFill>
-                <a:latin typeface="Microsoft YaHei" pitchFamily="34" charset="0"/>
-                <a:ea typeface="Microsoft YaHei" pitchFamily="34" charset="-122"/>
-                <a:cs typeface="Microsoft YaHei" pitchFamily="34" charset="-120"/>
+              <a:rPr b="1" sz="1000">
+                <a:solidFill>
+                  <a:srgbClr val="3FC6D6"/>
+                </a:solidFill>
+                <a:latin typeface="Microsoft YaHei"/>
+                <a:ea typeface="Microsoft YaHei"/>
               </a:rPr>
               <a:t>02</a:t>
+            </a:r>
+            <a:r>
+              <a:rPr sz="900">
+                <a:solidFill>
+                  <a:srgbClr val="9FB8C8"/>
+                </a:solidFill>
+                <a:latin typeface="Microsoft YaHei"/>
+                <a:ea typeface="Microsoft YaHei"/>
+              </a:rPr>
+              <a:t> / 18</a:t>
             </a:r>
             <a:endParaRPr lang="en-US" sz="1000" dirty="0"/>
           </a:p>
@@ -14877,6 +15655,50 @@
               <a:t>站在 KVMem 的肩膀上 · 异步页流水</a:t>
             </a:r>
             <a:endParaRPr lang="en-US" sz="900" dirty="0"/>
+          </a:p>
+        </p:txBody>
+      </p:sp>
+      <p:sp>
+        <p:nvSpPr>
+          <p:cNvPr id="226" name="Rectangle 225"/>
+          <p:cNvSpPr/>
+          <p:nvPr/>
+        </p:nvSpPr>
+        <p:spPr>
+          <a:xfrm>
+            <a:off x="457200" y="4711700"/>
+            <a:ext cx="8547100" cy="9525"/>
+          </a:xfrm>
+          <a:prstGeom prst="rect">
+            <a:avLst/>
+          </a:prstGeom>
+          <a:solidFill>
+            <a:srgbClr val="23465C"/>
+          </a:solidFill>
+          <a:ln>
+            <a:noFill/>
+          </a:ln>
+          <a:effectLst/>
+        </p:spPr>
+        <p:style>
+          <a:lnRef idx="1">
+            <a:schemeClr val="accent1"/>
+          </a:lnRef>
+          <a:fillRef idx="3">
+            <a:schemeClr val="accent1"/>
+          </a:fillRef>
+          <a:effectRef idx="2">
+            <a:schemeClr val="accent1"/>
+          </a:effectRef>
+          <a:fontRef idx="minor">
+            <a:schemeClr val="lt1"/>
+          </a:fontRef>
+        </p:style>
+        <p:txBody>
+          <a:bodyPr rtlCol="0" anchor="ctr"/>
+          <a:lstStyle/>
+          <a:p>
+            <a:pPr algn="ctr"/>
           </a:p>
         </p:txBody>
       </p:sp>
@@ -15414,32 +16236,41 @@
         </p:nvSpPr>
         <p:spPr>
           <a:xfrm>
-            <a:off x="8549640" y="4826000"/>
-            <a:ext cx="457200" cy="274320"/>
-          </a:xfrm>
-          <a:prstGeom prst="rect">
-            <a:avLst/>
-          </a:prstGeom>
-          <a:noFill/>
-          <a:ln/>
-        </p:spPr>
-        <p:txBody>
-          <a:bodyPr wrap="square" lIns="0" tIns="0" rIns="0" bIns="0" rtlCol="0" anchor="ctr"/>
+            <a:off x="7874000" y="4826000"/>
+            <a:ext cx="1130300" cy="274320"/>
+          </a:xfrm>
+          <a:prstGeom prst="rect">
+            <a:avLst/>
+          </a:prstGeom>
+          <a:noFill/>
+          <a:ln/>
+        </p:spPr>
+        <p:txBody>
+          <a:bodyPr wrap="none" lIns="0" tIns="0" rIns="0" bIns="0" rtlCol="0" anchor="ctr"/>
           <a:lstStyle/>
           <a:p>
             <a:pPr marL="0" indent="0" algn="r">
               <a:buNone/>
             </a:pPr>
             <a:r>
-              <a:rPr lang="en-US" sz="1000" dirty="0">
-                <a:solidFill>
-                  <a:srgbClr val="6B7C8A"/>
-                </a:solidFill>
-                <a:latin typeface="Microsoft YaHei" pitchFamily="34" charset="0"/>
-                <a:ea typeface="Microsoft YaHei" pitchFamily="34" charset="-122"/>
-                <a:cs typeface="Microsoft YaHei" pitchFamily="34" charset="-120"/>
+              <a:rPr b="1" sz="1000">
+                <a:solidFill>
+                  <a:srgbClr val="0FA3A8"/>
+                </a:solidFill>
+                <a:latin typeface="Microsoft YaHei"/>
+                <a:ea typeface="Microsoft YaHei"/>
               </a:rPr>
               <a:t>03</a:t>
+            </a:r>
+            <a:r>
+              <a:rPr sz="900">
+                <a:solidFill>
+                  <a:srgbClr val="9FB8C8"/>
+                </a:solidFill>
+                <a:latin typeface="Microsoft YaHei"/>
+                <a:ea typeface="Microsoft YaHei"/>
+              </a:rPr>
+              <a:t> / 18</a:t>
             </a:r>
             <a:endParaRPr lang="en-US" sz="1000" dirty="0"/>
           </a:p>
@@ -15481,6 +16312,50 @@
               <a:t>站在 KVMem 的肩膀上 · 异步页流水</a:t>
             </a:r>
             <a:endParaRPr lang="en-US" sz="900" dirty="0"/>
+          </a:p>
+        </p:txBody>
+      </p:sp>
+      <p:sp>
+        <p:nvSpPr>
+          <p:cNvPr id="243" name="Rectangle 242"/>
+          <p:cNvSpPr/>
+          <p:nvPr/>
+        </p:nvSpPr>
+        <p:spPr>
+          <a:xfrm>
+            <a:off x="457200" y="4711700"/>
+            <a:ext cx="8547100" cy="9525"/>
+          </a:xfrm>
+          <a:prstGeom prst="rect">
+            <a:avLst/>
+          </a:prstGeom>
+          <a:solidFill>
+            <a:srgbClr val="D8E3EA"/>
+          </a:solidFill>
+          <a:ln>
+            <a:noFill/>
+          </a:ln>
+          <a:effectLst/>
+        </p:spPr>
+        <p:style>
+          <a:lnRef idx="1">
+            <a:schemeClr val="accent1"/>
+          </a:lnRef>
+          <a:fillRef idx="3">
+            <a:schemeClr val="accent1"/>
+          </a:fillRef>
+          <a:effectRef idx="2">
+            <a:schemeClr val="accent1"/>
+          </a:effectRef>
+          <a:fontRef idx="minor">
+            <a:schemeClr val="lt1"/>
+          </a:fontRef>
+        </p:style>
+        <p:txBody>
+          <a:bodyPr rtlCol="0" anchor="ctr"/>
+          <a:lstStyle/>
+          <a:p>
+            <a:pPr algn="ctr"/>
           </a:p>
         </p:txBody>
       </p:sp>
@@ -16253,32 +17128,41 @@
         </p:nvSpPr>
         <p:spPr>
           <a:xfrm>
-            <a:off x="8549640" y="4826000"/>
-            <a:ext cx="457200" cy="274320"/>
-          </a:xfrm>
-          <a:prstGeom prst="rect">
-            <a:avLst/>
-          </a:prstGeom>
-          <a:noFill/>
-          <a:ln/>
-        </p:spPr>
-        <p:txBody>
-          <a:bodyPr wrap="square" lIns="0" tIns="0" rIns="0" bIns="0" rtlCol="0" anchor="ctr"/>
+            <a:off x="7874000" y="4826000"/>
+            <a:ext cx="1130300" cy="274320"/>
+          </a:xfrm>
+          <a:prstGeom prst="rect">
+            <a:avLst/>
+          </a:prstGeom>
+          <a:noFill/>
+          <a:ln/>
+        </p:spPr>
+        <p:txBody>
+          <a:bodyPr wrap="none" lIns="0" tIns="0" rIns="0" bIns="0" rtlCol="0" anchor="ctr"/>
           <a:lstStyle/>
           <a:p>
             <a:pPr marL="0" indent="0" algn="r">
               <a:buNone/>
             </a:pPr>
             <a:r>
-              <a:rPr lang="en-US" sz="1000" dirty="0">
-                <a:solidFill>
-                  <a:srgbClr val="6B7C8A"/>
-                </a:solidFill>
-                <a:latin typeface="Microsoft YaHei" pitchFamily="34" charset="0"/>
-                <a:ea typeface="Microsoft YaHei" pitchFamily="34" charset="-122"/>
-                <a:cs typeface="Microsoft YaHei" pitchFamily="34" charset="-120"/>
+              <a:rPr b="1" sz="1000">
+                <a:solidFill>
+                  <a:srgbClr val="0FA3A8"/>
+                </a:solidFill>
+                <a:latin typeface="Microsoft YaHei"/>
+                <a:ea typeface="Microsoft YaHei"/>
               </a:rPr>
               <a:t>04</a:t>
+            </a:r>
+            <a:r>
+              <a:rPr sz="900">
+                <a:solidFill>
+                  <a:srgbClr val="9FB8C8"/>
+                </a:solidFill>
+                <a:latin typeface="Microsoft YaHei"/>
+                <a:ea typeface="Microsoft YaHei"/>
+              </a:rPr>
+              <a:t> / 18</a:t>
             </a:r>
             <a:endParaRPr lang="en-US" sz="1000" dirty="0"/>
           </a:p>
@@ -16320,6 +17204,50 @@
               <a:t>站在 KVMem 的肩膀上 · 异步页流水</a:t>
             </a:r>
             <a:endParaRPr lang="en-US" sz="900" dirty="0"/>
+          </a:p>
+        </p:txBody>
+      </p:sp>
+      <p:sp>
+        <p:nvSpPr>
+          <p:cNvPr id="260" name="Rectangle 259"/>
+          <p:cNvSpPr/>
+          <p:nvPr/>
+        </p:nvSpPr>
+        <p:spPr>
+          <a:xfrm>
+            <a:off x="457200" y="4711700"/>
+            <a:ext cx="8547100" cy="9525"/>
+          </a:xfrm>
+          <a:prstGeom prst="rect">
+            <a:avLst/>
+          </a:prstGeom>
+          <a:solidFill>
+            <a:srgbClr val="D8E3EA"/>
+          </a:solidFill>
+          <a:ln>
+            <a:noFill/>
+          </a:ln>
+          <a:effectLst/>
+        </p:spPr>
+        <p:style>
+          <a:lnRef idx="1">
+            <a:schemeClr val="accent1"/>
+          </a:lnRef>
+          <a:fillRef idx="3">
+            <a:schemeClr val="accent1"/>
+          </a:fillRef>
+          <a:effectRef idx="2">
+            <a:schemeClr val="accent1"/>
+          </a:effectRef>
+          <a:fontRef idx="minor">
+            <a:schemeClr val="lt1"/>
+          </a:fontRef>
+        </p:style>
+        <p:txBody>
+          <a:bodyPr rtlCol="0" anchor="ctr"/>
+          <a:lstStyle/>
+          <a:p>
+            <a:pPr algn="ctr"/>
           </a:p>
         </p:txBody>
       </p:sp>
@@ -17371,32 +18299,41 @@
         </p:nvSpPr>
         <p:spPr>
           <a:xfrm>
-            <a:off x="8549640" y="4826000"/>
-            <a:ext cx="457200" cy="274320"/>
-          </a:xfrm>
-          <a:prstGeom prst="rect">
-            <a:avLst/>
-          </a:prstGeom>
-          <a:noFill/>
-          <a:ln/>
-        </p:spPr>
-        <p:txBody>
-          <a:bodyPr wrap="square" lIns="0" tIns="0" rIns="0" bIns="0" rtlCol="0" anchor="ctr"/>
+            <a:off x="7874000" y="4826000"/>
+            <a:ext cx="1130300" cy="274320"/>
+          </a:xfrm>
+          <a:prstGeom prst="rect">
+            <a:avLst/>
+          </a:prstGeom>
+          <a:noFill/>
+          <a:ln/>
+        </p:spPr>
+        <p:txBody>
+          <a:bodyPr wrap="none" lIns="0" tIns="0" rIns="0" bIns="0" rtlCol="0" anchor="ctr"/>
           <a:lstStyle/>
           <a:p>
             <a:pPr marL="0" indent="0" algn="r">
               <a:buNone/>
             </a:pPr>
             <a:r>
-              <a:rPr lang="en-US" sz="1000" dirty="0">
-                <a:solidFill>
-                  <a:srgbClr val="6B7C8A"/>
-                </a:solidFill>
-                <a:latin typeface="Microsoft YaHei" pitchFamily="34" charset="0"/>
-                <a:ea typeface="Microsoft YaHei" pitchFamily="34" charset="-122"/>
-                <a:cs typeface="Microsoft YaHei" pitchFamily="34" charset="-120"/>
+              <a:rPr b="1" sz="1000">
+                <a:solidFill>
+                  <a:srgbClr val="0FA3A8"/>
+                </a:solidFill>
+                <a:latin typeface="Microsoft YaHei"/>
+                <a:ea typeface="Microsoft YaHei"/>
               </a:rPr>
               <a:t>05</a:t>
+            </a:r>
+            <a:r>
+              <a:rPr sz="900">
+                <a:solidFill>
+                  <a:srgbClr val="9FB8C8"/>
+                </a:solidFill>
+                <a:latin typeface="Microsoft YaHei"/>
+                <a:ea typeface="Microsoft YaHei"/>
+              </a:rPr>
+              <a:t> / 18</a:t>
             </a:r>
             <a:endParaRPr lang="en-US" sz="1000" dirty="0"/>
           </a:p>
@@ -17438,6 +18375,50 @@
               <a:t>站在 KVMem 的肩膀上 · 异步页流水</a:t>
             </a:r>
             <a:endParaRPr lang="en-US" sz="900" dirty="0"/>
+          </a:p>
+        </p:txBody>
+      </p:sp>
+      <p:sp>
+        <p:nvSpPr>
+          <p:cNvPr id="292" name="Rectangle 291"/>
+          <p:cNvSpPr/>
+          <p:nvPr/>
+        </p:nvSpPr>
+        <p:spPr>
+          <a:xfrm>
+            <a:off x="457200" y="4711700"/>
+            <a:ext cx="8547100" cy="9525"/>
+          </a:xfrm>
+          <a:prstGeom prst="rect">
+            <a:avLst/>
+          </a:prstGeom>
+          <a:solidFill>
+            <a:srgbClr val="D8E3EA"/>
+          </a:solidFill>
+          <a:ln>
+            <a:noFill/>
+          </a:ln>
+          <a:effectLst/>
+        </p:spPr>
+        <p:style>
+          <a:lnRef idx="1">
+            <a:schemeClr val="accent1"/>
+          </a:lnRef>
+          <a:fillRef idx="3">
+            <a:schemeClr val="accent1"/>
+          </a:fillRef>
+          <a:effectRef idx="2">
+            <a:schemeClr val="accent1"/>
+          </a:effectRef>
+          <a:fontRef idx="minor">
+            <a:schemeClr val="lt1"/>
+          </a:fontRef>
+        </p:style>
+        <p:txBody>
+          <a:bodyPr rtlCol="0" anchor="ctr"/>
+          <a:lstStyle/>
+          <a:p>
+            <a:pPr algn="ctr"/>
           </a:p>
         </p:txBody>
       </p:sp>
@@ -17563,7 +18544,7 @@
               <a:buNone/>
             </a:pPr>
             <a:r>
-              <a:rPr lang="en-US" sz="2400" b="1" dirty="0">
+              <a:rPr lang="en-US" sz="2200" b="1" dirty="0">
                 <a:solidFill>
                   <a:srgbClr val="22303C"/>
                 </a:solidFill>
@@ -18537,32 +19518,41 @@
         </p:nvSpPr>
         <p:spPr>
           <a:xfrm>
-            <a:off x="8549640" y="4826000"/>
-            <a:ext cx="457200" cy="274320"/>
-          </a:xfrm>
-          <a:prstGeom prst="rect">
-            <a:avLst/>
-          </a:prstGeom>
-          <a:noFill/>
-          <a:ln/>
-        </p:spPr>
-        <p:txBody>
-          <a:bodyPr wrap="square" lIns="0" tIns="0" rIns="0" bIns="0" rtlCol="0" anchor="ctr"/>
+            <a:off x="7874000" y="4826000"/>
+            <a:ext cx="1130300" cy="274320"/>
+          </a:xfrm>
+          <a:prstGeom prst="rect">
+            <a:avLst/>
+          </a:prstGeom>
+          <a:noFill/>
+          <a:ln/>
+        </p:spPr>
+        <p:txBody>
+          <a:bodyPr wrap="none" lIns="0" tIns="0" rIns="0" bIns="0" rtlCol="0" anchor="ctr"/>
           <a:lstStyle/>
           <a:p>
             <a:pPr marL="0" indent="0" algn="r">
               <a:buNone/>
             </a:pPr>
             <a:r>
-              <a:rPr lang="en-US" sz="1000" dirty="0">
-                <a:solidFill>
-                  <a:srgbClr val="6B7C8A"/>
-                </a:solidFill>
-                <a:latin typeface="Microsoft YaHei" pitchFamily="34" charset="0"/>
-                <a:ea typeface="Microsoft YaHei" pitchFamily="34" charset="-122"/>
-                <a:cs typeface="Microsoft YaHei" pitchFamily="34" charset="-120"/>
+              <a:rPr b="1" sz="1000">
+                <a:solidFill>
+                  <a:srgbClr val="0FA3A8"/>
+                </a:solidFill>
+                <a:latin typeface="Microsoft YaHei"/>
+                <a:ea typeface="Microsoft YaHei"/>
               </a:rPr>
               <a:t>06</a:t>
+            </a:r>
+            <a:r>
+              <a:rPr sz="900">
+                <a:solidFill>
+                  <a:srgbClr val="9FB8C8"/>
+                </a:solidFill>
+                <a:latin typeface="Microsoft YaHei"/>
+                <a:ea typeface="Microsoft YaHei"/>
+              </a:rPr>
+              <a:t> / 18</a:t>
             </a:r>
             <a:endParaRPr lang="en-US" sz="1000" dirty="0"/>
           </a:p>
@@ -18604,6 +19594,50 @@
               <a:t>站在 KVMem 的肩膀上 · 异步页流水</a:t>
             </a:r>
             <a:endParaRPr lang="en-US" sz="900" dirty="0"/>
+          </a:p>
+        </p:txBody>
+      </p:sp>
+      <p:sp>
+        <p:nvSpPr>
+          <p:cNvPr id="323" name="Rectangle 322"/>
+          <p:cNvSpPr/>
+          <p:nvPr/>
+        </p:nvSpPr>
+        <p:spPr>
+          <a:xfrm>
+            <a:off x="457200" y="4711700"/>
+            <a:ext cx="8547100" cy="9525"/>
+          </a:xfrm>
+          <a:prstGeom prst="rect">
+            <a:avLst/>
+          </a:prstGeom>
+          <a:solidFill>
+            <a:srgbClr val="D8E3EA"/>
+          </a:solidFill>
+          <a:ln>
+            <a:noFill/>
+          </a:ln>
+          <a:effectLst/>
+        </p:spPr>
+        <p:style>
+          <a:lnRef idx="1">
+            <a:schemeClr val="accent1"/>
+          </a:lnRef>
+          <a:fillRef idx="3">
+            <a:schemeClr val="accent1"/>
+          </a:fillRef>
+          <a:effectRef idx="2">
+            <a:schemeClr val="accent1"/>
+          </a:effectRef>
+          <a:fontRef idx="minor">
+            <a:schemeClr val="lt1"/>
+          </a:fontRef>
+        </p:style>
+        <p:txBody>
+          <a:bodyPr rtlCol="0" anchor="ctr"/>
+          <a:lstStyle/>
+          <a:p>
+            <a:pPr algn="ctr"/>
           </a:p>
         </p:txBody>
       </p:sp>
@@ -19504,32 +20538,41 @@
         </p:nvSpPr>
         <p:spPr>
           <a:xfrm>
-            <a:off x="8549640" y="4826000"/>
-            <a:ext cx="457200" cy="274320"/>
-          </a:xfrm>
-          <a:prstGeom prst="rect">
-            <a:avLst/>
-          </a:prstGeom>
-          <a:noFill/>
-          <a:ln/>
-        </p:spPr>
-        <p:txBody>
-          <a:bodyPr wrap="square" lIns="0" tIns="0" rIns="0" bIns="0" rtlCol="0" anchor="ctr"/>
+            <a:off x="7874000" y="4826000"/>
+            <a:ext cx="1130300" cy="274320"/>
+          </a:xfrm>
+          <a:prstGeom prst="rect">
+            <a:avLst/>
+          </a:prstGeom>
+          <a:noFill/>
+          <a:ln/>
+        </p:spPr>
+        <p:txBody>
+          <a:bodyPr wrap="none" lIns="0" tIns="0" rIns="0" bIns="0" rtlCol="0" anchor="ctr"/>
           <a:lstStyle/>
           <a:p>
             <a:pPr marL="0" indent="0" algn="r">
               <a:buNone/>
             </a:pPr>
             <a:r>
-              <a:rPr lang="en-US" sz="1000" dirty="0">
-                <a:solidFill>
-                  <a:srgbClr val="6B7C8A"/>
-                </a:solidFill>
-                <a:latin typeface="Microsoft YaHei" pitchFamily="34" charset="0"/>
-                <a:ea typeface="Microsoft YaHei" pitchFamily="34" charset="-122"/>
-                <a:cs typeface="Microsoft YaHei" pitchFamily="34" charset="-120"/>
+              <a:rPr b="1" sz="1000">
+                <a:solidFill>
+                  <a:srgbClr val="0FA3A8"/>
+                </a:solidFill>
+                <a:latin typeface="Microsoft YaHei"/>
+                <a:ea typeface="Microsoft YaHei"/>
               </a:rPr>
               <a:t>07</a:t>
+            </a:r>
+            <a:r>
+              <a:rPr sz="900">
+                <a:solidFill>
+                  <a:srgbClr val="9FB8C8"/>
+                </a:solidFill>
+                <a:latin typeface="Microsoft YaHei"/>
+                <a:ea typeface="Microsoft YaHei"/>
+              </a:rPr>
+              <a:t> / 18</a:t>
             </a:r>
             <a:endParaRPr lang="en-US" sz="1000" dirty="0"/>
           </a:p>
@@ -19571,6 +20614,50 @@
               <a:t>站在 KVMem 的肩膀上 · 异步页流水</a:t>
             </a:r>
             <a:endParaRPr lang="en-US" sz="900" dirty="0"/>
+          </a:p>
+        </p:txBody>
+      </p:sp>
+      <p:sp>
+        <p:nvSpPr>
+          <p:cNvPr id="348" name="Rectangle 347"/>
+          <p:cNvSpPr/>
+          <p:nvPr/>
+        </p:nvSpPr>
+        <p:spPr>
+          <a:xfrm>
+            <a:off x="457200" y="4711700"/>
+            <a:ext cx="8547100" cy="9525"/>
+          </a:xfrm>
+          <a:prstGeom prst="rect">
+            <a:avLst/>
+          </a:prstGeom>
+          <a:solidFill>
+            <a:srgbClr val="D8E3EA"/>
+          </a:solidFill>
+          <a:ln>
+            <a:noFill/>
+          </a:ln>
+          <a:effectLst/>
+        </p:spPr>
+        <p:style>
+          <a:lnRef idx="1">
+            <a:schemeClr val="accent1"/>
+          </a:lnRef>
+          <a:fillRef idx="3">
+            <a:schemeClr val="accent1"/>
+          </a:fillRef>
+          <a:effectRef idx="2">
+            <a:schemeClr val="accent1"/>
+          </a:effectRef>
+          <a:fontRef idx="minor">
+            <a:schemeClr val="lt1"/>
+          </a:fontRef>
+        </p:style>
+        <p:txBody>
+          <a:bodyPr rtlCol="0" anchor="ctr"/>
+          <a:lstStyle/>
+          <a:p>
+            <a:pPr algn="ctr"/>
           </a:p>
         </p:txBody>
       </p:sp>
@@ -20290,32 +21377,41 @@
         </p:nvSpPr>
         <p:spPr>
           <a:xfrm>
-            <a:off x="8549640" y="4826000"/>
-            <a:ext cx="457200" cy="274320"/>
-          </a:xfrm>
-          <a:prstGeom prst="rect">
-            <a:avLst/>
-          </a:prstGeom>
-          <a:noFill/>
-          <a:ln/>
-        </p:spPr>
-        <p:txBody>
-          <a:bodyPr wrap="square" lIns="0" tIns="0" rIns="0" bIns="0" rtlCol="0" anchor="ctr"/>
+            <a:off x="7874000" y="4826000"/>
+            <a:ext cx="1130300" cy="274320"/>
+          </a:xfrm>
+          <a:prstGeom prst="rect">
+            <a:avLst/>
+          </a:prstGeom>
+          <a:noFill/>
+          <a:ln/>
+        </p:spPr>
+        <p:txBody>
+          <a:bodyPr wrap="none" lIns="0" tIns="0" rIns="0" bIns="0" rtlCol="0" anchor="ctr"/>
           <a:lstStyle/>
           <a:p>
             <a:pPr marL="0" indent="0" algn="r">
               <a:buNone/>
             </a:pPr>
             <a:r>
-              <a:rPr lang="en-US" sz="1000" dirty="0">
-                <a:solidFill>
-                  <a:srgbClr val="6B7C8A"/>
-                </a:solidFill>
-                <a:latin typeface="Microsoft YaHei" pitchFamily="34" charset="0"/>
-                <a:ea typeface="Microsoft YaHei" pitchFamily="34" charset="-122"/>
-                <a:cs typeface="Microsoft YaHei" pitchFamily="34" charset="-120"/>
+              <a:rPr b="1" sz="1000">
+                <a:solidFill>
+                  <a:srgbClr val="0FA3A8"/>
+                </a:solidFill>
+                <a:latin typeface="Microsoft YaHei"/>
+                <a:ea typeface="Microsoft YaHei"/>
               </a:rPr>
               <a:t>08</a:t>
+            </a:r>
+            <a:r>
+              <a:rPr sz="900">
+                <a:solidFill>
+                  <a:srgbClr val="9FB8C8"/>
+                </a:solidFill>
+                <a:latin typeface="Microsoft YaHei"/>
+                <a:ea typeface="Microsoft YaHei"/>
+              </a:rPr>
+              <a:t> / 18</a:t>
             </a:r>
             <a:endParaRPr lang="en-US" sz="1000" dirty="0"/>
           </a:p>
@@ -20357,6 +21453,50 @@
               <a:t>站在 KVMem 的肩膀上 · 异步页流水</a:t>
             </a:r>
             <a:endParaRPr lang="en-US" sz="900" dirty="0"/>
+          </a:p>
+        </p:txBody>
+      </p:sp>
+      <p:sp>
+        <p:nvSpPr>
+          <p:cNvPr id="370" name="Rectangle 369"/>
+          <p:cNvSpPr/>
+          <p:nvPr/>
+        </p:nvSpPr>
+        <p:spPr>
+          <a:xfrm>
+            <a:off x="457200" y="4711700"/>
+            <a:ext cx="8547100" cy="9525"/>
+          </a:xfrm>
+          <a:prstGeom prst="rect">
+            <a:avLst/>
+          </a:prstGeom>
+          <a:solidFill>
+            <a:srgbClr val="D8E3EA"/>
+          </a:solidFill>
+          <a:ln>
+            <a:noFill/>
+          </a:ln>
+          <a:effectLst/>
+        </p:spPr>
+        <p:style>
+          <a:lnRef idx="1">
+            <a:schemeClr val="accent1"/>
+          </a:lnRef>
+          <a:fillRef idx="3">
+            <a:schemeClr val="accent1"/>
+          </a:fillRef>
+          <a:effectRef idx="2">
+            <a:schemeClr val="accent1"/>
+          </a:effectRef>
+          <a:fontRef idx="minor">
+            <a:schemeClr val="lt1"/>
+          </a:fontRef>
+        </p:style>
+        <p:txBody>
+          <a:bodyPr rtlCol="0" anchor="ctr"/>
+          <a:lstStyle/>
+          <a:p>
+            <a:pPr algn="ctr"/>
           </a:p>
         </p:txBody>
       </p:sp>
@@ -20841,32 +21981,41 @@
         </p:nvSpPr>
         <p:spPr>
           <a:xfrm>
-            <a:off x="8549640" y="4826000"/>
-            <a:ext cx="457200" cy="274320"/>
-          </a:xfrm>
-          <a:prstGeom prst="rect">
-            <a:avLst/>
-          </a:prstGeom>
-          <a:noFill/>
-          <a:ln/>
-        </p:spPr>
-        <p:txBody>
-          <a:bodyPr wrap="square" lIns="0" tIns="0" rIns="0" bIns="0" rtlCol="0" anchor="ctr"/>
+            <a:off x="7874000" y="4826000"/>
+            <a:ext cx="1130300" cy="274320"/>
+          </a:xfrm>
+          <a:prstGeom prst="rect">
+            <a:avLst/>
+          </a:prstGeom>
+          <a:noFill/>
+          <a:ln/>
+        </p:spPr>
+        <p:txBody>
+          <a:bodyPr wrap="none" lIns="0" tIns="0" rIns="0" bIns="0" rtlCol="0" anchor="ctr"/>
           <a:lstStyle/>
           <a:p>
             <a:pPr marL="0" indent="0" algn="r">
               <a:buNone/>
             </a:pPr>
             <a:r>
-              <a:rPr lang="en-US" sz="1000" dirty="0">
-                <a:solidFill>
-                  <a:srgbClr val="6B7C8A"/>
-                </a:solidFill>
-                <a:latin typeface="Microsoft YaHei" pitchFamily="34" charset="0"/>
-                <a:ea typeface="Microsoft YaHei" pitchFamily="34" charset="-122"/>
-                <a:cs typeface="Microsoft YaHei" pitchFamily="34" charset="-120"/>
+              <a:rPr b="1" sz="1000">
+                <a:solidFill>
+                  <a:srgbClr val="0FA3A8"/>
+                </a:solidFill>
+                <a:latin typeface="Microsoft YaHei"/>
+                <a:ea typeface="Microsoft YaHei"/>
               </a:rPr>
               <a:t>09</a:t>
+            </a:r>
+            <a:r>
+              <a:rPr sz="900">
+                <a:solidFill>
+                  <a:srgbClr val="9FB8C8"/>
+                </a:solidFill>
+                <a:latin typeface="Microsoft YaHei"/>
+                <a:ea typeface="Microsoft YaHei"/>
+              </a:rPr>
+              <a:t> / 18</a:t>
             </a:r>
             <a:endParaRPr lang="en-US" sz="1000" dirty="0"/>
           </a:p>
@@ -20908,6 +22057,50 @@
               <a:t>站在 KVMem 的肩膀上 · 异步页流水</a:t>
             </a:r>
             <a:endParaRPr lang="en-US" sz="900" dirty="0"/>
+          </a:p>
+        </p:txBody>
+      </p:sp>
+      <p:sp>
+        <p:nvSpPr>
+          <p:cNvPr id="383" name="Rectangle 382"/>
+          <p:cNvSpPr/>
+          <p:nvPr/>
+        </p:nvSpPr>
+        <p:spPr>
+          <a:xfrm>
+            <a:off x="457200" y="4711700"/>
+            <a:ext cx="8547100" cy="9525"/>
+          </a:xfrm>
+          <a:prstGeom prst="rect">
+            <a:avLst/>
+          </a:prstGeom>
+          <a:solidFill>
+            <a:srgbClr val="D8E3EA"/>
+          </a:solidFill>
+          <a:ln>
+            <a:noFill/>
+          </a:ln>
+          <a:effectLst/>
+        </p:spPr>
+        <p:style>
+          <a:lnRef idx="1">
+            <a:schemeClr val="accent1"/>
+          </a:lnRef>
+          <a:fillRef idx="3">
+            <a:schemeClr val="accent1"/>
+          </a:fillRef>
+          <a:effectRef idx="2">
+            <a:schemeClr val="accent1"/>
+          </a:effectRef>
+          <a:fontRef idx="minor">
+            <a:schemeClr val="lt1"/>
+          </a:fontRef>
+        </p:style>
+        <p:txBody>
+          <a:bodyPr rtlCol="0" anchor="ctr"/>
+          <a:lstStyle/>
+          <a:p>
+            <a:pPr algn="ctr"/>
           </a:p>
         </p:txBody>
       </p:sp>

--- a/docs/异步页流水-技术说明-美化版.pptx
+++ b/docs/异步页流水-技术说明-美化版.pptx
@@ -2373,138 +2373,6 @@
       </p:sp>
       <p:sp>
         <p:nvSpPr>
-          <p:cNvPr id="19" name="Oval 18"/>
-          <p:cNvSpPr/>
-          <p:nvPr/>
-        </p:nvSpPr>
-        <p:spPr>
-          <a:xfrm>
-            <a:off x="8128000" y="2794000"/>
-            <a:ext cx="4064000" cy="4064000"/>
-          </a:xfrm>
-          <a:prstGeom prst="ellipse">
-            <a:avLst/>
-          </a:prstGeom>
-          <a:noFill/>
-          <a:ln w="12700">
-            <a:solidFill>
-              <a:srgbClr val="2A6B8F"/>
-            </a:solidFill>
-          </a:ln>
-          <a:effectLst/>
-        </p:spPr>
-        <p:style>
-          <a:lnRef idx="1">
-            <a:schemeClr val="accent1"/>
-          </a:lnRef>
-          <a:fillRef idx="3">
-            <a:schemeClr val="accent1"/>
-          </a:fillRef>
-          <a:effectRef idx="2">
-            <a:schemeClr val="accent1"/>
-          </a:effectRef>
-          <a:fontRef idx="minor">
-            <a:schemeClr val="lt1"/>
-          </a:fontRef>
-        </p:style>
-        <p:txBody>
-          <a:bodyPr rtlCol="0" anchor="ctr"/>
-          <a:lstStyle/>
-          <a:p>
-            <a:pPr algn="ctr"/>
-          </a:p>
-        </p:txBody>
-      </p:sp>
-      <p:sp>
-        <p:nvSpPr>
-          <p:cNvPr id="18" name="Oval 17"/>
-          <p:cNvSpPr/>
-          <p:nvPr/>
-        </p:nvSpPr>
-        <p:spPr>
-          <a:xfrm>
-            <a:off x="8128000" y="-2286000"/>
-            <a:ext cx="3048000" cy="3048000"/>
-          </a:xfrm>
-          <a:prstGeom prst="ellipse">
-            <a:avLst/>
-          </a:prstGeom>
-          <a:noFill/>
-          <a:ln w="12700">
-            <a:solidFill>
-              <a:srgbClr val="2A6B8F"/>
-            </a:solidFill>
-          </a:ln>
-          <a:effectLst/>
-        </p:spPr>
-        <p:style>
-          <a:lnRef idx="1">
-            <a:schemeClr val="accent1"/>
-          </a:lnRef>
-          <a:fillRef idx="3">
-            <a:schemeClr val="accent1"/>
-          </a:fillRef>
-          <a:effectRef idx="2">
-            <a:schemeClr val="accent1"/>
-          </a:effectRef>
-          <a:fontRef idx="minor">
-            <a:schemeClr val="lt1"/>
-          </a:fontRef>
-        </p:style>
-        <p:txBody>
-          <a:bodyPr rtlCol="0" anchor="ctr"/>
-          <a:lstStyle/>
-          <a:p>
-            <a:pPr algn="ctr"/>
-          </a:p>
-        </p:txBody>
-      </p:sp>
-      <p:sp>
-        <p:nvSpPr>
-          <p:cNvPr id="17" name="Oval 16"/>
-          <p:cNvSpPr/>
-          <p:nvPr/>
-        </p:nvSpPr>
-        <p:spPr>
-          <a:xfrm>
-            <a:off x="6604000" y="-2667000"/>
-            <a:ext cx="4826000" cy="4826000"/>
-          </a:xfrm>
-          <a:prstGeom prst="ellipse">
-            <a:avLst/>
-          </a:prstGeom>
-          <a:noFill/>
-          <a:ln w="12700">
-            <a:solidFill>
-              <a:srgbClr val="2A6B8F"/>
-            </a:solidFill>
-          </a:ln>
-          <a:effectLst/>
-        </p:spPr>
-        <p:style>
-          <a:lnRef idx="1">
-            <a:schemeClr val="accent1"/>
-          </a:lnRef>
-          <a:fillRef idx="3">
-            <a:schemeClr val="accent1"/>
-          </a:fillRef>
-          <a:effectRef idx="2">
-            <a:schemeClr val="accent1"/>
-          </a:effectRef>
-          <a:fontRef idx="minor">
-            <a:schemeClr val="lt1"/>
-          </a:fontRef>
-        </p:style>
-        <p:txBody>
-          <a:bodyPr rtlCol="0" anchor="ctr"/>
-          <a:lstStyle/>
-          <a:p>
-            <a:pPr algn="ctr"/>
-          </a:p>
-        </p:txBody>
-      </p:sp>
-      <p:sp>
-        <p:nvSpPr>
           <p:cNvPr id="3" name="Shape 1"/>
           <p:cNvSpPr/>
           <p:nvPr/>
@@ -2520,7 +2388,7 @@
             </a:avLst>
           </a:prstGeom>
           <a:solidFill>
-            <a:srgbClr val="0FA3A8"/>
+            <a:srgbClr val="0E7E86"/>
           </a:solidFill>
           <a:ln/>
         </p:spPr>
@@ -2556,7 +2424,7 @@
             <a:r>
               <a:rPr lang="en-US" sz="1200" b="1" kern="0" spc="300" dirty="0">
                 <a:solidFill>
-                  <a:srgbClr val="0FA3A8"/>
+                  <a:srgbClr val="3FC6D6"/>
                 </a:solidFill>
                 <a:latin typeface="Microsoft YaHei" pitchFamily="34" charset="0"/>
                 <a:ea typeface="Microsoft YaHei" pitchFamily="34" charset="-122"/>
@@ -2656,7 +2524,7 @@
             <a:r>
               <a:rPr lang="en-US" sz="1700" dirty="0">
                 <a:solidFill>
-                  <a:srgbClr val="BFD3DF"/>
+                  <a:srgbClr val="93A7B4"/>
                 </a:solidFill>
                 <a:latin typeface="Microsoft YaHei" pitchFamily="34" charset="0"/>
                 <a:ea typeface="Microsoft YaHei" pitchFamily="34" charset="-122"/>
@@ -2678,7 +2546,7 @@
             <a:r>
               <a:rPr lang="en-US" sz="1700" dirty="0">
                 <a:solidFill>
-                  <a:srgbClr val="BFD3DF"/>
+                  <a:srgbClr val="93A7B4"/>
                 </a:solidFill>
                 <a:latin typeface="Microsoft YaHei" pitchFamily="34" charset="0"/>
                 <a:ea typeface="Microsoft YaHei" pitchFamily="34" charset="-122"/>
@@ -2700,7 +2568,7 @@
             <a:r>
               <a:rPr lang="en-US" sz="1700" dirty="0">
                 <a:solidFill>
-                  <a:srgbClr val="BFD3DF"/>
+                  <a:srgbClr val="93A7B4"/>
                 </a:solidFill>
                 <a:latin typeface="Microsoft YaHei" pitchFamily="34" charset="0"/>
                 <a:ea typeface="Microsoft YaHei" pitchFamily="34" charset="-122"/>
@@ -2739,7 +2607,7 @@
             <a:r>
               <a:rPr lang="en-US" sz="1100" dirty="0">
                 <a:solidFill>
-                  <a:srgbClr val="7E97A8"/>
+                  <a:srgbClr val="A9BECC"/>
                 </a:solidFill>
                 <a:latin typeface="Microsoft YaHei" pitchFamily="34" charset="0"/>
                 <a:ea typeface="Microsoft YaHei" pitchFamily="34" charset="-122"/>
@@ -2750,7 +2618,7 @@
             <a:r>
               <a:rPr lang="en-US" sz="1100" dirty="0">
                 <a:solidFill>
-                  <a:srgbClr val="9FB8C8"/>
+                  <a:srgbClr val="A9BECC"/>
                 </a:solidFill>
                 <a:latin typeface="Microsoft YaHei" pitchFamily="34" charset="0"/>
                 <a:ea typeface="Microsoft YaHei" pitchFamily="34" charset="-122"/>
@@ -2792,7 +2660,11 @@
           <a:solidFill>
             <a:srgbClr val="13314D"/>
           </a:solidFill>
-          <a:ln/>
+          <a:ln w="9525">
+            <a:solidFill>
+              <a:srgbClr val="23465C"/>
+            </a:solidFill>
+          </a:ln>
         </p:spPr>
         <p:txBody>
           <a:bodyPr/>
@@ -2826,7 +2698,7 @@
             <a:r>
               <a:rPr lang="en-US" sz="1500" b="1" dirty="0">
                 <a:solidFill>
-                  <a:srgbClr val="F59E0B"/>
+                  <a:srgbClr val="F5A623"/>
                 </a:solidFill>
                 <a:latin typeface="Microsoft YaHei" pitchFamily="34" charset="0"/>
                 <a:ea typeface="Microsoft YaHei" pitchFamily="34" charset="-122"/>
@@ -2865,7 +2737,7 @@
             <a:r>
               <a:rPr lang="en-US" sz="1050" dirty="0">
                 <a:solidFill>
-                  <a:srgbClr val="9FB8C8"/>
+                  <a:srgbClr val="A9BECC"/>
                 </a:solidFill>
                 <a:latin typeface="Microsoft YaHei" pitchFamily="34" charset="0"/>
                 <a:ea typeface="Microsoft YaHei" pitchFamily="34" charset="-122"/>
@@ -2896,7 +2768,11 @@
           <a:solidFill>
             <a:srgbClr val="13314D"/>
           </a:solidFill>
-          <a:ln/>
+          <a:ln w="9525">
+            <a:solidFill>
+              <a:srgbClr val="23465C"/>
+            </a:solidFill>
+          </a:ln>
         </p:spPr>
         <p:txBody>
           <a:bodyPr/>
@@ -2930,7 +2806,7 @@
             <a:r>
               <a:rPr lang="en-US" sz="1500" b="1" dirty="0">
                 <a:solidFill>
-                  <a:srgbClr val="F59E0B"/>
+                  <a:srgbClr val="F5A623"/>
                 </a:solidFill>
                 <a:latin typeface="Microsoft YaHei" pitchFamily="34" charset="0"/>
                 <a:ea typeface="Microsoft YaHei" pitchFamily="34" charset="-122"/>
@@ -2969,7 +2845,7 @@
             <a:r>
               <a:rPr lang="en-US" sz="1050" dirty="0">
                 <a:solidFill>
-                  <a:srgbClr val="9FB8C8"/>
+                  <a:srgbClr val="A9BECC"/>
                 </a:solidFill>
                 <a:latin typeface="Microsoft YaHei" pitchFamily="34" charset="0"/>
                 <a:ea typeface="Microsoft YaHei" pitchFamily="34" charset="-122"/>
@@ -3000,7 +2876,11 @@
           <a:solidFill>
             <a:srgbClr val="13314D"/>
           </a:solidFill>
-          <a:ln/>
+          <a:ln w="9525">
+            <a:solidFill>
+              <a:srgbClr val="23465C"/>
+            </a:solidFill>
+          </a:ln>
         </p:spPr>
         <p:txBody>
           <a:bodyPr/>
@@ -3034,7 +2914,7 @@
             <a:r>
               <a:rPr lang="en-US" sz="1500" b="1" dirty="0">
                 <a:solidFill>
-                  <a:srgbClr val="F59E0B"/>
+                  <a:srgbClr val="F5A623"/>
                 </a:solidFill>
                 <a:latin typeface="Microsoft YaHei" pitchFamily="34" charset="0"/>
                 <a:ea typeface="Microsoft YaHei" pitchFamily="34" charset="-122"/>
@@ -3073,7 +2953,7 @@
             <a:r>
               <a:rPr lang="en-US" sz="1050" dirty="0">
                 <a:solidFill>
-                  <a:srgbClr val="9FB8C8"/>
+                  <a:srgbClr val="A9BECC"/>
                 </a:solidFill>
                 <a:latin typeface="Microsoft YaHei" pitchFamily="34" charset="0"/>
                 <a:ea typeface="Microsoft YaHei" pitchFamily="34" charset="-122"/>
@@ -3100,6 +2980,7 @@
             <a:avLst/>
           </a:prstGeom>
           <a:noFill/>
+          <a:ln/>
         </p:spPr>
         <p:txBody>
           <a:bodyPr wrap="none">
@@ -3111,7 +2992,7 @@
             <a:r>
               <a:rPr b="1" sz="900">
                 <a:solidFill>
-                  <a:srgbClr val="F59E0B"/>
+                  <a:srgbClr val="F5A623"/>
                 </a:solidFill>
                 <a:latin typeface="Microsoft YaHei"/>
                 <a:ea typeface="Microsoft YaHei"/>
@@ -3136,6 +3017,7 @@
             <a:avLst/>
           </a:prstGeom>
           <a:noFill/>
+          <a:ln/>
         </p:spPr>
         <p:txBody>
           <a:bodyPr wrap="none">
@@ -3147,7 +3029,7 @@
             <a:r>
               <a:rPr b="1" sz="900">
                 <a:solidFill>
-                  <a:srgbClr val="F59E0B"/>
+                  <a:srgbClr val="F5A623"/>
                 </a:solidFill>
                 <a:latin typeface="Microsoft YaHei"/>
                 <a:ea typeface="Microsoft YaHei"/>
@@ -3172,6 +3054,7 @@
             <a:avLst/>
           </a:prstGeom>
           <a:noFill/>
+          <a:ln/>
         </p:spPr>
         <p:txBody>
           <a:bodyPr wrap="none">
@@ -3183,7 +3066,7 @@
             <a:r>
               <a:rPr b="1" sz="900">
                 <a:solidFill>
-                  <a:srgbClr val="F59E0B"/>
+                  <a:srgbClr val="F5A623"/>
                 </a:solidFill>
                 <a:latin typeface="Microsoft YaHei"/>
                 <a:ea typeface="Microsoft YaHei"/>
@@ -3207,7 +3090,7 @@
     <p:bg>
       <p:bgPr>
         <a:solidFill>
-          <a:srgbClr val="F6F9FB"/>
+          <a:srgbClr val="0B1F33"/>
         </a:solidFill>
       </p:bgPr>
     </p:bg>
@@ -3242,7 +3125,7 @@
             </a:avLst>
           </a:prstGeom>
           <a:solidFill>
-            <a:srgbClr val="0FA3A8"/>
+            <a:srgbClr val="0E7E86"/>
           </a:solidFill>
           <a:ln/>
         </p:spPr>
@@ -3278,7 +3161,7 @@
             <a:r>
               <a:rPr lang="en-US" sz="1100" b="1" kern="0" spc="200" dirty="0">
                 <a:solidFill>
-                  <a:srgbClr val="0FA3A8"/>
+                  <a:srgbClr val="3FC6D6"/>
                 </a:solidFill>
                 <a:latin typeface="Microsoft YaHei" pitchFamily="34" charset="0"/>
                 <a:ea typeface="Microsoft YaHei" pitchFamily="34" charset="-122"/>
@@ -3317,7 +3200,7 @@
             <a:r>
               <a:rPr lang="en-US" sz="2400" b="1" dirty="0">
                 <a:solidFill>
-                  <a:srgbClr val="22303C"/>
+                  <a:srgbClr val="FFFFFF"/>
                 </a:solidFill>
                 <a:latin typeface="Microsoft YaHei" pitchFamily="34" charset="0"/>
                 <a:ea typeface="Microsoft YaHei" pitchFamily="34" charset="-122"/>
@@ -3391,7 +3274,7 @@
                   <a:tcPr marL="73152" marR="73152" marT="73152" marB="73152" anchor="ctr">
                     <a:lnL w="6350" cap="flat" cmpd="sng" algn="ctr">
                       <a:solidFill>
-                        <a:srgbClr val="D8E3EA"/>
+                        <a:srgbClr val="23465C"/>
                       </a:solidFill>
                       <a:prstDash val="solid"/>
                       <a:round/>
@@ -3400,7 +3283,7 @@
                     </a:lnL>
                     <a:lnR w="6350" cap="flat" cmpd="sng" algn="ctr">
                       <a:solidFill>
-                        <a:srgbClr val="D8E3EA"/>
+                        <a:srgbClr val="23465C"/>
                       </a:solidFill>
                       <a:prstDash val="solid"/>
                       <a:round/>
@@ -3409,7 +3292,7 @@
                     </a:lnR>
                     <a:lnT w="6350" cap="flat" cmpd="sng" algn="ctr">
                       <a:solidFill>
-                        <a:srgbClr val="D8E3EA"/>
+                        <a:srgbClr val="23465C"/>
                       </a:solidFill>
                       <a:prstDash val="solid"/>
                       <a:round/>
@@ -3418,7 +3301,7 @@
                     </a:lnT>
                     <a:lnB w="6350" cap="flat" cmpd="sng" algn="ctr">
                       <a:solidFill>
-                        <a:srgbClr val="D8E3EA"/>
+                        <a:srgbClr val="23465C"/>
                       </a:solidFill>
                       <a:prstDash val="solid"/>
                       <a:round/>
@@ -3426,7 +3309,7 @@
                       <a:tailEnd type="none" w="med" len="med"/>
                     </a:lnB>
                     <a:solidFill>
-                      <a:srgbClr val="0E4C6E"/>
+                      <a:srgbClr val="1A5F84"/>
                     </a:solidFill>
                   </a:tcPr>
                 </a:tc>
@@ -3459,7 +3342,7 @@
                   <a:tcPr marL="73152" marR="73152" marT="73152" marB="73152" anchor="ctr">
                     <a:lnL w="6350" cap="flat" cmpd="sng" algn="ctr">
                       <a:solidFill>
-                        <a:srgbClr val="D8E3EA"/>
+                        <a:srgbClr val="23465C"/>
                       </a:solidFill>
                       <a:prstDash val="solid"/>
                       <a:round/>
@@ -3468,7 +3351,7 @@
                     </a:lnL>
                     <a:lnR w="6350" cap="flat" cmpd="sng" algn="ctr">
                       <a:solidFill>
-                        <a:srgbClr val="D8E3EA"/>
+                        <a:srgbClr val="23465C"/>
                       </a:solidFill>
                       <a:prstDash val="solid"/>
                       <a:round/>
@@ -3477,7 +3360,7 @@
                     </a:lnR>
                     <a:lnT w="6350" cap="flat" cmpd="sng" algn="ctr">
                       <a:solidFill>
-                        <a:srgbClr val="D8E3EA"/>
+                        <a:srgbClr val="23465C"/>
                       </a:solidFill>
                       <a:prstDash val="solid"/>
                       <a:round/>
@@ -3486,7 +3369,7 @@
                     </a:lnT>
                     <a:lnB w="6350" cap="flat" cmpd="sng" algn="ctr">
                       <a:solidFill>
-                        <a:srgbClr val="D8E3EA"/>
+                        <a:srgbClr val="23465C"/>
                       </a:solidFill>
                       <a:prstDash val="solid"/>
                       <a:round/>
@@ -3494,7 +3377,7 @@
                       <a:tailEnd type="none" w="med" len="med"/>
                     </a:lnB>
                     <a:solidFill>
-                      <a:srgbClr val="0E4C6E"/>
+                      <a:srgbClr val="1A5F84"/>
                     </a:solidFill>
                   </a:tcPr>
                 </a:tc>
@@ -3516,7 +3399,7 @@
                       <a:r>
                         <a:rPr lang="en-US" sz="1100" dirty="0">
                           <a:solidFill>
-                            <a:srgbClr val="22303C"/>
+                            <a:srgbClr val="FFFFFF"/>
                           </a:solidFill>
                           <a:latin typeface="Microsoft YaHei" pitchFamily="34" charset="0"/>
                           <a:ea typeface="Microsoft YaHei" pitchFamily="34" charset="-122"/>
@@ -3534,7 +3417,7 @@
                   <a:tcPr marL="73152" marR="73152" marT="73152" marB="73152" anchor="ctr">
                     <a:lnL w="6350" cap="flat" cmpd="sng" algn="ctr">
                       <a:solidFill>
-                        <a:srgbClr val="D8E3EA"/>
+                        <a:srgbClr val="23465C"/>
                       </a:solidFill>
                       <a:prstDash val="solid"/>
                       <a:round/>
@@ -3543,7 +3426,7 @@
                     </a:lnL>
                     <a:lnR w="6350" cap="flat" cmpd="sng" algn="ctr">
                       <a:solidFill>
-                        <a:srgbClr val="D8E3EA"/>
+                        <a:srgbClr val="23465C"/>
                       </a:solidFill>
                       <a:prstDash val="solid"/>
                       <a:round/>
@@ -3552,7 +3435,7 @@
                     </a:lnR>
                     <a:lnT w="6350" cap="flat" cmpd="sng" algn="ctr">
                       <a:solidFill>
-                        <a:srgbClr val="D8E3EA"/>
+                        <a:srgbClr val="23465C"/>
                       </a:solidFill>
                       <a:prstDash val="solid"/>
                       <a:round/>
@@ -3561,7 +3444,7 @@
                     </a:lnT>
                     <a:lnB w="6350" cap="flat" cmpd="sng" algn="ctr">
                       <a:solidFill>
-                        <a:srgbClr val="D8E3EA"/>
+                        <a:srgbClr val="23465C"/>
                       </a:solidFill>
                       <a:prstDash val="solid"/>
                       <a:round/>
@@ -3569,7 +3452,7 @@
                       <a:tailEnd type="none" w="med" len="med"/>
                     </a:lnB>
                     <a:solidFill>
-                      <a:srgbClr val="FFFFFF"/>
+                      <a:srgbClr val="13314D"/>
                     </a:solidFill>
                   </a:tcPr>
                 </a:tc>
@@ -3584,7 +3467,7 @@
                       <a:r>
                         <a:rPr lang="en-US" sz="1100" dirty="0">
                           <a:solidFill>
-                            <a:srgbClr val="22303C"/>
+                            <a:srgbClr val="FFFFFF"/>
                           </a:solidFill>
                           <a:latin typeface="Microsoft YaHei" pitchFamily="34" charset="0"/>
                           <a:ea typeface="Microsoft YaHei" pitchFamily="34" charset="-122"/>
@@ -3602,7 +3485,7 @@
                   <a:tcPr marL="73152" marR="73152" marT="73152" marB="73152" anchor="ctr">
                     <a:lnL w="6350" cap="flat" cmpd="sng" algn="ctr">
                       <a:solidFill>
-                        <a:srgbClr val="D8E3EA"/>
+                        <a:srgbClr val="23465C"/>
                       </a:solidFill>
                       <a:prstDash val="solid"/>
                       <a:round/>
@@ -3611,7 +3494,7 @@
                     </a:lnL>
                     <a:lnR w="6350" cap="flat" cmpd="sng" algn="ctr">
                       <a:solidFill>
-                        <a:srgbClr val="D8E3EA"/>
+                        <a:srgbClr val="23465C"/>
                       </a:solidFill>
                       <a:prstDash val="solid"/>
                       <a:round/>
@@ -3620,7 +3503,7 @@
                     </a:lnR>
                     <a:lnT w="6350" cap="flat" cmpd="sng" algn="ctr">
                       <a:solidFill>
-                        <a:srgbClr val="D8E3EA"/>
+                        <a:srgbClr val="23465C"/>
                       </a:solidFill>
                       <a:prstDash val="solid"/>
                       <a:round/>
@@ -3629,7 +3512,7 @@
                     </a:lnT>
                     <a:lnB w="6350" cap="flat" cmpd="sng" algn="ctr">
                       <a:solidFill>
-                        <a:srgbClr val="D8E3EA"/>
+                        <a:srgbClr val="23465C"/>
                       </a:solidFill>
                       <a:prstDash val="solid"/>
                       <a:round/>
@@ -3637,7 +3520,7 @@
                       <a:tailEnd type="none" w="med" len="med"/>
                     </a:lnB>
                     <a:solidFill>
-                      <a:srgbClr val="FFFFFF"/>
+                      <a:srgbClr val="13314D"/>
                     </a:solidFill>
                   </a:tcPr>
                 </a:tc>
@@ -3659,7 +3542,7 @@
                       <a:r>
                         <a:rPr lang="en-US" sz="1100" dirty="0">
                           <a:solidFill>
-                            <a:srgbClr val="22303C"/>
+                            <a:srgbClr val="FFFFFF"/>
                           </a:solidFill>
                           <a:latin typeface="Microsoft YaHei" pitchFamily="34" charset="0"/>
                           <a:ea typeface="Microsoft YaHei" pitchFamily="34" charset="-122"/>
@@ -3677,7 +3560,7 @@
                   <a:tcPr marL="73152" marR="73152" marT="73152" marB="73152" anchor="ctr">
                     <a:lnL w="6350" cap="flat" cmpd="sng" algn="ctr">
                       <a:solidFill>
-                        <a:srgbClr val="D8E3EA"/>
+                        <a:srgbClr val="23465C"/>
                       </a:solidFill>
                       <a:prstDash val="solid"/>
                       <a:round/>
@@ -3686,7 +3569,7 @@
                     </a:lnL>
                     <a:lnR w="6350" cap="flat" cmpd="sng" algn="ctr">
                       <a:solidFill>
-                        <a:srgbClr val="D8E3EA"/>
+                        <a:srgbClr val="23465C"/>
                       </a:solidFill>
                       <a:prstDash val="solid"/>
                       <a:round/>
@@ -3695,7 +3578,7 @@
                     </a:lnR>
                     <a:lnT w="6350" cap="flat" cmpd="sng" algn="ctr">
                       <a:solidFill>
-                        <a:srgbClr val="D8E3EA"/>
+                        <a:srgbClr val="23465C"/>
                       </a:solidFill>
                       <a:prstDash val="solid"/>
                       <a:round/>
@@ -3704,7 +3587,7 @@
                     </a:lnT>
                     <a:lnB w="6350" cap="flat" cmpd="sng" algn="ctr">
                       <a:solidFill>
-                        <a:srgbClr val="D8E3EA"/>
+                        <a:srgbClr val="23465C"/>
                       </a:solidFill>
                       <a:prstDash val="solid"/>
                       <a:round/>
@@ -3712,7 +3595,7 @@
                       <a:tailEnd type="none" w="med" len="med"/>
                     </a:lnB>
                     <a:solidFill>
-                      <a:srgbClr val="F6F9FB"/>
+                      <a:srgbClr val="0F2436"/>
                     </a:solidFill>
                   </a:tcPr>
                 </a:tc>
@@ -3727,7 +3610,7 @@
                       <a:r>
                         <a:rPr lang="en-US" sz="1100" dirty="0">
                           <a:solidFill>
-                            <a:srgbClr val="22303C"/>
+                            <a:srgbClr val="FFFFFF"/>
                           </a:solidFill>
                           <a:latin typeface="Microsoft YaHei" pitchFamily="34" charset="0"/>
                           <a:ea typeface="Microsoft YaHei" pitchFamily="34" charset="-122"/>
@@ -3745,7 +3628,7 @@
                   <a:tcPr marL="73152" marR="73152" marT="73152" marB="73152" anchor="ctr">
                     <a:lnL w="6350" cap="flat" cmpd="sng" algn="ctr">
                       <a:solidFill>
-                        <a:srgbClr val="D8E3EA"/>
+                        <a:srgbClr val="23465C"/>
                       </a:solidFill>
                       <a:prstDash val="solid"/>
                       <a:round/>
@@ -3754,7 +3637,7 @@
                     </a:lnL>
                     <a:lnR w="6350" cap="flat" cmpd="sng" algn="ctr">
                       <a:solidFill>
-                        <a:srgbClr val="D8E3EA"/>
+                        <a:srgbClr val="23465C"/>
                       </a:solidFill>
                       <a:prstDash val="solid"/>
                       <a:round/>
@@ -3763,7 +3646,7 @@
                     </a:lnR>
                     <a:lnT w="6350" cap="flat" cmpd="sng" algn="ctr">
                       <a:solidFill>
-                        <a:srgbClr val="D8E3EA"/>
+                        <a:srgbClr val="23465C"/>
                       </a:solidFill>
                       <a:prstDash val="solid"/>
                       <a:round/>
@@ -3772,7 +3655,7 @@
                     </a:lnT>
                     <a:lnB w="6350" cap="flat" cmpd="sng" algn="ctr">
                       <a:solidFill>
-                        <a:srgbClr val="D8E3EA"/>
+                        <a:srgbClr val="23465C"/>
                       </a:solidFill>
                       <a:prstDash val="solid"/>
                       <a:round/>
@@ -3780,7 +3663,7 @@
                       <a:tailEnd type="none" w="med" len="med"/>
                     </a:lnB>
                     <a:solidFill>
-                      <a:srgbClr val="F6F9FB"/>
+                      <a:srgbClr val="0F2436"/>
                     </a:solidFill>
                   </a:tcPr>
                 </a:tc>
@@ -3802,7 +3685,7 @@
                       <a:r>
                         <a:rPr lang="en-US" sz="1100" dirty="0">
                           <a:solidFill>
-                            <a:srgbClr val="22303C"/>
+                            <a:srgbClr val="FFFFFF"/>
                           </a:solidFill>
                           <a:latin typeface="Microsoft YaHei" pitchFamily="34" charset="0"/>
                           <a:ea typeface="Microsoft YaHei" pitchFamily="34" charset="-122"/>
@@ -3820,7 +3703,7 @@
                   <a:tcPr marL="73152" marR="73152" marT="73152" marB="73152" anchor="ctr">
                     <a:lnL w="6350" cap="flat" cmpd="sng" algn="ctr">
                       <a:solidFill>
-                        <a:srgbClr val="D8E3EA"/>
+                        <a:srgbClr val="23465C"/>
                       </a:solidFill>
                       <a:prstDash val="solid"/>
                       <a:round/>
@@ -3829,7 +3712,7 @@
                     </a:lnL>
                     <a:lnR w="6350" cap="flat" cmpd="sng" algn="ctr">
                       <a:solidFill>
-                        <a:srgbClr val="D8E3EA"/>
+                        <a:srgbClr val="23465C"/>
                       </a:solidFill>
                       <a:prstDash val="solid"/>
                       <a:round/>
@@ -3838,7 +3721,7 @@
                     </a:lnR>
                     <a:lnT w="6350" cap="flat" cmpd="sng" algn="ctr">
                       <a:solidFill>
-                        <a:srgbClr val="D8E3EA"/>
+                        <a:srgbClr val="23465C"/>
                       </a:solidFill>
                       <a:prstDash val="solid"/>
                       <a:round/>
@@ -3847,7 +3730,7 @@
                     </a:lnT>
                     <a:lnB w="6350" cap="flat" cmpd="sng" algn="ctr">
                       <a:solidFill>
-                        <a:srgbClr val="D8E3EA"/>
+                        <a:srgbClr val="23465C"/>
                       </a:solidFill>
                       <a:prstDash val="solid"/>
                       <a:round/>
@@ -3855,7 +3738,7 @@
                       <a:tailEnd type="none" w="med" len="med"/>
                     </a:lnB>
                     <a:solidFill>
-                      <a:srgbClr val="FFFFFF"/>
+                      <a:srgbClr val="13314D"/>
                     </a:solidFill>
                   </a:tcPr>
                 </a:tc>
@@ -3870,7 +3753,7 @@
                       <a:r>
                         <a:rPr lang="en-US" sz="1100" dirty="0">
                           <a:solidFill>
-                            <a:srgbClr val="22303C"/>
+                            <a:srgbClr val="FFFFFF"/>
                           </a:solidFill>
                           <a:latin typeface="Microsoft YaHei" pitchFamily="34" charset="0"/>
                           <a:ea typeface="Microsoft YaHei" pitchFamily="34" charset="-122"/>
@@ -3888,7 +3771,7 @@
                   <a:tcPr marL="73152" marR="73152" marT="73152" marB="73152" anchor="ctr">
                     <a:lnL w="6350" cap="flat" cmpd="sng" algn="ctr">
                       <a:solidFill>
-                        <a:srgbClr val="D8E3EA"/>
+                        <a:srgbClr val="23465C"/>
                       </a:solidFill>
                       <a:prstDash val="solid"/>
                       <a:round/>
@@ -3897,7 +3780,7 @@
                     </a:lnL>
                     <a:lnR w="6350" cap="flat" cmpd="sng" algn="ctr">
                       <a:solidFill>
-                        <a:srgbClr val="D8E3EA"/>
+                        <a:srgbClr val="23465C"/>
                       </a:solidFill>
                       <a:prstDash val="solid"/>
                       <a:round/>
@@ -3906,7 +3789,7 @@
                     </a:lnR>
                     <a:lnT w="6350" cap="flat" cmpd="sng" algn="ctr">
                       <a:solidFill>
-                        <a:srgbClr val="D8E3EA"/>
+                        <a:srgbClr val="23465C"/>
                       </a:solidFill>
                       <a:prstDash val="solid"/>
                       <a:round/>
@@ -3915,7 +3798,7 @@
                     </a:lnT>
                     <a:lnB w="6350" cap="flat" cmpd="sng" algn="ctr">
                       <a:solidFill>
-                        <a:srgbClr val="D8E3EA"/>
+                        <a:srgbClr val="23465C"/>
                       </a:solidFill>
                       <a:prstDash val="solid"/>
                       <a:round/>
@@ -3923,7 +3806,7 @@
                       <a:tailEnd type="none" w="med" len="med"/>
                     </a:lnB>
                     <a:solidFill>
-                      <a:srgbClr val="FFFFFF"/>
+                      <a:srgbClr val="13314D"/>
                     </a:solidFill>
                   </a:tcPr>
                 </a:tc>
@@ -3945,7 +3828,7 @@
                       <a:r>
                         <a:rPr lang="en-US" sz="1100" dirty="0">
                           <a:solidFill>
-                            <a:srgbClr val="22303C"/>
+                            <a:srgbClr val="FFFFFF"/>
                           </a:solidFill>
                           <a:latin typeface="Microsoft YaHei" pitchFamily="34" charset="0"/>
                           <a:ea typeface="Microsoft YaHei" pitchFamily="34" charset="-122"/>
@@ -3963,7 +3846,7 @@
                   <a:tcPr marL="73152" marR="73152" marT="73152" marB="73152" anchor="ctr">
                     <a:lnL w="6350" cap="flat" cmpd="sng" algn="ctr">
                       <a:solidFill>
-                        <a:srgbClr val="D8E3EA"/>
+                        <a:srgbClr val="23465C"/>
                       </a:solidFill>
                       <a:prstDash val="solid"/>
                       <a:round/>
@@ -3972,7 +3855,7 @@
                     </a:lnL>
                     <a:lnR w="6350" cap="flat" cmpd="sng" algn="ctr">
                       <a:solidFill>
-                        <a:srgbClr val="D8E3EA"/>
+                        <a:srgbClr val="23465C"/>
                       </a:solidFill>
                       <a:prstDash val="solid"/>
                       <a:round/>
@@ -3981,7 +3864,7 @@
                     </a:lnR>
                     <a:lnT w="6350" cap="flat" cmpd="sng" algn="ctr">
                       <a:solidFill>
-                        <a:srgbClr val="D8E3EA"/>
+                        <a:srgbClr val="23465C"/>
                       </a:solidFill>
                       <a:prstDash val="solid"/>
                       <a:round/>
@@ -3990,7 +3873,7 @@
                     </a:lnT>
                     <a:lnB w="6350" cap="flat" cmpd="sng" algn="ctr">
                       <a:solidFill>
-                        <a:srgbClr val="D8E3EA"/>
+                        <a:srgbClr val="23465C"/>
                       </a:solidFill>
                       <a:prstDash val="solid"/>
                       <a:round/>
@@ -3998,7 +3881,7 @@
                       <a:tailEnd type="none" w="med" len="med"/>
                     </a:lnB>
                     <a:solidFill>
-                      <a:srgbClr val="F6F9FB"/>
+                      <a:srgbClr val="0F2436"/>
                     </a:solidFill>
                   </a:tcPr>
                 </a:tc>
@@ -4013,7 +3896,7 @@
                       <a:r>
                         <a:rPr lang="en-US" sz="1100" dirty="0">
                           <a:solidFill>
-                            <a:srgbClr val="22303C"/>
+                            <a:srgbClr val="FFFFFF"/>
                           </a:solidFill>
                           <a:latin typeface="Microsoft YaHei" pitchFamily="34" charset="0"/>
                           <a:ea typeface="Microsoft YaHei" pitchFamily="34" charset="-122"/>
@@ -4031,7 +3914,7 @@
                   <a:tcPr marL="73152" marR="73152" marT="73152" marB="73152" anchor="ctr">
                     <a:lnL w="6350" cap="flat" cmpd="sng" algn="ctr">
                       <a:solidFill>
-                        <a:srgbClr val="D8E3EA"/>
+                        <a:srgbClr val="23465C"/>
                       </a:solidFill>
                       <a:prstDash val="solid"/>
                       <a:round/>
@@ -4040,7 +3923,7 @@
                     </a:lnL>
                     <a:lnR w="6350" cap="flat" cmpd="sng" algn="ctr">
                       <a:solidFill>
-                        <a:srgbClr val="D8E3EA"/>
+                        <a:srgbClr val="23465C"/>
                       </a:solidFill>
                       <a:prstDash val="solid"/>
                       <a:round/>
@@ -4049,7 +3932,7 @@
                     </a:lnR>
                     <a:lnT w="6350" cap="flat" cmpd="sng" algn="ctr">
                       <a:solidFill>
-                        <a:srgbClr val="D8E3EA"/>
+                        <a:srgbClr val="23465C"/>
                       </a:solidFill>
                       <a:prstDash val="solid"/>
                       <a:round/>
@@ -4058,7 +3941,7 @@
                     </a:lnT>
                     <a:lnB w="6350" cap="flat" cmpd="sng" algn="ctr">
                       <a:solidFill>
-                        <a:srgbClr val="D8E3EA"/>
+                        <a:srgbClr val="23465C"/>
                       </a:solidFill>
                       <a:prstDash val="solid"/>
                       <a:round/>
@@ -4066,7 +3949,7 @@
                       <a:tailEnd type="none" w="med" len="med"/>
                     </a:lnB>
                     <a:solidFill>
-                      <a:srgbClr val="F6F9FB"/>
+                      <a:srgbClr val="0F2436"/>
                     </a:solidFill>
                   </a:tcPr>
                 </a:tc>
@@ -4088,7 +3971,7 @@
                       <a:r>
                         <a:rPr lang="en-US" sz="1100" dirty="0">
                           <a:solidFill>
-                            <a:srgbClr val="22303C"/>
+                            <a:srgbClr val="FFFFFF"/>
                           </a:solidFill>
                           <a:latin typeface="Microsoft YaHei" pitchFamily="34" charset="0"/>
                           <a:ea typeface="Microsoft YaHei" pitchFamily="34" charset="-122"/>
@@ -4106,7 +3989,7 @@
                   <a:tcPr marL="73152" marR="73152" marT="73152" marB="73152" anchor="ctr">
                     <a:lnL w="6350" cap="flat" cmpd="sng" algn="ctr">
                       <a:solidFill>
-                        <a:srgbClr val="D8E3EA"/>
+                        <a:srgbClr val="23465C"/>
                       </a:solidFill>
                       <a:prstDash val="solid"/>
                       <a:round/>
@@ -4115,7 +3998,7 @@
                     </a:lnL>
                     <a:lnR w="6350" cap="flat" cmpd="sng" algn="ctr">
                       <a:solidFill>
-                        <a:srgbClr val="D8E3EA"/>
+                        <a:srgbClr val="23465C"/>
                       </a:solidFill>
                       <a:prstDash val="solid"/>
                       <a:round/>
@@ -4124,7 +4007,7 @@
                     </a:lnR>
                     <a:lnT w="6350" cap="flat" cmpd="sng" algn="ctr">
                       <a:solidFill>
-                        <a:srgbClr val="D8E3EA"/>
+                        <a:srgbClr val="23465C"/>
                       </a:solidFill>
                       <a:prstDash val="solid"/>
                       <a:round/>
@@ -4133,7 +4016,7 @@
                     </a:lnT>
                     <a:lnB w="6350" cap="flat" cmpd="sng" algn="ctr">
                       <a:solidFill>
-                        <a:srgbClr val="D8E3EA"/>
+                        <a:srgbClr val="23465C"/>
                       </a:solidFill>
                       <a:prstDash val="solid"/>
                       <a:round/>
@@ -4141,7 +4024,7 @@
                       <a:tailEnd type="none" w="med" len="med"/>
                     </a:lnB>
                     <a:solidFill>
-                      <a:srgbClr val="FFFFFF"/>
+                      <a:srgbClr val="13314D"/>
                     </a:solidFill>
                   </a:tcPr>
                 </a:tc>
@@ -4156,7 +4039,7 @@
                       <a:r>
                         <a:rPr lang="en-US" sz="1100" dirty="0">
                           <a:solidFill>
-                            <a:srgbClr val="22303C"/>
+                            <a:srgbClr val="FFFFFF"/>
                           </a:solidFill>
                           <a:latin typeface="Microsoft YaHei" pitchFamily="34" charset="0"/>
                           <a:ea typeface="Microsoft YaHei" pitchFamily="34" charset="-122"/>
@@ -4174,7 +4057,7 @@
                   <a:tcPr marL="73152" marR="73152" marT="73152" marB="73152" anchor="ctr">
                     <a:lnL w="6350" cap="flat" cmpd="sng" algn="ctr">
                       <a:solidFill>
-                        <a:srgbClr val="D8E3EA"/>
+                        <a:srgbClr val="23465C"/>
                       </a:solidFill>
                       <a:prstDash val="solid"/>
                       <a:round/>
@@ -4183,7 +4066,7 @@
                     </a:lnL>
                     <a:lnR w="6350" cap="flat" cmpd="sng" algn="ctr">
                       <a:solidFill>
-                        <a:srgbClr val="D8E3EA"/>
+                        <a:srgbClr val="23465C"/>
                       </a:solidFill>
                       <a:prstDash val="solid"/>
                       <a:round/>
@@ -4192,7 +4075,7 @@
                     </a:lnR>
                     <a:lnT w="6350" cap="flat" cmpd="sng" algn="ctr">
                       <a:solidFill>
-                        <a:srgbClr val="D8E3EA"/>
+                        <a:srgbClr val="23465C"/>
                       </a:solidFill>
                       <a:prstDash val="solid"/>
                       <a:round/>
@@ -4201,7 +4084,7 @@
                     </a:lnT>
                     <a:lnB w="6350" cap="flat" cmpd="sng" algn="ctr">
                       <a:solidFill>
-                        <a:srgbClr val="D8E3EA"/>
+                        <a:srgbClr val="23465C"/>
                       </a:solidFill>
                       <a:prstDash val="solid"/>
                       <a:round/>
@@ -4209,7 +4092,7 @@
                       <a:tailEnd type="none" w="med" len="med"/>
                     </a:lnB>
                     <a:solidFill>
-                      <a:srgbClr val="FFFFFF"/>
+                      <a:srgbClr val="13314D"/>
                     </a:solidFill>
                   </a:tcPr>
                 </a:tc>
@@ -4231,7 +4114,7 @@
                       <a:r>
                         <a:rPr lang="en-US" sz="1100" dirty="0">
                           <a:solidFill>
-                            <a:srgbClr val="22303C"/>
+                            <a:srgbClr val="FFFFFF"/>
                           </a:solidFill>
                           <a:latin typeface="Microsoft YaHei" pitchFamily="34" charset="0"/>
                           <a:ea typeface="Microsoft YaHei" pitchFamily="34" charset="-122"/>
@@ -4249,7 +4132,7 @@
                   <a:tcPr marL="73152" marR="73152" marT="73152" marB="73152" anchor="ctr">
                     <a:lnL w="6350" cap="flat" cmpd="sng" algn="ctr">
                       <a:solidFill>
-                        <a:srgbClr val="D8E3EA"/>
+                        <a:srgbClr val="23465C"/>
                       </a:solidFill>
                       <a:prstDash val="solid"/>
                       <a:round/>
@@ -4258,7 +4141,7 @@
                     </a:lnL>
                     <a:lnR w="6350" cap="flat" cmpd="sng" algn="ctr">
                       <a:solidFill>
-                        <a:srgbClr val="D8E3EA"/>
+                        <a:srgbClr val="23465C"/>
                       </a:solidFill>
                       <a:prstDash val="solid"/>
                       <a:round/>
@@ -4267,7 +4150,7 @@
                     </a:lnR>
                     <a:lnT w="6350" cap="flat" cmpd="sng" algn="ctr">
                       <a:solidFill>
-                        <a:srgbClr val="D8E3EA"/>
+                        <a:srgbClr val="23465C"/>
                       </a:solidFill>
                       <a:prstDash val="solid"/>
                       <a:round/>
@@ -4276,7 +4159,7 @@
                     </a:lnT>
                     <a:lnB w="6350" cap="flat" cmpd="sng" algn="ctr">
                       <a:solidFill>
-                        <a:srgbClr val="D8E3EA"/>
+                        <a:srgbClr val="23465C"/>
                       </a:solidFill>
                       <a:prstDash val="solid"/>
                       <a:round/>
@@ -4284,7 +4167,7 @@
                       <a:tailEnd type="none" w="med" len="med"/>
                     </a:lnB>
                     <a:solidFill>
-                      <a:srgbClr val="F6F9FB"/>
+                      <a:srgbClr val="0F2436"/>
                     </a:solidFill>
                   </a:tcPr>
                 </a:tc>
@@ -4299,7 +4182,7 @@
                       <a:r>
                         <a:rPr lang="en-US" sz="1100" dirty="0">
                           <a:solidFill>
-                            <a:srgbClr val="22303C"/>
+                            <a:srgbClr val="FFFFFF"/>
                           </a:solidFill>
                           <a:latin typeface="Microsoft YaHei" pitchFamily="34" charset="0"/>
                           <a:ea typeface="Microsoft YaHei" pitchFamily="34" charset="-122"/>
@@ -4317,7 +4200,7 @@
                   <a:tcPr marL="73152" marR="73152" marT="73152" marB="73152" anchor="ctr">
                     <a:lnL w="6350" cap="flat" cmpd="sng" algn="ctr">
                       <a:solidFill>
-                        <a:srgbClr val="D8E3EA"/>
+                        <a:srgbClr val="23465C"/>
                       </a:solidFill>
                       <a:prstDash val="solid"/>
                       <a:round/>
@@ -4326,7 +4209,7 @@
                     </a:lnL>
                     <a:lnR w="6350" cap="flat" cmpd="sng" algn="ctr">
                       <a:solidFill>
-                        <a:srgbClr val="D8E3EA"/>
+                        <a:srgbClr val="23465C"/>
                       </a:solidFill>
                       <a:prstDash val="solid"/>
                       <a:round/>
@@ -4335,7 +4218,7 @@
                     </a:lnR>
                     <a:lnT w="6350" cap="flat" cmpd="sng" algn="ctr">
                       <a:solidFill>
-                        <a:srgbClr val="D8E3EA"/>
+                        <a:srgbClr val="23465C"/>
                       </a:solidFill>
                       <a:prstDash val="solid"/>
                       <a:round/>
@@ -4344,7 +4227,7 @@
                     </a:lnT>
                     <a:lnB w="6350" cap="flat" cmpd="sng" algn="ctr">
                       <a:solidFill>
-                        <a:srgbClr val="D8E3EA"/>
+                        <a:srgbClr val="23465C"/>
                       </a:solidFill>
                       <a:prstDash val="solid"/>
                       <a:round/>
@@ -4352,7 +4235,7 @@
                       <a:tailEnd type="none" w="med" len="med"/>
                     </a:lnB>
                     <a:solidFill>
-                      <a:srgbClr val="F6F9FB"/>
+                      <a:srgbClr val="0F2436"/>
                     </a:solidFill>
                   </a:tcPr>
                 </a:tc>
@@ -4393,7 +4276,7 @@
             <a:r>
               <a:rPr lang="en-US" sz="1000" dirty="0">
                 <a:solidFill>
-                  <a:srgbClr val="6B7C8A"/>
+                  <a:srgbClr val="A9BECC"/>
                 </a:solidFill>
                 <a:latin typeface="Microsoft YaHei" pitchFamily="34" charset="0"/>
                 <a:ea typeface="Microsoft YaHei" pitchFamily="34" charset="-122"/>
@@ -4432,7 +4315,7 @@
             <a:r>
               <a:rPr lang="en-US" sz="1200" b="1" dirty="0">
                 <a:solidFill>
-                  <a:srgbClr val="0FA3A8"/>
+                  <a:srgbClr val="3FC6D6"/>
                 </a:solidFill>
                 <a:latin typeface="Microsoft YaHei" pitchFamily="34" charset="0"/>
                 <a:ea typeface="Microsoft YaHei" pitchFamily="34" charset="-122"/>
@@ -4471,7 +4354,7 @@
             <a:r>
               <a:rPr b="1" sz="1000">
                 <a:solidFill>
-                  <a:srgbClr val="0FA3A8"/>
+                  <a:srgbClr val="3FC6D6"/>
                 </a:solidFill>
                 <a:latin typeface="Microsoft YaHei"/>
                 <a:ea typeface="Microsoft YaHei"/>
@@ -4481,7 +4364,7 @@
             <a:r>
               <a:rPr sz="900">
                 <a:solidFill>
-                  <a:srgbClr val="9FB8C8"/>
+                  <a:srgbClr val="8FA6B5"/>
                 </a:solidFill>
                 <a:latin typeface="Microsoft YaHei"/>
                 <a:ea typeface="Microsoft YaHei"/>
@@ -4519,7 +4402,7 @@
             <a:r>
               <a:rPr lang="en-US" sz="900" dirty="0">
                 <a:solidFill>
-                  <a:srgbClr val="6B7C8A"/>
+                  <a:srgbClr val="A9BECC"/>
                 </a:solidFill>
                 <a:latin typeface="Microsoft YaHei" pitchFamily="34" charset="0"/>
                 <a:ea typeface="Microsoft YaHei" pitchFamily="34" charset="-122"/>
@@ -4546,7 +4429,7 @@
             <a:avLst/>
           </a:prstGeom>
           <a:solidFill>
-            <a:srgbClr val="D8E3EA"/>
+            <a:srgbClr val="23465C"/>
           </a:solidFill>
           <a:ln>
             <a:noFill/>
@@ -4589,7 +4472,7 @@
     <p:bg>
       <p:bgPr>
         <a:solidFill>
-          <a:srgbClr val="F6F9FB"/>
+          <a:srgbClr val="0B1F33"/>
         </a:solidFill>
       </p:bgPr>
     </p:bg>
@@ -4624,7 +4507,7 @@
             </a:avLst>
           </a:prstGeom>
           <a:solidFill>
-            <a:srgbClr val="0FA3A8"/>
+            <a:srgbClr val="0E7E86"/>
           </a:solidFill>
           <a:ln/>
         </p:spPr>
@@ -4660,7 +4543,7 @@
             <a:r>
               <a:rPr lang="en-US" sz="1100" b="1" kern="0" spc="200" dirty="0">
                 <a:solidFill>
-                  <a:srgbClr val="0FA3A8"/>
+                  <a:srgbClr val="3FC6D6"/>
                 </a:solidFill>
                 <a:latin typeface="Microsoft YaHei" pitchFamily="34" charset="0"/>
                 <a:ea typeface="Microsoft YaHei" pitchFamily="34" charset="-122"/>
@@ -4699,7 +4582,7 @@
             <a:r>
               <a:rPr lang="en-US" sz="2400" b="1" dirty="0">
                 <a:solidFill>
-                  <a:srgbClr val="22303C"/>
+                  <a:srgbClr val="FFFFFF"/>
                 </a:solidFill>
                 <a:latin typeface="Microsoft YaHei" pitchFamily="34" charset="0"/>
                 <a:ea typeface="Microsoft YaHei" pitchFamily="34" charset="-122"/>
@@ -4728,7 +4611,7 @@
             </a:avLst>
           </a:prstGeom>
           <a:solidFill>
-            <a:srgbClr val="C0504D"/>
+            <a:srgbClr val="D06055"/>
           </a:solidFill>
           <a:ln/>
         </p:spPr>
@@ -4793,11 +4676,11 @@
             </a:avLst>
           </a:prstGeom>
           <a:solidFill>
-            <a:srgbClr val="FFFFFF"/>
+            <a:srgbClr val="13314D"/>
           </a:solidFill>
           <a:ln w="9525">
             <a:solidFill>
-              <a:srgbClr val="D8E3EA">
+              <a:srgbClr val="23465C">
                 <a:alpha val="100000"/>
               </a:srgbClr>
             </a:solidFill>
@@ -4842,7 +4725,7 @@
             <a:r>
               <a:rPr lang="en-US" sz="1000" dirty="0">
                 <a:solidFill>
-                  <a:srgbClr val="22303C"/>
+                  <a:srgbClr val="FFFFFF"/>
                 </a:solidFill>
                 <a:latin typeface="Microsoft YaHei" pitchFamily="34" charset="0"/>
                 <a:ea typeface="Microsoft YaHei" pitchFamily="34" charset="-122"/>
@@ -4871,7 +4754,7 @@
             </a:avLst>
           </a:prstGeom>
           <a:solidFill>
-            <a:srgbClr val="0E4C6E"/>
+            <a:srgbClr val="1A5F84"/>
           </a:solidFill>
           <a:ln/>
         </p:spPr>
@@ -4936,11 +4819,11 @@
             </a:avLst>
           </a:prstGeom>
           <a:solidFill>
-            <a:srgbClr val="FFFFFF"/>
+            <a:srgbClr val="13314D"/>
           </a:solidFill>
           <a:ln w="9525">
             <a:solidFill>
-              <a:srgbClr val="D8E3EA">
+              <a:srgbClr val="23465C">
                 <a:alpha val="100000"/>
               </a:srgbClr>
             </a:solidFill>
@@ -4985,7 +4868,7 @@
             <a:r>
               <a:rPr lang="en-US" sz="1000" dirty="0">
                 <a:solidFill>
-                  <a:srgbClr val="22303C"/>
+                  <a:srgbClr val="FFFFFF"/>
                 </a:solidFill>
                 <a:latin typeface="Microsoft YaHei" pitchFamily="34" charset="0"/>
                 <a:ea typeface="Microsoft YaHei" pitchFamily="34" charset="-122"/>
@@ -5014,7 +4897,7 @@
             </a:avLst>
           </a:prstGeom>
           <a:solidFill>
-            <a:srgbClr val="0FA3A8"/>
+            <a:srgbClr val="0E7E86"/>
           </a:solidFill>
           <a:ln/>
         </p:spPr>
@@ -5079,11 +4962,11 @@
             </a:avLst>
           </a:prstGeom>
           <a:solidFill>
-            <a:srgbClr val="FFFFFF"/>
+            <a:srgbClr val="13314D"/>
           </a:solidFill>
           <a:ln w="9525">
             <a:solidFill>
-              <a:srgbClr val="D8E3EA">
+              <a:srgbClr val="23465C">
                 <a:alpha val="100000"/>
               </a:srgbClr>
             </a:solidFill>
@@ -5128,7 +5011,7 @@
             <a:r>
               <a:rPr lang="en-US" sz="1000" dirty="0">
                 <a:solidFill>
-                  <a:srgbClr val="22303C"/>
+                  <a:srgbClr val="FFFFFF"/>
                 </a:solidFill>
                 <a:latin typeface="Microsoft YaHei" pitchFamily="34" charset="0"/>
                 <a:ea typeface="Microsoft YaHei" pitchFamily="34" charset="-122"/>
@@ -5157,7 +5040,7 @@
             </a:avLst>
           </a:prstGeom>
           <a:solidFill>
-            <a:srgbClr val="0FA3A8"/>
+            <a:srgbClr val="0E7E86"/>
           </a:solidFill>
           <a:ln/>
         </p:spPr>
@@ -5222,11 +5105,11 @@
             </a:avLst>
           </a:prstGeom>
           <a:solidFill>
-            <a:srgbClr val="FFFFFF"/>
+            <a:srgbClr val="13314D"/>
           </a:solidFill>
           <a:ln w="9525">
             <a:solidFill>
-              <a:srgbClr val="D8E3EA">
+              <a:srgbClr val="23465C">
                 <a:alpha val="100000"/>
               </a:srgbClr>
             </a:solidFill>
@@ -5271,7 +5154,7 @@
             <a:r>
               <a:rPr lang="en-US" sz="1000" dirty="0">
                 <a:solidFill>
-                  <a:srgbClr val="22303C"/>
+                  <a:srgbClr val="FFFFFF"/>
                 </a:solidFill>
                 <a:latin typeface="Microsoft YaHei" pitchFamily="34" charset="0"/>
                 <a:ea typeface="Microsoft YaHei" pitchFamily="34" charset="-122"/>
@@ -5300,7 +5183,7 @@
             </a:avLst>
           </a:prstGeom>
           <a:solidFill>
-            <a:srgbClr val="B07A00"/>
+            <a:srgbClr val="C98A1B"/>
           </a:solidFill>
           <a:ln/>
         </p:spPr>
@@ -5365,11 +5248,11 @@
             </a:avLst>
           </a:prstGeom>
           <a:solidFill>
-            <a:srgbClr val="FFFFFF"/>
+            <a:srgbClr val="13314D"/>
           </a:solidFill>
           <a:ln w="9525">
             <a:solidFill>
-              <a:srgbClr val="D8E3EA">
+              <a:srgbClr val="23465C">
                 <a:alpha val="100000"/>
               </a:srgbClr>
             </a:solidFill>
@@ -5414,7 +5297,7 @@
             <a:r>
               <a:rPr lang="en-US" sz="1000" dirty="0">
                 <a:solidFill>
-                  <a:srgbClr val="22303C"/>
+                  <a:srgbClr val="FFFFFF"/>
                 </a:solidFill>
                 <a:latin typeface="Microsoft YaHei" pitchFamily="34" charset="0"/>
                 <a:ea typeface="Microsoft YaHei" pitchFamily="34" charset="-122"/>
@@ -5453,7 +5336,7 @@
             <a:r>
               <a:rPr lang="en-US" sz="1150" b="1" dirty="0">
                 <a:solidFill>
-                  <a:srgbClr val="0FA3A8"/>
+                  <a:srgbClr val="3FC6D6"/>
                 </a:solidFill>
                 <a:latin typeface="Microsoft YaHei" pitchFamily="34" charset="0"/>
                 <a:ea typeface="Microsoft YaHei" pitchFamily="34" charset="-122"/>
@@ -5492,7 +5375,7 @@
             <a:r>
               <a:rPr b="1" sz="1000">
                 <a:solidFill>
-                  <a:srgbClr val="0FA3A8"/>
+                  <a:srgbClr val="3FC6D6"/>
                 </a:solidFill>
                 <a:latin typeface="Microsoft YaHei"/>
                 <a:ea typeface="Microsoft YaHei"/>
@@ -5502,7 +5385,7 @@
             <a:r>
               <a:rPr sz="900">
                 <a:solidFill>
-                  <a:srgbClr val="9FB8C8"/>
+                  <a:srgbClr val="8FA6B5"/>
                 </a:solidFill>
                 <a:latin typeface="Microsoft YaHei"/>
                 <a:ea typeface="Microsoft YaHei"/>
@@ -5540,7 +5423,7 @@
             <a:r>
               <a:rPr lang="en-US" sz="900" dirty="0">
                 <a:solidFill>
-                  <a:srgbClr val="6B7C8A"/>
+                  <a:srgbClr val="A9BECC"/>
                 </a:solidFill>
                 <a:latin typeface="Microsoft YaHei" pitchFamily="34" charset="0"/>
                 <a:ea typeface="Microsoft YaHei" pitchFamily="34" charset="-122"/>
@@ -5567,7 +5450,7 @@
             <a:avLst/>
           </a:prstGeom>
           <a:solidFill>
-            <a:srgbClr val="D8E3EA"/>
+            <a:srgbClr val="23465C"/>
           </a:solidFill>
           <a:ln>
             <a:noFill/>
@@ -5610,7 +5493,7 @@
     <p:bg>
       <p:bgPr>
         <a:solidFill>
-          <a:srgbClr val="F6F9FB"/>
+          <a:srgbClr val="0B1F33"/>
         </a:solidFill>
       </p:bgPr>
     </p:bg>
@@ -5645,7 +5528,7 @@
             </a:avLst>
           </a:prstGeom>
           <a:solidFill>
-            <a:srgbClr val="0FA3A8"/>
+            <a:srgbClr val="0E7E86"/>
           </a:solidFill>
           <a:ln/>
         </p:spPr>
@@ -5681,7 +5564,7 @@
             <a:r>
               <a:rPr lang="en-US" sz="1100" b="1" kern="0" spc="200" dirty="0">
                 <a:solidFill>
-                  <a:srgbClr val="0FA3A8"/>
+                  <a:srgbClr val="3FC6D6"/>
                 </a:solidFill>
                 <a:latin typeface="Microsoft YaHei" pitchFamily="34" charset="0"/>
                 <a:ea typeface="Microsoft YaHei" pitchFamily="34" charset="-122"/>
@@ -5720,7 +5603,7 @@
             <a:r>
               <a:rPr lang="en-US" sz="2400" b="1" dirty="0">
                 <a:solidFill>
-                  <a:srgbClr val="22303C"/>
+                  <a:srgbClr val="FFFFFF"/>
                 </a:solidFill>
                 <a:latin typeface="Microsoft YaHei" pitchFamily="34" charset="0"/>
                 <a:ea typeface="Microsoft YaHei" pitchFamily="34" charset="-122"/>
@@ -5749,11 +5632,11 @@
             </a:avLst>
           </a:prstGeom>
           <a:solidFill>
-            <a:srgbClr val="FFFFFF"/>
+            <a:srgbClr val="13314D"/>
           </a:solidFill>
           <a:ln w="9525">
             <a:solidFill>
-              <a:srgbClr val="D8E3EA">
+              <a:srgbClr val="23465C">
                 <a:alpha val="100000"/>
               </a:srgbClr>
             </a:solidFill>
@@ -5788,7 +5671,7 @@
             </a:avLst>
           </a:prstGeom>
           <a:solidFill>
-            <a:srgbClr val="C0504D"/>
+            <a:srgbClr val="D06055"/>
           </a:solidFill>
           <a:ln/>
         </p:spPr>
@@ -5824,7 +5707,7 @@
             <a:r>
               <a:rPr lang="en-US" sz="1300" b="1" dirty="0">
                 <a:solidFill>
-                  <a:srgbClr val="22303C"/>
+                  <a:srgbClr val="FFFFFF"/>
                 </a:solidFill>
                 <a:latin typeface="Microsoft YaHei" pitchFamily="34" charset="0"/>
                 <a:ea typeface="Microsoft YaHei" pitchFamily="34" charset="-122"/>
@@ -5867,7 +5750,7 @@
             <a:r>
               <a:rPr lang="en-US" sz="950" dirty="0">
                 <a:solidFill>
-                  <a:srgbClr val="6B7C8A"/>
+                  <a:srgbClr val="A9BECC"/>
                 </a:solidFill>
                 <a:latin typeface="Microsoft YaHei" pitchFamily="34" charset="0"/>
                 <a:ea typeface="Microsoft YaHei" pitchFamily="34" charset="-122"/>
@@ -5888,7 +5771,7 @@
             <a:r>
               <a:rPr lang="en-US" sz="950" dirty="0">
                 <a:solidFill>
-                  <a:srgbClr val="6B7C8A"/>
+                  <a:srgbClr val="A9BECC"/>
                 </a:solidFill>
                 <a:latin typeface="Microsoft YaHei" pitchFamily="34" charset="0"/>
                 <a:ea typeface="Microsoft YaHei" pitchFamily="34" charset="-122"/>
@@ -5909,7 +5792,7 @@
             <a:r>
               <a:rPr lang="en-US" sz="950" dirty="0">
                 <a:solidFill>
-                  <a:srgbClr val="6B7C8A"/>
+                  <a:srgbClr val="A9BECC"/>
                 </a:solidFill>
                 <a:latin typeface="Microsoft YaHei" pitchFamily="34" charset="0"/>
                 <a:ea typeface="Microsoft YaHei" pitchFamily="34" charset="-122"/>
@@ -5930,7 +5813,7 @@
             <a:r>
               <a:rPr lang="en-US" sz="950" dirty="0">
                 <a:solidFill>
-                  <a:srgbClr val="6B7C8A"/>
+                  <a:srgbClr val="A9BECC"/>
                 </a:solidFill>
                 <a:latin typeface="Microsoft YaHei" pitchFamily="34" charset="0"/>
                 <a:ea typeface="Microsoft YaHei" pitchFamily="34" charset="-122"/>
@@ -5959,11 +5842,11 @@
             </a:avLst>
           </a:prstGeom>
           <a:solidFill>
-            <a:srgbClr val="FFFFFF"/>
+            <a:srgbClr val="13314D"/>
           </a:solidFill>
           <a:ln w="9525">
             <a:solidFill>
-              <a:srgbClr val="D8E3EA">
+              <a:srgbClr val="23465C">
                 <a:alpha val="100000"/>
               </a:srgbClr>
             </a:solidFill>
@@ -5998,7 +5881,7 @@
             </a:avLst>
           </a:prstGeom>
           <a:solidFill>
-            <a:srgbClr val="0FA3A8"/>
+            <a:srgbClr val="0E7E86"/>
           </a:solidFill>
           <a:ln/>
         </p:spPr>
@@ -6034,7 +5917,7 @@
             <a:r>
               <a:rPr lang="en-US" sz="1300" b="1" dirty="0">
                 <a:solidFill>
-                  <a:srgbClr val="22303C"/>
+                  <a:srgbClr val="FFFFFF"/>
                 </a:solidFill>
                 <a:latin typeface="Microsoft YaHei" pitchFamily="34" charset="0"/>
                 <a:ea typeface="Microsoft YaHei" pitchFamily="34" charset="-122"/>
@@ -6077,7 +5960,7 @@
             <a:r>
               <a:rPr lang="en-US" sz="900" dirty="0">
                 <a:solidFill>
-                  <a:srgbClr val="6B7C8A"/>
+                  <a:srgbClr val="A9BECC"/>
                 </a:solidFill>
                 <a:latin typeface="Microsoft YaHei" pitchFamily="34" charset="0"/>
                 <a:ea typeface="Microsoft YaHei" pitchFamily="34" charset="-122"/>
@@ -6098,7 +5981,7 @@
             <a:r>
               <a:rPr lang="en-US" sz="900" dirty="0">
                 <a:solidFill>
-                  <a:srgbClr val="6B7C8A"/>
+                  <a:srgbClr val="A9BECC"/>
                 </a:solidFill>
                 <a:latin typeface="Microsoft YaHei" pitchFamily="34" charset="0"/>
                 <a:ea typeface="Microsoft YaHei" pitchFamily="34" charset="-122"/>
@@ -6119,7 +6002,7 @@
             <a:r>
               <a:rPr lang="en-US" sz="900" dirty="0">
                 <a:solidFill>
-                  <a:srgbClr val="6B7C8A"/>
+                  <a:srgbClr val="A9BECC"/>
                 </a:solidFill>
                 <a:latin typeface="Microsoft YaHei" pitchFamily="34" charset="0"/>
                 <a:ea typeface="Microsoft YaHei" pitchFamily="34" charset="-122"/>
@@ -6140,7 +6023,7 @@
             <a:r>
               <a:rPr lang="en-US" sz="900" dirty="0">
                 <a:solidFill>
-                  <a:srgbClr val="6B7C8A"/>
+                  <a:srgbClr val="A9BECC"/>
                 </a:solidFill>
                 <a:latin typeface="Microsoft YaHei" pitchFamily="34" charset="0"/>
                 <a:ea typeface="Microsoft YaHei" pitchFamily="34" charset="-122"/>
@@ -6161,7 +6044,7 @@
             <a:r>
               <a:rPr lang="en-US" sz="900" dirty="0">
                 <a:solidFill>
-                  <a:srgbClr val="6B7C8A"/>
+                  <a:srgbClr val="A9BECC"/>
                 </a:solidFill>
                 <a:latin typeface="Microsoft YaHei" pitchFamily="34" charset="0"/>
                 <a:ea typeface="Microsoft YaHei" pitchFamily="34" charset="-122"/>
@@ -6190,7 +6073,7 @@
             </a:avLst>
           </a:prstGeom>
           <a:solidFill>
-            <a:srgbClr val="FFF4DC"/>
+            <a:srgbClr val="3A2E12"/>
           </a:solidFill>
           <a:ln/>
         </p:spPr>
@@ -6216,7 +6099,7 @@
             </a:avLst>
           </a:prstGeom>
           <a:solidFill>
-            <a:srgbClr val="F59E0B"/>
+            <a:srgbClr val="D98E1F"/>
           </a:solidFill>
           <a:ln/>
         </p:spPr>
@@ -6252,7 +6135,7 @@
             <a:r>
               <a:rPr lang="en-US" sz="1000" b="1" dirty="0">
                 <a:solidFill>
-                  <a:srgbClr val="B07A00"/>
+                  <a:srgbClr val="F5A623"/>
                 </a:solidFill>
                 <a:latin typeface="Microsoft YaHei" pitchFamily="34" charset="0"/>
                 <a:ea typeface="Microsoft YaHei" pitchFamily="34" charset="-122"/>
@@ -6263,7 +6146,7 @@
             <a:r>
               <a:rPr lang="en-US" sz="1000" dirty="0">
                 <a:solidFill>
-                  <a:srgbClr val="22303C"/>
+                  <a:srgbClr val="FFFFFF"/>
                 </a:solidFill>
                 <a:latin typeface="Microsoft YaHei" pitchFamily="34" charset="0"/>
                 <a:ea typeface="Microsoft YaHei" pitchFamily="34" charset="-122"/>
@@ -6274,7 +6157,7 @@
             <a:r>
               <a:rPr lang="en-US" sz="1000" dirty="0">
                 <a:solidFill>
-                  <a:srgbClr val="22303C"/>
+                  <a:srgbClr val="FFFFFF"/>
                 </a:solidFill>
                 <a:latin typeface="Microsoft YaHei" pitchFamily="34" charset="0"/>
                 <a:ea typeface="Microsoft YaHei" pitchFamily="34" charset="-122"/>
@@ -6313,7 +6196,7 @@
             <a:r>
               <a:rPr lang="en-US" sz="1050" dirty="0">
                 <a:solidFill>
-                  <a:srgbClr val="6B7C8A"/>
+                  <a:srgbClr val="A9BECC"/>
                 </a:solidFill>
                 <a:latin typeface="Microsoft YaHei" pitchFamily="34" charset="0"/>
                 <a:ea typeface="Microsoft YaHei" pitchFamily="34" charset="-122"/>
@@ -6352,7 +6235,7 @@
             <a:r>
               <a:rPr b="1" sz="1000">
                 <a:solidFill>
-                  <a:srgbClr val="0FA3A8"/>
+                  <a:srgbClr val="3FC6D6"/>
                 </a:solidFill>
                 <a:latin typeface="Microsoft YaHei"/>
                 <a:ea typeface="Microsoft YaHei"/>
@@ -6362,7 +6245,7 @@
             <a:r>
               <a:rPr sz="900">
                 <a:solidFill>
-                  <a:srgbClr val="9FB8C8"/>
+                  <a:srgbClr val="8FA6B5"/>
                 </a:solidFill>
                 <a:latin typeface="Microsoft YaHei"/>
                 <a:ea typeface="Microsoft YaHei"/>
@@ -6400,7 +6283,7 @@
             <a:r>
               <a:rPr lang="en-US" sz="900" dirty="0">
                 <a:solidFill>
-                  <a:srgbClr val="6B7C8A"/>
+                  <a:srgbClr val="A9BECC"/>
                 </a:solidFill>
                 <a:latin typeface="Microsoft YaHei" pitchFamily="34" charset="0"/>
                 <a:ea typeface="Microsoft YaHei" pitchFamily="34" charset="-122"/>
@@ -6427,7 +6310,7 @@
             <a:avLst/>
           </a:prstGeom>
           <a:solidFill>
-            <a:srgbClr val="D8E3EA"/>
+            <a:srgbClr val="23465C"/>
           </a:solidFill>
           <a:ln>
             <a:noFill/>
@@ -6470,7 +6353,7 @@
     <p:bg>
       <p:bgPr>
         <a:solidFill>
-          <a:srgbClr val="F6F9FB"/>
+          <a:srgbClr val="0B1F33"/>
         </a:solidFill>
       </p:bgPr>
     </p:bg>
@@ -6505,7 +6388,7 @@
             </a:avLst>
           </a:prstGeom>
           <a:solidFill>
-            <a:srgbClr val="0FA3A8"/>
+            <a:srgbClr val="0E7E86"/>
           </a:solidFill>
           <a:ln/>
         </p:spPr>
@@ -6541,7 +6424,7 @@
             <a:r>
               <a:rPr lang="en-US" sz="1100" b="1" kern="0" spc="200" dirty="0">
                 <a:solidFill>
-                  <a:srgbClr val="0FA3A8"/>
+                  <a:srgbClr val="3FC6D6"/>
                 </a:solidFill>
                 <a:latin typeface="Microsoft YaHei" pitchFamily="34" charset="0"/>
                 <a:ea typeface="Microsoft YaHei" pitchFamily="34" charset="-122"/>
@@ -6580,7 +6463,7 @@
             <a:r>
               <a:rPr lang="en-US" sz="2400" b="1" dirty="0">
                 <a:solidFill>
-                  <a:srgbClr val="22303C"/>
+                  <a:srgbClr val="FFFFFF"/>
                 </a:solidFill>
                 <a:latin typeface="Microsoft YaHei" pitchFamily="34" charset="0"/>
                 <a:ea typeface="Microsoft YaHei" pitchFamily="34" charset="-122"/>
@@ -6619,7 +6502,7 @@
             <a:r>
               <a:rPr lang="en-US" sz="1050" dirty="0">
                 <a:solidFill>
-                  <a:srgbClr val="22303C"/>
+                  <a:srgbClr val="FFFFFF"/>
                 </a:solidFill>
                 <a:latin typeface="Microsoft YaHei" pitchFamily="34" charset="0"/>
                 <a:ea typeface="Microsoft YaHei" pitchFamily="34" charset="-122"/>
@@ -6630,7 +6513,7 @@
             <a:r>
               <a:rPr lang="en-US" sz="1050" b="1" dirty="0">
                 <a:solidFill>
-                  <a:srgbClr val="B07A00"/>
+                  <a:srgbClr val="F5A623"/>
                 </a:solidFill>
                 <a:latin typeface="Microsoft YaHei" pitchFamily="34" charset="0"/>
                 <a:ea typeface="Microsoft YaHei" pitchFamily="34" charset="-122"/>
@@ -6641,7 +6524,7 @@
             <a:r>
               <a:rPr lang="en-US" sz="1050" dirty="0">
                 <a:solidFill>
-                  <a:srgbClr val="22303C"/>
+                  <a:srgbClr val="FFFFFF"/>
                 </a:solidFill>
                 <a:latin typeface="Microsoft YaHei" pitchFamily="34" charset="0"/>
                 <a:ea typeface="Microsoft YaHei" pitchFamily="34" charset="-122"/>
@@ -6670,11 +6553,11 @@
             </a:avLst>
           </a:prstGeom>
           <a:solidFill>
-            <a:srgbClr val="FFFFFF"/>
+            <a:srgbClr val="13314D"/>
           </a:solidFill>
           <a:ln w="9525">
             <a:solidFill>
-              <a:srgbClr val="D8E3EA">
+              <a:srgbClr val="23465C">
                 <a:alpha val="100000"/>
               </a:srgbClr>
             </a:solidFill>
@@ -6709,7 +6592,7 @@
             </a:avLst>
           </a:prstGeom>
           <a:solidFill>
-            <a:srgbClr val="0FA3A8"/>
+            <a:srgbClr val="0E7E86"/>
           </a:solidFill>
           <a:ln/>
         </p:spPr>
@@ -6745,7 +6628,7 @@
             <a:r>
               <a:rPr lang="en-US" sz="1300" b="1" dirty="0">
                 <a:solidFill>
-                  <a:srgbClr val="22303C"/>
+                  <a:srgbClr val="FFFFFF"/>
                 </a:solidFill>
                 <a:latin typeface="Microsoft YaHei" pitchFamily="34" charset="0"/>
                 <a:ea typeface="Microsoft YaHei" pitchFamily="34" charset="-122"/>
@@ -6788,7 +6671,7 @@
             <a:r>
               <a:rPr lang="en-US" sz="900" dirty="0">
                 <a:solidFill>
-                  <a:srgbClr val="6B7C8A"/>
+                  <a:srgbClr val="A9BECC"/>
                 </a:solidFill>
                 <a:latin typeface="Microsoft YaHei" pitchFamily="34" charset="0"/>
                 <a:ea typeface="Microsoft YaHei" pitchFamily="34" charset="-122"/>
@@ -6809,7 +6692,7 @@
             <a:r>
               <a:rPr lang="en-US" sz="900" dirty="0">
                 <a:solidFill>
-                  <a:srgbClr val="6B7C8A"/>
+                  <a:srgbClr val="A9BECC"/>
                 </a:solidFill>
                 <a:latin typeface="Microsoft YaHei" pitchFamily="34" charset="0"/>
                 <a:ea typeface="Microsoft YaHei" pitchFamily="34" charset="-122"/>
@@ -6830,7 +6713,7 @@
             <a:r>
               <a:rPr lang="en-US" sz="900" dirty="0">
                 <a:solidFill>
-                  <a:srgbClr val="6B7C8A"/>
+                  <a:srgbClr val="A9BECC"/>
                 </a:solidFill>
                 <a:latin typeface="Microsoft YaHei" pitchFamily="34" charset="0"/>
                 <a:ea typeface="Microsoft YaHei" pitchFamily="34" charset="-122"/>
@@ -6851,7 +6734,7 @@
             <a:r>
               <a:rPr lang="en-US" sz="900" dirty="0">
                 <a:solidFill>
-                  <a:srgbClr val="6B7C8A"/>
+                  <a:srgbClr val="A9BECC"/>
                 </a:solidFill>
                 <a:latin typeface="Microsoft YaHei" pitchFamily="34" charset="0"/>
                 <a:ea typeface="Microsoft YaHei" pitchFamily="34" charset="-122"/>
@@ -6880,11 +6763,11 @@
             </a:avLst>
           </a:prstGeom>
           <a:solidFill>
-            <a:srgbClr val="FFFFFF"/>
+            <a:srgbClr val="13314D"/>
           </a:solidFill>
           <a:ln w="9525">
             <a:solidFill>
-              <a:srgbClr val="D8E3EA">
+              <a:srgbClr val="23465C">
                 <a:alpha val="100000"/>
               </a:srgbClr>
             </a:solidFill>
@@ -6919,7 +6802,7 @@
             </a:avLst>
           </a:prstGeom>
           <a:solidFill>
-            <a:srgbClr val="0E4C6E"/>
+            <a:srgbClr val="1A5F84"/>
           </a:solidFill>
           <a:ln/>
         </p:spPr>
@@ -6955,7 +6838,7 @@
             <a:r>
               <a:rPr lang="en-US" sz="1300" b="1" dirty="0">
                 <a:solidFill>
-                  <a:srgbClr val="22303C"/>
+                  <a:srgbClr val="FFFFFF"/>
                 </a:solidFill>
                 <a:latin typeface="Microsoft YaHei" pitchFamily="34" charset="0"/>
                 <a:ea typeface="Microsoft YaHei" pitchFamily="34" charset="-122"/>
@@ -6998,7 +6881,7 @@
             <a:r>
               <a:rPr lang="en-US" sz="900" dirty="0">
                 <a:solidFill>
-                  <a:srgbClr val="6B7C8A"/>
+                  <a:srgbClr val="A9BECC"/>
                 </a:solidFill>
                 <a:latin typeface="Microsoft YaHei" pitchFamily="34" charset="0"/>
                 <a:ea typeface="Microsoft YaHei" pitchFamily="34" charset="-122"/>
@@ -7019,7 +6902,7 @@
             <a:r>
               <a:rPr lang="en-US" sz="900" dirty="0">
                 <a:solidFill>
-                  <a:srgbClr val="6B7C8A"/>
+                  <a:srgbClr val="A9BECC"/>
                 </a:solidFill>
                 <a:latin typeface="Microsoft YaHei" pitchFamily="34" charset="0"/>
                 <a:ea typeface="Microsoft YaHei" pitchFamily="34" charset="-122"/>
@@ -7040,7 +6923,7 @@
             <a:r>
               <a:rPr lang="en-US" sz="900" dirty="0">
                 <a:solidFill>
-                  <a:srgbClr val="6B7C8A"/>
+                  <a:srgbClr val="A9BECC"/>
                 </a:solidFill>
                 <a:latin typeface="Microsoft YaHei" pitchFamily="34" charset="0"/>
                 <a:ea typeface="Microsoft YaHei" pitchFamily="34" charset="-122"/>
@@ -7061,7 +6944,7 @@
             <a:r>
               <a:rPr lang="en-US" sz="900" dirty="0">
                 <a:solidFill>
-                  <a:srgbClr val="6B7C8A"/>
+                  <a:srgbClr val="A9BECC"/>
                 </a:solidFill>
                 <a:latin typeface="Microsoft YaHei" pitchFamily="34" charset="0"/>
                 <a:ea typeface="Microsoft YaHei" pitchFamily="34" charset="-122"/>
@@ -7090,7 +6973,7 @@
             </a:avLst>
           </a:prstGeom>
           <a:solidFill>
-            <a:srgbClr val="FFF4DC"/>
+            <a:srgbClr val="3A2E12"/>
           </a:solidFill>
           <a:ln/>
         </p:spPr>
@@ -7116,7 +6999,7 @@
             </a:avLst>
           </a:prstGeom>
           <a:solidFill>
-            <a:srgbClr val="F59E0B"/>
+            <a:srgbClr val="D98E1F"/>
           </a:solidFill>
           <a:ln/>
         </p:spPr>
@@ -7152,7 +7035,7 @@
             <a:r>
               <a:rPr lang="en-US" sz="1100" b="1" dirty="0">
                 <a:solidFill>
-                  <a:srgbClr val="B07A00"/>
+                  <a:srgbClr val="F5A623"/>
                 </a:solidFill>
                 <a:latin typeface="Microsoft YaHei" pitchFamily="34" charset="0"/>
                 <a:ea typeface="Microsoft YaHei" pitchFamily="34" charset="-122"/>
@@ -7163,7 +7046,7 @@
             <a:r>
               <a:rPr lang="en-US" sz="1100" dirty="0">
                 <a:solidFill>
-                  <a:srgbClr val="22303C"/>
+                  <a:srgbClr val="FFFFFF"/>
                 </a:solidFill>
                 <a:latin typeface="Microsoft YaHei" pitchFamily="34" charset="0"/>
                 <a:ea typeface="Microsoft YaHei" pitchFamily="34" charset="-122"/>
@@ -7202,7 +7085,7 @@
             <a:r>
               <a:rPr lang="en-US" sz="1050" dirty="0">
                 <a:solidFill>
-                  <a:srgbClr val="6B7C8A"/>
+                  <a:srgbClr val="A9BECC"/>
                 </a:solidFill>
                 <a:latin typeface="Microsoft YaHei" pitchFamily="34" charset="0"/>
                 <a:ea typeface="Microsoft YaHei" pitchFamily="34" charset="-122"/>
@@ -7241,7 +7124,7 @@
             <a:r>
               <a:rPr b="1" sz="1000">
                 <a:solidFill>
-                  <a:srgbClr val="0FA3A8"/>
+                  <a:srgbClr val="3FC6D6"/>
                 </a:solidFill>
                 <a:latin typeface="Microsoft YaHei"/>
                 <a:ea typeface="Microsoft YaHei"/>
@@ -7251,7 +7134,7 @@
             <a:r>
               <a:rPr sz="900">
                 <a:solidFill>
-                  <a:srgbClr val="9FB8C8"/>
+                  <a:srgbClr val="8FA6B5"/>
                 </a:solidFill>
                 <a:latin typeface="Microsoft YaHei"/>
                 <a:ea typeface="Microsoft YaHei"/>
@@ -7289,7 +7172,7 @@
             <a:r>
               <a:rPr lang="en-US" sz="900" dirty="0">
                 <a:solidFill>
-                  <a:srgbClr val="6B7C8A"/>
+                  <a:srgbClr val="A9BECC"/>
                 </a:solidFill>
                 <a:latin typeface="Microsoft YaHei" pitchFamily="34" charset="0"/>
                 <a:ea typeface="Microsoft YaHei" pitchFamily="34" charset="-122"/>
@@ -7316,7 +7199,7 @@
             <a:avLst/>
           </a:prstGeom>
           <a:solidFill>
-            <a:srgbClr val="D8E3EA"/>
+            <a:srgbClr val="23465C"/>
           </a:solidFill>
           <a:ln>
             <a:noFill/>
@@ -7359,7 +7242,7 @@
     <p:bg>
       <p:bgPr>
         <a:solidFill>
-          <a:srgbClr val="F6F9FB"/>
+          <a:srgbClr val="0B1F33"/>
         </a:solidFill>
       </p:bgPr>
     </p:bg>
@@ -7394,7 +7277,7 @@
             </a:avLst>
           </a:prstGeom>
           <a:solidFill>
-            <a:srgbClr val="0FA3A8"/>
+            <a:srgbClr val="0E7E86"/>
           </a:solidFill>
           <a:ln/>
         </p:spPr>
@@ -7430,7 +7313,7 @@
             <a:r>
               <a:rPr lang="en-US" sz="1100" b="1" kern="0" spc="200" dirty="0">
                 <a:solidFill>
-                  <a:srgbClr val="0FA3A8"/>
+                  <a:srgbClr val="3FC6D6"/>
                 </a:solidFill>
                 <a:latin typeface="Microsoft YaHei" pitchFamily="34" charset="0"/>
                 <a:ea typeface="Microsoft YaHei" pitchFamily="34" charset="-122"/>
@@ -7469,7 +7352,7 @@
             <a:r>
               <a:rPr lang="en-US" sz="2400" b="1" dirty="0">
                 <a:solidFill>
-                  <a:srgbClr val="22303C"/>
+                  <a:srgbClr val="FFFFFF"/>
                 </a:solidFill>
                 <a:latin typeface="Microsoft YaHei" pitchFamily="34" charset="0"/>
                 <a:ea typeface="Microsoft YaHei" pitchFamily="34" charset="-122"/>
@@ -7571,7 +7454,7 @@
                   <a:tcPr marL="36576" marR="36576" marT="36576" marB="36576" anchor="ctr">
                     <a:lnL w="6350" cap="flat" cmpd="sng" algn="ctr">
                       <a:solidFill>
-                        <a:srgbClr val="D8E3EA"/>
+                        <a:srgbClr val="23465C"/>
                       </a:solidFill>
                       <a:prstDash val="solid"/>
                       <a:round/>
@@ -7580,7 +7463,7 @@
                     </a:lnL>
                     <a:lnR w="6350" cap="flat" cmpd="sng" algn="ctr">
                       <a:solidFill>
-                        <a:srgbClr val="D8E3EA"/>
+                        <a:srgbClr val="23465C"/>
                       </a:solidFill>
                       <a:prstDash val="solid"/>
                       <a:round/>
@@ -7589,7 +7472,7 @@
                     </a:lnR>
                     <a:lnT w="6350" cap="flat" cmpd="sng" algn="ctr">
                       <a:solidFill>
-                        <a:srgbClr val="D8E3EA"/>
+                        <a:srgbClr val="23465C"/>
                       </a:solidFill>
                       <a:prstDash val="solid"/>
                       <a:round/>
@@ -7598,7 +7481,7 @@
                     </a:lnT>
                     <a:lnB w="6350" cap="flat" cmpd="sng" algn="ctr">
                       <a:solidFill>
-                        <a:srgbClr val="D8E3EA"/>
+                        <a:srgbClr val="23465C"/>
                       </a:solidFill>
                       <a:prstDash val="solid"/>
                       <a:round/>
@@ -7606,7 +7489,7 @@
                       <a:tailEnd type="none" w="med" len="med"/>
                     </a:lnB>
                     <a:solidFill>
-                      <a:srgbClr val="0E4C6E"/>
+                      <a:srgbClr val="1A5F84"/>
                     </a:solidFill>
                   </a:tcPr>
                 </a:tc>
@@ -7639,7 +7522,7 @@
                   <a:tcPr marL="36576" marR="36576" marT="36576" marB="36576" anchor="ctr">
                     <a:lnL w="6350" cap="flat" cmpd="sng" algn="ctr">
                       <a:solidFill>
-                        <a:srgbClr val="D8E3EA"/>
+                        <a:srgbClr val="23465C"/>
                       </a:solidFill>
                       <a:prstDash val="solid"/>
                       <a:round/>
@@ -7648,7 +7531,7 @@
                     </a:lnL>
                     <a:lnR w="6350" cap="flat" cmpd="sng" algn="ctr">
                       <a:solidFill>
-                        <a:srgbClr val="D8E3EA"/>
+                        <a:srgbClr val="23465C"/>
                       </a:solidFill>
                       <a:prstDash val="solid"/>
                       <a:round/>
@@ -7657,7 +7540,7 @@
                     </a:lnR>
                     <a:lnT w="6350" cap="flat" cmpd="sng" algn="ctr">
                       <a:solidFill>
-                        <a:srgbClr val="D8E3EA"/>
+                        <a:srgbClr val="23465C"/>
                       </a:solidFill>
                       <a:prstDash val="solid"/>
                       <a:round/>
@@ -7666,7 +7549,7 @@
                     </a:lnT>
                     <a:lnB w="6350" cap="flat" cmpd="sng" algn="ctr">
                       <a:solidFill>
-                        <a:srgbClr val="D8E3EA"/>
+                        <a:srgbClr val="23465C"/>
                       </a:solidFill>
                       <a:prstDash val="solid"/>
                       <a:round/>
@@ -7674,7 +7557,7 @@
                       <a:tailEnd type="none" w="med" len="med"/>
                     </a:lnB>
                     <a:solidFill>
-                      <a:srgbClr val="0E4C6E"/>
+                      <a:srgbClr val="1A5F84"/>
                     </a:solidFill>
                   </a:tcPr>
                 </a:tc>
@@ -7707,7 +7590,7 @@
                   <a:tcPr marL="36576" marR="36576" marT="36576" marB="36576" anchor="ctr">
                     <a:lnL w="6350" cap="flat" cmpd="sng" algn="ctr">
                       <a:solidFill>
-                        <a:srgbClr val="D8E3EA"/>
+                        <a:srgbClr val="23465C"/>
                       </a:solidFill>
                       <a:prstDash val="solid"/>
                       <a:round/>
@@ -7716,7 +7599,7 @@
                     </a:lnL>
                     <a:lnR w="6350" cap="flat" cmpd="sng" algn="ctr">
                       <a:solidFill>
-                        <a:srgbClr val="D8E3EA"/>
+                        <a:srgbClr val="23465C"/>
                       </a:solidFill>
                       <a:prstDash val="solid"/>
                       <a:round/>
@@ -7725,7 +7608,7 @@
                     </a:lnR>
                     <a:lnT w="6350" cap="flat" cmpd="sng" algn="ctr">
                       <a:solidFill>
-                        <a:srgbClr val="D8E3EA"/>
+                        <a:srgbClr val="23465C"/>
                       </a:solidFill>
                       <a:prstDash val="solid"/>
                       <a:round/>
@@ -7734,7 +7617,7 @@
                     </a:lnT>
                     <a:lnB w="6350" cap="flat" cmpd="sng" algn="ctr">
                       <a:solidFill>
-                        <a:srgbClr val="D8E3EA"/>
+                        <a:srgbClr val="23465C"/>
                       </a:solidFill>
                       <a:prstDash val="solid"/>
                       <a:round/>
@@ -7742,7 +7625,7 @@
                       <a:tailEnd type="none" w="med" len="med"/>
                     </a:lnB>
                     <a:solidFill>
-                      <a:srgbClr val="0E4C6E"/>
+                      <a:srgbClr val="1A5F84"/>
                     </a:solidFill>
                   </a:tcPr>
                 </a:tc>
@@ -7775,7 +7658,7 @@
                   <a:tcPr marL="36576" marR="36576" marT="36576" marB="36576" anchor="ctr">
                     <a:lnL w="6350" cap="flat" cmpd="sng" algn="ctr">
                       <a:solidFill>
-                        <a:srgbClr val="D8E3EA"/>
+                        <a:srgbClr val="23465C"/>
                       </a:solidFill>
                       <a:prstDash val="solid"/>
                       <a:round/>
@@ -7784,7 +7667,7 @@
                     </a:lnL>
                     <a:lnR w="6350" cap="flat" cmpd="sng" algn="ctr">
                       <a:solidFill>
-                        <a:srgbClr val="D8E3EA"/>
+                        <a:srgbClr val="23465C"/>
                       </a:solidFill>
                       <a:prstDash val="solid"/>
                       <a:round/>
@@ -7793,7 +7676,7 @@
                     </a:lnR>
                     <a:lnT w="6350" cap="flat" cmpd="sng" algn="ctr">
                       <a:solidFill>
-                        <a:srgbClr val="D8E3EA"/>
+                        <a:srgbClr val="23465C"/>
                       </a:solidFill>
                       <a:prstDash val="solid"/>
                       <a:round/>
@@ -7802,7 +7685,7 @@
                     </a:lnT>
                     <a:lnB w="6350" cap="flat" cmpd="sng" algn="ctr">
                       <a:solidFill>
-                        <a:srgbClr val="D8E3EA"/>
+                        <a:srgbClr val="23465C"/>
                       </a:solidFill>
                       <a:prstDash val="solid"/>
                       <a:round/>
@@ -7810,7 +7693,7 @@
                       <a:tailEnd type="none" w="med" len="med"/>
                     </a:lnB>
                     <a:solidFill>
-                      <a:srgbClr val="0E4C6E"/>
+                      <a:srgbClr val="1A5F84"/>
                     </a:solidFill>
                   </a:tcPr>
                 </a:tc>
@@ -7843,7 +7726,7 @@
                   <a:tcPr marL="36576" marR="36576" marT="36576" marB="36576" anchor="ctr">
                     <a:lnL w="6350" cap="flat" cmpd="sng" algn="ctr">
                       <a:solidFill>
-                        <a:srgbClr val="D8E3EA"/>
+                        <a:srgbClr val="23465C"/>
                       </a:solidFill>
                       <a:prstDash val="solid"/>
                       <a:round/>
@@ -7852,7 +7735,7 @@
                     </a:lnL>
                     <a:lnR w="6350" cap="flat" cmpd="sng" algn="ctr">
                       <a:solidFill>
-                        <a:srgbClr val="D8E3EA"/>
+                        <a:srgbClr val="23465C"/>
                       </a:solidFill>
                       <a:prstDash val="solid"/>
                       <a:round/>
@@ -7861,7 +7744,7 @@
                     </a:lnR>
                     <a:lnT w="6350" cap="flat" cmpd="sng" algn="ctr">
                       <a:solidFill>
-                        <a:srgbClr val="D8E3EA"/>
+                        <a:srgbClr val="23465C"/>
                       </a:solidFill>
                       <a:prstDash val="solid"/>
                       <a:round/>
@@ -7870,7 +7753,7 @@
                     </a:lnT>
                     <a:lnB w="6350" cap="flat" cmpd="sng" algn="ctr">
                       <a:solidFill>
-                        <a:srgbClr val="D8E3EA"/>
+                        <a:srgbClr val="23465C"/>
                       </a:solidFill>
                       <a:prstDash val="solid"/>
                       <a:round/>
@@ -7878,7 +7761,7 @@
                       <a:tailEnd type="none" w="med" len="med"/>
                     </a:lnB>
                     <a:solidFill>
-                      <a:srgbClr val="0E4C6E"/>
+                      <a:srgbClr val="1A5F84"/>
                     </a:solidFill>
                   </a:tcPr>
                 </a:tc>
@@ -7911,7 +7794,7 @@
                   <a:tcPr marL="36576" marR="36576" marT="36576" marB="36576" anchor="ctr">
                     <a:lnL w="6350" cap="flat" cmpd="sng" algn="ctr">
                       <a:solidFill>
-                        <a:srgbClr val="D8E3EA"/>
+                        <a:srgbClr val="23465C"/>
                       </a:solidFill>
                       <a:prstDash val="solid"/>
                       <a:round/>
@@ -7920,7 +7803,7 @@
                     </a:lnL>
                     <a:lnR w="6350" cap="flat" cmpd="sng" algn="ctr">
                       <a:solidFill>
-                        <a:srgbClr val="D8E3EA"/>
+                        <a:srgbClr val="23465C"/>
                       </a:solidFill>
                       <a:prstDash val="solid"/>
                       <a:round/>
@@ -7929,7 +7812,7 @@
                     </a:lnR>
                     <a:lnT w="6350" cap="flat" cmpd="sng" algn="ctr">
                       <a:solidFill>
-                        <a:srgbClr val="D8E3EA"/>
+                        <a:srgbClr val="23465C"/>
                       </a:solidFill>
                       <a:prstDash val="solid"/>
                       <a:round/>
@@ -7938,7 +7821,7 @@
                     </a:lnT>
                     <a:lnB w="6350" cap="flat" cmpd="sng" algn="ctr">
                       <a:solidFill>
-                        <a:srgbClr val="D8E3EA"/>
+                        <a:srgbClr val="23465C"/>
                       </a:solidFill>
                       <a:prstDash val="solid"/>
                       <a:round/>
@@ -7946,7 +7829,7 @@
                       <a:tailEnd type="none" w="med" len="med"/>
                     </a:lnB>
                     <a:solidFill>
-                      <a:srgbClr val="0E4C6E"/>
+                      <a:srgbClr val="1A5F84"/>
                     </a:solidFill>
                   </a:tcPr>
                 </a:tc>
@@ -7968,7 +7851,7 @@
                       <a:r>
                         <a:rPr lang="en-US" sz="1050" dirty="0">
                           <a:solidFill>
-                            <a:srgbClr val="22303C"/>
+                            <a:srgbClr val="FFFFFF"/>
                           </a:solidFill>
                           <a:latin typeface="Microsoft YaHei" pitchFamily="34" charset="0"/>
                           <a:ea typeface="Microsoft YaHei" pitchFamily="34" charset="-122"/>
@@ -7986,7 +7869,7 @@
                   <a:tcPr marL="36576" marR="36576" marT="36576" marB="36576" anchor="ctr">
                     <a:lnL w="6350" cap="flat" cmpd="sng" algn="ctr">
                       <a:solidFill>
-                        <a:srgbClr val="D8E3EA"/>
+                        <a:srgbClr val="23465C"/>
                       </a:solidFill>
                       <a:prstDash val="solid"/>
                       <a:round/>
@@ -7995,7 +7878,7 @@
                     </a:lnL>
                     <a:lnR w="6350" cap="flat" cmpd="sng" algn="ctr">
                       <a:solidFill>
-                        <a:srgbClr val="D8E3EA"/>
+                        <a:srgbClr val="23465C"/>
                       </a:solidFill>
                       <a:prstDash val="solid"/>
                       <a:round/>
@@ -8004,7 +7887,7 @@
                     </a:lnR>
                     <a:lnT w="6350" cap="flat" cmpd="sng" algn="ctr">
                       <a:solidFill>
-                        <a:srgbClr val="D8E3EA"/>
+                        <a:srgbClr val="23465C"/>
                       </a:solidFill>
                       <a:prstDash val="solid"/>
                       <a:round/>
@@ -8013,7 +7896,7 @@
                     </a:lnT>
                     <a:lnB w="6350" cap="flat" cmpd="sng" algn="ctr">
                       <a:solidFill>
-                        <a:srgbClr val="D8E3EA"/>
+                        <a:srgbClr val="23465C"/>
                       </a:solidFill>
                       <a:prstDash val="solid"/>
                       <a:round/>
@@ -8021,7 +7904,7 @@
                       <a:tailEnd type="none" w="med" len="med"/>
                     </a:lnB>
                     <a:solidFill>
-                      <a:srgbClr val="FFFFFF"/>
+                      <a:srgbClr val="13314D"/>
                     </a:solidFill>
                   </a:tcPr>
                 </a:tc>
@@ -8036,7 +7919,7 @@
                       <a:r>
                         <a:rPr lang="en-US" sz="1050" dirty="0">
                           <a:solidFill>
-                            <a:srgbClr val="22303C"/>
+                            <a:srgbClr val="FFFFFF"/>
                           </a:solidFill>
                           <a:latin typeface="Microsoft YaHei" pitchFamily="34" charset="0"/>
                           <a:ea typeface="Microsoft YaHei" pitchFamily="34" charset="-122"/>
@@ -8054,7 +7937,7 @@
                   <a:tcPr marL="36576" marR="36576" marT="36576" marB="36576" anchor="ctr">
                     <a:lnL w="6350" cap="flat" cmpd="sng" algn="ctr">
                       <a:solidFill>
-                        <a:srgbClr val="D8E3EA"/>
+                        <a:srgbClr val="23465C"/>
                       </a:solidFill>
                       <a:prstDash val="solid"/>
                       <a:round/>
@@ -8063,7 +7946,7 @@
                     </a:lnL>
                     <a:lnR w="6350" cap="flat" cmpd="sng" algn="ctr">
                       <a:solidFill>
-                        <a:srgbClr val="D8E3EA"/>
+                        <a:srgbClr val="23465C"/>
                       </a:solidFill>
                       <a:prstDash val="solid"/>
                       <a:round/>
@@ -8072,7 +7955,7 @@
                     </a:lnR>
                     <a:lnT w="6350" cap="flat" cmpd="sng" algn="ctr">
                       <a:solidFill>
-                        <a:srgbClr val="D8E3EA"/>
+                        <a:srgbClr val="23465C"/>
                       </a:solidFill>
                       <a:prstDash val="solid"/>
                       <a:round/>
@@ -8081,7 +7964,7 @@
                     </a:lnT>
                     <a:lnB w="6350" cap="flat" cmpd="sng" algn="ctr">
                       <a:solidFill>
-                        <a:srgbClr val="D8E3EA"/>
+                        <a:srgbClr val="23465C"/>
                       </a:solidFill>
                       <a:prstDash val="solid"/>
                       <a:round/>
@@ -8089,7 +7972,7 @@
                       <a:tailEnd type="none" w="med" len="med"/>
                     </a:lnB>
                     <a:solidFill>
-                      <a:srgbClr val="FFFFFF"/>
+                      <a:srgbClr val="13314D"/>
                     </a:solidFill>
                   </a:tcPr>
                 </a:tc>
@@ -8104,7 +7987,7 @@
                       <a:r>
                         <a:rPr lang="en-US" sz="1050" dirty="0">
                           <a:solidFill>
-                            <a:srgbClr val="22303C"/>
+                            <a:srgbClr val="FFFFFF"/>
                           </a:solidFill>
                           <a:latin typeface="Microsoft YaHei" pitchFamily="34" charset="0"/>
                           <a:ea typeface="Microsoft YaHei" pitchFamily="34" charset="-122"/>
@@ -8122,7 +8005,7 @@
                   <a:tcPr marL="36576" marR="36576" marT="36576" marB="36576" anchor="ctr">
                     <a:lnL w="6350" cap="flat" cmpd="sng" algn="ctr">
                       <a:solidFill>
-                        <a:srgbClr val="D8E3EA"/>
+                        <a:srgbClr val="23465C"/>
                       </a:solidFill>
                       <a:prstDash val="solid"/>
                       <a:round/>
@@ -8131,7 +8014,7 @@
                     </a:lnL>
                     <a:lnR w="6350" cap="flat" cmpd="sng" algn="ctr">
                       <a:solidFill>
-                        <a:srgbClr val="D8E3EA"/>
+                        <a:srgbClr val="23465C"/>
                       </a:solidFill>
                       <a:prstDash val="solid"/>
                       <a:round/>
@@ -8140,7 +8023,7 @@
                     </a:lnR>
                     <a:lnT w="6350" cap="flat" cmpd="sng" algn="ctr">
                       <a:solidFill>
-                        <a:srgbClr val="D8E3EA"/>
+                        <a:srgbClr val="23465C"/>
                       </a:solidFill>
                       <a:prstDash val="solid"/>
                       <a:round/>
@@ -8149,7 +8032,7 @@
                     </a:lnT>
                     <a:lnB w="6350" cap="flat" cmpd="sng" algn="ctr">
                       <a:solidFill>
-                        <a:srgbClr val="D8E3EA"/>
+                        <a:srgbClr val="23465C"/>
                       </a:solidFill>
                       <a:prstDash val="solid"/>
                       <a:round/>
@@ -8157,7 +8040,7 @@
                       <a:tailEnd type="none" w="med" len="med"/>
                     </a:lnB>
                     <a:solidFill>
-                      <a:srgbClr val="FFFFFF"/>
+                      <a:srgbClr val="13314D"/>
                     </a:solidFill>
                   </a:tcPr>
                 </a:tc>
@@ -8172,7 +8055,7 @@
                       <a:r>
                         <a:rPr lang="en-US" sz="1050" dirty="0">
                           <a:solidFill>
-                            <a:srgbClr val="22303C"/>
+                            <a:srgbClr val="FFFFFF"/>
                           </a:solidFill>
                           <a:latin typeface="Microsoft YaHei" pitchFamily="34" charset="0"/>
                           <a:ea typeface="Microsoft YaHei" pitchFamily="34" charset="-122"/>
@@ -8190,7 +8073,7 @@
                   <a:tcPr marL="36576" marR="36576" marT="36576" marB="36576" anchor="ctr">
                     <a:lnL w="6350" cap="flat" cmpd="sng" algn="ctr">
                       <a:solidFill>
-                        <a:srgbClr val="D8E3EA"/>
+                        <a:srgbClr val="23465C"/>
                       </a:solidFill>
                       <a:prstDash val="solid"/>
                       <a:round/>
@@ -8199,7 +8082,7 @@
                     </a:lnL>
                     <a:lnR w="6350" cap="flat" cmpd="sng" algn="ctr">
                       <a:solidFill>
-                        <a:srgbClr val="D8E3EA"/>
+                        <a:srgbClr val="23465C"/>
                       </a:solidFill>
                       <a:prstDash val="solid"/>
                       <a:round/>
@@ -8208,7 +8091,7 @@
                     </a:lnR>
                     <a:lnT w="6350" cap="flat" cmpd="sng" algn="ctr">
                       <a:solidFill>
-                        <a:srgbClr val="D8E3EA"/>
+                        <a:srgbClr val="23465C"/>
                       </a:solidFill>
                       <a:prstDash val="solid"/>
                       <a:round/>
@@ -8217,7 +8100,7 @@
                     </a:lnT>
                     <a:lnB w="6350" cap="flat" cmpd="sng" algn="ctr">
                       <a:solidFill>
-                        <a:srgbClr val="D8E3EA"/>
+                        <a:srgbClr val="23465C"/>
                       </a:solidFill>
                       <a:prstDash val="solid"/>
                       <a:round/>
@@ -8225,7 +8108,7 @@
                       <a:tailEnd type="none" w="med" len="med"/>
                     </a:lnB>
                     <a:solidFill>
-                      <a:srgbClr val="FFFFFF"/>
+                      <a:srgbClr val="13314D"/>
                     </a:solidFill>
                   </a:tcPr>
                 </a:tc>
@@ -8240,7 +8123,7 @@
                       <a:r>
                         <a:rPr lang="en-US" sz="1050" dirty="0">
                           <a:solidFill>
-                            <a:srgbClr val="22303C"/>
+                            <a:srgbClr val="FFFFFF"/>
                           </a:solidFill>
                           <a:latin typeface="Microsoft YaHei" pitchFamily="34" charset="0"/>
                           <a:ea typeface="Microsoft YaHei" pitchFamily="34" charset="-122"/>
@@ -8258,7 +8141,7 @@
                   <a:tcPr marL="36576" marR="36576" marT="36576" marB="36576" anchor="ctr">
                     <a:lnL w="6350" cap="flat" cmpd="sng" algn="ctr">
                       <a:solidFill>
-                        <a:srgbClr val="D8E3EA"/>
+                        <a:srgbClr val="23465C"/>
                       </a:solidFill>
                       <a:prstDash val="solid"/>
                       <a:round/>
@@ -8267,7 +8150,7 @@
                     </a:lnL>
                     <a:lnR w="6350" cap="flat" cmpd="sng" algn="ctr">
                       <a:solidFill>
-                        <a:srgbClr val="D8E3EA"/>
+                        <a:srgbClr val="23465C"/>
                       </a:solidFill>
                       <a:prstDash val="solid"/>
                       <a:round/>
@@ -8276,7 +8159,7 @@
                     </a:lnR>
                     <a:lnT w="6350" cap="flat" cmpd="sng" algn="ctr">
                       <a:solidFill>
-                        <a:srgbClr val="D8E3EA"/>
+                        <a:srgbClr val="23465C"/>
                       </a:solidFill>
                       <a:prstDash val="solid"/>
                       <a:round/>
@@ -8285,7 +8168,7 @@
                     </a:lnT>
                     <a:lnB w="6350" cap="flat" cmpd="sng" algn="ctr">
                       <a:solidFill>
-                        <a:srgbClr val="D8E3EA"/>
+                        <a:srgbClr val="23465C"/>
                       </a:solidFill>
                       <a:prstDash val="solid"/>
                       <a:round/>
@@ -8293,7 +8176,7 @@
                       <a:tailEnd type="none" w="med" len="med"/>
                     </a:lnB>
                     <a:solidFill>
-                      <a:srgbClr val="FFFFFF"/>
+                      <a:srgbClr val="13314D"/>
                     </a:solidFill>
                   </a:tcPr>
                 </a:tc>
@@ -8308,7 +8191,7 @@
                       <a:r>
                         <a:rPr lang="en-US" sz="1050" dirty="0">
                           <a:solidFill>
-                            <a:srgbClr val="22303C"/>
+                            <a:srgbClr val="FFFFFF"/>
                           </a:solidFill>
                           <a:latin typeface="Microsoft YaHei" pitchFamily="34" charset="0"/>
                           <a:ea typeface="Microsoft YaHei" pitchFamily="34" charset="-122"/>
@@ -8326,7 +8209,7 @@
                   <a:tcPr marL="36576" marR="36576" marT="36576" marB="36576" anchor="ctr">
                     <a:lnL w="6350" cap="flat" cmpd="sng" algn="ctr">
                       <a:solidFill>
-                        <a:srgbClr val="D8E3EA"/>
+                        <a:srgbClr val="23465C"/>
                       </a:solidFill>
                       <a:prstDash val="solid"/>
                       <a:round/>
@@ -8335,7 +8218,7 @@
                     </a:lnL>
                     <a:lnR w="6350" cap="flat" cmpd="sng" algn="ctr">
                       <a:solidFill>
-                        <a:srgbClr val="D8E3EA"/>
+                        <a:srgbClr val="23465C"/>
                       </a:solidFill>
                       <a:prstDash val="solid"/>
                       <a:round/>
@@ -8344,7 +8227,7 @@
                     </a:lnR>
                     <a:lnT w="6350" cap="flat" cmpd="sng" algn="ctr">
                       <a:solidFill>
-                        <a:srgbClr val="D8E3EA"/>
+                        <a:srgbClr val="23465C"/>
                       </a:solidFill>
                       <a:prstDash val="solid"/>
                       <a:round/>
@@ -8353,7 +8236,7 @@
                     </a:lnT>
                     <a:lnB w="6350" cap="flat" cmpd="sng" algn="ctr">
                       <a:solidFill>
-                        <a:srgbClr val="D8E3EA"/>
+                        <a:srgbClr val="23465C"/>
                       </a:solidFill>
                       <a:prstDash val="solid"/>
                       <a:round/>
@@ -8361,7 +8244,7 @@
                       <a:tailEnd type="none" w="med" len="med"/>
                     </a:lnB>
                     <a:solidFill>
-                      <a:srgbClr val="FFFFFF"/>
+                      <a:srgbClr val="13314D"/>
                     </a:solidFill>
                   </a:tcPr>
                 </a:tc>
@@ -8383,7 +8266,7 @@
                       <a:r>
                         <a:rPr lang="en-US" sz="1050" dirty="0">
                           <a:solidFill>
-                            <a:srgbClr val="22303C"/>
+                            <a:srgbClr val="FFFFFF"/>
                           </a:solidFill>
                           <a:latin typeface="Microsoft YaHei" pitchFamily="34" charset="0"/>
                           <a:ea typeface="Microsoft YaHei" pitchFamily="34" charset="-122"/>
@@ -8401,7 +8284,7 @@
                   <a:tcPr marL="36576" marR="36576" marT="36576" marB="36576" anchor="ctr">
                     <a:lnL w="6350" cap="flat" cmpd="sng" algn="ctr">
                       <a:solidFill>
-                        <a:srgbClr val="D8E3EA"/>
+                        <a:srgbClr val="23465C"/>
                       </a:solidFill>
                       <a:prstDash val="solid"/>
                       <a:round/>
@@ -8410,7 +8293,7 @@
                     </a:lnL>
                     <a:lnR w="6350" cap="flat" cmpd="sng" algn="ctr">
                       <a:solidFill>
-                        <a:srgbClr val="D8E3EA"/>
+                        <a:srgbClr val="23465C"/>
                       </a:solidFill>
                       <a:prstDash val="solid"/>
                       <a:round/>
@@ -8419,7 +8302,7 @@
                     </a:lnR>
                     <a:lnT w="6350" cap="flat" cmpd="sng" algn="ctr">
                       <a:solidFill>
-                        <a:srgbClr val="D8E3EA"/>
+                        <a:srgbClr val="23465C"/>
                       </a:solidFill>
                       <a:prstDash val="solid"/>
                       <a:round/>
@@ -8428,7 +8311,7 @@
                     </a:lnT>
                     <a:lnB w="6350" cap="flat" cmpd="sng" algn="ctr">
                       <a:solidFill>
-                        <a:srgbClr val="D8E3EA"/>
+                        <a:srgbClr val="23465C"/>
                       </a:solidFill>
                       <a:prstDash val="solid"/>
                       <a:round/>
@@ -8436,7 +8319,7 @@
                       <a:tailEnd type="none" w="med" len="med"/>
                     </a:lnB>
                     <a:solidFill>
-                      <a:srgbClr val="F6F9FB"/>
+                      <a:srgbClr val="0F2436"/>
                     </a:solidFill>
                   </a:tcPr>
                 </a:tc>
@@ -8451,7 +8334,7 @@
                       <a:r>
                         <a:rPr lang="en-US" sz="1050" dirty="0">
                           <a:solidFill>
-                            <a:srgbClr val="22303C"/>
+                            <a:srgbClr val="FFFFFF"/>
                           </a:solidFill>
                           <a:latin typeface="Microsoft YaHei" pitchFamily="34" charset="0"/>
                           <a:ea typeface="Microsoft YaHei" pitchFamily="34" charset="-122"/>
@@ -8469,7 +8352,7 @@
                   <a:tcPr marL="36576" marR="36576" marT="36576" marB="36576" anchor="ctr">
                     <a:lnL w="6350" cap="flat" cmpd="sng" algn="ctr">
                       <a:solidFill>
-                        <a:srgbClr val="D8E3EA"/>
+                        <a:srgbClr val="23465C"/>
                       </a:solidFill>
                       <a:prstDash val="solid"/>
                       <a:round/>
@@ -8478,7 +8361,7 @@
                     </a:lnL>
                     <a:lnR w="6350" cap="flat" cmpd="sng" algn="ctr">
                       <a:solidFill>
-                        <a:srgbClr val="D8E3EA"/>
+                        <a:srgbClr val="23465C"/>
                       </a:solidFill>
                       <a:prstDash val="solid"/>
                       <a:round/>
@@ -8487,7 +8370,7 @@
                     </a:lnR>
                     <a:lnT w="6350" cap="flat" cmpd="sng" algn="ctr">
                       <a:solidFill>
-                        <a:srgbClr val="D8E3EA"/>
+                        <a:srgbClr val="23465C"/>
                       </a:solidFill>
                       <a:prstDash val="solid"/>
                       <a:round/>
@@ -8496,7 +8379,7 @@
                     </a:lnT>
                     <a:lnB w="6350" cap="flat" cmpd="sng" algn="ctr">
                       <a:solidFill>
-                        <a:srgbClr val="D8E3EA"/>
+                        <a:srgbClr val="23465C"/>
                       </a:solidFill>
                       <a:prstDash val="solid"/>
                       <a:round/>
@@ -8504,7 +8387,7 @@
                       <a:tailEnd type="none" w="med" len="med"/>
                     </a:lnB>
                     <a:solidFill>
-                      <a:srgbClr val="F6F9FB"/>
+                      <a:srgbClr val="0F2436"/>
                     </a:solidFill>
                   </a:tcPr>
                 </a:tc>
@@ -8519,7 +8402,7 @@
                       <a:r>
                         <a:rPr lang="en-US" sz="1050" dirty="0">
                           <a:solidFill>
-                            <a:srgbClr val="22303C"/>
+                            <a:srgbClr val="FFFFFF"/>
                           </a:solidFill>
                           <a:latin typeface="Microsoft YaHei" pitchFamily="34" charset="0"/>
                           <a:ea typeface="Microsoft YaHei" pitchFamily="34" charset="-122"/>
@@ -8537,7 +8420,7 @@
                   <a:tcPr marL="36576" marR="36576" marT="36576" marB="36576" anchor="ctr">
                     <a:lnL w="6350" cap="flat" cmpd="sng" algn="ctr">
                       <a:solidFill>
-                        <a:srgbClr val="D8E3EA"/>
+                        <a:srgbClr val="23465C"/>
                       </a:solidFill>
                       <a:prstDash val="solid"/>
                       <a:round/>
@@ -8546,7 +8429,7 @@
                     </a:lnL>
                     <a:lnR w="6350" cap="flat" cmpd="sng" algn="ctr">
                       <a:solidFill>
-                        <a:srgbClr val="D8E3EA"/>
+                        <a:srgbClr val="23465C"/>
                       </a:solidFill>
                       <a:prstDash val="solid"/>
                       <a:round/>
@@ -8555,7 +8438,7 @@
                     </a:lnR>
                     <a:lnT w="6350" cap="flat" cmpd="sng" algn="ctr">
                       <a:solidFill>
-                        <a:srgbClr val="D8E3EA"/>
+                        <a:srgbClr val="23465C"/>
                       </a:solidFill>
                       <a:prstDash val="solid"/>
                       <a:round/>
@@ -8564,7 +8447,7 @@
                     </a:lnT>
                     <a:lnB w="6350" cap="flat" cmpd="sng" algn="ctr">
                       <a:solidFill>
-                        <a:srgbClr val="D8E3EA"/>
+                        <a:srgbClr val="23465C"/>
                       </a:solidFill>
                       <a:prstDash val="solid"/>
                       <a:round/>
@@ -8572,7 +8455,7 @@
                       <a:tailEnd type="none" w="med" len="med"/>
                     </a:lnB>
                     <a:solidFill>
-                      <a:srgbClr val="F6F9FB"/>
+                      <a:srgbClr val="0F2436"/>
                     </a:solidFill>
                   </a:tcPr>
                 </a:tc>
@@ -8587,7 +8470,7 @@
                       <a:r>
                         <a:rPr lang="en-US" sz="1050" dirty="0">
                           <a:solidFill>
-                            <a:srgbClr val="22303C"/>
+                            <a:srgbClr val="FFFFFF"/>
                           </a:solidFill>
                           <a:latin typeface="Microsoft YaHei" pitchFamily="34" charset="0"/>
                           <a:ea typeface="Microsoft YaHei" pitchFamily="34" charset="-122"/>
@@ -8605,7 +8488,7 @@
                   <a:tcPr marL="36576" marR="36576" marT="36576" marB="36576" anchor="ctr">
                     <a:lnL w="6350" cap="flat" cmpd="sng" algn="ctr">
                       <a:solidFill>
-                        <a:srgbClr val="D8E3EA"/>
+                        <a:srgbClr val="23465C"/>
                       </a:solidFill>
                       <a:prstDash val="solid"/>
                       <a:round/>
@@ -8614,7 +8497,7 @@
                     </a:lnL>
                     <a:lnR w="6350" cap="flat" cmpd="sng" algn="ctr">
                       <a:solidFill>
-                        <a:srgbClr val="D8E3EA"/>
+                        <a:srgbClr val="23465C"/>
                       </a:solidFill>
                       <a:prstDash val="solid"/>
                       <a:round/>
@@ -8623,7 +8506,7 @@
                     </a:lnR>
                     <a:lnT w="6350" cap="flat" cmpd="sng" algn="ctr">
                       <a:solidFill>
-                        <a:srgbClr val="D8E3EA"/>
+                        <a:srgbClr val="23465C"/>
                       </a:solidFill>
                       <a:prstDash val="solid"/>
                       <a:round/>
@@ -8632,7 +8515,7 @@
                     </a:lnT>
                     <a:lnB w="6350" cap="flat" cmpd="sng" algn="ctr">
                       <a:solidFill>
-                        <a:srgbClr val="D8E3EA"/>
+                        <a:srgbClr val="23465C"/>
                       </a:solidFill>
                       <a:prstDash val="solid"/>
                       <a:round/>
@@ -8640,7 +8523,7 @@
                       <a:tailEnd type="none" w="med" len="med"/>
                     </a:lnB>
                     <a:solidFill>
-                      <a:srgbClr val="F6F9FB"/>
+                      <a:srgbClr val="0F2436"/>
                     </a:solidFill>
                   </a:tcPr>
                 </a:tc>
@@ -8655,7 +8538,7 @@
                       <a:r>
                         <a:rPr lang="en-US" sz="1050" dirty="0">
                           <a:solidFill>
-                            <a:srgbClr val="22303C"/>
+                            <a:srgbClr val="FFFFFF"/>
                           </a:solidFill>
                           <a:latin typeface="Microsoft YaHei" pitchFamily="34" charset="0"/>
                           <a:ea typeface="Microsoft YaHei" pitchFamily="34" charset="-122"/>
@@ -8673,7 +8556,7 @@
                   <a:tcPr marL="36576" marR="36576" marT="36576" marB="36576" anchor="ctr">
                     <a:lnL w="6350" cap="flat" cmpd="sng" algn="ctr">
                       <a:solidFill>
-                        <a:srgbClr val="D8E3EA"/>
+                        <a:srgbClr val="23465C"/>
                       </a:solidFill>
                       <a:prstDash val="solid"/>
                       <a:round/>
@@ -8682,7 +8565,7 @@
                     </a:lnL>
                     <a:lnR w="6350" cap="flat" cmpd="sng" algn="ctr">
                       <a:solidFill>
-                        <a:srgbClr val="D8E3EA"/>
+                        <a:srgbClr val="23465C"/>
                       </a:solidFill>
                       <a:prstDash val="solid"/>
                       <a:round/>
@@ -8691,7 +8574,7 @@
                     </a:lnR>
                     <a:lnT w="6350" cap="flat" cmpd="sng" algn="ctr">
                       <a:solidFill>
-                        <a:srgbClr val="D8E3EA"/>
+                        <a:srgbClr val="23465C"/>
                       </a:solidFill>
                       <a:prstDash val="solid"/>
                       <a:round/>
@@ -8700,7 +8583,7 @@
                     </a:lnT>
                     <a:lnB w="6350" cap="flat" cmpd="sng" algn="ctr">
                       <a:solidFill>
-                        <a:srgbClr val="D8E3EA"/>
+                        <a:srgbClr val="23465C"/>
                       </a:solidFill>
                       <a:prstDash val="solid"/>
                       <a:round/>
@@ -8708,7 +8591,7 @@
                       <a:tailEnd type="none" w="med" len="med"/>
                     </a:lnB>
                     <a:solidFill>
-                      <a:srgbClr val="F6F9FB"/>
+                      <a:srgbClr val="0F2436"/>
                     </a:solidFill>
                   </a:tcPr>
                 </a:tc>
@@ -8723,7 +8606,7 @@
                       <a:r>
                         <a:rPr lang="en-US" sz="1050" dirty="0">
                           <a:solidFill>
-                            <a:srgbClr val="22303C"/>
+                            <a:srgbClr val="FFFFFF"/>
                           </a:solidFill>
                           <a:latin typeface="Microsoft YaHei" pitchFamily="34" charset="0"/>
                           <a:ea typeface="Microsoft YaHei" pitchFamily="34" charset="-122"/>
@@ -8741,7 +8624,7 @@
                   <a:tcPr marL="36576" marR="36576" marT="36576" marB="36576" anchor="ctr">
                     <a:lnL w="6350" cap="flat" cmpd="sng" algn="ctr">
                       <a:solidFill>
-                        <a:srgbClr val="D8E3EA"/>
+                        <a:srgbClr val="23465C"/>
                       </a:solidFill>
                       <a:prstDash val="solid"/>
                       <a:round/>
@@ -8750,7 +8633,7 @@
                     </a:lnL>
                     <a:lnR w="6350" cap="flat" cmpd="sng" algn="ctr">
                       <a:solidFill>
-                        <a:srgbClr val="D8E3EA"/>
+                        <a:srgbClr val="23465C"/>
                       </a:solidFill>
                       <a:prstDash val="solid"/>
                       <a:round/>
@@ -8759,7 +8642,7 @@
                     </a:lnR>
                     <a:lnT w="6350" cap="flat" cmpd="sng" algn="ctr">
                       <a:solidFill>
-                        <a:srgbClr val="D8E3EA"/>
+                        <a:srgbClr val="23465C"/>
                       </a:solidFill>
                       <a:prstDash val="solid"/>
                       <a:round/>
@@ -8768,7 +8651,7 @@
                     </a:lnT>
                     <a:lnB w="6350" cap="flat" cmpd="sng" algn="ctr">
                       <a:solidFill>
-                        <a:srgbClr val="D8E3EA"/>
+                        <a:srgbClr val="23465C"/>
                       </a:solidFill>
                       <a:prstDash val="solid"/>
                       <a:round/>
@@ -8776,7 +8659,7 @@
                       <a:tailEnd type="none" w="med" len="med"/>
                     </a:lnB>
                     <a:solidFill>
-                      <a:srgbClr val="F6F9FB"/>
+                      <a:srgbClr val="0F2436"/>
                     </a:solidFill>
                   </a:tcPr>
                 </a:tc>
@@ -8798,7 +8681,7 @@
                       <a:r>
                         <a:rPr lang="en-US" sz="1050" dirty="0">
                           <a:solidFill>
-                            <a:srgbClr val="22303C"/>
+                            <a:srgbClr val="FFFFFF"/>
                           </a:solidFill>
                           <a:latin typeface="Microsoft YaHei" pitchFamily="34" charset="0"/>
                           <a:ea typeface="Microsoft YaHei" pitchFamily="34" charset="-122"/>
@@ -8816,7 +8699,7 @@
                   <a:tcPr marL="36576" marR="36576" marT="36576" marB="36576" anchor="ctr">
                     <a:lnL w="6350" cap="flat" cmpd="sng" algn="ctr">
                       <a:solidFill>
-                        <a:srgbClr val="D8E3EA"/>
+                        <a:srgbClr val="23465C"/>
                       </a:solidFill>
                       <a:prstDash val="solid"/>
                       <a:round/>
@@ -8825,7 +8708,7 @@
                     </a:lnL>
                     <a:lnR w="6350" cap="flat" cmpd="sng" algn="ctr">
                       <a:solidFill>
-                        <a:srgbClr val="D8E3EA"/>
+                        <a:srgbClr val="23465C"/>
                       </a:solidFill>
                       <a:prstDash val="solid"/>
                       <a:round/>
@@ -8834,7 +8717,7 @@
                     </a:lnR>
                     <a:lnT w="6350" cap="flat" cmpd="sng" algn="ctr">
                       <a:solidFill>
-                        <a:srgbClr val="D8E3EA"/>
+                        <a:srgbClr val="23465C"/>
                       </a:solidFill>
                       <a:prstDash val="solid"/>
                       <a:round/>
@@ -8843,7 +8726,7 @@
                     </a:lnT>
                     <a:lnB w="6350" cap="flat" cmpd="sng" algn="ctr">
                       <a:solidFill>
-                        <a:srgbClr val="D8E3EA"/>
+                        <a:srgbClr val="23465C"/>
                       </a:solidFill>
                       <a:prstDash val="solid"/>
                       <a:round/>
@@ -8851,7 +8734,7 @@
                       <a:tailEnd type="none" w="med" len="med"/>
                     </a:lnB>
                     <a:solidFill>
-                      <a:srgbClr val="FFFFFF"/>
+                      <a:srgbClr val="13314D"/>
                     </a:solidFill>
                   </a:tcPr>
                 </a:tc>
@@ -8866,7 +8749,7 @@
                       <a:r>
                         <a:rPr lang="en-US" sz="1050" dirty="0">
                           <a:solidFill>
-                            <a:srgbClr val="22303C"/>
+                            <a:srgbClr val="FFFFFF"/>
                           </a:solidFill>
                           <a:latin typeface="Microsoft YaHei" pitchFamily="34" charset="0"/>
                           <a:ea typeface="Microsoft YaHei" pitchFamily="34" charset="-122"/>
@@ -8884,7 +8767,7 @@
                   <a:tcPr marL="36576" marR="36576" marT="36576" marB="36576" anchor="ctr">
                     <a:lnL w="6350" cap="flat" cmpd="sng" algn="ctr">
                       <a:solidFill>
-                        <a:srgbClr val="D8E3EA"/>
+                        <a:srgbClr val="23465C"/>
                       </a:solidFill>
                       <a:prstDash val="solid"/>
                       <a:round/>
@@ -8893,7 +8776,7 @@
                     </a:lnL>
                     <a:lnR w="6350" cap="flat" cmpd="sng" algn="ctr">
                       <a:solidFill>
-                        <a:srgbClr val="D8E3EA"/>
+                        <a:srgbClr val="23465C"/>
                       </a:solidFill>
                       <a:prstDash val="solid"/>
                       <a:round/>
@@ -8902,7 +8785,7 @@
                     </a:lnR>
                     <a:lnT w="6350" cap="flat" cmpd="sng" algn="ctr">
                       <a:solidFill>
-                        <a:srgbClr val="D8E3EA"/>
+                        <a:srgbClr val="23465C"/>
                       </a:solidFill>
                       <a:prstDash val="solid"/>
                       <a:round/>
@@ -8911,7 +8794,7 @@
                     </a:lnT>
                     <a:lnB w="6350" cap="flat" cmpd="sng" algn="ctr">
                       <a:solidFill>
-                        <a:srgbClr val="D8E3EA"/>
+                        <a:srgbClr val="23465C"/>
                       </a:solidFill>
                       <a:prstDash val="solid"/>
                       <a:round/>
@@ -8919,7 +8802,7 @@
                       <a:tailEnd type="none" w="med" len="med"/>
                     </a:lnB>
                     <a:solidFill>
-                      <a:srgbClr val="FFFFFF"/>
+                      <a:srgbClr val="13314D"/>
                     </a:solidFill>
                   </a:tcPr>
                 </a:tc>
@@ -8934,7 +8817,7 @@
                       <a:r>
                         <a:rPr lang="en-US" sz="1050" dirty="0">
                           <a:solidFill>
-                            <a:srgbClr val="22303C"/>
+                            <a:srgbClr val="FFFFFF"/>
                           </a:solidFill>
                           <a:latin typeface="Microsoft YaHei" pitchFamily="34" charset="0"/>
                           <a:ea typeface="Microsoft YaHei" pitchFamily="34" charset="-122"/>
@@ -8952,7 +8835,7 @@
                   <a:tcPr marL="36576" marR="36576" marT="36576" marB="36576" anchor="ctr">
                     <a:lnL w="6350" cap="flat" cmpd="sng" algn="ctr">
                       <a:solidFill>
-                        <a:srgbClr val="D8E3EA"/>
+                        <a:srgbClr val="23465C"/>
                       </a:solidFill>
                       <a:prstDash val="solid"/>
                       <a:round/>
@@ -8961,7 +8844,7 @@
                     </a:lnL>
                     <a:lnR w="6350" cap="flat" cmpd="sng" algn="ctr">
                       <a:solidFill>
-                        <a:srgbClr val="D8E3EA"/>
+                        <a:srgbClr val="23465C"/>
                       </a:solidFill>
                       <a:prstDash val="solid"/>
                       <a:round/>
@@ -8970,7 +8853,7 @@
                     </a:lnR>
                     <a:lnT w="6350" cap="flat" cmpd="sng" algn="ctr">
                       <a:solidFill>
-                        <a:srgbClr val="D8E3EA"/>
+                        <a:srgbClr val="23465C"/>
                       </a:solidFill>
                       <a:prstDash val="solid"/>
                       <a:round/>
@@ -8979,7 +8862,7 @@
                     </a:lnT>
                     <a:lnB w="6350" cap="flat" cmpd="sng" algn="ctr">
                       <a:solidFill>
-                        <a:srgbClr val="D8E3EA"/>
+                        <a:srgbClr val="23465C"/>
                       </a:solidFill>
                       <a:prstDash val="solid"/>
                       <a:round/>
@@ -8987,7 +8870,7 @@
                       <a:tailEnd type="none" w="med" len="med"/>
                     </a:lnB>
                     <a:solidFill>
-                      <a:srgbClr val="FFFFFF"/>
+                      <a:srgbClr val="13314D"/>
                     </a:solidFill>
                   </a:tcPr>
                 </a:tc>
@@ -9002,7 +8885,7 @@
                       <a:r>
                         <a:rPr lang="en-US" sz="1050" dirty="0">
                           <a:solidFill>
-                            <a:srgbClr val="22303C"/>
+                            <a:srgbClr val="FFFFFF"/>
                           </a:solidFill>
                           <a:latin typeface="Microsoft YaHei" pitchFamily="34" charset="0"/>
                           <a:ea typeface="Microsoft YaHei" pitchFamily="34" charset="-122"/>
@@ -9020,7 +8903,7 @@
                   <a:tcPr marL="36576" marR="36576" marT="36576" marB="36576" anchor="ctr">
                     <a:lnL w="6350" cap="flat" cmpd="sng" algn="ctr">
                       <a:solidFill>
-                        <a:srgbClr val="D8E3EA"/>
+                        <a:srgbClr val="23465C"/>
                       </a:solidFill>
                       <a:prstDash val="solid"/>
                       <a:round/>
@@ -9029,7 +8912,7 @@
                     </a:lnL>
                     <a:lnR w="6350" cap="flat" cmpd="sng" algn="ctr">
                       <a:solidFill>
-                        <a:srgbClr val="D8E3EA"/>
+                        <a:srgbClr val="23465C"/>
                       </a:solidFill>
                       <a:prstDash val="solid"/>
                       <a:round/>
@@ -9038,7 +8921,7 @@
                     </a:lnR>
                     <a:lnT w="6350" cap="flat" cmpd="sng" algn="ctr">
                       <a:solidFill>
-                        <a:srgbClr val="D8E3EA"/>
+                        <a:srgbClr val="23465C"/>
                       </a:solidFill>
                       <a:prstDash val="solid"/>
                       <a:round/>
@@ -9047,7 +8930,7 @@
                     </a:lnT>
                     <a:lnB w="6350" cap="flat" cmpd="sng" algn="ctr">
                       <a:solidFill>
-                        <a:srgbClr val="D8E3EA"/>
+                        <a:srgbClr val="23465C"/>
                       </a:solidFill>
                       <a:prstDash val="solid"/>
                       <a:round/>
@@ -9055,7 +8938,7 @@
                       <a:tailEnd type="none" w="med" len="med"/>
                     </a:lnB>
                     <a:solidFill>
-                      <a:srgbClr val="FFFFFF"/>
+                      <a:srgbClr val="13314D"/>
                     </a:solidFill>
                   </a:tcPr>
                 </a:tc>
@@ -9070,7 +8953,7 @@
                       <a:r>
                         <a:rPr lang="en-US" sz="1050" dirty="0">
                           <a:solidFill>
-                            <a:srgbClr val="22303C"/>
+                            <a:srgbClr val="FFFFFF"/>
                           </a:solidFill>
                           <a:latin typeface="Microsoft YaHei" pitchFamily="34" charset="0"/>
                           <a:ea typeface="Microsoft YaHei" pitchFamily="34" charset="-122"/>
@@ -9088,7 +8971,7 @@
                   <a:tcPr marL="36576" marR="36576" marT="36576" marB="36576" anchor="ctr">
                     <a:lnL w="6350" cap="flat" cmpd="sng" algn="ctr">
                       <a:solidFill>
-                        <a:srgbClr val="D8E3EA"/>
+                        <a:srgbClr val="23465C"/>
                       </a:solidFill>
                       <a:prstDash val="solid"/>
                       <a:round/>
@@ -9097,7 +8980,7 @@
                     </a:lnL>
                     <a:lnR w="6350" cap="flat" cmpd="sng" algn="ctr">
                       <a:solidFill>
-                        <a:srgbClr val="D8E3EA"/>
+                        <a:srgbClr val="23465C"/>
                       </a:solidFill>
                       <a:prstDash val="solid"/>
                       <a:round/>
@@ -9106,7 +8989,7 @@
                     </a:lnR>
                     <a:lnT w="6350" cap="flat" cmpd="sng" algn="ctr">
                       <a:solidFill>
-                        <a:srgbClr val="D8E3EA"/>
+                        <a:srgbClr val="23465C"/>
                       </a:solidFill>
                       <a:prstDash val="solid"/>
                       <a:round/>
@@ -9115,7 +8998,7 @@
                     </a:lnT>
                     <a:lnB w="6350" cap="flat" cmpd="sng" algn="ctr">
                       <a:solidFill>
-                        <a:srgbClr val="D8E3EA"/>
+                        <a:srgbClr val="23465C"/>
                       </a:solidFill>
                       <a:prstDash val="solid"/>
                       <a:round/>
@@ -9123,7 +9006,7 @@
                       <a:tailEnd type="none" w="med" len="med"/>
                     </a:lnB>
                     <a:solidFill>
-                      <a:srgbClr val="FFFFFF"/>
+                      <a:srgbClr val="13314D"/>
                     </a:solidFill>
                   </a:tcPr>
                 </a:tc>
@@ -9138,7 +9021,7 @@
                       <a:r>
                         <a:rPr lang="en-US" sz="1050" dirty="0">
                           <a:solidFill>
-                            <a:srgbClr val="22303C"/>
+                            <a:srgbClr val="FFFFFF"/>
                           </a:solidFill>
                           <a:latin typeface="Microsoft YaHei" pitchFamily="34" charset="0"/>
                           <a:ea typeface="Microsoft YaHei" pitchFamily="34" charset="-122"/>
@@ -9156,7 +9039,7 @@
                   <a:tcPr marL="36576" marR="36576" marT="36576" marB="36576" anchor="ctr">
                     <a:lnL w="6350" cap="flat" cmpd="sng" algn="ctr">
                       <a:solidFill>
-                        <a:srgbClr val="D8E3EA"/>
+                        <a:srgbClr val="23465C"/>
                       </a:solidFill>
                       <a:prstDash val="solid"/>
                       <a:round/>
@@ -9165,7 +9048,7 @@
                     </a:lnL>
                     <a:lnR w="6350" cap="flat" cmpd="sng" algn="ctr">
                       <a:solidFill>
-                        <a:srgbClr val="D8E3EA"/>
+                        <a:srgbClr val="23465C"/>
                       </a:solidFill>
                       <a:prstDash val="solid"/>
                       <a:round/>
@@ -9174,7 +9057,7 @@
                     </a:lnR>
                     <a:lnT w="6350" cap="flat" cmpd="sng" algn="ctr">
                       <a:solidFill>
-                        <a:srgbClr val="D8E3EA"/>
+                        <a:srgbClr val="23465C"/>
                       </a:solidFill>
                       <a:prstDash val="solid"/>
                       <a:round/>
@@ -9183,7 +9066,7 @@
                     </a:lnT>
                     <a:lnB w="6350" cap="flat" cmpd="sng" algn="ctr">
                       <a:solidFill>
-                        <a:srgbClr val="D8E3EA"/>
+                        <a:srgbClr val="23465C"/>
                       </a:solidFill>
                       <a:prstDash val="solid"/>
                       <a:round/>
@@ -9191,7 +9074,7 @@
                       <a:tailEnd type="none" w="med" len="med"/>
                     </a:lnB>
                     <a:solidFill>
-                      <a:srgbClr val="FFFFFF"/>
+                      <a:srgbClr val="13314D"/>
                     </a:solidFill>
                   </a:tcPr>
                 </a:tc>
@@ -9213,7 +9096,7 @@
                       <a:r>
                         <a:rPr lang="en-US" sz="1050" dirty="0">
                           <a:solidFill>
-                            <a:srgbClr val="22303C"/>
+                            <a:srgbClr val="FFFFFF"/>
                           </a:solidFill>
                           <a:latin typeface="Microsoft YaHei" pitchFamily="34" charset="0"/>
                           <a:ea typeface="Microsoft YaHei" pitchFamily="34" charset="-122"/>
@@ -9231,7 +9114,7 @@
                   <a:tcPr marL="36576" marR="36576" marT="36576" marB="36576" anchor="ctr">
                     <a:lnL w="6350" cap="flat" cmpd="sng" algn="ctr">
                       <a:solidFill>
-                        <a:srgbClr val="D8E3EA"/>
+                        <a:srgbClr val="23465C"/>
                       </a:solidFill>
                       <a:prstDash val="solid"/>
                       <a:round/>
@@ -9240,7 +9123,7 @@
                     </a:lnL>
                     <a:lnR w="6350" cap="flat" cmpd="sng" algn="ctr">
                       <a:solidFill>
-                        <a:srgbClr val="D8E3EA"/>
+                        <a:srgbClr val="23465C"/>
                       </a:solidFill>
                       <a:prstDash val="solid"/>
                       <a:round/>
@@ -9249,7 +9132,7 @@
                     </a:lnR>
                     <a:lnT w="6350" cap="flat" cmpd="sng" algn="ctr">
                       <a:solidFill>
-                        <a:srgbClr val="D8E3EA"/>
+                        <a:srgbClr val="23465C"/>
                       </a:solidFill>
                       <a:prstDash val="solid"/>
                       <a:round/>
@@ -9258,7 +9141,7 @@
                     </a:lnT>
                     <a:lnB w="6350" cap="flat" cmpd="sng" algn="ctr">
                       <a:solidFill>
-                        <a:srgbClr val="D8E3EA"/>
+                        <a:srgbClr val="23465C"/>
                       </a:solidFill>
                       <a:prstDash val="solid"/>
                       <a:round/>
@@ -9281,7 +9164,7 @@
                       <a:r>
                         <a:rPr lang="en-US" sz="1050" dirty="0">
                           <a:solidFill>
-                            <a:srgbClr val="22303C"/>
+                            <a:srgbClr val="FFFFFF"/>
                           </a:solidFill>
                           <a:latin typeface="Microsoft YaHei" pitchFamily="34" charset="0"/>
                           <a:ea typeface="Microsoft YaHei" pitchFamily="34" charset="-122"/>
@@ -9299,7 +9182,7 @@
                   <a:tcPr marL="36576" marR="36576" marT="36576" marB="36576" anchor="ctr">
                     <a:lnL w="6350" cap="flat" cmpd="sng" algn="ctr">
                       <a:solidFill>
-                        <a:srgbClr val="D8E3EA"/>
+                        <a:srgbClr val="23465C"/>
                       </a:solidFill>
                       <a:prstDash val="solid"/>
                       <a:round/>
@@ -9308,7 +9191,7 @@
                     </a:lnL>
                     <a:lnR w="6350" cap="flat" cmpd="sng" algn="ctr">
                       <a:solidFill>
-                        <a:srgbClr val="D8E3EA"/>
+                        <a:srgbClr val="23465C"/>
                       </a:solidFill>
                       <a:prstDash val="solid"/>
                       <a:round/>
@@ -9317,7 +9200,7 @@
                     </a:lnR>
                     <a:lnT w="6350" cap="flat" cmpd="sng" algn="ctr">
                       <a:solidFill>
-                        <a:srgbClr val="D8E3EA"/>
+                        <a:srgbClr val="23465C"/>
                       </a:solidFill>
                       <a:prstDash val="solid"/>
                       <a:round/>
@@ -9326,7 +9209,7 @@
                     </a:lnT>
                     <a:lnB w="6350" cap="flat" cmpd="sng" algn="ctr">
                       <a:solidFill>
-                        <a:srgbClr val="D8E3EA"/>
+                        <a:srgbClr val="23465C"/>
                       </a:solidFill>
                       <a:prstDash val="solid"/>
                       <a:round/>
@@ -9349,7 +9232,7 @@
                       <a:r>
                         <a:rPr lang="en-US" sz="1050" dirty="0">
                           <a:solidFill>
-                            <a:srgbClr val="22303C"/>
+                            <a:srgbClr val="FFFFFF"/>
                           </a:solidFill>
                           <a:latin typeface="Microsoft YaHei" pitchFamily="34" charset="0"/>
                           <a:ea typeface="Microsoft YaHei" pitchFamily="34" charset="-122"/>
@@ -9367,7 +9250,7 @@
                   <a:tcPr marL="36576" marR="36576" marT="36576" marB="36576" anchor="ctr">
                     <a:lnL w="6350" cap="flat" cmpd="sng" algn="ctr">
                       <a:solidFill>
-                        <a:srgbClr val="D8E3EA"/>
+                        <a:srgbClr val="23465C"/>
                       </a:solidFill>
                       <a:prstDash val="solid"/>
                       <a:round/>
@@ -9376,7 +9259,7 @@
                     </a:lnL>
                     <a:lnR w="6350" cap="flat" cmpd="sng" algn="ctr">
                       <a:solidFill>
-                        <a:srgbClr val="D8E3EA"/>
+                        <a:srgbClr val="23465C"/>
                       </a:solidFill>
                       <a:prstDash val="solid"/>
                       <a:round/>
@@ -9385,7 +9268,7 @@
                     </a:lnR>
                     <a:lnT w="6350" cap="flat" cmpd="sng" algn="ctr">
                       <a:solidFill>
-                        <a:srgbClr val="D8E3EA"/>
+                        <a:srgbClr val="23465C"/>
                       </a:solidFill>
                       <a:prstDash val="solid"/>
                       <a:round/>
@@ -9394,7 +9277,7 @@
                     </a:lnT>
                     <a:lnB w="6350" cap="flat" cmpd="sng" algn="ctr">
                       <a:solidFill>
-                        <a:srgbClr val="D8E3EA"/>
+                        <a:srgbClr val="23465C"/>
                       </a:solidFill>
                       <a:prstDash val="solid"/>
                       <a:round/>
@@ -9417,7 +9300,7 @@
                       <a:r>
                         <a:rPr lang="en-US" sz="1050" dirty="0">
                           <a:solidFill>
-                            <a:srgbClr val="22303C"/>
+                            <a:srgbClr val="FFFFFF"/>
                           </a:solidFill>
                           <a:latin typeface="Microsoft YaHei" pitchFamily="34" charset="0"/>
                           <a:ea typeface="Microsoft YaHei" pitchFamily="34" charset="-122"/>
@@ -9435,7 +9318,7 @@
                   <a:tcPr marL="36576" marR="36576" marT="36576" marB="36576" anchor="ctr">
                     <a:lnL w="6350" cap="flat" cmpd="sng" algn="ctr">
                       <a:solidFill>
-                        <a:srgbClr val="D8E3EA"/>
+                        <a:srgbClr val="23465C"/>
                       </a:solidFill>
                       <a:prstDash val="solid"/>
                       <a:round/>
@@ -9444,7 +9327,7 @@
                     </a:lnL>
                     <a:lnR w="6350" cap="flat" cmpd="sng" algn="ctr">
                       <a:solidFill>
-                        <a:srgbClr val="D8E3EA"/>
+                        <a:srgbClr val="23465C"/>
                       </a:solidFill>
                       <a:prstDash val="solid"/>
                       <a:round/>
@@ -9453,7 +9336,7 @@
                     </a:lnR>
                     <a:lnT w="6350" cap="flat" cmpd="sng" algn="ctr">
                       <a:solidFill>
-                        <a:srgbClr val="D8E3EA"/>
+                        <a:srgbClr val="23465C"/>
                       </a:solidFill>
                       <a:prstDash val="solid"/>
                       <a:round/>
@@ -9462,7 +9345,7 @@
                     </a:lnT>
                     <a:lnB w="6350" cap="flat" cmpd="sng" algn="ctr">
                       <a:solidFill>
-                        <a:srgbClr val="D8E3EA"/>
+                        <a:srgbClr val="23465C"/>
                       </a:solidFill>
                       <a:prstDash val="solid"/>
                       <a:round/>
@@ -9485,7 +9368,7 @@
                       <a:r>
                         <a:rPr lang="en-US" sz="1050" dirty="0">
                           <a:solidFill>
-                            <a:srgbClr val="22303C"/>
+                            <a:srgbClr val="FFFFFF"/>
                           </a:solidFill>
                           <a:latin typeface="Microsoft YaHei" pitchFamily="34" charset="0"/>
                           <a:ea typeface="Microsoft YaHei" pitchFamily="34" charset="-122"/>
@@ -9503,7 +9386,7 @@
                   <a:tcPr marL="36576" marR="36576" marT="36576" marB="36576" anchor="ctr">
                     <a:lnL w="6350" cap="flat" cmpd="sng" algn="ctr">
                       <a:solidFill>
-                        <a:srgbClr val="D8E3EA"/>
+                        <a:srgbClr val="23465C"/>
                       </a:solidFill>
                       <a:prstDash val="solid"/>
                       <a:round/>
@@ -9512,7 +9395,7 @@
                     </a:lnL>
                     <a:lnR w="6350" cap="flat" cmpd="sng" algn="ctr">
                       <a:solidFill>
-                        <a:srgbClr val="D8E3EA"/>
+                        <a:srgbClr val="23465C"/>
                       </a:solidFill>
                       <a:prstDash val="solid"/>
                       <a:round/>
@@ -9521,7 +9404,7 @@
                     </a:lnR>
                     <a:lnT w="6350" cap="flat" cmpd="sng" algn="ctr">
                       <a:solidFill>
-                        <a:srgbClr val="D8E3EA"/>
+                        <a:srgbClr val="23465C"/>
                       </a:solidFill>
                       <a:prstDash val="solid"/>
                       <a:round/>
@@ -9530,7 +9413,7 @@
                     </a:lnT>
                     <a:lnB w="6350" cap="flat" cmpd="sng" algn="ctr">
                       <a:solidFill>
-                        <a:srgbClr val="D8E3EA"/>
+                        <a:srgbClr val="23465C"/>
                       </a:solidFill>
                       <a:prstDash val="solid"/>
                       <a:round/>
@@ -9553,7 +9436,7 @@
                       <a:r>
                         <a:rPr lang="en-US" sz="1050" dirty="0">
                           <a:solidFill>
-                            <a:srgbClr val="22303C"/>
+                            <a:srgbClr val="FFFFFF"/>
                           </a:solidFill>
                           <a:latin typeface="Microsoft YaHei" pitchFamily="34" charset="0"/>
                           <a:ea typeface="Microsoft YaHei" pitchFamily="34" charset="-122"/>
@@ -9571,7 +9454,7 @@
                   <a:tcPr marL="36576" marR="36576" marT="36576" marB="36576" anchor="ctr">
                     <a:lnL w="6350" cap="flat" cmpd="sng" algn="ctr">
                       <a:solidFill>
-                        <a:srgbClr val="D8E3EA"/>
+                        <a:srgbClr val="23465C"/>
                       </a:solidFill>
                       <a:prstDash val="solid"/>
                       <a:round/>
@@ -9580,7 +9463,7 @@
                     </a:lnL>
                     <a:lnR w="6350" cap="flat" cmpd="sng" algn="ctr">
                       <a:solidFill>
-                        <a:srgbClr val="D8E3EA"/>
+                        <a:srgbClr val="23465C"/>
                       </a:solidFill>
                       <a:prstDash val="solid"/>
                       <a:round/>
@@ -9589,7 +9472,7 @@
                     </a:lnR>
                     <a:lnT w="6350" cap="flat" cmpd="sng" algn="ctr">
                       <a:solidFill>
-                        <a:srgbClr val="D8E3EA"/>
+                        <a:srgbClr val="23465C"/>
                       </a:solidFill>
                       <a:prstDash val="solid"/>
                       <a:round/>
@@ -9598,7 +9481,7 @@
                     </a:lnT>
                     <a:lnB w="6350" cap="flat" cmpd="sng" algn="ctr">
                       <a:solidFill>
-                        <a:srgbClr val="D8E3EA"/>
+                        <a:srgbClr val="23465C"/>
                       </a:solidFill>
                       <a:prstDash val="solid"/>
                       <a:round/>
@@ -9628,7 +9511,7 @@
                       <a:r>
                         <a:rPr lang="en-US" sz="1050" dirty="0">
                           <a:solidFill>
-                            <a:srgbClr val="22303C"/>
+                            <a:srgbClr val="FFFFFF"/>
                           </a:solidFill>
                           <a:latin typeface="Microsoft YaHei" pitchFamily="34" charset="0"/>
                           <a:ea typeface="Microsoft YaHei" pitchFamily="34" charset="-122"/>
@@ -9646,7 +9529,7 @@
                   <a:tcPr marL="36576" marR="36576" marT="36576" marB="36576" anchor="ctr">
                     <a:lnL w="6350" cap="flat" cmpd="sng" algn="ctr">
                       <a:solidFill>
-                        <a:srgbClr val="D8E3EA"/>
+                        <a:srgbClr val="23465C"/>
                       </a:solidFill>
                       <a:prstDash val="solid"/>
                       <a:round/>
@@ -9655,7 +9538,7 @@
                     </a:lnL>
                     <a:lnR w="6350" cap="flat" cmpd="sng" algn="ctr">
                       <a:solidFill>
-                        <a:srgbClr val="D8E3EA"/>
+                        <a:srgbClr val="23465C"/>
                       </a:solidFill>
                       <a:prstDash val="solid"/>
                       <a:round/>
@@ -9664,7 +9547,7 @@
                     </a:lnR>
                     <a:lnT w="6350" cap="flat" cmpd="sng" algn="ctr">
                       <a:solidFill>
-                        <a:srgbClr val="D8E3EA"/>
+                        <a:srgbClr val="23465C"/>
                       </a:solidFill>
                       <a:prstDash val="solid"/>
                       <a:round/>
@@ -9673,7 +9556,7 @@
                     </a:lnT>
                     <a:lnB w="6350" cap="flat" cmpd="sng" algn="ctr">
                       <a:solidFill>
-                        <a:srgbClr val="D8E3EA"/>
+                        <a:srgbClr val="23465C"/>
                       </a:solidFill>
                       <a:prstDash val="solid"/>
                       <a:round/>
@@ -9696,7 +9579,7 @@
                       <a:r>
                         <a:rPr lang="en-US" sz="1050" dirty="0">
                           <a:solidFill>
-                            <a:srgbClr val="22303C"/>
+                            <a:srgbClr val="FFFFFF"/>
                           </a:solidFill>
                           <a:latin typeface="Microsoft YaHei" pitchFamily="34" charset="0"/>
                           <a:ea typeface="Microsoft YaHei" pitchFamily="34" charset="-122"/>
@@ -9714,7 +9597,7 @@
                   <a:tcPr marL="36576" marR="36576" marT="36576" marB="36576" anchor="ctr">
                     <a:lnL w="6350" cap="flat" cmpd="sng" algn="ctr">
                       <a:solidFill>
-                        <a:srgbClr val="D8E3EA"/>
+                        <a:srgbClr val="23465C"/>
                       </a:solidFill>
                       <a:prstDash val="solid"/>
                       <a:round/>
@@ -9723,7 +9606,7 @@
                     </a:lnL>
                     <a:lnR w="6350" cap="flat" cmpd="sng" algn="ctr">
                       <a:solidFill>
-                        <a:srgbClr val="D8E3EA"/>
+                        <a:srgbClr val="23465C"/>
                       </a:solidFill>
                       <a:prstDash val="solid"/>
                       <a:round/>
@@ -9732,7 +9615,7 @@
                     </a:lnR>
                     <a:lnT w="6350" cap="flat" cmpd="sng" algn="ctr">
                       <a:solidFill>
-                        <a:srgbClr val="D8E3EA"/>
+                        <a:srgbClr val="23465C"/>
                       </a:solidFill>
                       <a:prstDash val="solid"/>
                       <a:round/>
@@ -9741,7 +9624,7 @@
                     </a:lnT>
                     <a:lnB w="6350" cap="flat" cmpd="sng" algn="ctr">
                       <a:solidFill>
-                        <a:srgbClr val="D8E3EA"/>
+                        <a:srgbClr val="23465C"/>
                       </a:solidFill>
                       <a:prstDash val="solid"/>
                       <a:round/>
@@ -9764,7 +9647,7 @@
                       <a:r>
                         <a:rPr lang="en-US" sz="1050" dirty="0">
                           <a:solidFill>
-                            <a:srgbClr val="22303C"/>
+                            <a:srgbClr val="FFFFFF"/>
                           </a:solidFill>
                           <a:latin typeface="Microsoft YaHei" pitchFamily="34" charset="0"/>
                           <a:ea typeface="Microsoft YaHei" pitchFamily="34" charset="-122"/>
@@ -9782,7 +9665,7 @@
                   <a:tcPr marL="36576" marR="36576" marT="36576" marB="36576" anchor="ctr">
                     <a:lnL w="6350" cap="flat" cmpd="sng" algn="ctr">
                       <a:solidFill>
-                        <a:srgbClr val="D8E3EA"/>
+                        <a:srgbClr val="23465C"/>
                       </a:solidFill>
                       <a:prstDash val="solid"/>
                       <a:round/>
@@ -9791,7 +9674,7 @@
                     </a:lnL>
                     <a:lnR w="6350" cap="flat" cmpd="sng" algn="ctr">
                       <a:solidFill>
-                        <a:srgbClr val="D8E3EA"/>
+                        <a:srgbClr val="23465C"/>
                       </a:solidFill>
                       <a:prstDash val="solid"/>
                       <a:round/>
@@ -9800,7 +9683,7 @@
                     </a:lnR>
                     <a:lnT w="6350" cap="flat" cmpd="sng" algn="ctr">
                       <a:solidFill>
-                        <a:srgbClr val="D8E3EA"/>
+                        <a:srgbClr val="23465C"/>
                       </a:solidFill>
                       <a:prstDash val="solid"/>
                       <a:round/>
@@ -9809,7 +9692,7 @@
                     </a:lnT>
                     <a:lnB w="6350" cap="flat" cmpd="sng" algn="ctr">
                       <a:solidFill>
-                        <a:srgbClr val="D8E3EA"/>
+                        <a:srgbClr val="23465C"/>
                       </a:solidFill>
                       <a:prstDash val="solid"/>
                       <a:round/>
@@ -9832,7 +9715,7 @@
                       <a:r>
                         <a:rPr lang="en-US" sz="1050" dirty="0">
                           <a:solidFill>
-                            <a:srgbClr val="22303C"/>
+                            <a:srgbClr val="FFFFFF"/>
                           </a:solidFill>
                           <a:latin typeface="Microsoft YaHei" pitchFamily="34" charset="0"/>
                           <a:ea typeface="Microsoft YaHei" pitchFamily="34" charset="-122"/>
@@ -9850,7 +9733,7 @@
                   <a:tcPr marL="36576" marR="36576" marT="36576" marB="36576" anchor="ctr">
                     <a:lnL w="6350" cap="flat" cmpd="sng" algn="ctr">
                       <a:solidFill>
-                        <a:srgbClr val="D8E3EA"/>
+                        <a:srgbClr val="23465C"/>
                       </a:solidFill>
                       <a:prstDash val="solid"/>
                       <a:round/>
@@ -9859,7 +9742,7 @@
                     </a:lnL>
                     <a:lnR w="6350" cap="flat" cmpd="sng" algn="ctr">
                       <a:solidFill>
-                        <a:srgbClr val="D8E3EA"/>
+                        <a:srgbClr val="23465C"/>
                       </a:solidFill>
                       <a:prstDash val="solid"/>
                       <a:round/>
@@ -9868,7 +9751,7 @@
                     </a:lnR>
                     <a:lnT w="6350" cap="flat" cmpd="sng" algn="ctr">
                       <a:solidFill>
-                        <a:srgbClr val="D8E3EA"/>
+                        <a:srgbClr val="23465C"/>
                       </a:solidFill>
                       <a:prstDash val="solid"/>
                       <a:round/>
@@ -9877,7 +9760,7 @@
                     </a:lnT>
                     <a:lnB w="6350" cap="flat" cmpd="sng" algn="ctr">
                       <a:solidFill>
-                        <a:srgbClr val="D8E3EA"/>
+                        <a:srgbClr val="23465C"/>
                       </a:solidFill>
                       <a:prstDash val="solid"/>
                       <a:round/>
@@ -9900,7 +9783,7 @@
                       <a:r>
                         <a:rPr lang="en-US" sz="1050" dirty="0">
                           <a:solidFill>
-                            <a:srgbClr val="22303C"/>
+                            <a:srgbClr val="FFFFFF"/>
                           </a:solidFill>
                           <a:latin typeface="Microsoft YaHei" pitchFamily="34" charset="0"/>
                           <a:ea typeface="Microsoft YaHei" pitchFamily="34" charset="-122"/>
@@ -9918,7 +9801,7 @@
                   <a:tcPr marL="36576" marR="36576" marT="36576" marB="36576" anchor="ctr">
                     <a:lnL w="6350" cap="flat" cmpd="sng" algn="ctr">
                       <a:solidFill>
-                        <a:srgbClr val="D8E3EA"/>
+                        <a:srgbClr val="23465C"/>
                       </a:solidFill>
                       <a:prstDash val="solid"/>
                       <a:round/>
@@ -9927,7 +9810,7 @@
                     </a:lnL>
                     <a:lnR w="6350" cap="flat" cmpd="sng" algn="ctr">
                       <a:solidFill>
-                        <a:srgbClr val="D8E3EA"/>
+                        <a:srgbClr val="23465C"/>
                       </a:solidFill>
                       <a:prstDash val="solid"/>
                       <a:round/>
@@ -9936,7 +9819,7 @@
                     </a:lnR>
                     <a:lnT w="6350" cap="flat" cmpd="sng" algn="ctr">
                       <a:solidFill>
-                        <a:srgbClr val="D8E3EA"/>
+                        <a:srgbClr val="23465C"/>
                       </a:solidFill>
                       <a:prstDash val="solid"/>
                       <a:round/>
@@ -9945,7 +9828,7 @@
                     </a:lnT>
                     <a:lnB w="6350" cap="flat" cmpd="sng" algn="ctr">
                       <a:solidFill>
-                        <a:srgbClr val="D8E3EA"/>
+                        <a:srgbClr val="23465C"/>
                       </a:solidFill>
                       <a:prstDash val="solid"/>
                       <a:round/>
@@ -9968,7 +9851,7 @@
                       <a:r>
                         <a:rPr lang="en-US" sz="1050" dirty="0">
                           <a:solidFill>
-                            <a:srgbClr val="22303C"/>
+                            <a:srgbClr val="FFFFFF"/>
                           </a:solidFill>
                           <a:latin typeface="Microsoft YaHei" pitchFamily="34" charset="0"/>
                           <a:ea typeface="Microsoft YaHei" pitchFamily="34" charset="-122"/>
@@ -9986,7 +9869,7 @@
                   <a:tcPr marL="36576" marR="36576" marT="36576" marB="36576" anchor="ctr">
                     <a:lnL w="6350" cap="flat" cmpd="sng" algn="ctr">
                       <a:solidFill>
-                        <a:srgbClr val="D8E3EA"/>
+                        <a:srgbClr val="23465C"/>
                       </a:solidFill>
                       <a:prstDash val="solid"/>
                       <a:round/>
@@ -9995,7 +9878,7 @@
                     </a:lnL>
                     <a:lnR w="6350" cap="flat" cmpd="sng" algn="ctr">
                       <a:solidFill>
-                        <a:srgbClr val="D8E3EA"/>
+                        <a:srgbClr val="23465C"/>
                       </a:solidFill>
                       <a:prstDash val="solid"/>
                       <a:round/>
@@ -10004,7 +9887,7 @@
                     </a:lnR>
                     <a:lnT w="6350" cap="flat" cmpd="sng" algn="ctr">
                       <a:solidFill>
-                        <a:srgbClr val="D8E3EA"/>
+                        <a:srgbClr val="23465C"/>
                       </a:solidFill>
                       <a:prstDash val="solid"/>
                       <a:round/>
@@ -10013,7 +9896,7 @@
                     </a:lnT>
                     <a:lnB w="6350" cap="flat" cmpd="sng" algn="ctr">
                       <a:solidFill>
-                        <a:srgbClr val="D8E3EA"/>
+                        <a:srgbClr val="23465C"/>
                       </a:solidFill>
                       <a:prstDash val="solid"/>
                       <a:round/>
@@ -10043,7 +9926,7 @@
                       <a:r>
                         <a:rPr lang="en-US" sz="1050" dirty="0">
                           <a:solidFill>
-                            <a:srgbClr val="22303C"/>
+                            <a:srgbClr val="FFFFFF"/>
                           </a:solidFill>
                           <a:latin typeface="Microsoft YaHei" pitchFamily="34" charset="0"/>
                           <a:ea typeface="Microsoft YaHei" pitchFamily="34" charset="-122"/>
@@ -10061,7 +9944,7 @@
                   <a:tcPr marL="36576" marR="36576" marT="36576" marB="36576" anchor="ctr">
                     <a:lnL w="6350" cap="flat" cmpd="sng" algn="ctr">
                       <a:solidFill>
-                        <a:srgbClr val="D8E3EA"/>
+                        <a:srgbClr val="23465C"/>
                       </a:solidFill>
                       <a:prstDash val="solid"/>
                       <a:round/>
@@ -10070,7 +9953,7 @@
                     </a:lnL>
                     <a:lnR w="6350" cap="flat" cmpd="sng" algn="ctr">
                       <a:solidFill>
-                        <a:srgbClr val="D8E3EA"/>
+                        <a:srgbClr val="23465C"/>
                       </a:solidFill>
                       <a:prstDash val="solid"/>
                       <a:round/>
@@ -10079,7 +9962,7 @@
                     </a:lnR>
                     <a:lnT w="6350" cap="flat" cmpd="sng" algn="ctr">
                       <a:solidFill>
-                        <a:srgbClr val="D8E3EA"/>
+                        <a:srgbClr val="23465C"/>
                       </a:solidFill>
                       <a:prstDash val="solid"/>
                       <a:round/>
@@ -10088,7 +9971,7 @@
                     </a:lnT>
                     <a:lnB w="6350" cap="flat" cmpd="sng" algn="ctr">
                       <a:solidFill>
-                        <a:srgbClr val="D8E3EA"/>
+                        <a:srgbClr val="23465C"/>
                       </a:solidFill>
                       <a:prstDash val="solid"/>
                       <a:round/>
@@ -10111,7 +9994,7 @@
                       <a:r>
                         <a:rPr lang="en-US" sz="1050" dirty="0">
                           <a:solidFill>
-                            <a:srgbClr val="22303C"/>
+                            <a:srgbClr val="FFFFFF"/>
                           </a:solidFill>
                           <a:latin typeface="Microsoft YaHei" pitchFamily="34" charset="0"/>
                           <a:ea typeface="Microsoft YaHei" pitchFamily="34" charset="-122"/>
@@ -10129,7 +10012,7 @@
                   <a:tcPr marL="36576" marR="36576" marT="36576" marB="36576" anchor="ctr">
                     <a:lnL w="6350" cap="flat" cmpd="sng" algn="ctr">
                       <a:solidFill>
-                        <a:srgbClr val="D8E3EA"/>
+                        <a:srgbClr val="23465C"/>
                       </a:solidFill>
                       <a:prstDash val="solid"/>
                       <a:round/>
@@ -10138,7 +10021,7 @@
                     </a:lnL>
                     <a:lnR w="6350" cap="flat" cmpd="sng" algn="ctr">
                       <a:solidFill>
-                        <a:srgbClr val="D8E3EA"/>
+                        <a:srgbClr val="23465C"/>
                       </a:solidFill>
                       <a:prstDash val="solid"/>
                       <a:round/>
@@ -10147,7 +10030,7 @@
                     </a:lnR>
                     <a:lnT w="6350" cap="flat" cmpd="sng" algn="ctr">
                       <a:solidFill>
-                        <a:srgbClr val="D8E3EA"/>
+                        <a:srgbClr val="23465C"/>
                       </a:solidFill>
                       <a:prstDash val="solid"/>
                       <a:round/>
@@ -10156,7 +10039,7 @@
                     </a:lnT>
                     <a:lnB w="6350" cap="flat" cmpd="sng" algn="ctr">
                       <a:solidFill>
-                        <a:srgbClr val="D8E3EA"/>
+                        <a:srgbClr val="23465C"/>
                       </a:solidFill>
                       <a:prstDash val="solid"/>
                       <a:round/>
@@ -10179,7 +10062,7 @@
                       <a:r>
                         <a:rPr lang="en-US" sz="1050" dirty="0">
                           <a:solidFill>
-                            <a:srgbClr val="22303C"/>
+                            <a:srgbClr val="FFFFFF"/>
                           </a:solidFill>
                           <a:latin typeface="Microsoft YaHei" pitchFamily="34" charset="0"/>
                           <a:ea typeface="Microsoft YaHei" pitchFamily="34" charset="-122"/>
@@ -10197,7 +10080,7 @@
                   <a:tcPr marL="36576" marR="36576" marT="36576" marB="36576" anchor="ctr">
                     <a:lnL w="6350" cap="flat" cmpd="sng" algn="ctr">
                       <a:solidFill>
-                        <a:srgbClr val="D8E3EA"/>
+                        <a:srgbClr val="23465C"/>
                       </a:solidFill>
                       <a:prstDash val="solid"/>
                       <a:round/>
@@ -10206,7 +10089,7 @@
                     </a:lnL>
                     <a:lnR w="6350" cap="flat" cmpd="sng" algn="ctr">
                       <a:solidFill>
-                        <a:srgbClr val="D8E3EA"/>
+                        <a:srgbClr val="23465C"/>
                       </a:solidFill>
                       <a:prstDash val="solid"/>
                       <a:round/>
@@ -10215,7 +10098,7 @@
                     </a:lnR>
                     <a:lnT w="6350" cap="flat" cmpd="sng" algn="ctr">
                       <a:solidFill>
-                        <a:srgbClr val="D8E3EA"/>
+                        <a:srgbClr val="23465C"/>
                       </a:solidFill>
                       <a:prstDash val="solid"/>
                       <a:round/>
@@ -10224,7 +10107,7 @@
                     </a:lnT>
                     <a:lnB w="6350" cap="flat" cmpd="sng" algn="ctr">
                       <a:solidFill>
-                        <a:srgbClr val="D8E3EA"/>
+                        <a:srgbClr val="23465C"/>
                       </a:solidFill>
                       <a:prstDash val="solid"/>
                       <a:round/>
@@ -10247,7 +10130,7 @@
                       <a:r>
                         <a:rPr lang="en-US" sz="1050" dirty="0">
                           <a:solidFill>
-                            <a:srgbClr val="22303C"/>
+                            <a:srgbClr val="FFFFFF"/>
                           </a:solidFill>
                           <a:latin typeface="Microsoft YaHei" pitchFamily="34" charset="0"/>
                           <a:ea typeface="Microsoft YaHei" pitchFamily="34" charset="-122"/>
@@ -10265,7 +10148,7 @@
                   <a:tcPr marL="36576" marR="36576" marT="36576" marB="36576" anchor="ctr">
                     <a:lnL w="6350" cap="flat" cmpd="sng" algn="ctr">
                       <a:solidFill>
-                        <a:srgbClr val="D8E3EA"/>
+                        <a:srgbClr val="23465C"/>
                       </a:solidFill>
                       <a:prstDash val="solid"/>
                       <a:round/>
@@ -10274,7 +10157,7 @@
                     </a:lnL>
                     <a:lnR w="6350" cap="flat" cmpd="sng" algn="ctr">
                       <a:solidFill>
-                        <a:srgbClr val="D8E3EA"/>
+                        <a:srgbClr val="23465C"/>
                       </a:solidFill>
                       <a:prstDash val="solid"/>
                       <a:round/>
@@ -10283,7 +10166,7 @@
                     </a:lnR>
                     <a:lnT w="6350" cap="flat" cmpd="sng" algn="ctr">
                       <a:solidFill>
-                        <a:srgbClr val="D8E3EA"/>
+                        <a:srgbClr val="23465C"/>
                       </a:solidFill>
                       <a:prstDash val="solid"/>
                       <a:round/>
@@ -10292,7 +10175,7 @@
                     </a:lnT>
                     <a:lnB w="6350" cap="flat" cmpd="sng" algn="ctr">
                       <a:solidFill>
-                        <a:srgbClr val="D8E3EA"/>
+                        <a:srgbClr val="23465C"/>
                       </a:solidFill>
                       <a:prstDash val="solid"/>
                       <a:round/>
@@ -10315,7 +10198,7 @@
                       <a:r>
                         <a:rPr lang="en-US" sz="1050" dirty="0">
                           <a:solidFill>
-                            <a:srgbClr val="22303C"/>
+                            <a:srgbClr val="FFFFFF"/>
                           </a:solidFill>
                           <a:latin typeface="Microsoft YaHei" pitchFamily="34" charset="0"/>
                           <a:ea typeface="Microsoft YaHei" pitchFamily="34" charset="-122"/>
@@ -10333,7 +10216,7 @@
                   <a:tcPr marL="36576" marR="36576" marT="36576" marB="36576" anchor="ctr">
                     <a:lnL w="6350" cap="flat" cmpd="sng" algn="ctr">
                       <a:solidFill>
-                        <a:srgbClr val="D8E3EA"/>
+                        <a:srgbClr val="23465C"/>
                       </a:solidFill>
                       <a:prstDash val="solid"/>
                       <a:round/>
@@ -10342,7 +10225,7 @@
                     </a:lnL>
                     <a:lnR w="6350" cap="flat" cmpd="sng" algn="ctr">
                       <a:solidFill>
-                        <a:srgbClr val="D8E3EA"/>
+                        <a:srgbClr val="23465C"/>
                       </a:solidFill>
                       <a:prstDash val="solid"/>
                       <a:round/>
@@ -10351,7 +10234,7 @@
                     </a:lnR>
                     <a:lnT w="6350" cap="flat" cmpd="sng" algn="ctr">
                       <a:solidFill>
-                        <a:srgbClr val="D8E3EA"/>
+                        <a:srgbClr val="23465C"/>
                       </a:solidFill>
                       <a:prstDash val="solid"/>
                       <a:round/>
@@ -10360,7 +10243,7 @@
                     </a:lnT>
                     <a:lnB w="6350" cap="flat" cmpd="sng" algn="ctr">
                       <a:solidFill>
-                        <a:srgbClr val="D8E3EA"/>
+                        <a:srgbClr val="23465C"/>
                       </a:solidFill>
                       <a:prstDash val="solid"/>
                       <a:round/>
@@ -10383,7 +10266,7 @@
                       <a:r>
                         <a:rPr lang="en-US" sz="1050" dirty="0">
                           <a:solidFill>
-                            <a:srgbClr val="22303C"/>
+                            <a:srgbClr val="FFFFFF"/>
                           </a:solidFill>
                           <a:latin typeface="Microsoft YaHei" pitchFamily="34" charset="0"/>
                           <a:ea typeface="Microsoft YaHei" pitchFamily="34" charset="-122"/>
@@ -10401,7 +10284,7 @@
                   <a:tcPr marL="36576" marR="36576" marT="36576" marB="36576" anchor="ctr">
                     <a:lnL w="6350" cap="flat" cmpd="sng" algn="ctr">
                       <a:solidFill>
-                        <a:srgbClr val="D8E3EA"/>
+                        <a:srgbClr val="23465C"/>
                       </a:solidFill>
                       <a:prstDash val="solid"/>
                       <a:round/>
@@ -10410,7 +10293,7 @@
                     </a:lnL>
                     <a:lnR w="6350" cap="flat" cmpd="sng" algn="ctr">
                       <a:solidFill>
-                        <a:srgbClr val="D8E3EA"/>
+                        <a:srgbClr val="23465C"/>
                       </a:solidFill>
                       <a:prstDash val="solid"/>
                       <a:round/>
@@ -10419,7 +10302,7 @@
                     </a:lnR>
                     <a:lnT w="6350" cap="flat" cmpd="sng" algn="ctr">
                       <a:solidFill>
-                        <a:srgbClr val="D8E3EA"/>
+                        <a:srgbClr val="23465C"/>
                       </a:solidFill>
                       <a:prstDash val="solid"/>
                       <a:round/>
@@ -10428,7 +10311,7 @@
                     </a:lnT>
                     <a:lnB w="6350" cap="flat" cmpd="sng" algn="ctr">
                       <a:solidFill>
-                        <a:srgbClr val="D8E3EA"/>
+                        <a:srgbClr val="23465C"/>
                       </a:solidFill>
                       <a:prstDash val="solid"/>
                       <a:round/>
@@ -10477,7 +10360,7 @@
             <a:r>
               <a:rPr lang="en-US" sz="900" dirty="0">
                 <a:solidFill>
-                  <a:srgbClr val="6B7C8A"/>
+                  <a:srgbClr val="A9BECC"/>
                 </a:solidFill>
                 <a:latin typeface="Microsoft YaHei" pitchFamily="34" charset="0"/>
                 <a:ea typeface="Microsoft YaHei" pitchFamily="34" charset="-122"/>
@@ -10516,7 +10399,7 @@
             <a:r>
               <a:rPr lang="en-US" sz="1050" b="1" dirty="0">
                 <a:solidFill>
-                  <a:srgbClr val="0E4C6E"/>
+                  <a:srgbClr val="8FD0F0"/>
                 </a:solidFill>
                 <a:latin typeface="Microsoft YaHei" pitchFamily="34" charset="0"/>
                 <a:ea typeface="Microsoft YaHei" pitchFamily="34" charset="-122"/>
@@ -10527,7 +10410,7 @@
             <a:r>
               <a:rPr lang="en-US" sz="1050" dirty="0">
                 <a:solidFill>
-                  <a:srgbClr val="22303C"/>
+                  <a:srgbClr val="FFFFFF"/>
                 </a:solidFill>
                 <a:latin typeface="Microsoft YaHei" pitchFamily="34" charset="0"/>
                 <a:ea typeface="Microsoft YaHei" pitchFamily="34" charset="-122"/>
@@ -10566,7 +10449,7 @@
             <a:r>
               <a:rPr lang="en-US" sz="1050" b="1" dirty="0">
                 <a:solidFill>
-                  <a:srgbClr val="0E4C6E"/>
+                  <a:srgbClr val="8FD0F0"/>
                 </a:solidFill>
                 <a:latin typeface="Microsoft YaHei" pitchFamily="34" charset="0"/>
                 <a:ea typeface="Microsoft YaHei" pitchFamily="34" charset="-122"/>
@@ -10577,7 +10460,7 @@
             <a:r>
               <a:rPr lang="en-US" sz="1050" dirty="0">
                 <a:solidFill>
-                  <a:srgbClr val="22303C"/>
+                  <a:srgbClr val="FFFFFF"/>
                 </a:solidFill>
                 <a:latin typeface="Microsoft YaHei" pitchFamily="34" charset="0"/>
                 <a:ea typeface="Microsoft YaHei" pitchFamily="34" charset="-122"/>
@@ -10616,7 +10499,7 @@
             <a:r>
               <a:rPr lang="en-US" sz="1050" b="1" dirty="0">
                 <a:solidFill>
-                  <a:srgbClr val="0E4C6E"/>
+                  <a:srgbClr val="8FD0F0"/>
                 </a:solidFill>
                 <a:latin typeface="Microsoft YaHei" pitchFamily="34" charset="0"/>
                 <a:ea typeface="Microsoft YaHei" pitchFamily="34" charset="-122"/>
@@ -10627,7 +10510,7 @@
             <a:r>
               <a:rPr lang="en-US" sz="1050" dirty="0">
                 <a:solidFill>
-                  <a:srgbClr val="22303C"/>
+                  <a:srgbClr val="FFFFFF"/>
                 </a:solidFill>
                 <a:latin typeface="Microsoft YaHei" pitchFamily="34" charset="0"/>
                 <a:ea typeface="Microsoft YaHei" pitchFamily="34" charset="-122"/>
@@ -10666,7 +10549,7 @@
             <a:r>
               <a:rPr lang="en-US" sz="900" dirty="0">
                 <a:solidFill>
-                  <a:srgbClr val="6B7C8A"/>
+                  <a:srgbClr val="A9BECC"/>
                 </a:solidFill>
                 <a:latin typeface="Microsoft YaHei" pitchFamily="34" charset="0"/>
                 <a:ea typeface="Microsoft YaHei" pitchFamily="34" charset="-122"/>
@@ -10705,7 +10588,7 @@
             <a:r>
               <a:rPr b="1" sz="1000">
                 <a:solidFill>
-                  <a:srgbClr val="0FA3A8"/>
+                  <a:srgbClr val="3FC6D6"/>
                 </a:solidFill>
                 <a:latin typeface="Microsoft YaHei"/>
                 <a:ea typeface="Microsoft YaHei"/>
@@ -10715,7 +10598,7 @@
             <a:r>
               <a:rPr sz="900">
                 <a:solidFill>
-                  <a:srgbClr val="9FB8C8"/>
+                  <a:srgbClr val="8FA6B5"/>
                 </a:solidFill>
                 <a:latin typeface="Microsoft YaHei"/>
                 <a:ea typeface="Microsoft YaHei"/>
@@ -10753,7 +10636,7 @@
             <a:r>
               <a:rPr lang="en-US" sz="900" dirty="0">
                 <a:solidFill>
-                  <a:srgbClr val="6B7C8A"/>
+                  <a:srgbClr val="A9BECC"/>
                 </a:solidFill>
                 <a:latin typeface="Microsoft YaHei" pitchFamily="34" charset="0"/>
                 <a:ea typeface="Microsoft YaHei" pitchFamily="34" charset="-122"/>
@@ -10780,7 +10663,7 @@
             <a:avLst/>
           </a:prstGeom>
           <a:solidFill>
-            <a:srgbClr val="D8E3EA"/>
+            <a:srgbClr val="23465C"/>
           </a:solidFill>
           <a:ln>
             <a:noFill/>
@@ -10823,7 +10706,7 @@
     <p:bg>
       <p:bgPr>
         <a:solidFill>
-          <a:srgbClr val="F6F9FB"/>
+          <a:srgbClr val="0B1F33"/>
         </a:solidFill>
       </p:bgPr>
     </p:bg>
@@ -10858,7 +10741,7 @@
             </a:avLst>
           </a:prstGeom>
           <a:solidFill>
-            <a:srgbClr val="0FA3A8"/>
+            <a:srgbClr val="0E7E86"/>
           </a:solidFill>
           <a:ln/>
         </p:spPr>
@@ -10894,7 +10777,7 @@
             <a:r>
               <a:rPr lang="en-US" sz="1100" b="1" kern="0" spc="200" dirty="0">
                 <a:solidFill>
-                  <a:srgbClr val="0FA3A8"/>
+                  <a:srgbClr val="3FC6D6"/>
                 </a:solidFill>
                 <a:latin typeface="Microsoft YaHei" pitchFamily="34" charset="0"/>
                 <a:ea typeface="Microsoft YaHei" pitchFamily="34" charset="-122"/>
@@ -10933,7 +10816,7 @@
             <a:r>
               <a:rPr lang="en-US" sz="2400" b="1" dirty="0">
                 <a:solidFill>
-                  <a:srgbClr val="22303C"/>
+                  <a:srgbClr val="FFFFFF"/>
                 </a:solidFill>
                 <a:latin typeface="Microsoft YaHei" pitchFamily="34" charset="0"/>
                 <a:ea typeface="Microsoft YaHei" pitchFamily="34" charset="-122"/>
@@ -10962,11 +10845,11 @@
             </a:avLst>
           </a:prstGeom>
           <a:solidFill>
-            <a:srgbClr val="FFFFFF"/>
+            <a:srgbClr val="13314D"/>
           </a:solidFill>
           <a:ln w="9525">
             <a:solidFill>
-              <a:srgbClr val="D8E3EA">
+              <a:srgbClr val="23465C">
                 <a:alpha val="100000"/>
               </a:srgbClr>
             </a:solidFill>
@@ -11001,7 +10884,7 @@
             </a:avLst>
           </a:prstGeom>
           <a:solidFill>
-            <a:srgbClr val="C0504D"/>
+            <a:srgbClr val="D06055"/>
           </a:solidFill>
           <a:ln/>
         </p:spPr>
@@ -11037,7 +10920,7 @@
             <a:r>
               <a:rPr lang="en-US" sz="1200" b="1" dirty="0">
                 <a:solidFill>
-                  <a:srgbClr val="22303C"/>
+                  <a:srgbClr val="FFFFFF"/>
                 </a:solidFill>
                 <a:latin typeface="Microsoft YaHei" pitchFamily="34" charset="0"/>
                 <a:ea typeface="Microsoft YaHei" pitchFamily="34" charset="-122"/>
@@ -11076,7 +10959,7 @@
             <a:r>
               <a:rPr lang="en-US" sz="950" dirty="0">
                 <a:solidFill>
-                  <a:srgbClr val="6B7C8A"/>
+                  <a:srgbClr val="A9BECC"/>
                 </a:solidFill>
                 <a:latin typeface="Microsoft YaHei" pitchFamily="34" charset="0"/>
                 <a:ea typeface="Microsoft YaHei" pitchFamily="34" charset="-122"/>
@@ -11105,11 +10988,11 @@
             </a:avLst>
           </a:prstGeom>
           <a:solidFill>
-            <a:srgbClr val="FFFFFF"/>
+            <a:srgbClr val="13314D"/>
           </a:solidFill>
           <a:ln w="9525">
             <a:solidFill>
-              <a:srgbClr val="D8E3EA">
+              <a:srgbClr val="23465C">
                 <a:alpha val="100000"/>
               </a:srgbClr>
             </a:solidFill>
@@ -11144,7 +11027,7 @@
             </a:avLst>
           </a:prstGeom>
           <a:solidFill>
-            <a:srgbClr val="C0504D"/>
+            <a:srgbClr val="D06055"/>
           </a:solidFill>
           <a:ln/>
         </p:spPr>
@@ -11180,7 +11063,7 @@
             <a:r>
               <a:rPr lang="en-US" sz="1200" b="1" dirty="0">
                 <a:solidFill>
-                  <a:srgbClr val="22303C"/>
+                  <a:srgbClr val="FFFFFF"/>
                 </a:solidFill>
                 <a:latin typeface="Microsoft YaHei" pitchFamily="34" charset="0"/>
                 <a:ea typeface="Microsoft YaHei" pitchFamily="34" charset="-122"/>
@@ -11219,7 +11102,7 @@
             <a:r>
               <a:rPr lang="en-US" sz="950" dirty="0">
                 <a:solidFill>
-                  <a:srgbClr val="6B7C8A"/>
+                  <a:srgbClr val="A9BECC"/>
                 </a:solidFill>
                 <a:latin typeface="Microsoft YaHei" pitchFamily="34" charset="0"/>
                 <a:ea typeface="Microsoft YaHei" pitchFamily="34" charset="-122"/>
@@ -11248,11 +11131,11 @@
             </a:avLst>
           </a:prstGeom>
           <a:solidFill>
-            <a:srgbClr val="FFFFFF"/>
+            <a:srgbClr val="13314D"/>
           </a:solidFill>
           <a:ln w="9525">
             <a:solidFill>
-              <a:srgbClr val="D8E3EA">
+              <a:srgbClr val="23465C">
                 <a:alpha val="100000"/>
               </a:srgbClr>
             </a:solidFill>
@@ -11287,7 +11170,7 @@
             </a:avLst>
           </a:prstGeom>
           <a:solidFill>
-            <a:srgbClr val="C0504D"/>
+            <a:srgbClr val="D06055"/>
           </a:solidFill>
           <a:ln/>
         </p:spPr>
@@ -11323,7 +11206,7 @@
             <a:r>
               <a:rPr lang="en-US" sz="1200" b="1" dirty="0">
                 <a:solidFill>
-                  <a:srgbClr val="22303C"/>
+                  <a:srgbClr val="FFFFFF"/>
                 </a:solidFill>
                 <a:latin typeface="Microsoft YaHei" pitchFamily="34" charset="0"/>
                 <a:ea typeface="Microsoft YaHei" pitchFamily="34" charset="-122"/>
@@ -11362,7 +11245,7 @@
             <a:r>
               <a:rPr lang="en-US" sz="950" dirty="0">
                 <a:solidFill>
-                  <a:srgbClr val="6B7C8A"/>
+                  <a:srgbClr val="A9BECC"/>
                 </a:solidFill>
                 <a:latin typeface="Microsoft YaHei" pitchFamily="34" charset="0"/>
                 <a:ea typeface="Microsoft YaHei" pitchFamily="34" charset="-122"/>
@@ -11391,11 +11274,11 @@
             </a:avLst>
           </a:prstGeom>
           <a:solidFill>
-            <a:srgbClr val="FFFFFF"/>
+            <a:srgbClr val="13314D"/>
           </a:solidFill>
           <a:ln w="9525">
             <a:solidFill>
-              <a:srgbClr val="D8E3EA">
+              <a:srgbClr val="23465C">
                 <a:alpha val="100000"/>
               </a:srgbClr>
             </a:solidFill>
@@ -11430,7 +11313,7 @@
             </a:avLst>
           </a:prstGeom>
           <a:solidFill>
-            <a:srgbClr val="C0504D"/>
+            <a:srgbClr val="D06055"/>
           </a:solidFill>
           <a:ln/>
         </p:spPr>
@@ -11466,7 +11349,7 @@
             <a:r>
               <a:rPr lang="en-US" sz="1200" b="1" dirty="0">
                 <a:solidFill>
-                  <a:srgbClr val="22303C"/>
+                  <a:srgbClr val="FFFFFF"/>
                 </a:solidFill>
                 <a:latin typeface="Microsoft YaHei" pitchFamily="34" charset="0"/>
                 <a:ea typeface="Microsoft YaHei" pitchFamily="34" charset="-122"/>
@@ -11505,7 +11388,7 @@
             <a:r>
               <a:rPr lang="en-US" sz="950" dirty="0">
                 <a:solidFill>
-                  <a:srgbClr val="6B7C8A"/>
+                  <a:srgbClr val="A9BECC"/>
                 </a:solidFill>
                 <a:latin typeface="Microsoft YaHei" pitchFamily="34" charset="0"/>
                 <a:ea typeface="Microsoft YaHei" pitchFamily="34" charset="-122"/>
@@ -11534,11 +11417,11 @@
             </a:avLst>
           </a:prstGeom>
           <a:solidFill>
-            <a:srgbClr val="FFFFFF"/>
+            <a:srgbClr val="13314D"/>
           </a:solidFill>
           <a:ln w="9525">
             <a:solidFill>
-              <a:srgbClr val="D8E3EA">
+              <a:srgbClr val="23465C">
                 <a:alpha val="100000"/>
               </a:srgbClr>
             </a:solidFill>
@@ -11573,7 +11456,7 @@
             </a:avLst>
           </a:prstGeom>
           <a:solidFill>
-            <a:srgbClr val="C0504D"/>
+            <a:srgbClr val="D06055"/>
           </a:solidFill>
           <a:ln/>
         </p:spPr>
@@ -11609,7 +11492,7 @@
             <a:r>
               <a:rPr lang="en-US" sz="1200" b="1" dirty="0">
                 <a:solidFill>
-                  <a:srgbClr val="22303C"/>
+                  <a:srgbClr val="FFFFFF"/>
                 </a:solidFill>
                 <a:latin typeface="Microsoft YaHei" pitchFamily="34" charset="0"/>
                 <a:ea typeface="Microsoft YaHei" pitchFamily="34" charset="-122"/>
@@ -11648,7 +11531,7 @@
             <a:r>
               <a:rPr lang="en-US" sz="950" dirty="0">
                 <a:solidFill>
-                  <a:srgbClr val="6B7C8A"/>
+                  <a:srgbClr val="A9BECC"/>
                 </a:solidFill>
                 <a:latin typeface="Microsoft YaHei" pitchFamily="34" charset="0"/>
                 <a:ea typeface="Microsoft YaHei" pitchFamily="34" charset="-122"/>
@@ -11687,7 +11570,7 @@
             <a:r>
               <a:rPr lang="en-US" sz="950" dirty="0">
                 <a:solidFill>
-                  <a:srgbClr val="6B7C8A"/>
+                  <a:srgbClr val="A9BECC"/>
                 </a:solidFill>
                 <a:latin typeface="Microsoft YaHei" pitchFamily="34" charset="0"/>
                 <a:ea typeface="Microsoft YaHei" pitchFamily="34" charset="-122"/>
@@ -11726,7 +11609,7 @@
             <a:r>
               <a:rPr b="1" sz="1000">
                 <a:solidFill>
-                  <a:srgbClr val="0FA3A8"/>
+                  <a:srgbClr val="3FC6D6"/>
                 </a:solidFill>
                 <a:latin typeface="Microsoft YaHei"/>
                 <a:ea typeface="Microsoft YaHei"/>
@@ -11736,7 +11619,7 @@
             <a:r>
               <a:rPr sz="900">
                 <a:solidFill>
-                  <a:srgbClr val="9FB8C8"/>
+                  <a:srgbClr val="8FA6B5"/>
                 </a:solidFill>
                 <a:latin typeface="Microsoft YaHei"/>
                 <a:ea typeface="Microsoft YaHei"/>
@@ -11774,7 +11657,7 @@
             <a:r>
               <a:rPr lang="en-US" sz="900" dirty="0">
                 <a:solidFill>
-                  <a:srgbClr val="6B7C8A"/>
+                  <a:srgbClr val="A9BECC"/>
                 </a:solidFill>
                 <a:latin typeface="Microsoft YaHei" pitchFamily="34" charset="0"/>
                 <a:ea typeface="Microsoft YaHei" pitchFamily="34" charset="-122"/>
@@ -11801,7 +11684,7 @@
             <a:avLst/>
           </a:prstGeom>
           <a:solidFill>
-            <a:srgbClr val="D8E3EA"/>
+            <a:srgbClr val="23465C"/>
           </a:solidFill>
           <a:ln>
             <a:noFill/>
@@ -11844,7 +11727,7 @@
     <p:bg>
       <p:bgPr>
         <a:solidFill>
-          <a:srgbClr val="F6F9FB"/>
+          <a:srgbClr val="0B1F33"/>
         </a:solidFill>
       </p:bgPr>
     </p:bg>
@@ -11879,7 +11762,7 @@
             </a:avLst>
           </a:prstGeom>
           <a:solidFill>
-            <a:srgbClr val="0FA3A8"/>
+            <a:srgbClr val="0E7E86"/>
           </a:solidFill>
           <a:ln/>
         </p:spPr>
@@ -11915,7 +11798,7 @@
             <a:r>
               <a:rPr lang="en-US" sz="1100" b="1" kern="0" spc="200" dirty="0">
                 <a:solidFill>
-                  <a:srgbClr val="0FA3A8"/>
+                  <a:srgbClr val="3FC6D6"/>
                 </a:solidFill>
                 <a:latin typeface="Microsoft YaHei" pitchFamily="34" charset="0"/>
                 <a:ea typeface="Microsoft YaHei" pitchFamily="34" charset="-122"/>
@@ -11954,7 +11837,7 @@
             <a:r>
               <a:rPr lang="en-US" sz="2400" b="1" dirty="0">
                 <a:solidFill>
-                  <a:srgbClr val="22303C"/>
+                  <a:srgbClr val="FFFFFF"/>
                 </a:solidFill>
                 <a:latin typeface="Microsoft YaHei" pitchFamily="34" charset="0"/>
                 <a:ea typeface="Microsoft YaHei" pitchFamily="34" charset="-122"/>
@@ -11983,11 +11866,11 @@
             </a:avLst>
           </a:prstGeom>
           <a:solidFill>
-            <a:srgbClr val="FFFFFF"/>
+            <a:srgbClr val="13314D"/>
           </a:solidFill>
           <a:ln w="9525">
             <a:solidFill>
-              <a:srgbClr val="D8E3EA">
+              <a:srgbClr val="23465C">
                 <a:alpha val="100000"/>
               </a:srgbClr>
             </a:solidFill>
@@ -12022,7 +11905,7 @@
             </a:avLst>
           </a:prstGeom>
           <a:solidFill>
-            <a:srgbClr val="0FA3A8"/>
+            <a:srgbClr val="0E7E86"/>
           </a:solidFill>
           <a:ln/>
         </p:spPr>
@@ -12046,7 +11929,7 @@
             <a:avLst/>
           </a:prstGeom>
           <a:solidFill>
-            <a:srgbClr val="0FA3A8"/>
+            <a:srgbClr val="0E7E86"/>
           </a:solidFill>
           <a:ln/>
         </p:spPr>
@@ -12121,7 +12004,7 @@
             <a:r>
               <a:rPr lang="en-US" sz="1200" b="1" dirty="0">
                 <a:solidFill>
-                  <a:srgbClr val="22303C"/>
+                  <a:srgbClr val="FFFFFF"/>
                 </a:solidFill>
                 <a:latin typeface="Microsoft YaHei" pitchFamily="34" charset="0"/>
                 <a:ea typeface="Microsoft YaHei" pitchFamily="34" charset="-122"/>
@@ -12160,7 +12043,7 @@
             <a:r>
               <a:rPr lang="en-US" sz="950" dirty="0">
                 <a:solidFill>
-                  <a:srgbClr val="6B7C8A"/>
+                  <a:srgbClr val="A9BECC"/>
                 </a:solidFill>
                 <a:latin typeface="Microsoft YaHei" pitchFamily="34" charset="0"/>
                 <a:ea typeface="Microsoft YaHei" pitchFamily="34" charset="-122"/>
@@ -12189,11 +12072,11 @@
             </a:avLst>
           </a:prstGeom>
           <a:solidFill>
-            <a:srgbClr val="FFFFFF"/>
+            <a:srgbClr val="13314D"/>
           </a:solidFill>
           <a:ln w="9525">
             <a:solidFill>
-              <a:srgbClr val="D8E3EA">
+              <a:srgbClr val="23465C">
                 <a:alpha val="100000"/>
               </a:srgbClr>
             </a:solidFill>
@@ -12228,7 +12111,7 @@
             </a:avLst>
           </a:prstGeom>
           <a:solidFill>
-            <a:srgbClr val="0E4C6E"/>
+            <a:srgbClr val="1A5F84"/>
           </a:solidFill>
           <a:ln/>
         </p:spPr>
@@ -12252,7 +12135,7 @@
             <a:avLst/>
           </a:prstGeom>
           <a:solidFill>
-            <a:srgbClr val="0E4C6E"/>
+            <a:srgbClr val="1A5F84"/>
           </a:solidFill>
           <a:ln/>
         </p:spPr>
@@ -12327,7 +12210,7 @@
             <a:r>
               <a:rPr lang="en-US" sz="1200" b="1" dirty="0">
                 <a:solidFill>
-                  <a:srgbClr val="22303C"/>
+                  <a:srgbClr val="FFFFFF"/>
                 </a:solidFill>
                 <a:latin typeface="Microsoft YaHei" pitchFamily="34" charset="0"/>
                 <a:ea typeface="Microsoft YaHei" pitchFamily="34" charset="-122"/>
@@ -12366,7 +12249,7 @@
             <a:r>
               <a:rPr lang="en-US" sz="950" dirty="0">
                 <a:solidFill>
-                  <a:srgbClr val="6B7C8A"/>
+                  <a:srgbClr val="A9BECC"/>
                 </a:solidFill>
                 <a:latin typeface="Microsoft YaHei" pitchFamily="34" charset="0"/>
                 <a:ea typeface="Microsoft YaHei" pitchFamily="34" charset="-122"/>
@@ -12395,11 +12278,11 @@
             </a:avLst>
           </a:prstGeom>
           <a:solidFill>
-            <a:srgbClr val="FFFFFF"/>
+            <a:srgbClr val="13314D"/>
           </a:solidFill>
           <a:ln w="9525">
             <a:solidFill>
-              <a:srgbClr val="D8E3EA">
+              <a:srgbClr val="23465C">
                 <a:alpha val="100000"/>
               </a:srgbClr>
             </a:solidFill>
@@ -12434,7 +12317,7 @@
             </a:avLst>
           </a:prstGeom>
           <a:solidFill>
-            <a:srgbClr val="0E4C6E"/>
+            <a:srgbClr val="1A5F84"/>
           </a:solidFill>
           <a:ln/>
         </p:spPr>
@@ -12458,7 +12341,7 @@
             <a:avLst/>
           </a:prstGeom>
           <a:solidFill>
-            <a:srgbClr val="0E4C6E"/>
+            <a:srgbClr val="1A5F84"/>
           </a:solidFill>
           <a:ln/>
         </p:spPr>
@@ -12533,7 +12416,7 @@
             <a:r>
               <a:rPr lang="en-US" sz="1200" b="1" dirty="0">
                 <a:solidFill>
-                  <a:srgbClr val="22303C"/>
+                  <a:srgbClr val="FFFFFF"/>
                 </a:solidFill>
                 <a:latin typeface="Microsoft YaHei" pitchFamily="34" charset="0"/>
                 <a:ea typeface="Microsoft YaHei" pitchFamily="34" charset="-122"/>
@@ -12572,7 +12455,7 @@
             <a:r>
               <a:rPr lang="en-US" sz="950" dirty="0">
                 <a:solidFill>
-                  <a:srgbClr val="6B7C8A"/>
+                  <a:srgbClr val="A9BECC"/>
                 </a:solidFill>
                 <a:latin typeface="Microsoft YaHei" pitchFamily="34" charset="0"/>
                 <a:ea typeface="Microsoft YaHei" pitchFamily="34" charset="-122"/>
@@ -12601,11 +12484,11 @@
             </a:avLst>
           </a:prstGeom>
           <a:solidFill>
-            <a:srgbClr val="FFFFFF"/>
+            <a:srgbClr val="13314D"/>
           </a:solidFill>
           <a:ln w="9525">
             <a:solidFill>
-              <a:srgbClr val="D8E3EA">
+              <a:srgbClr val="23465C">
                 <a:alpha val="100000"/>
               </a:srgbClr>
             </a:solidFill>
@@ -12640,7 +12523,7 @@
             </a:avLst>
           </a:prstGeom>
           <a:solidFill>
-            <a:srgbClr val="F59E0B">
+            <a:srgbClr val="D98E1F">
               <a:alpha val="100000"/>
             </a:srgbClr>
           </a:solidFill>
@@ -12666,7 +12549,7 @@
             <a:avLst/>
           </a:prstGeom>
           <a:solidFill>
-            <a:srgbClr val="B07A00"/>
+            <a:srgbClr val="C98A1B"/>
           </a:solidFill>
           <a:ln/>
         </p:spPr>
@@ -12741,7 +12624,7 @@
             <a:r>
               <a:rPr lang="en-US" sz="1200" b="1" dirty="0">
                 <a:solidFill>
-                  <a:srgbClr val="22303C"/>
+                  <a:srgbClr val="FFFFFF"/>
                 </a:solidFill>
                 <a:latin typeface="Microsoft YaHei" pitchFamily="34" charset="0"/>
                 <a:ea typeface="Microsoft YaHei" pitchFamily="34" charset="-122"/>
@@ -12780,7 +12663,7 @@
             <a:r>
               <a:rPr lang="en-US" sz="950" dirty="0">
                 <a:solidFill>
-                  <a:srgbClr val="6B7C8A"/>
+                  <a:srgbClr val="A9BECC"/>
                 </a:solidFill>
                 <a:latin typeface="Microsoft YaHei" pitchFamily="34" charset="0"/>
                 <a:ea typeface="Microsoft YaHei" pitchFamily="34" charset="-122"/>
@@ -12809,11 +12692,11 @@
             </a:avLst>
           </a:prstGeom>
           <a:solidFill>
-            <a:srgbClr val="FFFFFF"/>
+            <a:srgbClr val="13314D"/>
           </a:solidFill>
           <a:ln w="9525">
             <a:solidFill>
-              <a:srgbClr val="D8E3EA">
+              <a:srgbClr val="23465C">
                 <a:alpha val="100000"/>
               </a:srgbClr>
             </a:solidFill>
@@ -12848,7 +12731,7 @@
             </a:avLst>
           </a:prstGeom>
           <a:solidFill>
-            <a:srgbClr val="0FA3A8"/>
+            <a:srgbClr val="0E7E86"/>
           </a:solidFill>
           <a:ln/>
         </p:spPr>
@@ -12872,7 +12755,7 @@
             <a:avLst/>
           </a:prstGeom>
           <a:solidFill>
-            <a:srgbClr val="0FA3A8"/>
+            <a:srgbClr val="0E7E86"/>
           </a:solidFill>
           <a:ln/>
         </p:spPr>
@@ -12947,7 +12830,7 @@
             <a:r>
               <a:rPr lang="en-US" sz="1200" b="1" dirty="0">
                 <a:solidFill>
-                  <a:srgbClr val="22303C"/>
+                  <a:srgbClr val="FFFFFF"/>
                 </a:solidFill>
                 <a:latin typeface="Microsoft YaHei" pitchFamily="34" charset="0"/>
                 <a:ea typeface="Microsoft YaHei" pitchFamily="34" charset="-122"/>
@@ -12986,7 +12869,7 @@
             <a:r>
               <a:rPr lang="en-US" sz="950" dirty="0">
                 <a:solidFill>
-                  <a:srgbClr val="6B7C8A"/>
+                  <a:srgbClr val="A9BECC"/>
                 </a:solidFill>
                 <a:latin typeface="Microsoft YaHei" pitchFamily="34" charset="0"/>
                 <a:ea typeface="Microsoft YaHei" pitchFamily="34" charset="-122"/>
@@ -13015,11 +12898,11 @@
             </a:avLst>
           </a:prstGeom>
           <a:solidFill>
-            <a:srgbClr val="FFFFFF"/>
+            <a:srgbClr val="13314D"/>
           </a:solidFill>
           <a:ln w="9525">
             <a:solidFill>
-              <a:srgbClr val="D8E3EA">
+              <a:srgbClr val="23465C">
                 <a:alpha val="100000"/>
               </a:srgbClr>
             </a:solidFill>
@@ -13054,7 +12937,7 @@
             </a:avLst>
           </a:prstGeom>
           <a:solidFill>
-            <a:srgbClr val="F59E0B"/>
+            <a:srgbClr val="D98E1F"/>
           </a:solidFill>
           <a:ln/>
         </p:spPr>
@@ -13078,7 +12961,7 @@
             <a:avLst/>
           </a:prstGeom>
           <a:solidFill>
-            <a:srgbClr val="F59E0B"/>
+            <a:srgbClr val="D98E1F"/>
           </a:solidFill>
           <a:ln/>
         </p:spPr>
@@ -13153,7 +13036,7 @@
             <a:r>
               <a:rPr lang="en-US" sz="1200" b="1" dirty="0">
                 <a:solidFill>
-                  <a:srgbClr val="22303C"/>
+                  <a:srgbClr val="FFFFFF"/>
                 </a:solidFill>
                 <a:latin typeface="Microsoft YaHei" pitchFamily="34" charset="0"/>
                 <a:ea typeface="Microsoft YaHei" pitchFamily="34" charset="-122"/>
@@ -13192,7 +13075,7 @@
             <a:r>
               <a:rPr lang="en-US" sz="950" dirty="0">
                 <a:solidFill>
-                  <a:srgbClr val="6B7C8A"/>
+                  <a:srgbClr val="A9BECC"/>
                 </a:solidFill>
                 <a:latin typeface="Microsoft YaHei" pitchFamily="34" charset="0"/>
                 <a:ea typeface="Microsoft YaHei" pitchFamily="34" charset="-122"/>
@@ -13231,7 +13114,7 @@
             <a:r>
               <a:rPr b="1" sz="1000">
                 <a:solidFill>
-                  <a:srgbClr val="0FA3A8"/>
+                  <a:srgbClr val="3FC6D6"/>
                 </a:solidFill>
                 <a:latin typeface="Microsoft YaHei"/>
                 <a:ea typeface="Microsoft YaHei"/>
@@ -13241,7 +13124,7 @@
             <a:r>
               <a:rPr sz="900">
                 <a:solidFill>
-                  <a:srgbClr val="9FB8C8"/>
+                  <a:srgbClr val="8FA6B5"/>
                 </a:solidFill>
                 <a:latin typeface="Microsoft YaHei"/>
                 <a:ea typeface="Microsoft YaHei"/>
@@ -13279,7 +13162,7 @@
             <a:r>
               <a:rPr lang="en-US" sz="900" dirty="0">
                 <a:solidFill>
-                  <a:srgbClr val="6B7C8A"/>
+                  <a:srgbClr val="A9BECC"/>
                 </a:solidFill>
                 <a:latin typeface="Microsoft YaHei" pitchFamily="34" charset="0"/>
                 <a:ea typeface="Microsoft YaHei" pitchFamily="34" charset="-122"/>
@@ -13306,7 +13189,7 @@
             <a:avLst/>
           </a:prstGeom>
           <a:solidFill>
-            <a:srgbClr val="D8E3EA"/>
+            <a:srgbClr val="23465C"/>
           </a:solidFill>
           <a:ln>
             <a:noFill/>
@@ -13349,7 +13232,7 @@
     <p:bg>
       <p:bgPr>
         <a:solidFill>
-          <a:srgbClr val="F6F9FB"/>
+          <a:srgbClr val="0B1F33"/>
         </a:solidFill>
       </p:bgPr>
     </p:bg>
@@ -13384,7 +13267,7 @@
             </a:avLst>
           </a:prstGeom>
           <a:solidFill>
-            <a:srgbClr val="0FA3A8"/>
+            <a:srgbClr val="0E7E86"/>
           </a:solidFill>
           <a:ln/>
         </p:spPr>
@@ -13420,7 +13303,7 @@
             <a:r>
               <a:rPr lang="en-US" sz="1100" b="1" kern="0" spc="200" dirty="0">
                 <a:solidFill>
-                  <a:srgbClr val="0FA3A8"/>
+                  <a:srgbClr val="3FC6D6"/>
                 </a:solidFill>
                 <a:latin typeface="Microsoft YaHei" pitchFamily="34" charset="0"/>
                 <a:ea typeface="Microsoft YaHei" pitchFamily="34" charset="-122"/>
@@ -13459,7 +13342,7 @@
             <a:r>
               <a:rPr lang="en-US" sz="2400" b="1" dirty="0">
                 <a:solidFill>
-                  <a:srgbClr val="22303C"/>
+                  <a:srgbClr val="FFFFFF"/>
                 </a:solidFill>
                 <a:latin typeface="Microsoft YaHei" pitchFamily="34" charset="0"/>
                 <a:ea typeface="Microsoft YaHei" pitchFamily="34" charset="-122"/>
@@ -13488,11 +13371,11 @@
             </a:avLst>
           </a:prstGeom>
           <a:solidFill>
-            <a:srgbClr val="FFFFFF"/>
+            <a:srgbClr val="13314D"/>
           </a:solidFill>
           <a:ln w="9525">
             <a:solidFill>
-              <a:srgbClr val="D8E3EA">
+              <a:srgbClr val="23465C">
                 <a:alpha val="100000"/>
               </a:srgbClr>
             </a:solidFill>
@@ -13527,7 +13410,7 @@
             </a:avLst>
           </a:prstGeom>
           <a:solidFill>
-            <a:srgbClr val="0FA3A8"/>
+            <a:srgbClr val="0E7E86"/>
           </a:solidFill>
           <a:ln/>
         </p:spPr>
@@ -13563,7 +13446,7 @@
             <a:r>
               <a:rPr lang="en-US" sz="1300" b="1" dirty="0">
                 <a:solidFill>
-                  <a:srgbClr val="22303C"/>
+                  <a:srgbClr val="FFFFFF"/>
                 </a:solidFill>
                 <a:latin typeface="Microsoft YaHei" pitchFamily="34" charset="0"/>
                 <a:ea typeface="Microsoft YaHei" pitchFamily="34" charset="-122"/>
@@ -13606,7 +13489,7 @@
             <a:r>
               <a:rPr lang="en-US" sz="950" dirty="0">
                 <a:solidFill>
-                  <a:srgbClr val="6B7C8A"/>
+                  <a:srgbClr val="A9BECC"/>
                 </a:solidFill>
                 <a:latin typeface="Microsoft YaHei" pitchFamily="34" charset="0"/>
                 <a:ea typeface="Microsoft YaHei" pitchFamily="34" charset="-122"/>
@@ -13627,7 +13510,7 @@
             <a:r>
               <a:rPr lang="en-US" sz="950" dirty="0">
                 <a:solidFill>
-                  <a:srgbClr val="6B7C8A"/>
+                  <a:srgbClr val="A9BECC"/>
                 </a:solidFill>
                 <a:latin typeface="Microsoft YaHei" pitchFamily="34" charset="0"/>
                 <a:ea typeface="Microsoft YaHei" pitchFamily="34" charset="-122"/>
@@ -13648,7 +13531,7 @@
             <a:r>
               <a:rPr lang="en-US" sz="950" b="1" dirty="0">
                 <a:solidFill>
-                  <a:srgbClr val="0FA3A8"/>
+                  <a:srgbClr val="3FC6D6"/>
                 </a:solidFill>
                 <a:latin typeface="Microsoft YaHei" pitchFamily="34" charset="0"/>
                 <a:ea typeface="Microsoft YaHei" pitchFamily="34" charset="-122"/>
@@ -13669,7 +13552,7 @@
             <a:r>
               <a:rPr lang="en-US" sz="950" dirty="0">
                 <a:solidFill>
-                  <a:srgbClr val="6B7C8A"/>
+                  <a:srgbClr val="A9BECC"/>
                 </a:solidFill>
                 <a:latin typeface="Microsoft YaHei" pitchFamily="34" charset="0"/>
                 <a:ea typeface="Microsoft YaHei" pitchFamily="34" charset="-122"/>
@@ -13698,11 +13581,11 @@
             </a:avLst>
           </a:prstGeom>
           <a:solidFill>
-            <a:srgbClr val="FFFFFF"/>
+            <a:srgbClr val="13314D"/>
           </a:solidFill>
           <a:ln w="9525">
             <a:solidFill>
-              <a:srgbClr val="D8E3EA">
+              <a:srgbClr val="23465C">
                 <a:alpha val="100000"/>
               </a:srgbClr>
             </a:solidFill>
@@ -13737,7 +13620,7 @@
             </a:avLst>
           </a:prstGeom>
           <a:solidFill>
-            <a:srgbClr val="0E4C6E"/>
+            <a:srgbClr val="1A5F84"/>
           </a:solidFill>
           <a:ln/>
         </p:spPr>
@@ -13773,7 +13656,7 @@
             <a:r>
               <a:rPr lang="en-US" sz="1300" b="1" dirty="0">
                 <a:solidFill>
-                  <a:srgbClr val="22303C"/>
+                  <a:srgbClr val="FFFFFF"/>
                 </a:solidFill>
                 <a:latin typeface="Microsoft YaHei" pitchFamily="34" charset="0"/>
                 <a:ea typeface="Microsoft YaHei" pitchFamily="34" charset="-122"/>
@@ -13816,7 +13699,7 @@
             <a:r>
               <a:rPr lang="en-US" sz="950" dirty="0">
                 <a:solidFill>
-                  <a:srgbClr val="6B7C8A"/>
+                  <a:srgbClr val="A9BECC"/>
                 </a:solidFill>
                 <a:latin typeface="Microsoft YaHei" pitchFamily="34" charset="0"/>
                 <a:ea typeface="Microsoft YaHei" pitchFamily="34" charset="-122"/>
@@ -13837,7 +13720,7 @@
             <a:r>
               <a:rPr lang="en-US" sz="950" dirty="0">
                 <a:solidFill>
-                  <a:srgbClr val="0FA3A8"/>
+                  <a:srgbClr val="3FC6D6"/>
                 </a:solidFill>
                 <a:latin typeface="Microsoft YaHei" pitchFamily="34" charset="0"/>
                 <a:ea typeface="Microsoft YaHei" pitchFamily="34" charset="-122"/>
@@ -13858,7 +13741,7 @@
             <a:r>
               <a:rPr lang="en-US" sz="950" dirty="0">
                 <a:solidFill>
-                  <a:srgbClr val="0FA3A8"/>
+                  <a:srgbClr val="3FC6D6"/>
                 </a:solidFill>
                 <a:latin typeface="Microsoft YaHei" pitchFamily="34" charset="0"/>
                 <a:ea typeface="Microsoft YaHei" pitchFamily="34" charset="-122"/>
@@ -13879,7 +13762,7 @@
             <a:r>
               <a:rPr lang="en-US" sz="950" dirty="0">
                 <a:solidFill>
-                  <a:srgbClr val="C0504D"/>
+                  <a:srgbClr val="FF8A75"/>
                 </a:solidFill>
                 <a:latin typeface="Microsoft YaHei" pitchFamily="34" charset="0"/>
                 <a:ea typeface="Microsoft YaHei" pitchFamily="34" charset="-122"/>
@@ -13908,7 +13791,7 @@
             </a:avLst>
           </a:prstGeom>
           <a:solidFill>
-            <a:srgbClr val="FFF4DC"/>
+            <a:srgbClr val="3A2E12"/>
           </a:solidFill>
           <a:ln/>
         </p:spPr>
@@ -13934,7 +13817,7 @@
             </a:avLst>
           </a:prstGeom>
           <a:solidFill>
-            <a:srgbClr val="F59E0B"/>
+            <a:srgbClr val="D98E1F"/>
           </a:solidFill>
           <a:ln/>
         </p:spPr>
@@ -13970,7 +13853,7 @@
             <a:r>
               <a:rPr lang="en-US" sz="1100" b="1" dirty="0">
                 <a:solidFill>
-                  <a:srgbClr val="B07A00"/>
+                  <a:srgbClr val="F5A623"/>
                 </a:solidFill>
                 <a:latin typeface="Microsoft YaHei" pitchFamily="34" charset="0"/>
                 <a:ea typeface="Microsoft YaHei" pitchFamily="34" charset="-122"/>
@@ -13981,7 +13864,7 @@
             <a:r>
               <a:rPr lang="en-US" sz="1100" dirty="0">
                 <a:solidFill>
-                  <a:srgbClr val="22303C"/>
+                  <a:srgbClr val="FFFFFF"/>
                 </a:solidFill>
                 <a:latin typeface="Microsoft YaHei" pitchFamily="34" charset="0"/>
                 <a:ea typeface="Microsoft YaHei" pitchFamily="34" charset="-122"/>
@@ -13992,7 +13875,7 @@
             <a:r>
               <a:rPr lang="en-US" sz="1100" b="1" dirty="0">
                 <a:solidFill>
-                  <a:srgbClr val="22303C"/>
+                  <a:srgbClr val="FFFFFF"/>
                 </a:solidFill>
                 <a:latin typeface="Microsoft YaHei" pitchFamily="34" charset="0"/>
                 <a:ea typeface="Microsoft YaHei" pitchFamily="34" charset="-122"/>
@@ -14003,7 +13886,7 @@
             <a:r>
               <a:rPr lang="en-US" sz="1100" dirty="0">
                 <a:solidFill>
-                  <a:srgbClr val="22303C"/>
+                  <a:srgbClr val="FFFFFF"/>
                 </a:solidFill>
                 <a:latin typeface="Microsoft YaHei" pitchFamily="34" charset="0"/>
                 <a:ea typeface="Microsoft YaHei" pitchFamily="34" charset="-122"/>
@@ -14042,7 +13925,7 @@
             <a:r>
               <a:rPr lang="en-US" sz="900" dirty="0">
                 <a:solidFill>
-                  <a:srgbClr val="6B7C8A"/>
+                  <a:srgbClr val="A9BECC"/>
                 </a:solidFill>
                 <a:latin typeface="Microsoft YaHei" pitchFamily="34" charset="0"/>
                 <a:ea typeface="Microsoft YaHei" pitchFamily="34" charset="-122"/>
@@ -14081,7 +13964,7 @@
             <a:r>
               <a:rPr b="1" sz="1000">
                 <a:solidFill>
-                  <a:srgbClr val="0FA3A8"/>
+                  <a:srgbClr val="3FC6D6"/>
                 </a:solidFill>
                 <a:latin typeface="Microsoft YaHei"/>
                 <a:ea typeface="Microsoft YaHei"/>
@@ -14091,7 +13974,7 @@
             <a:r>
               <a:rPr sz="900">
                 <a:solidFill>
-                  <a:srgbClr val="9FB8C8"/>
+                  <a:srgbClr val="8FA6B5"/>
                 </a:solidFill>
                 <a:latin typeface="Microsoft YaHei"/>
                 <a:ea typeface="Microsoft YaHei"/>
@@ -14129,7 +14012,7 @@
             <a:r>
               <a:rPr lang="en-US" sz="900" dirty="0">
                 <a:solidFill>
-                  <a:srgbClr val="6B7C8A"/>
+                  <a:srgbClr val="A9BECC"/>
                 </a:solidFill>
                 <a:latin typeface="Microsoft YaHei" pitchFamily="34" charset="0"/>
                 <a:ea typeface="Microsoft YaHei" pitchFamily="34" charset="-122"/>
@@ -14156,7 +14039,7 @@
             <a:avLst/>
           </a:prstGeom>
           <a:solidFill>
-            <a:srgbClr val="D8E3EA"/>
+            <a:srgbClr val="23465C"/>
           </a:solidFill>
           <a:ln>
             <a:noFill/>
@@ -14234,7 +14117,7 @@
             </a:avLst>
           </a:prstGeom>
           <a:solidFill>
-            <a:srgbClr val="0FA3A8"/>
+            <a:srgbClr val="0E7E86"/>
           </a:solidFill>
           <a:ln/>
         </p:spPr>
@@ -14270,7 +14153,7 @@
             <a:r>
               <a:rPr lang="en-US" sz="1200" b="1" kern="0" spc="300" dirty="0">
                 <a:solidFill>
-                  <a:srgbClr val="0FA3A8"/>
+                  <a:srgbClr val="3FC6D6"/>
                 </a:solidFill>
                 <a:latin typeface="Microsoft YaHei" pitchFamily="34" charset="0"/>
                 <a:ea typeface="Microsoft YaHei" pitchFamily="34" charset="-122"/>
@@ -14336,7 +14219,7 @@
             <a:avLst/>
           </a:prstGeom>
           <a:solidFill>
-            <a:srgbClr val="0FA3A8"/>
+            <a:srgbClr val="0E7E86"/>
           </a:solidFill>
           <a:ln/>
         </p:spPr>
@@ -14372,7 +14255,7 @@
             <a:r>
               <a:rPr lang="en-US" sz="1300" b="1" dirty="0">
                 <a:solidFill>
-                  <a:srgbClr val="0B1F33"/>
+                  <a:srgbClr val="FFFFFF"/>
                 </a:solidFill>
                 <a:latin typeface="Microsoft YaHei" pitchFamily="34" charset="0"/>
                 <a:ea typeface="Microsoft YaHei" pitchFamily="34" charset="-122"/>
@@ -14411,7 +14294,7 @@
             <a:r>
               <a:rPr lang="en-US" sz="1350" dirty="0">
                 <a:solidFill>
-                  <a:srgbClr val="E3EEF4"/>
+                  <a:srgbClr val="FFFFFF"/>
                 </a:solidFill>
                 <a:latin typeface="Microsoft YaHei" pitchFamily="34" charset="0"/>
                 <a:ea typeface="Microsoft YaHei" pitchFamily="34" charset="-122"/>
@@ -14438,7 +14321,7 @@
             <a:avLst/>
           </a:prstGeom>
           <a:solidFill>
-            <a:srgbClr val="0FA3A8"/>
+            <a:srgbClr val="0E7E86"/>
           </a:solidFill>
           <a:ln/>
         </p:spPr>
@@ -14474,7 +14357,7 @@
             <a:r>
               <a:rPr lang="en-US" sz="1300" b="1" dirty="0">
                 <a:solidFill>
-                  <a:srgbClr val="0B1F33"/>
+                  <a:srgbClr val="FFFFFF"/>
                 </a:solidFill>
                 <a:latin typeface="Microsoft YaHei" pitchFamily="34" charset="0"/>
                 <a:ea typeface="Microsoft YaHei" pitchFamily="34" charset="-122"/>
@@ -14513,7 +14396,7 @@
             <a:r>
               <a:rPr lang="en-US" sz="1350" dirty="0">
                 <a:solidFill>
-                  <a:srgbClr val="E3EEF4"/>
+                  <a:srgbClr val="FFFFFF"/>
                 </a:solidFill>
                 <a:latin typeface="Microsoft YaHei" pitchFamily="34" charset="0"/>
                 <a:ea typeface="Microsoft YaHei" pitchFamily="34" charset="-122"/>
@@ -14540,7 +14423,7 @@
             <a:avLst/>
           </a:prstGeom>
           <a:solidFill>
-            <a:srgbClr val="0FA3A8"/>
+            <a:srgbClr val="0E7E86"/>
           </a:solidFill>
           <a:ln/>
         </p:spPr>
@@ -14576,7 +14459,7 @@
             <a:r>
               <a:rPr lang="en-US" sz="1300" b="1" dirty="0">
                 <a:solidFill>
-                  <a:srgbClr val="0B1F33"/>
+                  <a:srgbClr val="FFFFFF"/>
                 </a:solidFill>
                 <a:latin typeface="Microsoft YaHei" pitchFamily="34" charset="0"/>
                 <a:ea typeface="Microsoft YaHei" pitchFamily="34" charset="-122"/>
@@ -14615,7 +14498,7 @@
             <a:r>
               <a:rPr lang="en-US" sz="1350" dirty="0">
                 <a:solidFill>
-                  <a:srgbClr val="E3EEF4"/>
+                  <a:srgbClr val="FFFFFF"/>
                 </a:solidFill>
                 <a:latin typeface="Microsoft YaHei" pitchFamily="34" charset="0"/>
                 <a:ea typeface="Microsoft YaHei" pitchFamily="34" charset="-122"/>
@@ -14644,7 +14527,7 @@
             </a:avLst>
           </a:prstGeom>
           <a:solidFill>
-            <a:srgbClr val="13314D"/>
+            <a:srgbClr val="16324A"/>
           </a:solidFill>
           <a:ln/>
         </p:spPr>
@@ -14680,7 +14563,7 @@
             <a:r>
               <a:rPr lang="en-US" sz="900" dirty="0">
                 <a:solidFill>
-                  <a:srgbClr val="9FB8C8"/>
+                  <a:srgbClr val="A9BECC"/>
                 </a:solidFill>
                 <a:latin typeface="Microsoft YaHei" pitchFamily="34" charset="0"/>
                 <a:ea typeface="Microsoft YaHei" pitchFamily="34" charset="-122"/>
@@ -14719,7 +14602,7 @@
             <a:r>
               <a:rPr lang="en-US" sz="1000" dirty="0">
                 <a:solidFill>
-                  <a:srgbClr val="7E97A8"/>
+                  <a:srgbClr val="A9BECC"/>
                 </a:solidFill>
                 <a:latin typeface="Microsoft YaHei" pitchFamily="34" charset="0"/>
                 <a:ea typeface="Microsoft YaHei" pitchFamily="34" charset="-122"/>
@@ -14780,7 +14663,7 @@
             </a:avLst>
           </a:prstGeom>
           <a:solidFill>
-            <a:srgbClr val="F59E0B"/>
+            <a:srgbClr val="D98E1F"/>
           </a:solidFill>
           <a:ln/>
         </p:spPr>
@@ -14816,7 +14699,7 @@
             <a:r>
               <a:rPr lang="en-US" sz="1100" b="1" kern="0" spc="200" dirty="0">
                 <a:solidFill>
-                  <a:srgbClr val="F59E0B"/>
+                  <a:srgbClr val="3FC6D6"/>
                 </a:solidFill>
                 <a:latin typeface="Microsoft YaHei" pitchFamily="34" charset="0"/>
                 <a:ea typeface="Microsoft YaHei" pitchFamily="34" charset="-122"/>
@@ -14894,7 +14777,7 @@
             <a:r>
               <a:rPr lang="en-US" sz="1350" dirty="0">
                 <a:solidFill>
-                  <a:srgbClr val="C9D9E3"/>
+                  <a:srgbClr val="FFFFFF"/>
                 </a:solidFill>
                 <a:latin typeface="Microsoft YaHei" pitchFamily="34" charset="0"/>
                 <a:ea typeface="Microsoft YaHei" pitchFamily="34" charset="-122"/>
@@ -14933,7 +14816,7 @@
             <a:r>
               <a:rPr lang="en-US" sz="1600" b="1" dirty="0">
                 <a:solidFill>
-                  <a:srgbClr val="FFFFFF"/>
+                  <a:srgbClr val="8FD0F0"/>
                 </a:solidFill>
                 <a:latin typeface="Microsoft YaHei" pitchFamily="34" charset="0"/>
                 <a:ea typeface="Microsoft YaHei" pitchFamily="34" charset="-122"/>
@@ -14964,7 +14847,11 @@
           <a:solidFill>
             <a:srgbClr val="13314D"/>
           </a:solidFill>
-          <a:ln/>
+          <a:ln w="9525">
+            <a:solidFill>
+              <a:srgbClr val="23465C"/>
+            </a:solidFill>
+          </a:ln>
         </p:spPr>
         <p:txBody>
           <a:bodyPr/>
@@ -14988,7 +14875,7 @@
             </a:avLst>
           </a:prstGeom>
           <a:solidFill>
-            <a:srgbClr val="F59E0B"/>
+            <a:srgbClr val="D98E1F"/>
           </a:solidFill>
           <a:ln/>
         </p:spPr>
@@ -15063,7 +14950,7 @@
             <a:r>
               <a:rPr lang="en-US" sz="950" dirty="0">
                 <a:solidFill>
-                  <a:srgbClr val="9FB8C8"/>
+                  <a:srgbClr val="A9BECC"/>
                 </a:solidFill>
                 <a:latin typeface="Microsoft YaHei" pitchFamily="34" charset="0"/>
                 <a:ea typeface="Microsoft YaHei" pitchFamily="34" charset="-122"/>
@@ -15080,7 +14967,7 @@
             <a:r>
               <a:rPr lang="en-US" sz="950" dirty="0">
                 <a:solidFill>
-                  <a:srgbClr val="9FB8C8"/>
+                  <a:srgbClr val="A9BECC"/>
                 </a:solidFill>
                 <a:latin typeface="Microsoft YaHei" pitchFamily="34" charset="0"/>
                 <a:ea typeface="Microsoft YaHei" pitchFamily="34" charset="-122"/>
@@ -15097,7 +14984,7 @@
             <a:r>
               <a:rPr lang="en-US" sz="950" dirty="0">
                 <a:solidFill>
-                  <a:srgbClr val="9FB8C8"/>
+                  <a:srgbClr val="A9BECC"/>
                 </a:solidFill>
                 <a:latin typeface="Microsoft YaHei" pitchFamily="34" charset="0"/>
                 <a:ea typeface="Microsoft YaHei" pitchFamily="34" charset="-122"/>
@@ -15145,7 +15032,11 @@
           <a:solidFill>
             <a:srgbClr val="13314D"/>
           </a:solidFill>
-          <a:ln/>
+          <a:ln w="9525">
+            <a:solidFill>
+              <a:srgbClr val="23465C"/>
+            </a:solidFill>
+          </a:ln>
         </p:spPr>
         <p:txBody>
           <a:bodyPr/>
@@ -15169,7 +15060,7 @@
             </a:avLst>
           </a:prstGeom>
           <a:solidFill>
-            <a:srgbClr val="F59E0B"/>
+            <a:srgbClr val="D98E1F"/>
           </a:solidFill>
           <a:ln/>
         </p:spPr>
@@ -15261,7 +15152,7 @@
             <a:r>
               <a:rPr lang="en-US" sz="950" dirty="0">
                 <a:solidFill>
-                  <a:srgbClr val="9FB8C8"/>
+                  <a:srgbClr val="A9BECC"/>
                 </a:solidFill>
                 <a:latin typeface="Microsoft YaHei" pitchFamily="34" charset="0"/>
                 <a:ea typeface="Microsoft YaHei" pitchFamily="34" charset="-122"/>
@@ -15278,7 +15169,7 @@
             <a:r>
               <a:rPr lang="en-US" sz="950" dirty="0">
                 <a:solidFill>
-                  <a:srgbClr val="9FB8C8"/>
+                  <a:srgbClr val="A9BECC"/>
                 </a:solidFill>
                 <a:latin typeface="Microsoft YaHei" pitchFamily="34" charset="0"/>
                 <a:ea typeface="Microsoft YaHei" pitchFamily="34" charset="-122"/>
@@ -15295,7 +15186,7 @@
             <a:r>
               <a:rPr lang="en-US" sz="950" dirty="0">
                 <a:solidFill>
-                  <a:srgbClr val="9FB8C8"/>
+                  <a:srgbClr val="A9BECC"/>
                 </a:solidFill>
                 <a:latin typeface="Microsoft YaHei" pitchFamily="34" charset="0"/>
                 <a:ea typeface="Microsoft YaHei" pitchFamily="34" charset="-122"/>
@@ -15326,7 +15217,11 @@
           <a:solidFill>
             <a:srgbClr val="13314D"/>
           </a:solidFill>
-          <a:ln/>
+          <a:ln w="9525">
+            <a:solidFill>
+              <a:srgbClr val="23465C"/>
+            </a:solidFill>
+          </a:ln>
         </p:spPr>
         <p:txBody>
           <a:bodyPr/>
@@ -15350,7 +15245,7 @@
             </a:avLst>
           </a:prstGeom>
           <a:solidFill>
-            <a:srgbClr val="F59E0B"/>
+            <a:srgbClr val="D98E1F"/>
           </a:solidFill>
           <a:ln/>
         </p:spPr>
@@ -15487,7 +15382,7 @@
             <a:r>
               <a:rPr lang="en-US" sz="950" dirty="0">
                 <a:solidFill>
-                  <a:srgbClr val="9FB8C8"/>
+                  <a:srgbClr val="A9BECC"/>
                 </a:solidFill>
                 <a:latin typeface="Microsoft YaHei" pitchFamily="34" charset="0"/>
                 <a:ea typeface="Microsoft YaHei" pitchFamily="34" charset="-122"/>
@@ -15509,7 +15404,7 @@
             <a:r>
               <a:rPr lang="en-US" sz="950" dirty="0">
                 <a:solidFill>
-                  <a:srgbClr val="9FB8C8"/>
+                  <a:srgbClr val="A9BECC"/>
                 </a:solidFill>
                 <a:latin typeface="Microsoft YaHei" pitchFamily="34" charset="0"/>
                 <a:ea typeface="Microsoft YaHei" pitchFamily="34" charset="-122"/>
@@ -15559,7 +15454,7 @@
             <a:r>
               <a:rPr lang="en-US" sz="1050" dirty="0">
                 <a:solidFill>
-                  <a:srgbClr val="C9D9E3"/>
+                  <a:srgbClr val="FFFFFF"/>
                 </a:solidFill>
                 <a:latin typeface="Microsoft YaHei" pitchFamily="34" charset="0"/>
                 <a:ea typeface="Microsoft YaHei" pitchFamily="34" charset="-122"/>
@@ -15608,7 +15503,7 @@
             <a:r>
               <a:rPr sz="900">
                 <a:solidFill>
-                  <a:srgbClr val="9FB8C8"/>
+                  <a:srgbClr val="3FC6D6"/>
                 </a:solidFill>
                 <a:latin typeface="Microsoft YaHei"/>
                 <a:ea typeface="Microsoft YaHei"/>
@@ -15646,7 +15541,7 @@
             <a:r>
               <a:rPr lang="en-US" sz="900" dirty="0">
                 <a:solidFill>
-                  <a:srgbClr val="6B7C8A"/>
+                  <a:srgbClr val="A9BECC"/>
                 </a:solidFill>
                 <a:latin typeface="Microsoft YaHei" pitchFamily="34" charset="0"/>
                 <a:ea typeface="Microsoft YaHei" pitchFamily="34" charset="-122"/>
@@ -15673,7 +15568,7 @@
             <a:avLst/>
           </a:prstGeom>
           <a:solidFill>
-            <a:srgbClr val="23465C"/>
+            <a:srgbClr val="2E5A78"/>
           </a:solidFill>
           <a:ln>
             <a:noFill/>
@@ -15716,7 +15611,7 @@
     <p:bg>
       <p:bgPr>
         <a:solidFill>
-          <a:srgbClr val="F6F9FB"/>
+          <a:srgbClr val="0B1F33"/>
         </a:solidFill>
       </p:bgPr>
     </p:bg>
@@ -15751,7 +15646,7 @@
             </a:avLst>
           </a:prstGeom>
           <a:solidFill>
-            <a:srgbClr val="0FA3A8"/>
+            <a:srgbClr val="0E7E86"/>
           </a:solidFill>
           <a:ln/>
         </p:spPr>
@@ -15787,7 +15682,7 @@
             <a:r>
               <a:rPr lang="en-US" sz="1100" b="1" kern="0" spc="200" dirty="0">
                 <a:solidFill>
-                  <a:srgbClr val="0FA3A8"/>
+                  <a:srgbClr val="3FC6D6"/>
                 </a:solidFill>
                 <a:latin typeface="Microsoft YaHei" pitchFamily="34" charset="0"/>
                 <a:ea typeface="Microsoft YaHei" pitchFamily="34" charset="-122"/>
@@ -15826,7 +15721,7 @@
             <a:r>
               <a:rPr lang="en-US" sz="2400" b="1" dirty="0">
                 <a:solidFill>
-                  <a:srgbClr val="22303C"/>
+                  <a:srgbClr val="FFFFFF"/>
                 </a:solidFill>
                 <a:latin typeface="Microsoft YaHei" pitchFamily="34" charset="0"/>
                 <a:ea typeface="Microsoft YaHei" pitchFamily="34" charset="-122"/>
@@ -15865,7 +15760,7 @@
             <a:r>
               <a:rPr lang="en-US" sz="1250" dirty="0">
                 <a:solidFill>
-                  <a:srgbClr val="22303C"/>
+                  <a:srgbClr val="FFFFFF"/>
                 </a:solidFill>
                 <a:latin typeface="Microsoft YaHei" pitchFamily="34" charset="0"/>
                 <a:ea typeface="Microsoft YaHei" pitchFamily="34" charset="-122"/>
@@ -15894,7 +15789,7 @@
             </a:avLst>
           </a:prstGeom>
           <a:solidFill>
-            <a:srgbClr val="0E4C6E"/>
+            <a:srgbClr val="1A5F84"/>
           </a:solidFill>
           <a:ln/>
         </p:spPr>
@@ -15969,7 +15864,7 @@
             <a:r>
               <a:rPr lang="en-US" sz="1000" dirty="0">
                 <a:solidFill>
-                  <a:srgbClr val="E3EEF4"/>
+                  <a:srgbClr val="FFFFFF"/>
                 </a:solidFill>
                 <a:latin typeface="Microsoft YaHei" pitchFamily="34" charset="0"/>
                 <a:ea typeface="Microsoft YaHei" pitchFamily="34" charset="-122"/>
@@ -15998,7 +15893,7 @@
             </a:avLst>
           </a:prstGeom>
           <a:solidFill>
-            <a:srgbClr val="0FA3A8"/>
+            <a:srgbClr val="0E7E86"/>
           </a:solidFill>
           <a:ln/>
         </p:spPr>
@@ -16073,7 +15968,7 @@
             <a:r>
               <a:rPr lang="en-US" sz="1000" dirty="0">
                 <a:solidFill>
-                  <a:srgbClr val="E3EEF4"/>
+                  <a:srgbClr val="FFFFFF"/>
                 </a:solidFill>
                 <a:latin typeface="Microsoft YaHei" pitchFamily="34" charset="0"/>
                 <a:ea typeface="Microsoft YaHei" pitchFamily="34" charset="-122"/>
@@ -16102,7 +15997,7 @@
             </a:avLst>
           </a:prstGeom>
           <a:solidFill>
-            <a:srgbClr val="9DB4C0"/>
+            <a:srgbClr val="5A7789"/>
           </a:solidFill>
           <a:ln/>
         </p:spPr>
@@ -16177,7 +16072,7 @@
             <a:r>
               <a:rPr lang="en-US" sz="1000" dirty="0">
                 <a:solidFill>
-                  <a:srgbClr val="E3EEF4"/>
+                  <a:srgbClr val="FFFFFF"/>
                 </a:solidFill>
                 <a:latin typeface="Microsoft YaHei" pitchFamily="34" charset="0"/>
                 <a:ea typeface="Microsoft YaHei" pitchFamily="34" charset="-122"/>
@@ -16216,7 +16111,7 @@
             <a:r>
               <a:rPr lang="en-US" sz="1350" b="1" dirty="0">
                 <a:solidFill>
-                  <a:srgbClr val="22303C"/>
+                  <a:srgbClr val="FFFFFF"/>
                 </a:solidFill>
                 <a:latin typeface="Microsoft YaHei" pitchFamily="34" charset="0"/>
                 <a:ea typeface="Microsoft YaHei" pitchFamily="34" charset="-122"/>
@@ -16255,7 +16150,7 @@
             <a:r>
               <a:rPr b="1" sz="1000">
                 <a:solidFill>
-                  <a:srgbClr val="0FA3A8"/>
+                  <a:srgbClr val="3FC6D6"/>
                 </a:solidFill>
                 <a:latin typeface="Microsoft YaHei"/>
                 <a:ea typeface="Microsoft YaHei"/>
@@ -16265,7 +16160,7 @@
             <a:r>
               <a:rPr sz="900">
                 <a:solidFill>
-                  <a:srgbClr val="9FB8C8"/>
+                  <a:srgbClr val="8FA6B5"/>
                 </a:solidFill>
                 <a:latin typeface="Microsoft YaHei"/>
                 <a:ea typeface="Microsoft YaHei"/>
@@ -16303,7 +16198,7 @@
             <a:r>
               <a:rPr lang="en-US" sz="900" dirty="0">
                 <a:solidFill>
-                  <a:srgbClr val="6B7C8A"/>
+                  <a:srgbClr val="A9BECC"/>
                 </a:solidFill>
                 <a:latin typeface="Microsoft YaHei" pitchFamily="34" charset="0"/>
                 <a:ea typeface="Microsoft YaHei" pitchFamily="34" charset="-122"/>
@@ -16330,7 +16225,7 @@
             <a:avLst/>
           </a:prstGeom>
           <a:solidFill>
-            <a:srgbClr val="D8E3EA"/>
+            <a:srgbClr val="23465C"/>
           </a:solidFill>
           <a:ln>
             <a:noFill/>
@@ -16373,7 +16268,7 @@
     <p:bg>
       <p:bgPr>
         <a:solidFill>
-          <a:srgbClr val="F6F9FB"/>
+          <a:srgbClr val="0B1F33"/>
         </a:solidFill>
       </p:bgPr>
     </p:bg>
@@ -16408,7 +16303,7 @@
             </a:avLst>
           </a:prstGeom>
           <a:solidFill>
-            <a:srgbClr val="0FA3A8"/>
+            <a:srgbClr val="0E7E86"/>
           </a:solidFill>
           <a:ln/>
         </p:spPr>
@@ -16444,7 +16339,7 @@
             <a:r>
               <a:rPr lang="en-US" sz="1100" b="1" kern="0" spc="200" dirty="0">
                 <a:solidFill>
-                  <a:srgbClr val="0FA3A8"/>
+                  <a:srgbClr val="3FC6D6"/>
                 </a:solidFill>
                 <a:latin typeface="Microsoft YaHei" pitchFamily="34" charset="0"/>
                 <a:ea typeface="Microsoft YaHei" pitchFamily="34" charset="-122"/>
@@ -16483,7 +16378,7 @@
             <a:r>
               <a:rPr lang="en-US" sz="2400" b="1" dirty="0">
                 <a:solidFill>
-                  <a:srgbClr val="22303C"/>
+                  <a:srgbClr val="FFFFFF"/>
                 </a:solidFill>
                 <a:latin typeface="Microsoft YaHei" pitchFamily="34" charset="0"/>
                 <a:ea typeface="Microsoft YaHei" pitchFamily="34" charset="-122"/>
@@ -16522,7 +16417,7 @@
             <a:r>
               <a:rPr lang="en-US" sz="1300" b="1" dirty="0">
                 <a:solidFill>
-                  <a:srgbClr val="0E4C6E"/>
+                  <a:srgbClr val="8FD0F0"/>
                 </a:solidFill>
                 <a:latin typeface="Microsoft YaHei" pitchFamily="34" charset="0"/>
                 <a:ea typeface="Microsoft YaHei" pitchFamily="34" charset="-122"/>
@@ -16562,7 +16457,7 @@
             <a:r>
               <a:rPr lang="en-US" sz="1050" dirty="0">
                 <a:solidFill>
-                  <a:srgbClr val="22303C"/>
+                  <a:srgbClr val="FFFFFF"/>
                 </a:solidFill>
                 <a:latin typeface="Microsoft YaHei" pitchFamily="34" charset="0"/>
                 <a:ea typeface="Microsoft YaHei" pitchFamily="34" charset="-122"/>
@@ -16602,7 +16497,7 @@
             <a:r>
               <a:rPr lang="en-US" sz="1050" dirty="0">
                 <a:solidFill>
-                  <a:srgbClr val="22303C"/>
+                  <a:srgbClr val="FFFFFF"/>
                 </a:solidFill>
                 <a:latin typeface="Microsoft YaHei" pitchFamily="34" charset="0"/>
                 <a:ea typeface="Microsoft YaHei" pitchFamily="34" charset="-122"/>
@@ -16642,7 +16537,7 @@
             <a:r>
               <a:rPr lang="en-US" sz="1050" dirty="0">
                 <a:solidFill>
-                  <a:srgbClr val="22303C"/>
+                  <a:srgbClr val="FFFFFF"/>
                 </a:solidFill>
                 <a:latin typeface="Microsoft YaHei" pitchFamily="34" charset="0"/>
                 <a:ea typeface="Microsoft YaHei" pitchFamily="34" charset="-122"/>
@@ -16682,7 +16577,7 @@
             <a:r>
               <a:rPr lang="en-US" sz="1050" dirty="0">
                 <a:solidFill>
-                  <a:srgbClr val="22303C"/>
+                  <a:srgbClr val="FFFFFF"/>
                 </a:solidFill>
                 <a:latin typeface="Microsoft YaHei" pitchFamily="34" charset="0"/>
                 <a:ea typeface="Microsoft YaHei" pitchFamily="34" charset="-122"/>
@@ -16722,7 +16617,7 @@
             <a:r>
               <a:rPr lang="en-US" sz="1050" dirty="0">
                 <a:solidFill>
-                  <a:srgbClr val="22303C"/>
+                  <a:srgbClr val="FFFFFF"/>
                 </a:solidFill>
                 <a:latin typeface="Microsoft YaHei" pitchFamily="34" charset="0"/>
                 <a:ea typeface="Microsoft YaHei" pitchFamily="34" charset="-122"/>
@@ -16762,7 +16657,7 @@
             <a:r>
               <a:rPr lang="en-US" sz="1050" dirty="0">
                 <a:solidFill>
-                  <a:srgbClr val="22303C"/>
+                  <a:srgbClr val="FFFFFF"/>
                 </a:solidFill>
                 <a:latin typeface="Microsoft YaHei" pitchFamily="34" charset="0"/>
                 <a:ea typeface="Microsoft YaHei" pitchFamily="34" charset="-122"/>
@@ -16791,11 +16686,11 @@
             </a:avLst>
           </a:prstGeom>
           <a:solidFill>
-            <a:srgbClr val="FFFFFF"/>
+            <a:srgbClr val="13314D"/>
           </a:solidFill>
           <a:ln w="9525">
             <a:solidFill>
-              <a:srgbClr val="D8E3EA">
+              <a:srgbClr val="23465C">
                 <a:alpha val="100000"/>
               </a:srgbClr>
             </a:solidFill>
@@ -16830,7 +16725,7 @@
             </a:avLst>
           </a:prstGeom>
           <a:solidFill>
-            <a:srgbClr val="0FA3A8"/>
+            <a:srgbClr val="0E7E86"/>
           </a:solidFill>
           <a:ln/>
         </p:spPr>
@@ -16866,7 +16761,7 @@
             <a:r>
               <a:rPr lang="en-US" sz="1300" b="1" dirty="0">
                 <a:solidFill>
-                  <a:srgbClr val="0E4C6E"/>
+                  <a:srgbClr val="8FD0F0"/>
                 </a:solidFill>
                 <a:latin typeface="Microsoft YaHei" pitchFamily="34" charset="0"/>
                 <a:ea typeface="Microsoft YaHei" pitchFamily="34" charset="-122"/>
@@ -16908,7 +16803,7 @@
             <a:r>
               <a:rPr lang="en-US" sz="1050" b="1" dirty="0">
                 <a:solidFill>
-                  <a:srgbClr val="22303C"/>
+                  <a:srgbClr val="FFFFFF"/>
                 </a:solidFill>
                 <a:latin typeface="Microsoft YaHei" pitchFamily="34" charset="0"/>
                 <a:ea typeface="Microsoft YaHei" pitchFamily="34" charset="-122"/>
@@ -16928,7 +16823,7 @@
             <a:r>
               <a:rPr lang="en-US" sz="1050" dirty="0">
                 <a:solidFill>
-                  <a:srgbClr val="6B7C8A"/>
+                  <a:srgbClr val="A9BECC"/>
                 </a:solidFill>
                 <a:latin typeface="Microsoft YaHei" pitchFamily="34" charset="0"/>
                 <a:ea typeface="Microsoft YaHei" pitchFamily="34" charset="-122"/>
@@ -16948,7 +16843,7 @@
             <a:r>
               <a:rPr lang="en-US" sz="1050" dirty="0">
                 <a:solidFill>
-                  <a:srgbClr val="000000"/>
+                  <a:srgbClr val="DCE8EF"/>
                 </a:solidFill>
                 <a:latin typeface="Microsoft YaHei" pitchFamily="34" charset="0"/>
                 <a:ea typeface="Microsoft YaHei" pitchFamily="34" charset="-122"/>
@@ -16968,7 +16863,7 @@
             <a:r>
               <a:rPr lang="en-US" sz="1050" b="1" dirty="0">
                 <a:solidFill>
-                  <a:srgbClr val="22303C"/>
+                  <a:srgbClr val="FFFFFF"/>
                 </a:solidFill>
                 <a:latin typeface="Microsoft YaHei" pitchFamily="34" charset="0"/>
                 <a:ea typeface="Microsoft YaHei" pitchFamily="34" charset="-122"/>
@@ -16988,7 +16883,7 @@
             <a:r>
               <a:rPr lang="en-US" sz="1050" dirty="0">
                 <a:solidFill>
-                  <a:srgbClr val="6B7C8A"/>
+                  <a:srgbClr val="A9BECC"/>
                 </a:solidFill>
                 <a:latin typeface="Microsoft YaHei" pitchFamily="34" charset="0"/>
                 <a:ea typeface="Microsoft YaHei" pitchFamily="34" charset="-122"/>
@@ -17008,7 +16903,7 @@
             <a:r>
               <a:rPr lang="en-US" sz="1050" dirty="0">
                 <a:solidFill>
-                  <a:srgbClr val="6B7C8A"/>
+                  <a:srgbClr val="A9BECC"/>
                 </a:solidFill>
                 <a:latin typeface="Microsoft YaHei" pitchFamily="34" charset="0"/>
                 <a:ea typeface="Microsoft YaHei" pitchFamily="34" charset="-122"/>
@@ -17028,7 +16923,7 @@
             <a:r>
               <a:rPr lang="en-US" sz="1050" dirty="0">
                 <a:solidFill>
-                  <a:srgbClr val="6B7C8A"/>
+                  <a:srgbClr val="A9BECC"/>
                 </a:solidFill>
                 <a:latin typeface="Microsoft YaHei" pitchFamily="34" charset="0"/>
                 <a:ea typeface="Microsoft YaHei" pitchFamily="34" charset="-122"/>
@@ -17048,7 +16943,7 @@
             <a:r>
               <a:rPr lang="en-US" sz="1050" dirty="0">
                 <a:solidFill>
-                  <a:srgbClr val="000000"/>
+                  <a:srgbClr val="DCE8EF"/>
                 </a:solidFill>
                 <a:latin typeface="Microsoft YaHei" pitchFamily="34" charset="0"/>
                 <a:ea typeface="Microsoft YaHei" pitchFamily="34" charset="-122"/>
@@ -17068,7 +16963,7 @@
             <a:r>
               <a:rPr lang="en-US" sz="1050" b="1" dirty="0">
                 <a:solidFill>
-                  <a:srgbClr val="22303C"/>
+                  <a:srgbClr val="FFFFFF"/>
                 </a:solidFill>
                 <a:latin typeface="Microsoft YaHei" pitchFamily="34" charset="0"/>
                 <a:ea typeface="Microsoft YaHei" pitchFamily="34" charset="-122"/>
@@ -17088,7 +16983,7 @@
             <a:r>
               <a:rPr lang="en-US" sz="1050" dirty="0">
                 <a:solidFill>
-                  <a:srgbClr val="6B7C8A"/>
+                  <a:srgbClr val="A9BECC"/>
                 </a:solidFill>
                 <a:latin typeface="Microsoft YaHei" pitchFamily="34" charset="0"/>
                 <a:ea typeface="Microsoft YaHei" pitchFamily="34" charset="-122"/>
@@ -17108,7 +17003,7 @@
             <a:r>
               <a:rPr lang="en-US" sz="1050" dirty="0">
                 <a:solidFill>
-                  <a:srgbClr val="6B7C8A"/>
+                  <a:srgbClr val="A9BECC"/>
                 </a:solidFill>
                 <a:latin typeface="Microsoft YaHei" pitchFamily="34" charset="0"/>
                 <a:ea typeface="Microsoft YaHei" pitchFamily="34" charset="-122"/>
@@ -17147,7 +17042,7 @@
             <a:r>
               <a:rPr b="1" sz="1000">
                 <a:solidFill>
-                  <a:srgbClr val="0FA3A8"/>
+                  <a:srgbClr val="3FC6D6"/>
                 </a:solidFill>
                 <a:latin typeface="Microsoft YaHei"/>
                 <a:ea typeface="Microsoft YaHei"/>
@@ -17157,7 +17052,7 @@
             <a:r>
               <a:rPr sz="900">
                 <a:solidFill>
-                  <a:srgbClr val="9FB8C8"/>
+                  <a:srgbClr val="8FA6B5"/>
                 </a:solidFill>
                 <a:latin typeface="Microsoft YaHei"/>
                 <a:ea typeface="Microsoft YaHei"/>
@@ -17195,7 +17090,7 @@
             <a:r>
               <a:rPr lang="en-US" sz="900" dirty="0">
                 <a:solidFill>
-                  <a:srgbClr val="6B7C8A"/>
+                  <a:srgbClr val="A9BECC"/>
                 </a:solidFill>
                 <a:latin typeface="Microsoft YaHei" pitchFamily="34" charset="0"/>
                 <a:ea typeface="Microsoft YaHei" pitchFamily="34" charset="-122"/>
@@ -17222,7 +17117,7 @@
             <a:avLst/>
           </a:prstGeom>
           <a:solidFill>
-            <a:srgbClr val="D8E3EA"/>
+            <a:srgbClr val="23465C"/>
           </a:solidFill>
           <a:ln>
             <a:noFill/>
@@ -17265,7 +17160,7 @@
     <p:bg>
       <p:bgPr>
         <a:solidFill>
-          <a:srgbClr val="F6F9FB"/>
+          <a:srgbClr val="0B1F33"/>
         </a:solidFill>
       </p:bgPr>
     </p:bg>
@@ -17300,7 +17195,7 @@
             </a:avLst>
           </a:prstGeom>
           <a:solidFill>
-            <a:srgbClr val="0FA3A8"/>
+            <a:srgbClr val="0E7E86"/>
           </a:solidFill>
           <a:ln/>
         </p:spPr>
@@ -17336,7 +17231,7 @@
             <a:r>
               <a:rPr lang="en-US" sz="1100" b="1" kern="0" spc="200" dirty="0">
                 <a:solidFill>
-                  <a:srgbClr val="0FA3A8"/>
+                  <a:srgbClr val="3FC6D6"/>
                 </a:solidFill>
                 <a:latin typeface="Microsoft YaHei" pitchFamily="34" charset="0"/>
                 <a:ea typeface="Microsoft YaHei" pitchFamily="34" charset="-122"/>
@@ -17375,7 +17270,7 @@
             <a:r>
               <a:rPr lang="en-US" sz="2400" b="1" dirty="0">
                 <a:solidFill>
-                  <a:srgbClr val="22303C"/>
+                  <a:srgbClr val="FFFFFF"/>
                 </a:solidFill>
                 <a:latin typeface="Microsoft YaHei" pitchFamily="34" charset="0"/>
                 <a:ea typeface="Microsoft YaHei" pitchFamily="34" charset="-122"/>
@@ -17414,7 +17309,7 @@
             <a:r>
               <a:rPr lang="en-US" sz="1200" b="1" dirty="0">
                 <a:solidFill>
-                  <a:srgbClr val="22303C"/>
+                  <a:srgbClr val="FFFFFF"/>
                 </a:solidFill>
                 <a:latin typeface="Microsoft YaHei" pitchFamily="34" charset="0"/>
                 <a:ea typeface="Microsoft YaHei" pitchFamily="34" charset="-122"/>
@@ -17443,7 +17338,7 @@
             </a:avLst>
           </a:prstGeom>
           <a:solidFill>
-            <a:srgbClr val="0E4C6E"/>
+            <a:srgbClr val="1A5F84"/>
           </a:solidFill>
           <a:ln/>
         </p:spPr>
@@ -17508,7 +17403,7 @@
             </a:avLst>
           </a:prstGeom>
           <a:solidFill>
-            <a:srgbClr val="C0504D"/>
+            <a:srgbClr val="D06055"/>
           </a:solidFill>
           <a:ln/>
         </p:spPr>
@@ -17573,7 +17468,7 @@
             </a:avLst>
           </a:prstGeom>
           <a:solidFill>
-            <a:srgbClr val="0E4C6E"/>
+            <a:srgbClr val="1A5F84"/>
           </a:solidFill>
           <a:ln/>
         </p:spPr>
@@ -17638,7 +17533,7 @@
             </a:avLst>
           </a:prstGeom>
           <a:solidFill>
-            <a:srgbClr val="C0504D"/>
+            <a:srgbClr val="D06055"/>
           </a:solidFill>
           <a:ln/>
         </p:spPr>
@@ -17703,7 +17598,7 @@
             </a:avLst>
           </a:prstGeom>
           <a:solidFill>
-            <a:srgbClr val="0E4C6E"/>
+            <a:srgbClr val="1A5F84"/>
           </a:solidFill>
           <a:ln/>
         </p:spPr>
@@ -17778,7 +17673,7 @@
             <a:r>
               <a:rPr lang="en-US" sz="1200" b="1" dirty="0">
                 <a:solidFill>
-                  <a:srgbClr val="22303C"/>
+                  <a:srgbClr val="FFFFFF"/>
                 </a:solidFill>
                 <a:latin typeface="Microsoft YaHei" pitchFamily="34" charset="0"/>
                 <a:ea typeface="Microsoft YaHei" pitchFamily="34" charset="-122"/>
@@ -17807,7 +17702,7 @@
             </a:avLst>
           </a:prstGeom>
           <a:solidFill>
-            <a:srgbClr val="0E4C6E"/>
+            <a:srgbClr val="1A5F84"/>
           </a:solidFill>
           <a:ln/>
         </p:spPr>
@@ -17872,7 +17767,7 @@
             </a:avLst>
           </a:prstGeom>
           <a:solidFill>
-            <a:srgbClr val="0E4C6E"/>
+            <a:srgbClr val="1A5F84"/>
           </a:solidFill>
           <a:ln/>
         </p:spPr>
@@ -17937,7 +17832,7 @@
             </a:avLst>
           </a:prstGeom>
           <a:solidFill>
-            <a:srgbClr val="0E4C6E"/>
+            <a:srgbClr val="1A5F84"/>
           </a:solidFill>
           <a:ln/>
         </p:spPr>
@@ -18002,7 +17897,7 @@
             </a:avLst>
           </a:prstGeom>
           <a:solidFill>
-            <a:srgbClr val="0E4C6E"/>
+            <a:srgbClr val="1A5F84"/>
           </a:solidFill>
           <a:ln/>
         </p:spPr>
@@ -18067,7 +17962,7 @@
             </a:avLst>
           </a:prstGeom>
           <a:solidFill>
-            <a:srgbClr val="0E4C6E"/>
+            <a:srgbClr val="1A5F84"/>
           </a:solidFill>
           <a:ln/>
         </p:spPr>
@@ -18132,7 +18027,7 @@
             </a:avLst>
           </a:prstGeom>
           <a:solidFill>
-            <a:srgbClr val="E8F1F5"/>
+            <a:srgbClr val="16324A"/>
           </a:solidFill>
           <a:ln/>
         </p:spPr>
@@ -18168,7 +18063,7 @@
             <a:r>
               <a:rPr lang="en-US" sz="1000" b="1" dirty="0">
                 <a:solidFill>
-                  <a:srgbClr val="0FA3A8"/>
+                  <a:srgbClr val="3FC6D6"/>
                 </a:solidFill>
                 <a:latin typeface="Microsoft YaHei" pitchFamily="34" charset="0"/>
                 <a:ea typeface="Microsoft YaHei" pitchFamily="34" charset="-122"/>
@@ -18207,7 +18102,7 @@
             <a:r>
               <a:rPr lang="en-US" sz="1300" b="1" dirty="0">
                 <a:solidFill>
-                  <a:srgbClr val="22303C"/>
+                  <a:srgbClr val="FFFFFF"/>
                 </a:solidFill>
                 <a:latin typeface="Microsoft YaHei" pitchFamily="34" charset="0"/>
                 <a:ea typeface="Microsoft YaHei" pitchFamily="34" charset="-122"/>
@@ -18218,7 +18113,7 @@
             <a:r>
               <a:rPr lang="en-US" sz="1300" dirty="0">
                 <a:solidFill>
-                  <a:srgbClr val="000000"/>
+                  <a:srgbClr val="DCE8EF"/>
                 </a:solidFill>
                 <a:latin typeface="Microsoft YaHei" pitchFamily="34" charset="0"/>
                 <a:ea typeface="Microsoft YaHei" pitchFamily="34" charset="-122"/>
@@ -18229,7 +18124,7 @@
             <a:r>
               <a:rPr lang="en-US" sz="1300" b="1" dirty="0">
                 <a:solidFill>
-                  <a:srgbClr val="C0504D"/>
+                  <a:srgbClr val="FF8A75"/>
                 </a:solidFill>
                 <a:latin typeface="Microsoft YaHei" pitchFamily="34" charset="0"/>
                 <a:ea typeface="Microsoft YaHei" pitchFamily="34" charset="-122"/>
@@ -18240,7 +18135,7 @@
             <a:r>
               <a:rPr lang="en-US" sz="1300" dirty="0">
                 <a:solidFill>
-                  <a:srgbClr val="000000"/>
+                  <a:srgbClr val="DCE8EF"/>
                 </a:solidFill>
                 <a:latin typeface="Microsoft YaHei" pitchFamily="34" charset="0"/>
                 <a:ea typeface="Microsoft YaHei" pitchFamily="34" charset="-122"/>
@@ -18279,7 +18174,7 @@
             <a:r>
               <a:rPr lang="en-US" sz="1350" b="1" dirty="0">
                 <a:solidFill>
-                  <a:srgbClr val="0FA3A8"/>
+                  <a:srgbClr val="3FC6D6"/>
                 </a:solidFill>
                 <a:latin typeface="Microsoft YaHei" pitchFamily="34" charset="0"/>
                 <a:ea typeface="Microsoft YaHei" pitchFamily="34" charset="-122"/>
@@ -18318,7 +18213,7 @@
             <a:r>
               <a:rPr b="1" sz="1000">
                 <a:solidFill>
-                  <a:srgbClr val="0FA3A8"/>
+                  <a:srgbClr val="3FC6D6"/>
                 </a:solidFill>
                 <a:latin typeface="Microsoft YaHei"/>
                 <a:ea typeface="Microsoft YaHei"/>
@@ -18328,7 +18223,7 @@
             <a:r>
               <a:rPr sz="900">
                 <a:solidFill>
-                  <a:srgbClr val="9FB8C8"/>
+                  <a:srgbClr val="8FA6B5"/>
                 </a:solidFill>
                 <a:latin typeface="Microsoft YaHei"/>
                 <a:ea typeface="Microsoft YaHei"/>
@@ -18366,7 +18261,7 @@
             <a:r>
               <a:rPr lang="en-US" sz="900" dirty="0">
                 <a:solidFill>
-                  <a:srgbClr val="6B7C8A"/>
+                  <a:srgbClr val="A9BECC"/>
                 </a:solidFill>
                 <a:latin typeface="Microsoft YaHei" pitchFamily="34" charset="0"/>
                 <a:ea typeface="Microsoft YaHei" pitchFamily="34" charset="-122"/>
@@ -18393,7 +18288,7 @@
             <a:avLst/>
           </a:prstGeom>
           <a:solidFill>
-            <a:srgbClr val="D8E3EA"/>
+            <a:srgbClr val="23465C"/>
           </a:solidFill>
           <a:ln>
             <a:noFill/>
@@ -18436,7 +18331,7 @@
     <p:bg>
       <p:bgPr>
         <a:solidFill>
-          <a:srgbClr val="F6F9FB"/>
+          <a:srgbClr val="0B1F33"/>
         </a:solidFill>
       </p:bgPr>
     </p:bg>
@@ -18471,7 +18366,7 @@
             </a:avLst>
           </a:prstGeom>
           <a:solidFill>
-            <a:srgbClr val="0FA3A8"/>
+            <a:srgbClr val="0E7E86"/>
           </a:solidFill>
           <a:ln/>
         </p:spPr>
@@ -18507,7 +18402,7 @@
             <a:r>
               <a:rPr lang="en-US" sz="1100" b="1" kern="0" spc="200" dirty="0">
                 <a:solidFill>
-                  <a:srgbClr val="0FA3A8"/>
+                  <a:srgbClr val="3FC6D6"/>
                 </a:solidFill>
                 <a:latin typeface="Microsoft YaHei" pitchFamily="34" charset="0"/>
                 <a:ea typeface="Microsoft YaHei" pitchFamily="34" charset="-122"/>
@@ -18546,7 +18441,7 @@
             <a:r>
               <a:rPr lang="en-US" sz="2200" b="1" dirty="0">
                 <a:solidFill>
-                  <a:srgbClr val="22303C"/>
+                  <a:srgbClr val="FFFFFF"/>
                 </a:solidFill>
                 <a:latin typeface="Microsoft YaHei" pitchFamily="34" charset="0"/>
                 <a:ea typeface="Microsoft YaHei" pitchFamily="34" charset="-122"/>
@@ -18585,7 +18480,7 @@
             <a:r>
               <a:rPr lang="en-US" sz="1050" b="1" dirty="0">
                 <a:solidFill>
-                  <a:srgbClr val="22303C"/>
+                  <a:srgbClr val="FFFFFF"/>
                 </a:solidFill>
                 <a:latin typeface="Microsoft YaHei" pitchFamily="34" charset="0"/>
                 <a:ea typeface="Microsoft YaHei" pitchFamily="34" charset="-122"/>
@@ -18614,7 +18509,7 @@
             </a:avLst>
           </a:prstGeom>
           <a:solidFill>
-            <a:srgbClr val="0E4C6E"/>
+            <a:srgbClr val="1A5F84"/>
           </a:solidFill>
           <a:ln/>
         </p:spPr>
@@ -18689,7 +18584,7 @@
             <a:r>
               <a:rPr lang="en-US" sz="1050" b="1" dirty="0">
                 <a:solidFill>
-                  <a:srgbClr val="22303C"/>
+                  <a:srgbClr val="FFFFFF"/>
                 </a:solidFill>
                 <a:latin typeface="Microsoft YaHei" pitchFamily="34" charset="0"/>
                 <a:ea typeface="Microsoft YaHei" pitchFamily="34" charset="-122"/>
@@ -18718,7 +18613,7 @@
             </a:avLst>
           </a:prstGeom>
           <a:solidFill>
-            <a:srgbClr val="0E4C6E"/>
+            <a:srgbClr val="1A5F84"/>
           </a:solidFill>
           <a:ln/>
         </p:spPr>
@@ -18783,7 +18678,7 @@
             </a:avLst>
           </a:prstGeom>
           <a:solidFill>
-            <a:srgbClr val="0FA3A8"/>
+            <a:srgbClr val="0E7E86"/>
           </a:solidFill>
           <a:ln/>
         </p:spPr>
@@ -18858,7 +18753,7 @@
             <a:r>
               <a:rPr lang="en-US" sz="1050" b="1" dirty="0">
                 <a:solidFill>
-                  <a:srgbClr val="0FA3A8"/>
+                  <a:srgbClr val="3FC6D6"/>
                 </a:solidFill>
                 <a:latin typeface="Microsoft YaHei" pitchFamily="34" charset="0"/>
                 <a:ea typeface="Microsoft YaHei" pitchFamily="34" charset="-122"/>
@@ -18887,11 +18782,11 @@
             </a:avLst>
           </a:prstGeom>
           <a:solidFill>
-            <a:srgbClr val="FFFFFF"/>
+            <a:srgbClr val="13314D"/>
           </a:solidFill>
           <a:ln w="9525">
             <a:solidFill>
-              <a:srgbClr val="D8E3EA">
+              <a:srgbClr val="23465C">
                 <a:alpha val="100000"/>
               </a:srgbClr>
             </a:solidFill>
@@ -18926,7 +18821,7 @@
             </a:avLst>
           </a:prstGeom>
           <a:solidFill>
-            <a:srgbClr val="0FA3A8"/>
+            <a:srgbClr val="0E7E86"/>
           </a:solidFill>
           <a:ln/>
         </p:spPr>
@@ -18962,7 +18857,7 @@
             <a:r>
               <a:rPr lang="en-US" sz="1250" b="1" dirty="0">
                 <a:solidFill>
-                  <a:srgbClr val="0E4C6E"/>
+                  <a:srgbClr val="8FD0F0"/>
                 </a:solidFill>
                 <a:latin typeface="Microsoft YaHei" pitchFamily="34" charset="0"/>
                 <a:ea typeface="Microsoft YaHei" pitchFamily="34" charset="-122"/>
@@ -19001,7 +18896,7 @@
             <a:r>
               <a:rPr lang="en-US" sz="1000" dirty="0">
                 <a:solidFill>
-                  <a:srgbClr val="6B7C8A"/>
+                  <a:srgbClr val="A9BECC"/>
                 </a:solidFill>
                 <a:latin typeface="Microsoft YaHei" pitchFamily="34" charset="0"/>
                 <a:ea typeface="Microsoft YaHei" pitchFamily="34" charset="-122"/>
@@ -19018,7 +18913,7 @@
             <a:r>
               <a:rPr lang="en-US" sz="1000" dirty="0">
                 <a:solidFill>
-                  <a:srgbClr val="6B7C8A"/>
+                  <a:srgbClr val="A9BECC"/>
                 </a:solidFill>
                 <a:latin typeface="Microsoft YaHei" pitchFamily="34" charset="0"/>
                 <a:ea typeface="Microsoft YaHei" pitchFamily="34" charset="-122"/>
@@ -19047,11 +18942,11 @@
             </a:avLst>
           </a:prstGeom>
           <a:solidFill>
-            <a:srgbClr val="FFFFFF"/>
+            <a:srgbClr val="13314D"/>
           </a:solidFill>
           <a:ln w="9525">
             <a:solidFill>
-              <a:srgbClr val="D8E3EA">
+              <a:srgbClr val="23465C">
                 <a:alpha val="100000"/>
               </a:srgbClr>
             </a:solidFill>
@@ -19086,7 +18981,7 @@
             </a:avLst>
           </a:prstGeom>
           <a:solidFill>
-            <a:srgbClr val="0FA3A8"/>
+            <a:srgbClr val="0E7E86"/>
           </a:solidFill>
           <a:ln/>
         </p:spPr>
@@ -19122,7 +19017,7 @@
             <a:r>
               <a:rPr lang="en-US" sz="1250" b="1" dirty="0">
                 <a:solidFill>
-                  <a:srgbClr val="0E4C6E"/>
+                  <a:srgbClr val="8FD0F0"/>
                 </a:solidFill>
                 <a:latin typeface="Microsoft YaHei" pitchFamily="34" charset="0"/>
                 <a:ea typeface="Microsoft YaHei" pitchFamily="34" charset="-122"/>
@@ -19161,7 +19056,7 @@
             <a:r>
               <a:rPr lang="en-US" sz="1000" dirty="0">
                 <a:solidFill>
-                  <a:srgbClr val="6B7C8A"/>
+                  <a:srgbClr val="A9BECC"/>
                 </a:solidFill>
                 <a:latin typeface="Microsoft YaHei" pitchFamily="34" charset="0"/>
                 <a:ea typeface="Microsoft YaHei" pitchFamily="34" charset="-122"/>
@@ -19178,7 +19073,7 @@
             <a:r>
               <a:rPr lang="en-US" sz="1000" dirty="0">
                 <a:solidFill>
-                  <a:srgbClr val="6B7C8A"/>
+                  <a:srgbClr val="A9BECC"/>
                 </a:solidFill>
                 <a:latin typeface="Microsoft YaHei" pitchFamily="34" charset="0"/>
                 <a:ea typeface="Microsoft YaHei" pitchFamily="34" charset="-122"/>
@@ -19207,11 +19102,11 @@
             </a:avLst>
           </a:prstGeom>
           <a:solidFill>
-            <a:srgbClr val="FFFFFF"/>
+            <a:srgbClr val="13314D"/>
           </a:solidFill>
           <a:ln w="9525">
             <a:solidFill>
-              <a:srgbClr val="D8E3EA">
+              <a:srgbClr val="23465C">
                 <a:alpha val="100000"/>
               </a:srgbClr>
             </a:solidFill>
@@ -19246,7 +19141,7 @@
             </a:avLst>
           </a:prstGeom>
           <a:solidFill>
-            <a:srgbClr val="0FA3A8"/>
+            <a:srgbClr val="0E7E86"/>
           </a:solidFill>
           <a:ln/>
         </p:spPr>
@@ -19282,7 +19177,7 @@
             <a:r>
               <a:rPr lang="en-US" sz="1250" b="1" dirty="0">
                 <a:solidFill>
-                  <a:srgbClr val="0E4C6E"/>
+                  <a:srgbClr val="8FD0F0"/>
                 </a:solidFill>
                 <a:latin typeface="Microsoft YaHei" pitchFamily="34" charset="0"/>
                 <a:ea typeface="Microsoft YaHei" pitchFamily="34" charset="-122"/>
@@ -19321,7 +19216,7 @@
             <a:r>
               <a:rPr lang="en-US" sz="1000" dirty="0">
                 <a:solidFill>
-                  <a:srgbClr val="6B7C8A"/>
+                  <a:srgbClr val="A9BECC"/>
                 </a:solidFill>
                 <a:latin typeface="Microsoft YaHei" pitchFamily="34" charset="0"/>
                 <a:ea typeface="Microsoft YaHei" pitchFamily="34" charset="-122"/>
@@ -19338,7 +19233,7 @@
             <a:r>
               <a:rPr lang="en-US" sz="1000" dirty="0">
                 <a:solidFill>
-                  <a:srgbClr val="6B7C8A"/>
+                  <a:srgbClr val="A9BECC"/>
                 </a:solidFill>
                 <a:latin typeface="Microsoft YaHei" pitchFamily="34" charset="0"/>
                 <a:ea typeface="Microsoft YaHei" pitchFamily="34" charset="-122"/>
@@ -19367,11 +19262,11 @@
             </a:avLst>
           </a:prstGeom>
           <a:solidFill>
-            <a:srgbClr val="FFFFFF"/>
+            <a:srgbClr val="13314D"/>
           </a:solidFill>
           <a:ln w="9525">
             <a:solidFill>
-              <a:srgbClr val="D8E3EA">
+              <a:srgbClr val="23465C">
                 <a:alpha val="100000"/>
               </a:srgbClr>
             </a:solidFill>
@@ -19406,7 +19301,7 @@
             </a:avLst>
           </a:prstGeom>
           <a:solidFill>
-            <a:srgbClr val="0FA3A8"/>
+            <a:srgbClr val="0E7E86"/>
           </a:solidFill>
           <a:ln/>
         </p:spPr>
@@ -19442,7 +19337,7 @@
             <a:r>
               <a:rPr lang="en-US" sz="1250" b="1" dirty="0">
                 <a:solidFill>
-                  <a:srgbClr val="0E4C6E"/>
+                  <a:srgbClr val="8FD0F0"/>
                 </a:solidFill>
                 <a:latin typeface="Microsoft YaHei" pitchFamily="34" charset="0"/>
                 <a:ea typeface="Microsoft YaHei" pitchFamily="34" charset="-122"/>
@@ -19481,7 +19376,7 @@
             <a:r>
               <a:rPr lang="en-US" sz="1000" dirty="0">
                 <a:solidFill>
-                  <a:srgbClr val="6B7C8A"/>
+                  <a:srgbClr val="A9BECC"/>
                 </a:solidFill>
                 <a:latin typeface="Microsoft YaHei" pitchFamily="34" charset="0"/>
                 <a:ea typeface="Microsoft YaHei" pitchFamily="34" charset="-122"/>
@@ -19498,7 +19393,7 @@
             <a:r>
               <a:rPr lang="en-US" sz="1000" dirty="0">
                 <a:solidFill>
-                  <a:srgbClr val="6B7C8A"/>
+                  <a:srgbClr val="A9BECC"/>
                 </a:solidFill>
                 <a:latin typeface="Microsoft YaHei" pitchFamily="34" charset="0"/>
                 <a:ea typeface="Microsoft YaHei" pitchFamily="34" charset="-122"/>
@@ -19537,7 +19432,7 @@
             <a:r>
               <a:rPr b="1" sz="1000">
                 <a:solidFill>
-                  <a:srgbClr val="0FA3A8"/>
+                  <a:srgbClr val="3FC6D6"/>
                 </a:solidFill>
                 <a:latin typeface="Microsoft YaHei"/>
                 <a:ea typeface="Microsoft YaHei"/>
@@ -19547,7 +19442,7 @@
             <a:r>
               <a:rPr sz="900">
                 <a:solidFill>
-                  <a:srgbClr val="9FB8C8"/>
+                  <a:srgbClr val="8FA6B5"/>
                 </a:solidFill>
                 <a:latin typeface="Microsoft YaHei"/>
                 <a:ea typeface="Microsoft YaHei"/>
@@ -19585,7 +19480,7 @@
             <a:r>
               <a:rPr lang="en-US" sz="900" dirty="0">
                 <a:solidFill>
-                  <a:srgbClr val="6B7C8A"/>
+                  <a:srgbClr val="A9BECC"/>
                 </a:solidFill>
                 <a:latin typeface="Microsoft YaHei" pitchFamily="34" charset="0"/>
                 <a:ea typeface="Microsoft YaHei" pitchFamily="34" charset="-122"/>
@@ -19612,7 +19507,7 @@
             <a:avLst/>
           </a:prstGeom>
           <a:solidFill>
-            <a:srgbClr val="D8E3EA"/>
+            <a:srgbClr val="23465C"/>
           </a:solidFill>
           <a:ln>
             <a:noFill/>
@@ -19655,7 +19550,7 @@
     <p:bg>
       <p:bgPr>
         <a:solidFill>
-          <a:srgbClr val="F6F9FB"/>
+          <a:srgbClr val="0B1F33"/>
         </a:solidFill>
       </p:bgPr>
     </p:bg>
@@ -19690,7 +19585,7 @@
             </a:avLst>
           </a:prstGeom>
           <a:solidFill>
-            <a:srgbClr val="0FA3A8"/>
+            <a:srgbClr val="0E7E86"/>
           </a:solidFill>
           <a:ln/>
         </p:spPr>
@@ -19726,7 +19621,7 @@
             <a:r>
               <a:rPr lang="en-US" sz="1100" b="1" kern="0" spc="200" dirty="0">
                 <a:solidFill>
-                  <a:srgbClr val="0FA3A8"/>
+                  <a:srgbClr val="3FC6D6"/>
                 </a:solidFill>
                 <a:latin typeface="Microsoft YaHei" pitchFamily="34" charset="0"/>
                 <a:ea typeface="Microsoft YaHei" pitchFamily="34" charset="-122"/>
@@ -19765,7 +19660,7 @@
             <a:r>
               <a:rPr lang="en-US" sz="2400" b="1" dirty="0">
                 <a:solidFill>
-                  <a:srgbClr val="22303C"/>
+                  <a:srgbClr val="FFFFFF"/>
                 </a:solidFill>
                 <a:latin typeface="Microsoft YaHei" pitchFamily="34" charset="0"/>
                 <a:ea typeface="Microsoft YaHei" pitchFamily="34" charset="-122"/>
@@ -19794,11 +19689,11 @@
             </a:avLst>
           </a:prstGeom>
           <a:solidFill>
-            <a:srgbClr val="FFFFFF"/>
+            <a:srgbClr val="13314D"/>
           </a:solidFill>
           <a:ln w="9525">
             <a:solidFill>
-              <a:srgbClr val="D8E3EA">
+              <a:srgbClr val="23465C">
                 <a:alpha val="100000"/>
               </a:srgbClr>
             </a:solidFill>
@@ -19833,7 +19728,7 @@
             </a:avLst>
           </a:prstGeom>
           <a:solidFill>
-            <a:srgbClr val="0E4C6E"/>
+            <a:srgbClr val="1A5F84"/>
           </a:solidFill>
           <a:ln/>
         </p:spPr>
@@ -19869,7 +19764,7 @@
             <a:r>
               <a:rPr lang="en-US" sz="1400" b="1" dirty="0">
                 <a:solidFill>
-                  <a:srgbClr val="0E4C6E"/>
+                  <a:srgbClr val="8FD0F0"/>
                 </a:solidFill>
                 <a:latin typeface="Microsoft YaHei" pitchFamily="34" charset="0"/>
                 <a:ea typeface="Microsoft YaHei" pitchFamily="34" charset="-122"/>
@@ -19908,7 +19803,7 @@
             <a:r>
               <a:rPr lang="en-US" sz="1000" b="1" dirty="0">
                 <a:solidFill>
-                  <a:srgbClr val="22303C"/>
+                  <a:srgbClr val="FFFFFF"/>
                 </a:solidFill>
                 <a:latin typeface="Microsoft YaHei" pitchFamily="34" charset="0"/>
                 <a:ea typeface="Microsoft YaHei" pitchFamily="34" charset="-122"/>
@@ -19947,7 +19842,7 @@
             <a:r>
               <a:rPr lang="en-US" sz="950" dirty="0">
                 <a:solidFill>
-                  <a:srgbClr val="6B7C8A"/>
+                  <a:srgbClr val="A9BECC"/>
                 </a:solidFill>
                 <a:latin typeface="Microsoft YaHei" pitchFamily="34" charset="0"/>
                 <a:ea typeface="Microsoft YaHei" pitchFamily="34" charset="-122"/>
@@ -19964,7 +19859,7 @@
             <a:r>
               <a:rPr lang="en-US" sz="950" dirty="0">
                 <a:solidFill>
-                  <a:srgbClr val="6B7C8A"/>
+                  <a:srgbClr val="A9BECC"/>
                 </a:solidFill>
                 <a:latin typeface="Microsoft YaHei" pitchFamily="34" charset="0"/>
                 <a:ea typeface="Microsoft YaHei" pitchFamily="34" charset="-122"/>
@@ -19993,11 +19888,11 @@
             </a:avLst>
           </a:prstGeom>
           <a:solidFill>
-            <a:srgbClr val="FFFFFF"/>
+            <a:srgbClr val="13314D"/>
           </a:solidFill>
           <a:ln w="9525">
             <a:solidFill>
-              <a:srgbClr val="D8E3EA">
+              <a:srgbClr val="23465C">
                 <a:alpha val="100000"/>
               </a:srgbClr>
             </a:solidFill>
@@ -20032,7 +19927,7 @@
             </a:avLst>
           </a:prstGeom>
           <a:solidFill>
-            <a:srgbClr val="0FA3A8"/>
+            <a:srgbClr val="0E7E86"/>
           </a:solidFill>
           <a:ln/>
         </p:spPr>
@@ -20068,7 +19963,7 @@
             <a:r>
               <a:rPr lang="en-US" sz="1400" b="1" dirty="0">
                 <a:solidFill>
-                  <a:srgbClr val="0FA3A8"/>
+                  <a:srgbClr val="3FC6D6"/>
                 </a:solidFill>
                 <a:latin typeface="Microsoft YaHei" pitchFamily="34" charset="0"/>
                 <a:ea typeface="Microsoft YaHei" pitchFamily="34" charset="-122"/>
@@ -20107,7 +20002,7 @@
             <a:r>
               <a:rPr lang="en-US" sz="1000" b="1" dirty="0">
                 <a:solidFill>
-                  <a:srgbClr val="22303C"/>
+                  <a:srgbClr val="FFFFFF"/>
                 </a:solidFill>
                 <a:latin typeface="Microsoft YaHei" pitchFamily="34" charset="0"/>
                 <a:ea typeface="Microsoft YaHei" pitchFamily="34" charset="-122"/>
@@ -20146,7 +20041,7 @@
             <a:r>
               <a:rPr lang="en-US" sz="950" dirty="0">
                 <a:solidFill>
-                  <a:srgbClr val="6B7C8A"/>
+                  <a:srgbClr val="A9BECC"/>
                 </a:solidFill>
                 <a:latin typeface="Microsoft YaHei" pitchFamily="34" charset="0"/>
                 <a:ea typeface="Microsoft YaHei" pitchFamily="34" charset="-122"/>
@@ -20163,7 +20058,7 @@
             <a:r>
               <a:rPr lang="en-US" sz="950" dirty="0">
                 <a:solidFill>
-                  <a:srgbClr val="6B7C8A"/>
+                  <a:srgbClr val="A9BECC"/>
                 </a:solidFill>
                 <a:latin typeface="Microsoft YaHei" pitchFamily="34" charset="0"/>
                 <a:ea typeface="Microsoft YaHei" pitchFamily="34" charset="-122"/>
@@ -20192,11 +20087,11 @@
             </a:avLst>
           </a:prstGeom>
           <a:solidFill>
-            <a:srgbClr val="FFFFFF"/>
+            <a:srgbClr val="13314D"/>
           </a:solidFill>
           <a:ln w="9525">
             <a:solidFill>
-              <a:srgbClr val="D8E3EA">
+              <a:srgbClr val="23465C">
                 <a:alpha val="100000"/>
               </a:srgbClr>
             </a:solidFill>
@@ -20231,7 +20126,7 @@
             </a:avLst>
           </a:prstGeom>
           <a:solidFill>
-            <a:srgbClr val="F59E0B">
+            <a:srgbClr val="D98E1F">
               <a:alpha val="100000"/>
             </a:srgbClr>
           </a:solidFill>
@@ -20269,7 +20164,7 @@
             <a:r>
               <a:rPr lang="en-US" sz="1400" b="1" dirty="0">
                 <a:solidFill>
-                  <a:srgbClr val="B07A00"/>
+                  <a:srgbClr val="F5A623"/>
                 </a:solidFill>
                 <a:latin typeface="Microsoft YaHei" pitchFamily="34" charset="0"/>
                 <a:ea typeface="Microsoft YaHei" pitchFamily="34" charset="-122"/>
@@ -20308,7 +20203,7 @@
             <a:r>
               <a:rPr lang="en-US" sz="1000" b="1" dirty="0">
                 <a:solidFill>
-                  <a:srgbClr val="22303C"/>
+                  <a:srgbClr val="FFFFFF"/>
                 </a:solidFill>
                 <a:latin typeface="Microsoft YaHei" pitchFamily="34" charset="0"/>
                 <a:ea typeface="Microsoft YaHei" pitchFamily="34" charset="-122"/>
@@ -20347,7 +20242,7 @@
             <a:r>
               <a:rPr lang="en-US" sz="950" dirty="0">
                 <a:solidFill>
-                  <a:srgbClr val="6B7C8A"/>
+                  <a:srgbClr val="A9BECC"/>
                 </a:solidFill>
                 <a:latin typeface="Microsoft YaHei" pitchFamily="34" charset="0"/>
                 <a:ea typeface="Microsoft YaHei" pitchFamily="34" charset="-122"/>
@@ -20364,7 +20259,7 @@
             <a:r>
               <a:rPr lang="en-US" sz="950" dirty="0">
                 <a:solidFill>
-                  <a:srgbClr val="6B7C8A"/>
+                  <a:srgbClr val="A9BECC"/>
                 </a:solidFill>
                 <a:latin typeface="Microsoft YaHei" pitchFamily="34" charset="0"/>
                 <a:ea typeface="Microsoft YaHei" pitchFamily="34" charset="-122"/>
@@ -20393,7 +20288,7 @@
             </a:avLst>
           </a:prstGeom>
           <a:solidFill>
-            <a:srgbClr val="0B1F33"/>
+            <a:srgbClr val="23465C"/>
           </a:solidFill>
           <a:ln/>
         </p:spPr>
@@ -20429,7 +20324,7 @@
             <a:r>
               <a:rPr lang="en-US" sz="1200" dirty="0">
                 <a:solidFill>
-                  <a:srgbClr val="DCE8EF"/>
+                  <a:srgbClr val="FFFFFF"/>
                 </a:solidFill>
                 <a:latin typeface="Microsoft YaHei" pitchFamily="34" charset="0"/>
                 <a:ea typeface="Microsoft YaHei" pitchFamily="34" charset="-122"/>
@@ -20468,7 +20363,7 @@
             <a:r>
               <a:rPr lang="en-US" sz="1400" b="1" dirty="0">
                 <a:solidFill>
-                  <a:srgbClr val="0FA3A8"/>
+                  <a:srgbClr val="3FC6D6"/>
                 </a:solidFill>
                 <a:latin typeface="Microsoft YaHei" pitchFamily="34" charset="0"/>
                 <a:ea typeface="Microsoft YaHei" pitchFamily="34" charset="-122"/>
@@ -20479,7 +20374,7 @@
             <a:r>
               <a:rPr lang="en-US" sz="1400" b="1" dirty="0">
                 <a:solidFill>
-                  <a:srgbClr val="0E4C6E"/>
+                  <a:srgbClr val="8FD0F0"/>
                 </a:solidFill>
                 <a:latin typeface="Microsoft YaHei" pitchFamily="34" charset="0"/>
                 <a:ea typeface="Microsoft YaHei" pitchFamily="34" charset="-122"/>
@@ -20518,7 +20413,7 @@
             <a:r>
               <a:rPr lang="en-US" sz="1050" dirty="0">
                 <a:solidFill>
-                  <a:srgbClr val="6B7C8A"/>
+                  <a:srgbClr val="A9BECC"/>
                 </a:solidFill>
                 <a:latin typeface="Microsoft YaHei" pitchFamily="34" charset="0"/>
                 <a:ea typeface="Microsoft YaHei" pitchFamily="34" charset="-122"/>
@@ -20557,7 +20452,7 @@
             <a:r>
               <a:rPr b="1" sz="1000">
                 <a:solidFill>
-                  <a:srgbClr val="0FA3A8"/>
+                  <a:srgbClr val="3FC6D6"/>
                 </a:solidFill>
                 <a:latin typeface="Microsoft YaHei"/>
                 <a:ea typeface="Microsoft YaHei"/>
@@ -20567,7 +20462,7 @@
             <a:r>
               <a:rPr sz="900">
                 <a:solidFill>
-                  <a:srgbClr val="9FB8C8"/>
+                  <a:srgbClr val="8FA6B5"/>
                 </a:solidFill>
                 <a:latin typeface="Microsoft YaHei"/>
                 <a:ea typeface="Microsoft YaHei"/>
@@ -20605,7 +20500,7 @@
             <a:r>
               <a:rPr lang="en-US" sz="900" dirty="0">
                 <a:solidFill>
-                  <a:srgbClr val="6B7C8A"/>
+                  <a:srgbClr val="A9BECC"/>
                 </a:solidFill>
                 <a:latin typeface="Microsoft YaHei" pitchFamily="34" charset="0"/>
                 <a:ea typeface="Microsoft YaHei" pitchFamily="34" charset="-122"/>
@@ -20632,7 +20527,7 @@
             <a:avLst/>
           </a:prstGeom>
           <a:solidFill>
-            <a:srgbClr val="D8E3EA"/>
+            <a:srgbClr val="23465C"/>
           </a:solidFill>
           <a:ln>
             <a:noFill/>
@@ -20675,7 +20570,7 @@
     <p:bg>
       <p:bgPr>
         <a:solidFill>
-          <a:srgbClr val="F6F9FB"/>
+          <a:srgbClr val="0B1F33"/>
         </a:solidFill>
       </p:bgPr>
     </p:bg>
@@ -20710,7 +20605,7 @@
             </a:avLst>
           </a:prstGeom>
           <a:solidFill>
-            <a:srgbClr val="0FA3A8"/>
+            <a:srgbClr val="0E7E86"/>
           </a:solidFill>
           <a:ln/>
         </p:spPr>
@@ -20746,7 +20641,7 @@
             <a:r>
               <a:rPr lang="en-US" sz="1100" b="1" kern="0" spc="200" dirty="0">
                 <a:solidFill>
-                  <a:srgbClr val="0FA3A8"/>
+                  <a:srgbClr val="3FC6D6"/>
                 </a:solidFill>
                 <a:latin typeface="Microsoft YaHei" pitchFamily="34" charset="0"/>
                 <a:ea typeface="Microsoft YaHei" pitchFamily="34" charset="-122"/>
@@ -20785,7 +20680,7 @@
             <a:r>
               <a:rPr lang="en-US" sz="2400" b="1" dirty="0">
                 <a:solidFill>
-                  <a:srgbClr val="22303C"/>
+                  <a:srgbClr val="FFFFFF"/>
                 </a:solidFill>
                 <a:latin typeface="Microsoft YaHei" pitchFamily="34" charset="0"/>
                 <a:ea typeface="Microsoft YaHei" pitchFamily="34" charset="-122"/>
@@ -20824,7 +20719,7 @@
             <a:r>
               <a:rPr lang="en-US" sz="1300" dirty="0">
                 <a:solidFill>
-                  <a:srgbClr val="22303C"/>
+                  <a:srgbClr val="FFFFFF"/>
                 </a:solidFill>
                 <a:latin typeface="Microsoft YaHei" pitchFamily="34" charset="0"/>
                 <a:ea typeface="Microsoft YaHei" pitchFamily="34" charset="-122"/>
@@ -20853,7 +20748,7 @@
             </a:avLst>
           </a:prstGeom>
           <a:solidFill>
-            <a:srgbClr val="C9A227"/>
+            <a:srgbClr val="D9A82C"/>
           </a:solidFill>
           <a:ln/>
         </p:spPr>
@@ -20928,7 +20823,7 @@
             <a:r>
               <a:rPr lang="en-US" sz="900" dirty="0">
                 <a:solidFill>
-                  <a:srgbClr val="6B7C8A"/>
+                  <a:srgbClr val="A9BECC"/>
                 </a:solidFill>
                 <a:latin typeface="Microsoft YaHei" pitchFamily="34" charset="0"/>
                 <a:ea typeface="Microsoft YaHei" pitchFamily="34" charset="-122"/>
@@ -20957,7 +20852,7 @@
             </a:avLst>
           </a:prstGeom>
           <a:solidFill>
-            <a:srgbClr val="0FA3A8"/>
+            <a:srgbClr val="0E7E86"/>
           </a:solidFill>
           <a:ln/>
         </p:spPr>
@@ -21032,7 +20927,7 @@
             <a:r>
               <a:rPr lang="en-US" sz="900" dirty="0">
                 <a:solidFill>
-                  <a:srgbClr val="6B7C8A"/>
+                  <a:srgbClr val="A9BECC"/>
                 </a:solidFill>
                 <a:latin typeface="Microsoft YaHei" pitchFamily="34" charset="0"/>
                 <a:ea typeface="Microsoft YaHei" pitchFamily="34" charset="-122"/>
@@ -21061,7 +20956,7 @@
             </a:avLst>
           </a:prstGeom>
           <a:solidFill>
-            <a:srgbClr val="0FA3A8">
+            <a:srgbClr val="0E7E86">
               <a:alpha val="100000"/>
             </a:srgbClr>
           </a:solidFill>
@@ -21138,7 +21033,7 @@
             <a:r>
               <a:rPr lang="en-US" sz="900" dirty="0">
                 <a:solidFill>
-                  <a:srgbClr val="6B7C8A"/>
+                  <a:srgbClr val="A9BECC"/>
                 </a:solidFill>
                 <a:latin typeface="Microsoft YaHei" pitchFamily="34" charset="0"/>
                 <a:ea typeface="Microsoft YaHei" pitchFamily="34" charset="-122"/>
@@ -21167,7 +21062,7 @@
             </a:avLst>
           </a:prstGeom>
           <a:solidFill>
-            <a:srgbClr val="9DB4C0"/>
+            <a:srgbClr val="5A7789"/>
           </a:solidFill>
           <a:ln/>
         </p:spPr>
@@ -21242,7 +21137,7 @@
             <a:r>
               <a:rPr lang="en-US" sz="900" dirty="0">
                 <a:solidFill>
-                  <a:srgbClr val="6B7C8A"/>
+                  <a:srgbClr val="A9BECC"/>
                 </a:solidFill>
                 <a:latin typeface="Microsoft YaHei" pitchFamily="34" charset="0"/>
                 <a:ea typeface="Microsoft YaHei" pitchFamily="34" charset="-122"/>
@@ -21281,7 +21176,7 @@
             <a:r>
               <a:rPr lang="en-US" sz="1250" b="1" dirty="0">
                 <a:solidFill>
-                  <a:srgbClr val="0E4C6E"/>
+                  <a:srgbClr val="8FD0F0"/>
                 </a:solidFill>
                 <a:latin typeface="Microsoft YaHei" pitchFamily="34" charset="0"/>
                 <a:ea typeface="Microsoft YaHei" pitchFamily="34" charset="-122"/>
@@ -21292,7 +21187,7 @@
             <a:r>
               <a:rPr lang="en-US" sz="1250" dirty="0">
                 <a:solidFill>
-                  <a:srgbClr val="22303C"/>
+                  <a:srgbClr val="FFFFFF"/>
                 </a:solidFill>
                 <a:latin typeface="Microsoft YaHei" pitchFamily="34" charset="0"/>
                 <a:ea typeface="Microsoft YaHei" pitchFamily="34" charset="-122"/>
@@ -21321,7 +21216,7 @@
             </a:avLst>
           </a:prstGeom>
           <a:solidFill>
-            <a:srgbClr val="0B1F33"/>
+            <a:srgbClr val="23465C"/>
           </a:solidFill>
           <a:ln/>
         </p:spPr>
@@ -21357,7 +21252,7 @@
             <a:r>
               <a:rPr lang="en-US" sz="1200" dirty="0">
                 <a:solidFill>
-                  <a:srgbClr val="DCE8EF"/>
+                  <a:srgbClr val="FFFFFF"/>
                 </a:solidFill>
                 <a:latin typeface="Microsoft YaHei" pitchFamily="34" charset="0"/>
                 <a:ea typeface="Microsoft YaHei" pitchFamily="34" charset="-122"/>
@@ -21396,7 +21291,7 @@
             <a:r>
               <a:rPr b="1" sz="1000">
                 <a:solidFill>
-                  <a:srgbClr val="0FA3A8"/>
+                  <a:srgbClr val="3FC6D6"/>
                 </a:solidFill>
                 <a:latin typeface="Microsoft YaHei"/>
                 <a:ea typeface="Microsoft YaHei"/>
@@ -21406,7 +21301,7 @@
             <a:r>
               <a:rPr sz="900">
                 <a:solidFill>
-                  <a:srgbClr val="9FB8C8"/>
+                  <a:srgbClr val="8FA6B5"/>
                 </a:solidFill>
                 <a:latin typeface="Microsoft YaHei"/>
                 <a:ea typeface="Microsoft YaHei"/>
@@ -21444,7 +21339,7 @@
             <a:r>
               <a:rPr lang="en-US" sz="900" dirty="0">
                 <a:solidFill>
-                  <a:srgbClr val="6B7C8A"/>
+                  <a:srgbClr val="A9BECC"/>
                 </a:solidFill>
                 <a:latin typeface="Microsoft YaHei" pitchFamily="34" charset="0"/>
                 <a:ea typeface="Microsoft YaHei" pitchFamily="34" charset="-122"/>
@@ -21471,7 +21366,7 @@
             <a:avLst/>
           </a:prstGeom>
           <a:solidFill>
-            <a:srgbClr val="D8E3EA"/>
+            <a:srgbClr val="23465C"/>
           </a:solidFill>
           <a:ln>
             <a:noFill/>
@@ -21514,7 +21409,7 @@
     <p:bg>
       <p:bgPr>
         <a:solidFill>
-          <a:srgbClr val="F6F9FB"/>
+          <a:srgbClr val="0B1F33"/>
         </a:solidFill>
       </p:bgPr>
     </p:bg>
@@ -21549,7 +21444,7 @@
             </a:avLst>
           </a:prstGeom>
           <a:solidFill>
-            <a:srgbClr val="0FA3A8"/>
+            <a:srgbClr val="0E7E86"/>
           </a:solidFill>
           <a:ln/>
         </p:spPr>
@@ -21585,7 +21480,7 @@
             <a:r>
               <a:rPr lang="en-US" sz="1100" b="1" kern="0" spc="200" dirty="0">
                 <a:solidFill>
-                  <a:srgbClr val="0FA3A8"/>
+                  <a:srgbClr val="3FC6D6"/>
                 </a:solidFill>
                 <a:latin typeface="Microsoft YaHei" pitchFamily="34" charset="0"/>
                 <a:ea typeface="Microsoft YaHei" pitchFamily="34" charset="-122"/>
@@ -21624,7 +21519,7 @@
             <a:r>
               <a:rPr lang="en-US" sz="2400" b="1" dirty="0">
                 <a:solidFill>
-                  <a:srgbClr val="22303C"/>
+                  <a:srgbClr val="FFFFFF"/>
                 </a:solidFill>
                 <a:latin typeface="Microsoft YaHei" pitchFamily="34" charset="0"/>
                 <a:ea typeface="Microsoft YaHei" pitchFamily="34" charset="-122"/>
@@ -21663,7 +21558,7 @@
             <a:r>
               <a:rPr lang="en-US" sz="1200" dirty="0">
                 <a:solidFill>
-                  <a:srgbClr val="22303C"/>
+                  <a:srgbClr val="FFFFFF"/>
                 </a:solidFill>
                 <a:latin typeface="Microsoft YaHei" pitchFamily="34" charset="0"/>
                 <a:ea typeface="Microsoft YaHei" pitchFamily="34" charset="-122"/>
@@ -21702,7 +21597,7 @@
             <a:r>
               <a:rPr lang="en-US" sz="1150" b="1" dirty="0">
                 <a:solidFill>
-                  <a:srgbClr val="0E4C6E"/>
+                  <a:srgbClr val="8FD0F0"/>
                 </a:solidFill>
                 <a:latin typeface="Microsoft YaHei" pitchFamily="34" charset="0"/>
                 <a:ea typeface="Microsoft YaHei" pitchFamily="34" charset="-122"/>
@@ -21713,7 +21608,7 @@
             <a:r>
               <a:rPr lang="en-US" sz="1150" dirty="0">
                 <a:solidFill>
-                  <a:srgbClr val="22303C"/>
+                  <a:srgbClr val="FFFFFF"/>
                 </a:solidFill>
                 <a:latin typeface="Microsoft YaHei" pitchFamily="34" charset="0"/>
                 <a:ea typeface="Microsoft YaHei" pitchFamily="34" charset="-122"/>
@@ -21752,7 +21647,7 @@
             <a:r>
               <a:rPr lang="en-US" sz="1150" b="1" dirty="0">
                 <a:solidFill>
-                  <a:srgbClr val="0E4C6E"/>
+                  <a:srgbClr val="8FD0F0"/>
                 </a:solidFill>
                 <a:latin typeface="Microsoft YaHei" pitchFamily="34" charset="0"/>
                 <a:ea typeface="Microsoft YaHei" pitchFamily="34" charset="-122"/>
@@ -21763,7 +21658,7 @@
             <a:r>
               <a:rPr lang="en-US" sz="1150" dirty="0">
                 <a:solidFill>
-                  <a:srgbClr val="22303C"/>
+                  <a:srgbClr val="FFFFFF"/>
                 </a:solidFill>
                 <a:latin typeface="Microsoft YaHei" pitchFamily="34" charset="0"/>
                 <a:ea typeface="Microsoft YaHei" pitchFamily="34" charset="-122"/>
@@ -21802,7 +21697,7 @@
             <a:r>
               <a:rPr lang="en-US" sz="1150" b="1" dirty="0">
                 <a:solidFill>
-                  <a:srgbClr val="0E4C6E"/>
+                  <a:srgbClr val="8FD0F0"/>
                 </a:solidFill>
                 <a:latin typeface="Microsoft YaHei" pitchFamily="34" charset="0"/>
                 <a:ea typeface="Microsoft YaHei" pitchFamily="34" charset="-122"/>
@@ -21813,7 +21708,7 @@
             <a:r>
               <a:rPr lang="en-US" sz="1150" dirty="0">
                 <a:solidFill>
-                  <a:srgbClr val="22303C"/>
+                  <a:srgbClr val="FFFFFF"/>
                 </a:solidFill>
                 <a:latin typeface="Microsoft YaHei" pitchFamily="34" charset="0"/>
                 <a:ea typeface="Microsoft YaHei" pitchFamily="34" charset="-122"/>
@@ -21842,7 +21737,7 @@
             </a:avLst>
           </a:prstGeom>
           <a:solidFill>
-            <a:srgbClr val="E8F1F5"/>
+            <a:srgbClr val="16324A"/>
           </a:solidFill>
           <a:ln/>
         </p:spPr>
@@ -21878,7 +21773,7 @@
             <a:r>
               <a:rPr lang="en-US" sz="1150" b="1" dirty="0">
                 <a:solidFill>
-                  <a:srgbClr val="0E4C6E"/>
+                  <a:srgbClr val="8FD0F0"/>
                 </a:solidFill>
                 <a:latin typeface="Microsoft YaHei" pitchFamily="34" charset="0"/>
                 <a:ea typeface="Microsoft YaHei" pitchFamily="34" charset="-122"/>
@@ -21889,7 +21784,7 @@
             <a:r>
               <a:rPr lang="en-US" sz="1150" dirty="0">
                 <a:solidFill>
-                  <a:srgbClr val="22303C"/>
+                  <a:srgbClr val="FFFFFF"/>
                 </a:solidFill>
                 <a:latin typeface="Microsoft YaHei" pitchFamily="34" charset="0"/>
                 <a:ea typeface="Microsoft YaHei" pitchFamily="34" charset="-122"/>
@@ -21900,7 +21795,7 @@
             <a:r>
               <a:rPr lang="en-US" sz="1150" b="1" dirty="0">
                 <a:solidFill>
-                  <a:srgbClr val="22303C"/>
+                  <a:srgbClr val="FFFFFF"/>
                 </a:solidFill>
                 <a:latin typeface="Microsoft YaHei" pitchFamily="34" charset="0"/>
                 <a:ea typeface="Microsoft YaHei" pitchFamily="34" charset="-122"/>
@@ -21911,7 +21806,7 @@
             <a:r>
               <a:rPr lang="en-US" sz="1150" dirty="0">
                 <a:solidFill>
-                  <a:srgbClr val="22303C"/>
+                  <a:srgbClr val="FFFFFF"/>
                 </a:solidFill>
                 <a:latin typeface="Microsoft YaHei" pitchFamily="34" charset="0"/>
                 <a:ea typeface="Microsoft YaHei" pitchFamily="34" charset="-122"/>
@@ -21950,7 +21845,7 @@
             <a:r>
               <a:rPr lang="en-US" sz="1100" b="1" dirty="0">
                 <a:solidFill>
-                  <a:srgbClr val="C0504D"/>
+                  <a:srgbClr val="FF8A75"/>
                 </a:solidFill>
                 <a:latin typeface="Microsoft YaHei" pitchFamily="34" charset="0"/>
                 <a:ea typeface="Microsoft YaHei" pitchFamily="34" charset="-122"/>
@@ -21961,7 +21856,7 @@
             <a:r>
               <a:rPr lang="en-US" sz="1100" dirty="0">
                 <a:solidFill>
-                  <a:srgbClr val="6B7C8A"/>
+                  <a:srgbClr val="A9BECC"/>
                 </a:solidFill>
                 <a:latin typeface="Microsoft YaHei" pitchFamily="34" charset="0"/>
                 <a:ea typeface="Microsoft YaHei" pitchFamily="34" charset="-122"/>
@@ -22000,7 +21895,7 @@
             <a:r>
               <a:rPr b="1" sz="1000">
                 <a:solidFill>
-                  <a:srgbClr val="0FA3A8"/>
+                  <a:srgbClr val="3FC6D6"/>
                 </a:solidFill>
                 <a:latin typeface="Microsoft YaHei"/>
                 <a:ea typeface="Microsoft YaHei"/>
@@ -22010,7 +21905,7 @@
             <a:r>
               <a:rPr sz="900">
                 <a:solidFill>
-                  <a:srgbClr val="9FB8C8"/>
+                  <a:srgbClr val="8FA6B5"/>
                 </a:solidFill>
                 <a:latin typeface="Microsoft YaHei"/>
                 <a:ea typeface="Microsoft YaHei"/>
@@ -22048,7 +21943,7 @@
             <a:r>
               <a:rPr lang="en-US" sz="900" dirty="0">
                 <a:solidFill>
-                  <a:srgbClr val="6B7C8A"/>
+                  <a:srgbClr val="A9BECC"/>
                 </a:solidFill>
                 <a:latin typeface="Microsoft YaHei" pitchFamily="34" charset="0"/>
                 <a:ea typeface="Microsoft YaHei" pitchFamily="34" charset="-122"/>
@@ -22075,7 +21970,7 @@
             <a:avLst/>
           </a:prstGeom>
           <a:solidFill>
-            <a:srgbClr val="D8E3EA"/>
+            <a:srgbClr val="23465C"/>
           </a:solidFill>
           <a:ln>
             <a:noFill/>

--- a/docs/异步页流水-技术说明-美化版.pptx
+++ b/docs/异步页流水-技术说明-美化版.pptx
@@ -9149,7 +9149,7 @@
                       <a:tailEnd type="none" w="med" len="med"/>
                     </a:lnB>
                     <a:solidFill>
-                      <a:srgbClr val="E4F2EF"/>
+                      <a:srgbClr val="0E7E86"/>
                     </a:solidFill>
                   </a:tcPr>
                 </a:tc>
@@ -9217,7 +9217,7 @@
                       <a:tailEnd type="none" w="med" len="med"/>
                     </a:lnB>
                     <a:solidFill>
-                      <a:srgbClr val="E4F2EF"/>
+                      <a:srgbClr val="0E7E86"/>
                     </a:solidFill>
                   </a:tcPr>
                 </a:tc>
@@ -9285,7 +9285,7 @@
                       <a:tailEnd type="none" w="med" len="med"/>
                     </a:lnB>
                     <a:solidFill>
-                      <a:srgbClr val="E4F2EF"/>
+                      <a:srgbClr val="0E7E86"/>
                     </a:solidFill>
                   </a:tcPr>
                 </a:tc>
@@ -9353,7 +9353,7 @@
                       <a:tailEnd type="none" w="med" len="med"/>
                     </a:lnB>
                     <a:solidFill>
-                      <a:srgbClr val="E4F2EF"/>
+                      <a:srgbClr val="0E7E86"/>
                     </a:solidFill>
                   </a:tcPr>
                 </a:tc>
@@ -9421,7 +9421,7 @@
                       <a:tailEnd type="none" w="med" len="med"/>
                     </a:lnB>
                     <a:solidFill>
-                      <a:srgbClr val="E4F2EF"/>
+                      <a:srgbClr val="0E7E86"/>
                     </a:solidFill>
                   </a:tcPr>
                 </a:tc>
@@ -9489,7 +9489,7 @@
                       <a:tailEnd type="none" w="med" len="med"/>
                     </a:lnB>
                     <a:solidFill>
-                      <a:srgbClr val="E4F2EF"/>
+                      <a:srgbClr val="0E7E86"/>
                     </a:solidFill>
                   </a:tcPr>
                 </a:tc>
@@ -9564,7 +9564,7 @@
                       <a:tailEnd type="none" w="med" len="med"/>
                     </a:lnB>
                     <a:solidFill>
-                      <a:srgbClr val="E4F2EF"/>
+                      <a:srgbClr val="0E7E86"/>
                     </a:solidFill>
                   </a:tcPr>
                 </a:tc>
@@ -9632,7 +9632,7 @@
                       <a:tailEnd type="none" w="med" len="med"/>
                     </a:lnB>
                     <a:solidFill>
-                      <a:srgbClr val="E4F2EF"/>
+                      <a:srgbClr val="0E7E86"/>
                     </a:solidFill>
                   </a:tcPr>
                 </a:tc>
@@ -9700,7 +9700,7 @@
                       <a:tailEnd type="none" w="med" len="med"/>
                     </a:lnB>
                     <a:solidFill>
-                      <a:srgbClr val="E4F2EF"/>
+                      <a:srgbClr val="0E7E86"/>
                     </a:solidFill>
                   </a:tcPr>
                 </a:tc>
@@ -9768,7 +9768,7 @@
                       <a:tailEnd type="none" w="med" len="med"/>
                     </a:lnB>
                     <a:solidFill>
-                      <a:srgbClr val="E4F2EF"/>
+                      <a:srgbClr val="0E7E86"/>
                     </a:solidFill>
                   </a:tcPr>
                 </a:tc>
@@ -9836,7 +9836,7 @@
                       <a:tailEnd type="none" w="med" len="med"/>
                     </a:lnB>
                     <a:solidFill>
-                      <a:srgbClr val="E4F2EF"/>
+                      <a:srgbClr val="0E7E86"/>
                     </a:solidFill>
                   </a:tcPr>
                 </a:tc>
@@ -9904,7 +9904,7 @@
                       <a:tailEnd type="none" w="med" len="med"/>
                     </a:lnB>
                     <a:solidFill>
-                      <a:srgbClr val="E4F2EF"/>
+                      <a:srgbClr val="0E7E86"/>
                     </a:solidFill>
                   </a:tcPr>
                 </a:tc>
@@ -9979,7 +9979,7 @@
                       <a:tailEnd type="none" w="med" len="med"/>
                     </a:lnB>
                     <a:solidFill>
-                      <a:srgbClr val="E4F2EF"/>
+                      <a:srgbClr val="0E7E86"/>
                     </a:solidFill>
                   </a:tcPr>
                 </a:tc>
@@ -10047,7 +10047,7 @@
                       <a:tailEnd type="none" w="med" len="med"/>
                     </a:lnB>
                     <a:solidFill>
-                      <a:srgbClr val="E4F2EF"/>
+                      <a:srgbClr val="0E7E86"/>
                     </a:solidFill>
                   </a:tcPr>
                 </a:tc>
@@ -10115,7 +10115,7 @@
                       <a:tailEnd type="none" w="med" len="med"/>
                     </a:lnB>
                     <a:solidFill>
-                      <a:srgbClr val="E4F2EF"/>
+                      <a:srgbClr val="0E7E86"/>
                     </a:solidFill>
                   </a:tcPr>
                 </a:tc>
@@ -10183,7 +10183,7 @@
                       <a:tailEnd type="none" w="med" len="med"/>
                     </a:lnB>
                     <a:solidFill>
-                      <a:srgbClr val="E4F2EF"/>
+                      <a:srgbClr val="0E7E86"/>
                     </a:solidFill>
                   </a:tcPr>
                 </a:tc>
@@ -10251,7 +10251,7 @@
                       <a:tailEnd type="none" w="med" len="med"/>
                     </a:lnB>
                     <a:solidFill>
-                      <a:srgbClr val="E4F2EF"/>
+                      <a:srgbClr val="0E7E86"/>
                     </a:solidFill>
                   </a:tcPr>
                 </a:tc>
@@ -10319,7 +10319,7 @@
                       <a:tailEnd type="none" w="med" len="med"/>
                     </a:lnB>
                     <a:solidFill>
-                      <a:srgbClr val="E4F2EF"/>
+                      <a:srgbClr val="0E7E86"/>
                     </a:solidFill>
                   </a:tcPr>
                 </a:tc>
